--- a/system-design-101/vi/lessons/sd-10-022/slides/sd-10-022.pptx
+++ b/system-design-101/vi/lessons/sd-10-022/slides/sd-10-022.pptx
@@ -1870,7 +1870,7 @@
               <a:buNone/>
             </a:pPr>
             <a:r>
-              <a:rPr lang="en-US" sz="3000" b="1" dirty="0" spc="-6" kern="0">
+              <a:rPr lang="en-US" sz="3000" b="1" dirty="0" spc="-4" kern="0">
                 <a:solidFill>
                   <a:srgbClr val="FF6A4D"/>
                 </a:solidFill>
@@ -1878,7 +1878,29 @@
                 <a:ea typeface="Be Vietnam Pro" pitchFamily="34" charset="-122"/>
                 <a:cs typeface="Be Vietnam Pro" pitchFamily="34" charset="-120"/>
               </a:rPr>
-              <a:t>Mỗi</a:t>
+              <a:t>Cùng</a:t>
+            </a:r>
+            <a:r>
+              <a:rPr lang="en-US" sz="3000" b="1" dirty="0" spc="-11" kern="0">
+                <a:solidFill>
+                  <a:srgbClr val="FF6A4D"/>
+                </a:solidFill>
+                <a:latin typeface="Be Vietnam Pro" pitchFamily="34" charset="0"/>
+                <a:ea typeface="Be Vietnam Pro" pitchFamily="34" charset="-122"/>
+                <a:cs typeface="Be Vietnam Pro" pitchFamily="34" charset="-120"/>
+              </a:rPr>
+              <a:t> một</a:t>
+            </a:r>
+            <a:r>
+              <a:rPr lang="en-US" sz="3000" b="1" dirty="0" spc="0" kern="0">
+                <a:solidFill>
+                  <a:srgbClr val="FF6A4D"/>
+                </a:solidFill>
+                <a:latin typeface="Be Vietnam Pro" pitchFamily="34" charset="0"/>
+                <a:ea typeface="Be Vietnam Pro" pitchFamily="34" charset="-122"/>
+                <a:cs typeface="Be Vietnam Pro" pitchFamily="34" charset="-120"/>
+              </a:rPr>
+              <a:t> bài</a:t>
             </a:r>
             <a:r>
               <a:rPr lang="en-US" sz="3000" b="1" dirty="0" spc="-5" kern="0">
@@ -1889,7 +1911,18 @@
                 <a:ea typeface="Be Vietnam Pro" pitchFamily="34" charset="-122"/>
                 <a:cs typeface="Be Vietnam Pro" pitchFamily="34" charset="-120"/>
               </a:rPr>
-              <a:t> mô</a:t>
+              <a:t> toán,</a:t>
+            </a:r>
+            <a:r>
+              <a:rPr lang="en-US" sz="3000" b="1" dirty="0" spc="-3" kern="0">
+                <a:solidFill>
+                  <a:srgbClr val="FF6A4D"/>
+                </a:solidFill>
+                <a:latin typeface="Be Vietnam Pro" pitchFamily="34" charset="0"/>
+                <a:ea typeface="Be Vietnam Pro" pitchFamily="34" charset="-122"/>
+                <a:cs typeface="Be Vietnam Pro" pitchFamily="34" charset="-120"/>
+              </a:rPr>
+              <a:t> ba</a:t>
             </a:r>
             <a:r>
               <a:rPr lang="en-US" sz="3000" b="1" dirty="0" spc="0" kern="0">
@@ -1900,10 +1933,10 @@
                 <a:ea typeface="Be Vietnam Pro" pitchFamily="34" charset="-122"/>
                 <a:cs typeface="Be Vietnam Pro" pitchFamily="34" charset="-120"/>
               </a:rPr>
-              <a:t> hình</a:t>
-            </a:r>
-            <a:r>
-              <a:rPr lang="en-US" sz="3000" b="1" dirty="0" spc="-1" kern="0">
+              <a:t> cách</a:t>
+            </a:r>
+            <a:r>
+              <a:rPr lang="en-US" sz="3000" b="1" dirty="0" spc="-3" kern="0">
                 <a:solidFill>
                   <a:srgbClr val="FF6A4D"/>
                 </a:solidFill>
@@ -1911,10 +1944,10 @@
                 <a:ea typeface="Be Vietnam Pro" pitchFamily="34" charset="-122"/>
                 <a:cs typeface="Be Vietnam Pro" pitchFamily="34" charset="-120"/>
               </a:rPr>
-              <a:t> nhìn</a:t>
-            </a:r>
-            <a:r>
-              <a:rPr lang="en-US" sz="3000" b="1" dirty="0" spc="5" kern="0">
+              <a:t> viết:</a:t>
+            </a:r>
+            <a:r>
+              <a:rPr lang="en-US" sz="3000" b="1" dirty="0" spc="8" kern="0">
                 <a:solidFill>
                   <a:srgbClr val="FF6A4D"/>
                 </a:solidFill>
@@ -1922,10 +1955,10 @@
                 <a:ea typeface="Be Vietnam Pro" pitchFamily="34" charset="-122"/>
                 <a:cs typeface="Be Vietnam Pro" pitchFamily="34" charset="-120"/>
               </a:rPr>
-              <a:t> chương</a:t>
-            </a:r>
-            <a:r>
-              <a:rPr lang="en-US" sz="3000" b="1" dirty="0" spc="8" kern="0">
+              <a:t> đều</a:t>
+            </a:r>
+            <a:r>
+              <a:rPr lang="en-US" sz="3000" b="1" dirty="0" spc="-22" kern="0">
                 <a:solidFill>
                   <a:srgbClr val="FF6A4D"/>
                 </a:solidFill>
@@ -1933,10 +1966,10 @@
                 <a:ea typeface="Be Vietnam Pro" pitchFamily="34" charset="-122"/>
                 <a:cs typeface="Be Vietnam Pro" pitchFamily="34" charset="-120"/>
               </a:rPr>
-              <a:t> trình</a:t>
-            </a:r>
-            <a:r>
-              <a:rPr lang="en-US" sz="3000" b="1" dirty="0" spc="-4" kern="0">
+              <a:t> ra</a:t>
+            </a:r>
+            <a:r>
+              <a:rPr lang="en-US" sz="3000" b="1" dirty="0" spc="1" kern="0">
                 <a:solidFill>
                   <a:srgbClr val="FF6A4D"/>
                 </a:solidFill>
@@ -1944,18 +1977,7 @@
                 <a:ea typeface="Be Vietnam Pro" pitchFamily="34" charset="-122"/>
                 <a:cs typeface="Be Vietnam Pro" pitchFamily="34" charset="-120"/>
               </a:rPr>
-              <a:t> là</a:t>
-            </a:r>
-            <a:r>
-              <a:rPr lang="en-US" sz="3000" b="1" dirty="0" spc="3" kern="0">
-                <a:solidFill>
-                  <a:srgbClr val="FF6A4D"/>
-                </a:solidFill>
-                <a:latin typeface="Be Vietnam Pro" pitchFamily="34" charset="0"/>
-                <a:ea typeface="Be Vietnam Pro" pitchFamily="34" charset="-122"/>
-                <a:cs typeface="Be Vietnam Pro" pitchFamily="34" charset="-120"/>
-              </a:rPr>
-              <a:t> gì?</a:t>
+              <a:t> 56.</a:t>
             </a:r>
             <a:endParaRPr lang="en-US" sz="3000" dirty="0"/>
           </a:p>
@@ -2094,6 +2116,28 @@
               <a:buNone/>
             </a:pPr>
             <a:r>
+              <a:rPr lang="en-US" sz="1800" dirty="0" spc="-3" kern="0">
+                <a:solidFill>
+                  <a:srgbClr val="C4C8D6"/>
+                </a:solidFill>
+                <a:latin typeface="Be Vietnam Pro" pitchFamily="34" charset="0"/>
+                <a:ea typeface="Be Vietnam Pro" pitchFamily="34" charset="-122"/>
+                <a:cs typeface="Be Vietnam Pro" pitchFamily="34" charset="-120"/>
+              </a:rPr>
+              <a:t>bài</a:t>
+            </a:r>
+            <a:r>
+              <a:rPr lang="en-US" sz="1800" dirty="0" spc="-9" kern="0">
+                <a:solidFill>
+                  <a:srgbClr val="C4C8D6"/>
+                </a:solidFill>
+                <a:latin typeface="Be Vietnam Pro" pitchFamily="34" charset="0"/>
+                <a:ea typeface="Be Vietnam Pro" pitchFamily="34" charset="-122"/>
+                <a:cs typeface="Be Vietnam Pro" pitchFamily="34" charset="-120"/>
+              </a:rPr>
+              <a:t> toán,</a:t>
+            </a:r>
+            <a:r>
               <a:rPr lang="en-US" sz="1800" dirty="0" spc="-1" kern="0">
                 <a:solidFill>
                   <a:srgbClr val="C4C8D6"/>
@@ -2102,10 +2146,10 @@
                 <a:ea typeface="Be Vietnam Pro" pitchFamily="34" charset="-122"/>
                 <a:cs typeface="Be Vietnam Pro" pitchFamily="34" charset="-120"/>
               </a:rPr>
-              <a:t>ý</a:t>
-            </a:r>
-            <a:r>
-              <a:rPr lang="en-US" sz="1800" dirty="0" spc="3" kern="0">
+              <a:t> ba</a:t>
+            </a:r>
+            <a:r>
+              <a:rPr lang="en-US" sz="1800" dirty="0" spc="2" kern="0">
                 <a:solidFill>
                   <a:srgbClr val="C4C8D6"/>
                 </a:solidFill>
@@ -2113,10 +2157,10 @@
                 <a:ea typeface="Be Vietnam Pro" pitchFamily="34" charset="-122"/>
                 <a:cs typeface="Be Vietnam Pro" pitchFamily="34" charset="-120"/>
               </a:rPr>
-              <a:t> cho</a:t>
-            </a:r>
-            <a:r>
-              <a:rPr lang="en-US" sz="1800" dirty="0" spc="-2" kern="0">
+              <a:t> cách</a:t>
+            </a:r>
+            <a:r>
+              <a:rPr lang="en-US" sz="1800" dirty="0" spc="-5" kern="0">
                 <a:solidFill>
                   <a:srgbClr val="C4C8D6"/>
                 </a:solidFill>
@@ -2124,29 +2168,7 @@
                 <a:ea typeface="Be Vietnam Pro" pitchFamily="34" charset="-122"/>
                 <a:cs typeface="Be Vietnam Pro" pitchFamily="34" charset="-120"/>
               </a:rPr>
-              <a:t> mỗi</a:t>
-            </a:r>
-            <a:r>
-              <a:rPr lang="en-US" sz="1800" dirty="0" spc="-1" kern="0">
-                <a:solidFill>
-                  <a:srgbClr val="C4C8D6"/>
-                </a:solidFill>
-                <a:latin typeface="Be Vietnam Pro" pitchFamily="34" charset="0"/>
-                <a:ea typeface="Be Vietnam Pro" pitchFamily="34" charset="-122"/>
-                <a:cs typeface="Be Vietnam Pro" pitchFamily="34" charset="-120"/>
-              </a:rPr>
-              <a:t> mô</a:t>
-            </a:r>
-            <a:r>
-              <a:rPr lang="en-US" sz="1800" dirty="0" spc="-2" kern="0">
-                <a:solidFill>
-                  <a:srgbClr val="C4C8D6"/>
-                </a:solidFill>
-                <a:latin typeface="Be Vietnam Pro" pitchFamily="34" charset="0"/>
-                <a:ea typeface="Be Vietnam Pro" pitchFamily="34" charset="-122"/>
-                <a:cs typeface="Be Vietnam Pro" pitchFamily="34" charset="-120"/>
-              </a:rPr>
-              <a:t> hình</a:t>
+              <a:t> viết</a:t>
             </a:r>
             <a:endParaRPr lang="en-US" sz="1800" dirty="0"/>
           </a:p>
@@ -2177,6 +2199,17 @@
               <a:buNone/>
             </a:pPr>
             <a:r>
+              <a:rPr lang="en-US" sz="1800" dirty="0" spc="-36" kern="0">
+                <a:solidFill>
+                  <a:srgbClr val="C4C8D6"/>
+                </a:solidFill>
+                <a:latin typeface="Be Vietnam Pro" pitchFamily="34" charset="0"/>
+                <a:ea typeface="Be Vietnam Pro" pitchFamily="34" charset="-122"/>
+                <a:cs typeface="Be Vietnam Pro" pitchFamily="34" charset="-120"/>
+              </a:rPr>
+              <a:t>kết</a:t>
+            </a:r>
+            <a:r>
               <a:rPr lang="en-US" sz="1800" dirty="0" spc="-2" kern="0">
                 <a:solidFill>
                   <a:srgbClr val="C4C8D6"/>
@@ -2185,10 +2218,10 @@
                 <a:ea typeface="Be Vietnam Pro" pitchFamily="34" charset="-122"/>
                 <a:cs typeface="Be Vietnam Pro" pitchFamily="34" charset="-120"/>
               </a:rPr>
-              <a:t>lối</a:t>
-            </a:r>
-            <a:r>
-              <a:rPr lang="en-US" sz="1800" dirty="0" spc="-12" kern="0">
+              <a:t> quả</a:t>
+            </a:r>
+            <a:r>
+              <a:rPr lang="en-US" sz="1800" dirty="0" spc="3" kern="0">
                 <a:solidFill>
                   <a:srgbClr val="C4C8D6"/>
                 </a:solidFill>
@@ -2196,10 +2229,10 @@
                 <a:ea typeface="Be Vietnam Pro" pitchFamily="34" charset="-122"/>
                 <a:cs typeface="Be Vietnam Pro" pitchFamily="34" charset="-120"/>
               </a:rPr>
-              <a:t> trong</a:t>
-            </a:r>
-            <a:r>
-              <a:rPr lang="en-US" sz="1800" dirty="0" spc="-10" kern="0">
+              <a:t> của</a:t>
+            </a:r>
+            <a:r>
+              <a:rPr lang="en-US" sz="1800" dirty="0" spc="2" kern="0">
                 <a:solidFill>
                   <a:srgbClr val="C4C8D6"/>
                 </a:solidFill>
@@ -2207,10 +2240,10 @@
                 <a:ea typeface="Be Vietnam Pro" pitchFamily="34" charset="-122"/>
                 <a:cs typeface="Be Vietnam Pro" pitchFamily="34" charset="-120"/>
               </a:rPr>
-              <a:t> tài</a:t>
-            </a:r>
-            <a:r>
-              <a:rPr lang="en-US" sz="1800" dirty="0" spc="-2" kern="0">
+              <a:t> cả</a:t>
+            </a:r>
+            <a:r>
+              <a:rPr lang="en-US" sz="1800" dirty="0" spc="-1" kern="0">
                 <a:solidFill>
                   <a:srgbClr val="C4C8D6"/>
                 </a:solidFill>
@@ -2218,10 +2251,10 @@
                 <a:ea typeface="Be Vietnam Pro" pitchFamily="34" charset="-122"/>
                 <a:cs typeface="Be Vietnam Pro" pitchFamily="34" charset="-120"/>
               </a:rPr>
-              <a:t> liệu</a:t>
-            </a:r>
-            <a:r>
-              <a:rPr lang="en-US" sz="1800" dirty="0" spc="4" kern="0">
+              <a:t> ba</a:t>
+            </a:r>
+            <a:r>
+              <a:rPr lang="en-US" sz="1800" dirty="0" spc="2" kern="0">
                 <a:solidFill>
                   <a:srgbClr val="C4C8D6"/>
                 </a:solidFill>
@@ -2229,7 +2262,7 @@
                 <a:ea typeface="Be Vietnam Pro" pitchFamily="34" charset="-122"/>
                 <a:cs typeface="Be Vietnam Pro" pitchFamily="34" charset="-120"/>
               </a:rPr>
-              <a:t> Python</a:t>
+              <a:t> cách</a:t>
             </a:r>
             <a:endParaRPr lang="en-US" sz="1800" dirty="0"/>
           </a:p>
@@ -2260,7 +2293,7 @@
               <a:buNone/>
             </a:pPr>
             <a:r>
-              <a:rPr lang="en-US" sz="1800" dirty="0" spc="-1" kern="0">
+              <a:rPr lang="en-US" sz="1800" dirty="0" spc="-2" kern="0">
                 <a:solidFill>
                   <a:srgbClr val="C4C8D6"/>
                 </a:solidFill>
@@ -2268,7 +2301,29 @@
                 <a:ea typeface="Be Vietnam Pro" pitchFamily="34" charset="-122"/>
                 <a:cs typeface="Be Vietnam Pro" pitchFamily="34" charset="-120"/>
               </a:rPr>
-              <a:t>danh</a:t>
+              <a:t>lối</a:t>
+            </a:r>
+            <a:r>
+              <a:rPr lang="en-US" sz="1800" dirty="0" spc="-12" kern="0">
+                <a:solidFill>
+                  <a:srgbClr val="C4C8D6"/>
+                </a:solidFill>
+                <a:latin typeface="Be Vietnam Pro" pitchFamily="34" charset="0"/>
+                <a:ea typeface="Be Vietnam Pro" pitchFamily="34" charset="-122"/>
+                <a:cs typeface="Be Vietnam Pro" pitchFamily="34" charset="-120"/>
+              </a:rPr>
+              <a:t> trong</a:t>
+            </a:r>
+            <a:r>
+              <a:rPr lang="en-US" sz="1800" dirty="0" spc="-10" kern="0">
+                <a:solidFill>
+                  <a:srgbClr val="C4C8D6"/>
+                </a:solidFill>
+                <a:latin typeface="Be Vietnam Pro" pitchFamily="34" charset="0"/>
+                <a:ea typeface="Be Vietnam Pro" pitchFamily="34" charset="-122"/>
+                <a:cs typeface="Be Vietnam Pro" pitchFamily="34" charset="-120"/>
+              </a:rPr>
+              <a:t> tài</a:t>
             </a:r>
             <a:r>
               <a:rPr lang="en-US" sz="1800" dirty="0" spc="-2" kern="0">
@@ -2279,18 +2334,7 @@
                 <a:ea typeface="Be Vietnam Pro" pitchFamily="34" charset="-122"/>
                 <a:cs typeface="Be Vietnam Pro" pitchFamily="34" charset="-120"/>
               </a:rPr>
-              <a:t> sách</a:t>
-            </a:r>
-            <a:r>
-              <a:rPr lang="en-US" sz="1800" dirty="0" spc="1" kern="0">
-                <a:solidFill>
-                  <a:srgbClr val="C4C8D6"/>
-                </a:solidFill>
-                <a:latin typeface="Be Vietnam Pro" pitchFamily="34" charset="0"/>
-                <a:ea typeface="Be Vietnam Pro" pitchFamily="34" charset="-122"/>
-                <a:cs typeface="Be Vietnam Pro" pitchFamily="34" charset="-120"/>
-              </a:rPr>
-              <a:t> có</a:t>
+              <a:t> liệu</a:t>
             </a:r>
             <a:r>
               <a:rPr lang="en-US" sz="1800" dirty="0" spc="4" kern="0">
@@ -2659,10 +2703,10 @@
                 <a:ea typeface="Be Vietnam Pro" pitchFamily="34" charset="-122"/>
                 <a:cs typeface="Be Vietnam Pro" pitchFamily="34" charset="-120"/>
               </a:rPr>
-              <a:t>Tính</a:t>
-            </a:r>
-            <a:r>
-              <a:rPr lang="en-US" sz="2400" dirty="0" spc="-9" kern="0">
+              <a:t>Chỉ</a:t>
+            </a:r>
+            <a:r>
+              <a:rPr lang="en-US" sz="2400" dirty="0" spc="1" kern="0">
                 <a:solidFill>
                   <a:srgbClr val="C4C8D6"/>
                 </a:solidFill>
@@ -2670,10 +2714,10 @@
                 <a:ea typeface="Be Vietnam Pro" pitchFamily="34" charset="-122"/>
                 <a:cs typeface="Be Vietnam Pro" pitchFamily="34" charset="-120"/>
               </a:rPr>
-              <a:t> toán</a:t>
-            </a:r>
-            <a:r>
-              <a:rPr lang="en-US" sz="2400" dirty="0" spc="0" kern="0">
+              <a:t> nhận</a:t>
+            </a:r>
+            <a:r>
+              <a:rPr lang="en-US" sz="2400" dirty="0" spc="13" kern="0">
                 <a:solidFill>
                   <a:srgbClr val="C4C8D6"/>
                 </a:solidFill>
@@ -2681,10 +2725,10 @@
                 <a:ea typeface="Be Vietnam Pro" pitchFamily="34" charset="-122"/>
                 <a:cs typeface="Be Vietnam Pro" pitchFamily="34" charset="-120"/>
               </a:rPr>
-              <a:t> không</a:t>
-            </a:r>
-            <a:r>
-              <a:rPr lang="en-US" sz="2400" dirty="0" spc="-10" kern="0">
+              <a:t> đầu</a:t>
+            </a:r>
+            <a:r>
+              <a:rPr lang="en-US" sz="2400" dirty="0" spc="-8" kern="0">
                 <a:solidFill>
                   <a:srgbClr val="C4C8D6"/>
                 </a:solidFill>
@@ -2692,10 +2736,10 @@
                 <a:ea typeface="Be Vietnam Pro" pitchFamily="34" charset="-122"/>
                 <a:cs typeface="Be Vietnam Pro" pitchFamily="34" charset="-120"/>
               </a:rPr>
-              <a:t> tác</a:t>
-            </a:r>
-            <a:r>
-              <a:rPr lang="en-US" sz="2400" dirty="0" spc="3" kern="0">
+              <a:t> vào,</a:t>
+            </a:r>
+            <a:r>
+              <a:rPr lang="en-US" sz="2400" dirty="0" spc="-21" kern="0">
                 <a:solidFill>
                   <a:srgbClr val="C4C8D6"/>
                 </a:solidFill>
@@ -2703,10 +2747,10 @@
                 <a:ea typeface="Be Vietnam Pro" pitchFamily="34" charset="-122"/>
                 <a:cs typeface="Be Vietnam Pro" pitchFamily="34" charset="-120"/>
               </a:rPr>
-              <a:t> dụng</a:t>
-            </a:r>
-            <a:r>
-              <a:rPr lang="en-US" sz="2400" dirty="0" spc="2" kern="0">
+              <a:t> trả</a:t>
+            </a:r>
+            <a:r>
+              <a:rPr lang="en-US" sz="2400" dirty="0" spc="13" kern="0">
                 <a:solidFill>
                   <a:srgbClr val="C4C8D6"/>
                 </a:solidFill>
@@ -2714,7 +2758,18 @@
                 <a:ea typeface="Be Vietnam Pro" pitchFamily="34" charset="-122"/>
                 <a:cs typeface="Be Vietnam Pro" pitchFamily="34" charset="-120"/>
               </a:rPr>
-              <a:t> phụ</a:t>
+              <a:t> đầu</a:t>
+            </a:r>
+            <a:r>
+              <a:rPr lang="en-US" sz="2400" dirty="0" spc="-29" kern="0">
+                <a:solidFill>
+                  <a:srgbClr val="C4C8D6"/>
+                </a:solidFill>
+                <a:latin typeface="Be Vietnam Pro" pitchFamily="34" charset="0"/>
+                <a:ea typeface="Be Vietnam Pro" pitchFamily="34" charset="-122"/>
+                <a:cs typeface="Be Vietnam Pro" pitchFamily="34" charset="-120"/>
+              </a:rPr>
+              <a:t> ra</a:t>
             </a:r>
             <a:endParaRPr lang="en-US" sz="2400" dirty="0"/>
           </a:p>
@@ -2874,7 +2929,7 @@
               <a:buNone/>
             </a:pPr>
             <a:r>
-              <a:rPr lang="en-US" sz="2400" dirty="0" spc="26" kern="0">
+              <a:rPr lang="en-US" sz="2400" dirty="0" spc="1" kern="0">
                 <a:solidFill>
                   <a:srgbClr val="C4C8D6"/>
                 </a:solidFill>
@@ -2882,7 +2937,62 @@
                 <a:ea typeface="Be Vietnam Pro" pitchFamily="34" charset="-122"/>
                 <a:cs typeface="Be Vietnam Pro" pitchFamily="34" charset="-120"/>
               </a:rPr>
-              <a:t>Dựng</a:t>
+              <a:t>Đối</a:t>
+            </a:r>
+            <a:r>
+              <a:rPr lang="en-US" sz="2400" dirty="0" spc="7" kern="0">
+                <a:solidFill>
+                  <a:srgbClr val="C4C8D6"/>
+                </a:solidFill>
+                <a:latin typeface="Be Vietnam Pro" pitchFamily="34" charset="0"/>
+                <a:ea typeface="Be Vietnam Pro" pitchFamily="34" charset="-122"/>
+                <a:cs typeface="Be Vietnam Pro" pitchFamily="34" charset="-120"/>
+              </a:rPr>
+              <a:t> tượng</a:t>
+            </a:r>
+            <a:r>
+              <a:rPr lang="en-US" sz="2400" dirty="0" spc="3" kern="0">
+                <a:solidFill>
+                  <a:srgbClr val="C4C8D6"/>
+                </a:solidFill>
+                <a:latin typeface="Be Vietnam Pro" pitchFamily="34" charset="0"/>
+                <a:ea typeface="Be Vietnam Pro" pitchFamily="34" charset="-122"/>
+                <a:cs typeface="Be Vietnam Pro" pitchFamily="34" charset="-120"/>
+              </a:rPr>
+              <a:t> giữ</a:t>
+            </a:r>
+            <a:r>
+              <a:rPr lang="en-US" sz="2400" dirty="0" spc="-13" kern="0">
+                <a:solidFill>
+                  <a:srgbClr val="C4C8D6"/>
+                </a:solidFill>
+                <a:latin typeface="Be Vietnam Pro" pitchFamily="34" charset="0"/>
+                <a:ea typeface="Be Vietnam Pro" pitchFamily="34" charset="-122"/>
+                <a:cs typeface="Be Vietnam Pro" pitchFamily="34" charset="-120"/>
+              </a:rPr>
+              <a:t> trạng</a:t>
+            </a:r>
+            <a:r>
+              <a:rPr lang="en-US" sz="2400" dirty="0" spc="0" kern="0">
+                <a:solidFill>
+                  <a:srgbClr val="C4C8D6"/>
+                </a:solidFill>
+                <a:latin typeface="Be Vietnam Pro" pitchFamily="34" charset="0"/>
+                <a:ea typeface="Be Vietnam Pro" pitchFamily="34" charset="-122"/>
+                <a:cs typeface="Be Vietnam Pro" pitchFamily="34" charset="-120"/>
+              </a:rPr>
+              <a:t> thái</a:t>
+            </a:r>
+            <a:r>
+              <a:rPr lang="en-US" sz="2400" dirty="0" spc="-15" kern="0">
+                <a:solidFill>
+                  <a:srgbClr val="C4C8D6"/>
+                </a:solidFill>
+                <a:latin typeface="Be Vietnam Pro" pitchFamily="34" charset="0"/>
+                <a:ea typeface="Be Vietnam Pro" pitchFamily="34" charset="-122"/>
+                <a:cs typeface="Be Vietnam Pro" pitchFamily="34" charset="-120"/>
+              </a:rPr>
+              <a:t> và</a:t>
             </a:r>
             <a:r>
               <a:rPr lang="en-US" sz="2400" dirty="0" spc="6" kern="0">
@@ -2893,7 +3003,7 @@
                 <a:ea typeface="Be Vietnam Pro" pitchFamily="34" charset="-122"/>
                 <a:cs typeface="Be Vietnam Pro" pitchFamily="34" charset="-120"/>
               </a:rPr>
-              <a:t> chương</a:t>
+              <a:t> phương</a:t>
             </a:r>
             <a:r>
               <a:rPr lang="en-US" sz="2400" dirty="0" spc="9" kern="0">
@@ -2904,51 +3014,7 @@
                 <a:ea typeface="Be Vietnam Pro" pitchFamily="34" charset="-122"/>
                 <a:cs typeface="Be Vietnam Pro" pitchFamily="34" charset="-120"/>
               </a:rPr>
-              <a:t> trình</a:t>
-            </a:r>
-            <a:r>
-              <a:rPr lang="en-US" sz="2400" dirty="0" spc="2" kern="0">
-                <a:solidFill>
-                  <a:srgbClr val="C4C8D6"/>
-                </a:solidFill>
-                <a:latin typeface="Be Vietnam Pro" pitchFamily="34" charset="0"/>
-                <a:ea typeface="Be Vietnam Pro" pitchFamily="34" charset="-122"/>
-                <a:cs typeface="Be Vietnam Pro" pitchFamily="34" charset="-120"/>
-              </a:rPr>
-              <a:t> từ</a:t>
-            </a:r>
-            <a:r>
-              <a:rPr lang="en-US" sz="2400" dirty="0" spc="0" kern="0">
-                <a:solidFill>
-                  <a:srgbClr val="C4C8D6"/>
-                </a:solidFill>
-                <a:latin typeface="Be Vietnam Pro" pitchFamily="34" charset="0"/>
-                <a:ea typeface="Be Vietnam Pro" pitchFamily="34" charset="-122"/>
-                <a:cs typeface="Be Vietnam Pro" pitchFamily="34" charset="-120"/>
-              </a:rPr>
-              <a:t> các</a:t>
-            </a:r>
-            <a:r>
-              <a:rPr lang="en-US" sz="2400" dirty="0" spc="13" kern="0">
-                <a:solidFill>
-                  <a:srgbClr val="C4C8D6"/>
-                </a:solidFill>
-                <a:latin typeface="Be Vietnam Pro" pitchFamily="34" charset="0"/>
-                <a:ea typeface="Be Vietnam Pro" pitchFamily="34" charset="-122"/>
-                <a:cs typeface="Be Vietnam Pro" pitchFamily="34" charset="-120"/>
-              </a:rPr>
-              <a:t> đối</a:t>
-            </a:r>
-            <a:r>
-              <a:rPr lang="en-US" sz="2400" dirty="0" spc="7" kern="0">
-                <a:solidFill>
-                  <a:srgbClr val="C4C8D6"/>
-                </a:solidFill>
-                <a:latin typeface="Be Vietnam Pro" pitchFamily="34" charset="0"/>
-                <a:ea typeface="Be Vietnam Pro" pitchFamily="34" charset="-122"/>
-                <a:cs typeface="Be Vietnam Pro" pitchFamily="34" charset="-120"/>
-              </a:rPr>
-              <a:t> tượng</a:t>
+              <a:t> thức</a:t>
             </a:r>
             <a:endParaRPr lang="en-US" sz="2400" dirty="0"/>
           </a:p>
@@ -3112,7 +3178,7 @@
               <a:buNone/>
             </a:pPr>
             <a:r>
-              <a:rPr lang="en-US" sz="5700" dirty="0" spc="-3" kern="0">
+              <a:rPr lang="en-US" sz="5700" dirty="0" spc="5" kern="0">
                 <a:solidFill>
                   <a:srgbClr val="F3EEE3"/>
                 </a:solidFill>
@@ -3120,7 +3186,7 @@
                 <a:ea typeface="Bricolage Grotesque ExtraBold" pitchFamily="34" charset="-122"/>
                 <a:cs typeface="Bricolage Grotesque ExtraBold" pitchFamily="34" charset="-120"/>
               </a:rPr>
-              <a:t>4</a:t>
+              <a:t>1</a:t>
             </a:r>
             <a:endParaRPr lang="en-US" sz="5700" dirty="0"/>
           </a:p>
@@ -3151,7 +3217,7 @@
               <a:buNone/>
             </a:pPr>
             <a:r>
-              <a:rPr lang="en-US" sz="5700" dirty="0" spc="-3" kern="0">
+              <a:rPr lang="en-US" sz="5700" dirty="0" spc="-8" kern="0">
                 <a:solidFill>
                   <a:srgbClr val="F3EEE3"/>
                 </a:solidFill>
@@ -3159,7 +3225,7 @@
                 <a:ea typeface="Bricolage Grotesque ExtraBold" pitchFamily="34" charset="-122"/>
                 <a:cs typeface="Bricolage Grotesque ExtraBold" pitchFamily="34" charset="-120"/>
               </a:rPr>
-              <a:t>4</a:t>
+              <a:t>56</a:t>
             </a:r>
             <a:endParaRPr lang="en-US" sz="5700" dirty="0"/>
           </a:p>
@@ -3190,7 +3256,7 @@
               <a:buNone/>
             </a:pPr>
             <a:r>
-              <a:rPr lang="en-US" sz="5700" dirty="0" spc="3" kern="0">
+              <a:rPr lang="en-US" sz="5700" dirty="0" spc="-3" kern="0">
                 <a:solidFill>
                   <a:srgbClr val="F3EEE3"/>
                 </a:solidFill>
@@ -3198,7 +3264,7 @@
                 <a:ea typeface="Bricolage Grotesque ExtraBold" pitchFamily="34" charset="-122"/>
                 <a:cs typeface="Bricolage Grotesque ExtraBold" pitchFamily="34" charset="-120"/>
               </a:rPr>
-              <a:t>2</a:t>
+              <a:t>4</a:t>
             </a:r>
             <a:endParaRPr lang="en-US" sz="5700" dirty="0"/>
           </a:p>
@@ -3394,7 +3460,7 @@
               <a:buNone/>
             </a:pPr>
             <a:r>
-              <a:rPr lang="en-US" sz="7200" dirty="0" spc="0" kern="0">
+              <a:rPr lang="en-US" sz="7200" dirty="0" spc="-14" kern="0">
                 <a:solidFill>
                   <a:srgbClr val="14161C"/>
                 </a:solidFill>
@@ -3402,10 +3468,10 @@
                 <a:ea typeface="Bricolage Grotesque ExtraBold" pitchFamily="34" charset="-122"/>
                 <a:cs typeface="Bricolage Grotesque ExtraBold" pitchFamily="34" charset="-120"/>
               </a:rPr>
-              <a:t>Ba</a:t>
-            </a:r>
-            <a:r>
-              <a:rPr lang="en-US" sz="7200" dirty="0" spc="-1" kern="0">
+              <a:t>Một</a:t>
+            </a:r>
+            <a:r>
+              <a:rPr lang="en-US" sz="7200" dirty="0" spc="-6" kern="0">
                 <a:solidFill>
                   <a:srgbClr val="14161C"/>
                 </a:solidFill>
@@ -3413,10 +3479,10 @@
                 <a:ea typeface="Bricolage Grotesque ExtraBold" pitchFamily="34" charset="-122"/>
                 <a:cs typeface="Bricolage Grotesque ExtraBold" pitchFamily="34" charset="-120"/>
               </a:rPr>
-              <a:t> mô</a:t>
-            </a:r>
-            <a:r>
-              <a:rPr lang="en-US" sz="7200" dirty="0" spc="-18" kern="0">
+              <a:t> bài</a:t>
+            </a:r>
+            <a:r>
+              <a:rPr lang="en-US" sz="7200" dirty="0" spc="-29" kern="0">
                 <a:solidFill>
                   <a:srgbClr val="14161C"/>
                 </a:solidFill>
@@ -3424,18 +3490,7 @@
                 <a:ea typeface="Bricolage Grotesque ExtraBold" pitchFamily="34" charset="-122"/>
                 <a:cs typeface="Bricolage Grotesque ExtraBold" pitchFamily="34" charset="-120"/>
               </a:rPr>
-              <a:t> hình</a:t>
-            </a:r>
-            <a:r>
-              <a:rPr lang="en-US" sz="7200" dirty="0" spc="-1" kern="0">
-                <a:solidFill>
-                  <a:srgbClr val="14161C"/>
-                </a:solidFill>
-                <a:latin typeface="Bricolage Grotesque ExtraBold" pitchFamily="34" charset="0"/>
-                <a:ea typeface="Bricolage Grotesque ExtraBold" pitchFamily="34" charset="-122"/>
-                <a:cs typeface="Bricolage Grotesque ExtraBold" pitchFamily="34" charset="-120"/>
-              </a:rPr>
-              <a:t> chính</a:t>
+              <a:t> toán,</a:t>
             </a:r>
             <a:endParaRPr lang="en-US" sz="7200" dirty="0"/>
           </a:p>
@@ -3447,7 +3502,7 @@
               <a:buNone/>
             </a:pPr>
             <a:r>
-              <a:rPr lang="en-US" sz="7200" dirty="0" spc="32" kern="0">
+              <a:rPr lang="en-US" sz="7200" dirty="0" spc="-10" kern="0">
                 <a:solidFill>
                   <a:srgbClr val="14161C"/>
                 </a:solidFill>
@@ -3455,10 +3510,10 @@
                 <a:ea typeface="Bricolage Grotesque ExtraBold" pitchFamily="34" charset="-122"/>
                 <a:cs typeface="Bricolage Grotesque ExtraBold" pitchFamily="34" charset="-120"/>
               </a:rPr>
-              <a:t>để</a:t>
-            </a:r>
-            <a:r>
-              <a:rPr lang="en-US" sz="7200" dirty="0" spc="-41" kern="0">
+              <a:t>ba</a:t>
+            </a:r>
+            <a:r>
+              <a:rPr lang="en-US" sz="7200" dirty="0" spc="2" kern="0">
                 <a:solidFill>
                   <a:srgbClr val="14161C"/>
                 </a:solidFill>
@@ -3466,10 +3521,10 @@
                 <a:ea typeface="Bricolage Grotesque ExtraBold" pitchFamily="34" charset="-122"/>
                 <a:cs typeface="Bricolage Grotesque ExtraBold" pitchFamily="34" charset="-120"/>
               </a:rPr>
-              <a:t> tổ</a:t>
-            </a:r>
-            <a:r>
-              <a:rPr lang="en-US" sz="7200" dirty="0" spc="-55" kern="0">
+              <a:t> cách</a:t>
+            </a:r>
+            <a:r>
+              <a:rPr lang="en-US" sz="7200" dirty="0" spc="1" kern="0">
                 <a:solidFill>
                   <a:srgbClr val="14161C"/>
                 </a:solidFill>
@@ -3477,18 +3532,7 @@
                 <a:ea typeface="Bricolage Grotesque ExtraBold" pitchFamily="34" charset="-122"/>
                 <a:cs typeface="Bricolage Grotesque ExtraBold" pitchFamily="34" charset="-120"/>
               </a:rPr>
-              <a:t> chức</a:t>
-            </a:r>
-            <a:r>
-              <a:rPr lang="en-US" sz="7200" dirty="0" spc="-1" kern="0">
-                <a:solidFill>
-                  <a:srgbClr val="14161C"/>
-                </a:solidFill>
-                <a:latin typeface="Bricolage Grotesque ExtraBold" pitchFamily="34" charset="0"/>
-                <a:ea typeface="Bricolage Grotesque ExtraBold" pitchFamily="34" charset="-122"/>
-                <a:cs typeface="Bricolage Grotesque ExtraBold" pitchFamily="34" charset="-120"/>
-              </a:rPr>
-              <a:t> mã</a:t>
+              <a:t> viết</a:t>
             </a:r>
             <a:endParaRPr lang="en-US" sz="7200" dirty="0"/>
           </a:p>
@@ -3522,6 +3566,83 @@
               <a:buNone/>
             </a:pPr>
             <a:r>
+              <a:rPr lang="en-US" sz="2700" dirty="0" spc="-61" kern="0">
+                <a:solidFill>
+                  <a:srgbClr val="14161C"/>
+                </a:solidFill>
+                <a:latin typeface="Be Vietnam Pro" pitchFamily="34" charset="0"/>
+                <a:ea typeface="Be Vietnam Pro" pitchFamily="34" charset="-122"/>
+                <a:cs typeface="Be Vietnam Pro" pitchFamily="34" charset="-120"/>
+              </a:rPr>
+              <a:t>Tổng</a:t>
+            </a:r>
+            <a:r>
+              <a:rPr lang="en-US" sz="2700" dirty="0" spc="-3" kern="0">
+                <a:solidFill>
+                  <a:srgbClr val="14161C"/>
+                </a:solidFill>
+                <a:latin typeface="Be Vietnam Pro" pitchFamily="34" charset="0"/>
+                <a:ea typeface="Be Vietnam Pro" pitchFamily="34" charset="-122"/>
+                <a:cs typeface="Be Vietnam Pro" pitchFamily="34" charset="-120"/>
+              </a:rPr>
+              <a:t> bình</a:t>
+            </a:r>
+            <a:r>
+              <a:rPr lang="en-US" sz="2700" dirty="0" spc="4" kern="0">
+                <a:solidFill>
+                  <a:srgbClr val="14161C"/>
+                </a:solidFill>
+                <a:latin typeface="Be Vietnam Pro" pitchFamily="34" charset="0"/>
+                <a:ea typeface="Be Vietnam Pro" pitchFamily="34" charset="-122"/>
+                <a:cs typeface="Be Vietnam Pro" pitchFamily="34" charset="-120"/>
+              </a:rPr>
+              <a:t> phương</a:t>
+            </a:r>
+            <a:r>
+              <a:rPr lang="en-US" sz="2700" dirty="0" spc="2" kern="0">
+                <a:solidFill>
+                  <a:srgbClr val="14161C"/>
+                </a:solidFill>
+                <a:latin typeface="Be Vietnam Pro" pitchFamily="34" charset="0"/>
+                <a:ea typeface="Be Vietnam Pro" pitchFamily="34" charset="-122"/>
+                <a:cs typeface="Be Vietnam Pro" pitchFamily="34" charset="-120"/>
+              </a:rPr>
+              <a:t> các</a:t>
+            </a:r>
+            <a:r>
+              <a:rPr lang="en-US" sz="2700" dirty="0" spc="-12" kern="0">
+                <a:solidFill>
+                  <a:srgbClr val="14161C"/>
+                </a:solidFill>
+                <a:latin typeface="Be Vietnam Pro" pitchFamily="34" charset="0"/>
+                <a:ea typeface="Be Vietnam Pro" pitchFamily="34" charset="-122"/>
+                <a:cs typeface="Be Vietnam Pro" pitchFamily="34" charset="-120"/>
+              </a:rPr>
+              <a:t> số</a:t>
+            </a:r>
+            <a:r>
+              <a:rPr lang="en-US" sz="2700" dirty="0" spc="0" kern="0">
+                <a:solidFill>
+                  <a:srgbClr val="14161C"/>
+                </a:solidFill>
+                <a:latin typeface="Be Vietnam Pro" pitchFamily="34" charset="0"/>
+                <a:ea typeface="Be Vietnam Pro" pitchFamily="34" charset="-122"/>
+                <a:cs typeface="Be Vietnam Pro" pitchFamily="34" charset="-120"/>
+              </a:rPr>
+              <a:t> chẵn</a:t>
+            </a:r>
+            <a:r>
+              <a:rPr lang="en-US" sz="2700" dirty="0" spc="-20" kern="0">
+                <a:solidFill>
+                  <a:srgbClr val="14161C"/>
+                </a:solidFill>
+                <a:latin typeface="Be Vietnam Pro" pitchFamily="34" charset="0"/>
+                <a:ea typeface="Be Vietnam Pro" pitchFamily="34" charset="-122"/>
+                <a:cs typeface="Be Vietnam Pro" pitchFamily="34" charset="-120"/>
+              </a:rPr>
+              <a:t> trong</a:t>
+            </a:r>
+            <a:r>
               <a:rPr lang="en-US" sz="2700" dirty="0" spc="-1" kern="0">
                 <a:solidFill>
                   <a:srgbClr val="14161C"/>
@@ -3530,7 +3651,18 @@
                 <a:ea typeface="Be Vietnam Pro" pitchFamily="34" charset="-122"/>
                 <a:cs typeface="Be Vietnam Pro" pitchFamily="34" charset="-120"/>
               </a:rPr>
-              <a:t>Bài</a:t>
+              <a:t> 1</a:t>
+            </a:r>
+            <a:r>
+              <a:rPr lang="en-US" sz="2700" dirty="0" spc="10" kern="0">
+                <a:solidFill>
+                  <a:srgbClr val="14161C"/>
+                </a:solidFill>
+                <a:latin typeface="Be Vietnam Pro" pitchFamily="34" charset="0"/>
+                <a:ea typeface="Be Vietnam Pro" pitchFamily="34" charset="-122"/>
+                <a:cs typeface="Be Vietnam Pro" pitchFamily="34" charset="-120"/>
+              </a:rPr>
+              <a:t> đến</a:t>
             </a:r>
             <a:r>
               <a:rPr lang="en-US" sz="2700" dirty="0" spc="-2" kern="0">
@@ -3541,29 +3673,84 @@
                 <a:ea typeface="Be Vietnam Pro" pitchFamily="34" charset="-122"/>
                 <a:cs typeface="Be Vietnam Pro" pitchFamily="34" charset="-120"/>
               </a:rPr>
-              <a:t> nguồn</a:t>
-            </a:r>
-            <a:r>
-              <a:rPr lang="en-US" sz="2700" dirty="0" spc="-13" kern="0">
-                <a:solidFill>
-                  <a:srgbClr val="14161C"/>
-                </a:solidFill>
-                <a:latin typeface="Be Vietnam Pro" pitchFamily="34" charset="0"/>
-                <a:ea typeface="Be Vietnam Pro" pitchFamily="34" charset="-122"/>
-                <a:cs typeface="Be Vietnam Pro" pitchFamily="34" charset="-120"/>
-              </a:rPr>
-              <a:t> so</a:t>
-            </a:r>
-            <a:r>
-              <a:rPr lang="en-US" sz="2700" dirty="0" spc="-8" kern="0">
-                <a:solidFill>
-                  <a:srgbClr val="14161C"/>
-                </a:solidFill>
-                <a:latin typeface="Be Vietnam Pro" pitchFamily="34" charset="0"/>
-                <a:ea typeface="Be Vietnam Pro" pitchFamily="34" charset="-122"/>
-                <a:cs typeface="Be Vietnam Pro" pitchFamily="34" charset="-120"/>
-              </a:rPr>
-              <a:t> ba</a:t>
+              <a:t> 6</a:t>
+            </a:r>
+            <a:r>
+              <a:rPr lang="en-US" sz="2700" dirty="0" spc="-1" kern="0">
+                <a:solidFill>
+                  <a:srgbClr val="14161C"/>
+                </a:solidFill>
+                <a:latin typeface="Be Vietnam Pro" pitchFamily="34" charset="0"/>
+                <a:ea typeface="Be Vietnam Pro" pitchFamily="34" charset="-122"/>
+                <a:cs typeface="Be Vietnam Pro" pitchFamily="34" charset="-120"/>
+              </a:rPr>
+              <a:t> là</a:t>
+            </a:r>
+            <a:r>
+              <a:rPr lang="en-US" sz="2700" dirty="0" spc="-3" kern="0">
+                <a:solidFill>
+                  <a:srgbClr val="14161C"/>
+                </a:solidFill>
+                <a:latin typeface="Be Vietnam Pro" pitchFamily="34" charset="0"/>
+                <a:ea typeface="Be Vietnam Pro" pitchFamily="34" charset="-122"/>
+                <a:cs typeface="Be Vietnam Pro" pitchFamily="34" charset="-120"/>
+              </a:rPr>
+              <a:t> 56.</a:t>
+            </a:r>
+            <a:r>
+              <a:rPr lang="en-US" sz="2700" dirty="0" spc="-1" kern="0">
+                <a:solidFill>
+                  <a:srgbClr val="14161C"/>
+                </a:solidFill>
+                <a:latin typeface="Be Vietnam Pro" pitchFamily="34" charset="0"/>
+                <a:ea typeface="Be Vietnam Pro" pitchFamily="34" charset="-122"/>
+                <a:cs typeface="Be Vietnam Pro" pitchFamily="34" charset="-120"/>
+              </a:rPr>
+              <a:t> Mỗi</a:t>
+            </a:r>
+            <a:r>
+              <a:rPr lang="en-US" sz="2700" dirty="0" spc="-3" kern="0">
+                <a:solidFill>
+                  <a:srgbClr val="14161C"/>
+                </a:solidFill>
+                <a:latin typeface="Be Vietnam Pro" pitchFamily="34" charset="0"/>
+                <a:ea typeface="Be Vietnam Pro" pitchFamily="34" charset="-122"/>
+                <a:cs typeface="Be Vietnam Pro" pitchFamily="34" charset="-120"/>
+              </a:rPr>
+              <a:t> mô hình</a:t>
+            </a:r>
+            <a:r>
+              <a:rPr lang="en-US" sz="2700" dirty="0" spc="-1" kern="0">
+                <a:solidFill>
+                  <a:srgbClr val="14161C"/>
+                </a:solidFill>
+                <a:latin typeface="Be Vietnam Pro" pitchFamily="34" charset="0"/>
+                <a:ea typeface="Be Vietnam Pro" pitchFamily="34" charset="-122"/>
+                <a:cs typeface="Be Vietnam Pro" pitchFamily="34" charset="-120"/>
+              </a:rPr>
+              <a:t> tính</a:t>
+            </a:r>
+            <a:r>
+              <a:rPr lang="en-US" sz="2700" dirty="0" spc="-3" kern="0">
+                <a:solidFill>
+                  <a:srgbClr val="14161C"/>
+                </a:solidFill>
+                <a:latin typeface="Be Vietnam Pro" pitchFamily="34" charset="0"/>
+                <a:ea typeface="Be Vietnam Pro" pitchFamily="34" charset="-122"/>
+                <a:cs typeface="Be Vietnam Pro" pitchFamily="34" charset="-120"/>
+              </a:rPr>
+              <a:t> nó</a:t>
+            </a:r>
+            <a:r>
+              <a:rPr lang="en-US" sz="2700" dirty="0" spc="-7" kern="0">
+                <a:solidFill>
+                  <a:srgbClr val="14161C"/>
+                </a:solidFill>
+                <a:latin typeface="Be Vietnam Pro" pitchFamily="34" charset="0"/>
+                <a:ea typeface="Be Vietnam Pro" pitchFamily="34" charset="-122"/>
+                <a:cs typeface="Be Vietnam Pro" pitchFamily="34" charset="-120"/>
+              </a:rPr>
+              <a:t> một</a:t>
             </a:r>
             <a:r>
               <a:rPr lang="en-US" sz="2700" dirty="0" spc="-2" kern="0">
@@ -3574,205 +3761,7 @@
                 <a:ea typeface="Be Vietnam Pro" pitchFamily="34" charset="-122"/>
                 <a:cs typeface="Be Vietnam Pro" pitchFamily="34" charset="-120"/>
               </a:rPr>
-              <a:t> mô</a:t>
-            </a:r>
-            <a:r>
-              <a:rPr lang="en-US" sz="2700" dirty="0" spc="-3" kern="0">
-                <a:solidFill>
-                  <a:srgbClr val="14161C"/>
-                </a:solidFill>
-                <a:latin typeface="Be Vietnam Pro" pitchFamily="34" charset="0"/>
-                <a:ea typeface="Be Vietnam Pro" pitchFamily="34" charset="-122"/>
-                <a:cs typeface="Be Vietnam Pro" pitchFamily="34" charset="-120"/>
-              </a:rPr>
-              <a:t> hình</a:t>
-            </a:r>
-            <a:r>
-              <a:rPr lang="en-US" sz="2700" dirty="0" spc="-4" kern="0">
-                <a:solidFill>
-                  <a:srgbClr val="14161C"/>
-                </a:solidFill>
-                <a:latin typeface="Be Vietnam Pro" pitchFamily="34" charset="0"/>
-                <a:ea typeface="Be Vietnam Pro" pitchFamily="34" charset="-122"/>
-                <a:cs typeface="Be Vietnam Pro" pitchFamily="34" charset="-120"/>
-              </a:rPr>
-              <a:t> bằng</a:t>
-            </a:r>
-            <a:r>
-              <a:rPr lang="en-US" sz="2700" dirty="0" spc="-9" kern="0">
-                <a:solidFill>
-                  <a:srgbClr val="14161C"/>
-                </a:solidFill>
-                <a:latin typeface="Be Vietnam Pro" pitchFamily="34" charset="0"/>
-                <a:ea typeface="Be Vietnam Pro" pitchFamily="34" charset="-122"/>
-                <a:cs typeface="Be Vietnam Pro" pitchFamily="34" charset="-120"/>
-              </a:rPr>
-              <a:t> ba</a:t>
-            </a:r>
-            <a:r>
-              <a:rPr lang="en-US" sz="2700" dirty="0" spc="-3" kern="0">
-                <a:solidFill>
-                  <a:srgbClr val="14161C"/>
-                </a:solidFill>
-                <a:latin typeface="Be Vietnam Pro" pitchFamily="34" charset="0"/>
-                <a:ea typeface="Be Vietnam Pro" pitchFamily="34" charset="-122"/>
-                <a:cs typeface="Be Vietnam Pro" pitchFamily="34" charset="-120"/>
-              </a:rPr>
-              <a:t> danh</a:t>
-            </a:r>
-            <a:r>
-              <a:rPr lang="en-US" sz="2700" dirty="0" spc="-5" kern="0">
-                <a:solidFill>
-                  <a:srgbClr val="14161C"/>
-                </a:solidFill>
-                <a:latin typeface="Be Vietnam Pro" pitchFamily="34" charset="0"/>
-                <a:ea typeface="Be Vietnam Pro" pitchFamily="34" charset="-122"/>
-                <a:cs typeface="Be Vietnam Pro" pitchFamily="34" charset="-120"/>
-              </a:rPr>
-              <a:t> sách</a:t>
-            </a:r>
-            <a:r>
-              <a:rPr lang="en-US" sz="2700" dirty="0" spc="-7" kern="0">
-                <a:solidFill>
-                  <a:srgbClr val="14161C"/>
-                </a:solidFill>
-                <a:latin typeface="Be Vietnam Pro" pitchFamily="34" charset="0"/>
-                <a:ea typeface="Be Vietnam Pro" pitchFamily="34" charset="-122"/>
-                <a:cs typeface="Be Vietnam Pro" pitchFamily="34" charset="-120"/>
-              </a:rPr>
-              <a:t> bốn</a:t>
-            </a:r>
-            <a:r>
-              <a:rPr lang="en-US" sz="2700" dirty="0" spc="-2" kern="0">
-                <a:solidFill>
-                  <a:srgbClr val="14161C"/>
-                </a:solidFill>
-                <a:latin typeface="Be Vietnam Pro" pitchFamily="34" charset="0"/>
-                <a:ea typeface="Be Vietnam Pro" pitchFamily="34" charset="-122"/>
-                <a:cs typeface="Be Vietnam Pro" pitchFamily="34" charset="-120"/>
-              </a:rPr>
-              <a:t> ý. Bài</a:t>
-            </a:r>
-            <a:r>
-              <a:rPr lang="en-US" sz="2700" dirty="0" spc="-12" kern="0">
-                <a:solidFill>
-                  <a:srgbClr val="14161C"/>
-                </a:solidFill>
-                <a:latin typeface="Be Vietnam Pro" pitchFamily="34" charset="0"/>
-                <a:ea typeface="Be Vietnam Pro" pitchFamily="34" charset="-122"/>
-                <a:cs typeface="Be Vietnam Pro" pitchFamily="34" charset="-120"/>
-              </a:rPr>
-              <a:t> này</a:t>
-            </a:r>
-            <a:r>
-              <a:rPr lang="en-US" sz="2700" dirty="0" spc="-2" kern="0">
-                <a:solidFill>
-                  <a:srgbClr val="14161C"/>
-                </a:solidFill>
-                <a:latin typeface="Be Vietnam Pro" pitchFamily="34" charset="0"/>
-                <a:ea typeface="Be Vietnam Pro" pitchFamily="34" charset="-122"/>
-                <a:cs typeface="Be Vietnam Pro" pitchFamily="34" charset="-120"/>
-              </a:rPr>
-              <a:t> giữ</a:t>
-            </a:r>
-            <a:r>
-              <a:rPr lang="en-US" sz="2700" dirty="0" spc="1" kern="0">
-                <a:solidFill>
-                  <a:srgbClr val="14161C"/>
-                </a:solidFill>
-                <a:latin typeface="Be Vietnam Pro" pitchFamily="34" charset="0"/>
-                <a:ea typeface="Be Vietnam Pro" pitchFamily="34" charset="-122"/>
-                <a:cs typeface="Be Vietnam Pro" pitchFamily="34" charset="-120"/>
-              </a:rPr>
-              <a:t> các</a:t>
-            </a:r>
-            <a:r>
-              <a:rPr lang="en-US" sz="2700" dirty="0" spc="-2" kern="0">
-                <a:solidFill>
-                  <a:srgbClr val="14161C"/>
-                </a:solidFill>
-                <a:latin typeface="Be Vietnam Pro" pitchFamily="34" charset="0"/>
-                <a:ea typeface="Be Vietnam Pro" pitchFamily="34" charset="-122"/>
-                <a:cs typeface="Be Vietnam Pro" pitchFamily="34" charset="-120"/>
-              </a:rPr>
-              <a:t> ý</a:t>
-            </a:r>
-            <a:r>
-              <a:rPr lang="en-US" sz="2700" dirty="0" spc="16" kern="0">
-                <a:solidFill>
-                  <a:srgbClr val="14161C"/>
-                </a:solidFill>
-                <a:latin typeface="Be Vietnam Pro" pitchFamily="34" charset="0"/>
-                <a:ea typeface="Be Vietnam Pro" pitchFamily="34" charset="-122"/>
-                <a:cs typeface="Be Vietnam Pro" pitchFamily="34" charset="-120"/>
-              </a:rPr>
-              <a:t> đó</a:t>
-            </a:r>
-            <a:r>
-              <a:rPr lang="en-US" sz="2700" dirty="0" spc="-30" kern="0">
-                <a:solidFill>
-                  <a:srgbClr val="14161C"/>
-                </a:solidFill>
-                <a:latin typeface="Be Vietnam Pro" pitchFamily="34" charset="0"/>
-                <a:ea typeface="Be Vietnam Pro" pitchFamily="34" charset="-122"/>
-                <a:cs typeface="Be Vietnam Pro" pitchFamily="34" charset="-120"/>
-              </a:rPr>
-              <a:t> rồi</a:t>
-            </a:r>
-            <a:r>
-              <a:rPr lang="en-US" sz="2700" dirty="0" spc="13" kern="0">
-                <a:solidFill>
-                  <a:srgbClr val="14161C"/>
-                </a:solidFill>
-                <a:latin typeface="Be Vietnam Pro" pitchFamily="34" charset="0"/>
-                <a:ea typeface="Be Vietnam Pro" pitchFamily="34" charset="-122"/>
-                <a:cs typeface="Be Vietnam Pro" pitchFamily="34" charset="-120"/>
-              </a:rPr>
-              <a:t> đối</a:t>
-            </a:r>
-            <a:r>
-              <a:rPr lang="en-US" sz="2700" dirty="0" spc="-1" kern="0">
-                <a:solidFill>
-                  <a:srgbClr val="14161C"/>
-                </a:solidFill>
-                <a:latin typeface="Be Vietnam Pro" pitchFamily="34" charset="0"/>
-                <a:ea typeface="Be Vietnam Pro" pitchFamily="34" charset="-122"/>
-                <a:cs typeface="Be Vietnam Pro" pitchFamily="34" charset="-120"/>
-              </a:rPr>
-              <a:t> chiếu</a:t>
-            </a:r>
-            <a:r>
-              <a:rPr lang="en-US" sz="2700" dirty="0" spc="-13" kern="0">
-                <a:solidFill>
-                  <a:srgbClr val="14161C"/>
-                </a:solidFill>
-                <a:latin typeface="Be Vietnam Pro" pitchFamily="34" charset="0"/>
-                <a:ea typeface="Be Vietnam Pro" pitchFamily="34" charset="-122"/>
-                <a:cs typeface="Be Vietnam Pro" pitchFamily="34" charset="-120"/>
-              </a:rPr>
-              <a:t> với tài</a:t>
-            </a:r>
-            <a:r>
-              <a:rPr lang="en-US" sz="2700" dirty="0" spc="-1" kern="0">
-                <a:solidFill>
-                  <a:srgbClr val="14161C"/>
-                </a:solidFill>
-                <a:latin typeface="Be Vietnam Pro" pitchFamily="34" charset="0"/>
-                <a:ea typeface="Be Vietnam Pro" pitchFamily="34" charset="-122"/>
-                <a:cs typeface="Be Vietnam Pro" pitchFamily="34" charset="-120"/>
-              </a:rPr>
-              <a:t> liệu</a:t>
-            </a:r>
-            <a:r>
-              <a:rPr lang="en-US" sz="2700" dirty="0" spc="6" kern="0">
-                <a:solidFill>
-                  <a:srgbClr val="14161C"/>
-                </a:solidFill>
-                <a:latin typeface="Be Vietnam Pro" pitchFamily="34" charset="0"/>
-                <a:ea typeface="Be Vietnam Pro" pitchFamily="34" charset="-122"/>
-                <a:cs typeface="Be Vietnam Pro" pitchFamily="34" charset="-120"/>
-              </a:rPr>
-              <a:t> Python.</a:t>
+              <a:t> kiểu.</a:t>
             </a:r>
             <a:endParaRPr lang="en-US" sz="2700" dirty="0"/>
           </a:p>
@@ -4021,26 +4010,26 @@
               <a:buNone/>
             </a:pPr>
             <a:r>
-              <a:rPr lang="en-US" sz="2250" b="1" dirty="0" spc="-5" kern="0">
-                <a:solidFill>
-                  <a:srgbClr val="F3EEE3"/>
-                </a:solidFill>
-                <a:latin typeface="Be Vietnam Pro" pitchFamily="34" charset="0"/>
-                <a:ea typeface="Be Vietnam Pro" pitchFamily="34" charset="-122"/>
-                <a:cs typeface="Be Vietnam Pro" pitchFamily="34" charset="-120"/>
-              </a:rPr>
-              <a:t>4</a:t>
-            </a:r>
-            <a:r>
-              <a:rPr lang="en-US" sz="2250" b="1" dirty="0" spc="5" kern="0">
-                <a:solidFill>
-                  <a:srgbClr val="F3EEE3"/>
-                </a:solidFill>
-                <a:latin typeface="Be Vietnam Pro" pitchFamily="34" charset="0"/>
-                <a:ea typeface="Be Vietnam Pro" pitchFamily="34" charset="-122"/>
-                <a:cs typeface="Be Vietnam Pro" pitchFamily="34" charset="-120"/>
-              </a:rPr>
-              <a:t> ý</a:t>
+              <a:rPr lang="en-US" sz="2250" b="1" dirty="0" spc="4" kern="0">
+                <a:solidFill>
+                  <a:srgbClr val="F3EEE3"/>
+                </a:solidFill>
+                <a:latin typeface="Be Vietnam Pro" pitchFamily="34" charset="0"/>
+                <a:ea typeface="Be Vietnam Pro" pitchFamily="34" charset="-122"/>
+                <a:cs typeface="Be Vietnam Pro" pitchFamily="34" charset="-120"/>
+              </a:rPr>
+              <a:t>=</a:t>
+            </a:r>
+            <a:r>
+              <a:rPr lang="en-US" sz="2250" b="1" dirty="0" spc="1" kern="0">
+                <a:solidFill>
+                  <a:srgbClr val="F3EEE3"/>
+                </a:solidFill>
+                <a:latin typeface="Be Vietnam Pro" pitchFamily="34" charset="0"/>
+                <a:ea typeface="Be Vietnam Pro" pitchFamily="34" charset="-122"/>
+                <a:cs typeface="Be Vietnam Pro" pitchFamily="34" charset="-120"/>
+              </a:rPr>
+              <a:t> 56</a:t>
             </a:r>
             <a:endParaRPr lang="en-US" sz="2250" dirty="0"/>
           </a:p>
@@ -4074,37 +4063,15 @@
               <a:buNone/>
             </a:pPr>
             <a:r>
-              <a:rPr lang="en-US" sz="2400" dirty="0" spc="1" kern="0">
-                <a:solidFill>
-                  <a:srgbClr val="14161C"/>
-                </a:solidFill>
-                <a:latin typeface="Be Vietnam Pro" pitchFamily="34" charset="0"/>
-                <a:ea typeface="Be Vietnam Pro" pitchFamily="34" charset="-122"/>
-                <a:cs typeface="Be Vietnam Pro" pitchFamily="34" charset="-120"/>
-              </a:rPr>
-              <a:t>Đổi</a:t>
-            </a:r>
-            <a:r>
-              <a:rPr lang="en-US" sz="2400" dirty="0" spc="-13" kern="0">
-                <a:solidFill>
-                  <a:srgbClr val="14161C"/>
-                </a:solidFill>
-                <a:latin typeface="Be Vietnam Pro" pitchFamily="34" charset="0"/>
-                <a:ea typeface="Be Vietnam Pro" pitchFamily="34" charset="-122"/>
-                <a:cs typeface="Be Vietnam Pro" pitchFamily="34" charset="-120"/>
-              </a:rPr>
-              <a:t> trạng</a:t>
-            </a:r>
-            <a:r>
-              <a:rPr lang="en-US" sz="2400" dirty="0" spc="1" kern="0">
-                <a:solidFill>
-                  <a:srgbClr val="14161C"/>
-                </a:solidFill>
-                <a:latin typeface="Be Vietnam Pro" pitchFamily="34" charset="0"/>
-                <a:ea typeface="Be Vietnam Pro" pitchFamily="34" charset="-122"/>
-                <a:cs typeface="Be Vietnam Pro" pitchFamily="34" charset="-120"/>
-              </a:rPr>
-              <a:t> thái</a:t>
+              <a:rPr lang="en-US" sz="2400" dirty="0" spc="-7" kern="0">
+                <a:solidFill>
+                  <a:srgbClr val="14161C"/>
+                </a:solidFill>
+                <a:latin typeface="Be Vietnam Pro" pitchFamily="34" charset="0"/>
+                <a:ea typeface="Be Vietnam Pro" pitchFamily="34" charset="-122"/>
+                <a:cs typeface="Be Vietnam Pro" pitchFamily="34" charset="-120"/>
+              </a:rPr>
+              <a:t>Một</a:t>
             </a:r>
             <a:r>
               <a:rPr lang="en-US" sz="2400" dirty="0" spc="0" kern="0">
@@ -4115,29 +4082,62 @@
                 <a:ea typeface="Be Vietnam Pro" pitchFamily="34" charset="-122"/>
                 <a:cs typeface="Be Vietnam Pro" pitchFamily="34" charset="-120"/>
               </a:rPr>
-              <a:t> bằng</a:t>
-            </a:r>
-            <a:r>
-              <a:rPr lang="en-US" sz="2400" dirty="0" spc="-1" kern="0">
-                <a:solidFill>
-                  <a:srgbClr val="14161C"/>
-                </a:solidFill>
-                <a:latin typeface="Be Vietnam Pro" pitchFamily="34" charset="0"/>
-                <a:ea typeface="Be Vietnam Pro" pitchFamily="34" charset="-122"/>
-                <a:cs typeface="Be Vietnam Pro" pitchFamily="34" charset="-120"/>
-              </a:rPr>
-              <a:t> chuỗi</a:t>
-            </a:r>
-            <a:r>
-              <a:rPr lang="en-US" sz="2400" dirty="0" spc="0" kern="0">
-                <a:solidFill>
-                  <a:srgbClr val="14161C"/>
-                </a:solidFill>
-                <a:latin typeface="Be Vietnam Pro" pitchFamily="34" charset="0"/>
-                <a:ea typeface="Be Vietnam Pro" pitchFamily="34" charset="-122"/>
-                <a:cs typeface="Be Vietnam Pro" pitchFamily="34" charset="-120"/>
-              </a:rPr>
-              <a:t> lệnh</a:t>
+              <a:t> biến</a:t>
+            </a:r>
+            <a:r>
+              <a:rPr lang="en-US" sz="2400" dirty="0" spc="-18" kern="0">
+                <a:solidFill>
+                  <a:srgbClr val="14161C"/>
+                </a:solidFill>
+                <a:latin typeface="Be Vietnam Pro" pitchFamily="34" charset="0"/>
+                <a:ea typeface="Be Vietnam Pro" pitchFamily="34" charset="-122"/>
+                <a:cs typeface="Be Vietnam Pro" pitchFamily="34" charset="-120"/>
+              </a:rPr>
+              <a:t> total</a:t>
+            </a:r>
+            <a:r>
+              <a:rPr lang="en-US" sz="2400" dirty="0" spc="12" kern="0">
+                <a:solidFill>
+                  <a:srgbClr val="14161C"/>
+                </a:solidFill>
+                <a:latin typeface="Be Vietnam Pro" pitchFamily="34" charset="0"/>
+                <a:ea typeface="Be Vietnam Pro" pitchFamily="34" charset="-122"/>
+                <a:cs typeface="Be Vietnam Pro" pitchFamily="34" charset="-120"/>
+              </a:rPr>
+              <a:t> đổi</a:t>
+            </a:r>
+            <a:r>
+              <a:rPr lang="en-US" sz="2400" dirty="0" spc="-7" kern="0">
+                <a:solidFill>
+                  <a:srgbClr val="14161C"/>
+                </a:solidFill>
+                <a:latin typeface="Be Vietnam Pro" pitchFamily="34" charset="0"/>
+                <a:ea typeface="Be Vietnam Pro" pitchFamily="34" charset="-122"/>
+                <a:cs typeface="Be Vietnam Pro" pitchFamily="34" charset="-120"/>
+              </a:rPr>
+              <a:t> sau</a:t>
+            </a:r>
+            <a:r>
+              <a:rPr lang="en-US" sz="2400" dirty="0" spc="2" kern="0">
+                <a:solidFill>
+                  <a:srgbClr val="14161C"/>
+                </a:solidFill>
+                <a:latin typeface="Be Vietnam Pro" pitchFamily="34" charset="0"/>
+                <a:ea typeface="Be Vietnam Pro" pitchFamily="34" charset="-122"/>
+                <a:cs typeface="Be Vietnam Pro" pitchFamily="34" charset="-120"/>
+              </a:rPr>
+              <a:t> mỗi</a:t>
+            </a:r>
+            <a:r>
+              <a:rPr lang="en-US" sz="2400" dirty="0" spc="-9" kern="0">
+                <a:solidFill>
+                  <a:srgbClr val="14161C"/>
+                </a:solidFill>
+                <a:latin typeface="Be Vietnam Pro" pitchFamily="34" charset="0"/>
+                <a:ea typeface="Be Vietnam Pro" pitchFamily="34" charset="-122"/>
+                <a:cs typeface="Be Vietnam Pro" pitchFamily="34" charset="-120"/>
+              </a:rPr>
+              <a:t> vòng</a:t>
             </a:r>
             <a:endParaRPr lang="en-US" sz="2400" dirty="0"/>
           </a:p>
@@ -4276,26 +4276,26 @@
               <a:buNone/>
             </a:pPr>
             <a:r>
-              <a:rPr lang="en-US" sz="2250" b="1" dirty="0" spc="-5" kern="0">
-                <a:solidFill>
-                  <a:srgbClr val="F3EEE3"/>
-                </a:solidFill>
-                <a:latin typeface="Be Vietnam Pro" pitchFamily="34" charset="0"/>
-                <a:ea typeface="Be Vietnam Pro" pitchFamily="34" charset="-122"/>
-                <a:cs typeface="Be Vietnam Pro" pitchFamily="34" charset="-120"/>
-              </a:rPr>
-              <a:t>4</a:t>
-            </a:r>
-            <a:r>
-              <a:rPr lang="en-US" sz="2250" b="1" dirty="0" spc="5" kern="0">
-                <a:solidFill>
-                  <a:srgbClr val="F3EEE3"/>
-                </a:solidFill>
-                <a:latin typeface="Be Vietnam Pro" pitchFamily="34" charset="0"/>
-                <a:ea typeface="Be Vietnam Pro" pitchFamily="34" charset="-122"/>
-                <a:cs typeface="Be Vietnam Pro" pitchFamily="34" charset="-120"/>
-              </a:rPr>
-              <a:t> ý</a:t>
+              <a:rPr lang="en-US" sz="2250" b="1" dirty="0" spc="4" kern="0">
+                <a:solidFill>
+                  <a:srgbClr val="F3EEE3"/>
+                </a:solidFill>
+                <a:latin typeface="Be Vietnam Pro" pitchFamily="34" charset="0"/>
+                <a:ea typeface="Be Vietnam Pro" pitchFamily="34" charset="-122"/>
+                <a:cs typeface="Be Vietnam Pro" pitchFamily="34" charset="-120"/>
+              </a:rPr>
+              <a:t>=</a:t>
+            </a:r>
+            <a:r>
+              <a:rPr lang="en-US" sz="2250" b="1" dirty="0" spc="1" kern="0">
+                <a:solidFill>
+                  <a:srgbClr val="F3EEE3"/>
+                </a:solidFill>
+                <a:latin typeface="Be Vietnam Pro" pitchFamily="34" charset="0"/>
+                <a:ea typeface="Be Vietnam Pro" pitchFamily="34" charset="-122"/>
+                <a:cs typeface="Be Vietnam Pro" pitchFamily="34" charset="-120"/>
+              </a:rPr>
+              <a:t> 56</a:t>
             </a:r>
             <a:endParaRPr lang="en-US" sz="2250" dirty="0"/>
           </a:p>
@@ -4337,18 +4337,29 @@
                 <a:ea typeface="Be Vietnam Pro" pitchFamily="34" charset="-122"/>
                 <a:cs typeface="Be Vietnam Pro" pitchFamily="34" charset="-120"/>
               </a:rPr>
-              <a:t>Tính</a:t>
-            </a:r>
-            <a:r>
-              <a:rPr lang="en-US" sz="2400" dirty="0" spc="-9" kern="0">
-                <a:solidFill>
-                  <a:srgbClr val="14161C"/>
-                </a:solidFill>
-                <a:latin typeface="Be Vietnam Pro" pitchFamily="34" charset="0"/>
-                <a:ea typeface="Be Vietnam Pro" pitchFamily="34" charset="-122"/>
-                <a:cs typeface="Be Vietnam Pro" pitchFamily="34" charset="-120"/>
-              </a:rPr>
-              <a:t> toán</a:t>
+              <a:t>Các</a:t>
+            </a:r>
+            <a:r>
+              <a:rPr lang="en-US" sz="2400" dirty="0" spc="3" kern="0">
+                <a:solidFill>
+                  <a:srgbClr val="14161C"/>
+                </a:solidFill>
+                <a:latin typeface="Be Vietnam Pro" pitchFamily="34" charset="0"/>
+                <a:ea typeface="Be Vietnam Pro" pitchFamily="34" charset="-122"/>
+                <a:cs typeface="Be Vietnam Pro" pitchFamily="34" charset="-120"/>
+              </a:rPr>
+              <a:t> hàm</a:t>
+            </a:r>
+            <a:r>
+              <a:rPr lang="en-US" sz="2400" dirty="0" spc="1" kern="0">
+                <a:solidFill>
+                  <a:srgbClr val="14161C"/>
+                </a:solidFill>
+                <a:latin typeface="Be Vietnam Pro" pitchFamily="34" charset="0"/>
+                <a:ea typeface="Be Vietnam Pro" pitchFamily="34" charset="-122"/>
+                <a:cs typeface="Be Vietnam Pro" pitchFamily="34" charset="-120"/>
+              </a:rPr>
+              <a:t> nhỏ</a:t>
             </a:r>
             <a:r>
               <a:rPr lang="en-US" sz="2400" dirty="0" spc="0" kern="0">
@@ -4359,40 +4370,51 @@
                 <a:ea typeface="Be Vietnam Pro" pitchFamily="34" charset="-122"/>
                 <a:cs typeface="Be Vietnam Pro" pitchFamily="34" charset="-120"/>
               </a:rPr>
+              <a:t> nối</a:t>
+            </a:r>
+            <a:r>
+              <a:rPr lang="en-US" sz="2400" dirty="0" spc="1" kern="0">
+                <a:solidFill>
+                  <a:srgbClr val="14161C"/>
+                </a:solidFill>
+                <a:latin typeface="Be Vietnam Pro" pitchFamily="34" charset="0"/>
+                <a:ea typeface="Be Vietnam Pro" pitchFamily="34" charset="-122"/>
+                <a:cs typeface="Be Vietnam Pro" pitchFamily="34" charset="-120"/>
+              </a:rPr>
+              <a:t> nhau,</a:t>
+            </a:r>
+            <a:r>
+              <a:rPr lang="en-US" sz="2400" dirty="0" spc="0" kern="0">
+                <a:solidFill>
+                  <a:srgbClr val="14161C"/>
+                </a:solidFill>
+                <a:latin typeface="Be Vietnam Pro" pitchFamily="34" charset="0"/>
+                <a:ea typeface="Be Vietnam Pro" pitchFamily="34" charset="-122"/>
+                <a:cs typeface="Be Vietnam Pro" pitchFamily="34" charset="-120"/>
+              </a:rPr>
               <a:t> không</a:t>
             </a:r>
             <a:r>
-              <a:rPr lang="en-US" sz="2400" dirty="0" spc="1" kern="0">
-                <a:solidFill>
-                  <a:srgbClr val="14161C"/>
-                </a:solidFill>
-                <a:latin typeface="Be Vietnam Pro" pitchFamily="34" charset="0"/>
-                <a:ea typeface="Be Vietnam Pro" pitchFamily="34" charset="-122"/>
-                <a:cs typeface="Be Vietnam Pro" pitchFamily="34" charset="-120"/>
-              </a:rPr>
-              <a:t> có</a:t>
-            </a:r>
-            <a:r>
-              <a:rPr lang="en-US" sz="2400" dirty="0" spc="-11" kern="0">
-                <a:solidFill>
-                  <a:srgbClr val="14161C"/>
-                </a:solidFill>
-                <a:latin typeface="Be Vietnam Pro" pitchFamily="34" charset="0"/>
-                <a:ea typeface="Be Vietnam Pro" pitchFamily="34" charset="-122"/>
-                <a:cs typeface="Be Vietnam Pro" pitchFamily="34" charset="-120"/>
-              </a:rPr>
-              <a:t> tác</a:t>
-            </a:r>
-            <a:r>
-              <a:rPr lang="en-US" sz="2400" dirty="0" spc="3" kern="0">
-                <a:solidFill>
-                  <a:srgbClr val="14161C"/>
-                </a:solidFill>
-                <a:latin typeface="Be Vietnam Pro" pitchFamily="34" charset="0"/>
-                <a:ea typeface="Be Vietnam Pro" pitchFamily="34" charset="-122"/>
-                <a:cs typeface="Be Vietnam Pro" pitchFamily="34" charset="-120"/>
-              </a:rPr>
-              <a:t> dụng phụ</a:t>
+              <a:rPr lang="en-US" sz="2400" dirty="0" spc="13" kern="0">
+                <a:solidFill>
+                  <a:srgbClr val="14161C"/>
+                </a:solidFill>
+                <a:latin typeface="Be Vietnam Pro" pitchFamily="34" charset="0"/>
+                <a:ea typeface="Be Vietnam Pro" pitchFamily="34" charset="-122"/>
+                <a:cs typeface="Be Vietnam Pro" pitchFamily="34" charset="-120"/>
+              </a:rPr>
+              <a:t> đổi</a:t>
+            </a:r>
+            <a:r>
+              <a:rPr lang="en-US" sz="2400" dirty="0" spc="0" kern="0">
+                <a:solidFill>
+                  <a:srgbClr val="14161C"/>
+                </a:solidFill>
+                <a:latin typeface="Be Vietnam Pro" pitchFamily="34" charset="0"/>
+                <a:ea typeface="Be Vietnam Pro" pitchFamily="34" charset="-122"/>
+                <a:cs typeface="Be Vietnam Pro" pitchFamily="34" charset="-120"/>
+              </a:rPr>
+              <a:t> biến</a:t>
             </a:r>
             <a:endParaRPr lang="en-US" sz="2400" dirty="0"/>
           </a:p>
@@ -4553,26 +4575,26 @@
               <a:buNone/>
             </a:pPr>
             <a:r>
-              <a:rPr lang="en-US" sz="2250" b="1" dirty="0" spc="-5" kern="0">
-                <a:solidFill>
-                  <a:srgbClr val="F3EEE3"/>
-                </a:solidFill>
-                <a:latin typeface="Be Vietnam Pro" pitchFamily="34" charset="0"/>
-                <a:ea typeface="Be Vietnam Pro" pitchFamily="34" charset="-122"/>
-                <a:cs typeface="Be Vietnam Pro" pitchFamily="34" charset="-120"/>
-              </a:rPr>
-              <a:t>4</a:t>
-            </a:r>
-            <a:r>
-              <a:rPr lang="en-US" sz="2250" b="1" dirty="0" spc="5" kern="0">
-                <a:solidFill>
-                  <a:srgbClr val="F3EEE3"/>
-                </a:solidFill>
-                <a:latin typeface="Be Vietnam Pro" pitchFamily="34" charset="0"/>
-                <a:ea typeface="Be Vietnam Pro" pitchFamily="34" charset="-122"/>
-                <a:cs typeface="Be Vietnam Pro" pitchFamily="34" charset="-120"/>
-              </a:rPr>
-              <a:t> ý</a:t>
+              <a:rPr lang="en-US" sz="2250" b="1" dirty="0" spc="4" kern="0">
+                <a:solidFill>
+                  <a:srgbClr val="F3EEE3"/>
+                </a:solidFill>
+                <a:latin typeface="Be Vietnam Pro" pitchFamily="34" charset="0"/>
+                <a:ea typeface="Be Vietnam Pro" pitchFamily="34" charset="-122"/>
+                <a:cs typeface="Be Vietnam Pro" pitchFamily="34" charset="-120"/>
+              </a:rPr>
+              <a:t>=</a:t>
+            </a:r>
+            <a:r>
+              <a:rPr lang="en-US" sz="2250" b="1" dirty="0" spc="1" kern="0">
+                <a:solidFill>
+                  <a:srgbClr val="F3EEE3"/>
+                </a:solidFill>
+                <a:latin typeface="Be Vietnam Pro" pitchFamily="34" charset="0"/>
+                <a:ea typeface="Be Vietnam Pro" pitchFamily="34" charset="-122"/>
+                <a:cs typeface="Be Vietnam Pro" pitchFamily="34" charset="-120"/>
+              </a:rPr>
+              <a:t> 56</a:t>
             </a:r>
             <a:endParaRPr lang="en-US" sz="2250" dirty="0"/>
           </a:p>
@@ -4606,15 +4628,70 @@
               <a:buNone/>
             </a:pPr>
             <a:r>
-              <a:rPr lang="en-US" sz="2400" dirty="0" spc="26" kern="0">
-                <a:solidFill>
-                  <a:srgbClr val="14161C"/>
-                </a:solidFill>
-                <a:latin typeface="Be Vietnam Pro" pitchFamily="34" charset="0"/>
-                <a:ea typeface="Be Vietnam Pro" pitchFamily="34" charset="-122"/>
-                <a:cs typeface="Be Vietnam Pro" pitchFamily="34" charset="-120"/>
-              </a:rPr>
-              <a:t>Dựng</a:t>
+              <a:rPr lang="en-US" sz="2400" dirty="0" spc="-7" kern="0">
+                <a:solidFill>
+                  <a:srgbClr val="14161C"/>
+                </a:solidFill>
+                <a:latin typeface="Be Vietnam Pro" pitchFamily="34" charset="0"/>
+                <a:ea typeface="Be Vietnam Pro" pitchFamily="34" charset="-122"/>
+                <a:cs typeface="Be Vietnam Pro" pitchFamily="34" charset="-120"/>
+              </a:rPr>
+              <a:t>Một</a:t>
+            </a:r>
+            <a:r>
+              <a:rPr lang="en-US" sz="2400" dirty="0" spc="12" kern="0">
+                <a:solidFill>
+                  <a:srgbClr val="14161C"/>
+                </a:solidFill>
+                <a:latin typeface="Be Vietnam Pro" pitchFamily="34" charset="0"/>
+                <a:ea typeface="Be Vietnam Pro" pitchFamily="34" charset="-122"/>
+                <a:cs typeface="Be Vietnam Pro" pitchFamily="34" charset="-120"/>
+              </a:rPr>
+              <a:t> đối</a:t>
+            </a:r>
+            <a:r>
+              <a:rPr lang="en-US" sz="2400" dirty="0" spc="7" kern="0">
+                <a:solidFill>
+                  <a:srgbClr val="14161C"/>
+                </a:solidFill>
+                <a:latin typeface="Be Vietnam Pro" pitchFamily="34" charset="0"/>
+                <a:ea typeface="Be Vietnam Pro" pitchFamily="34" charset="-122"/>
+                <a:cs typeface="Be Vietnam Pro" pitchFamily="34" charset="-120"/>
+              </a:rPr>
+              <a:t> tượng</a:t>
+            </a:r>
+            <a:r>
+              <a:rPr lang="en-US" sz="2400" dirty="0" spc="3" kern="0">
+                <a:solidFill>
+                  <a:srgbClr val="14161C"/>
+                </a:solidFill>
+                <a:latin typeface="Be Vietnam Pro" pitchFamily="34" charset="0"/>
+                <a:ea typeface="Be Vietnam Pro" pitchFamily="34" charset="-122"/>
+                <a:cs typeface="Be Vietnam Pro" pitchFamily="34" charset="-120"/>
+              </a:rPr>
+              <a:t> giữ</a:t>
+            </a:r>
+            <a:r>
+              <a:rPr lang="en-US" sz="2400" dirty="0" spc="-18" kern="0">
+                <a:solidFill>
+                  <a:srgbClr val="14161C"/>
+                </a:solidFill>
+                <a:latin typeface="Be Vietnam Pro" pitchFamily="34" charset="0"/>
+                <a:ea typeface="Be Vietnam Pro" pitchFamily="34" charset="-122"/>
+                <a:cs typeface="Be Vietnam Pro" pitchFamily="34" charset="-120"/>
+              </a:rPr>
+              <a:t> total</a:t>
+            </a:r>
+            <a:r>
+              <a:rPr lang="en-US" sz="2400" dirty="0" spc="-15" kern="0">
+                <a:solidFill>
+                  <a:srgbClr val="14161C"/>
+                </a:solidFill>
+                <a:latin typeface="Be Vietnam Pro" pitchFamily="34" charset="0"/>
+                <a:ea typeface="Be Vietnam Pro" pitchFamily="34" charset="-122"/>
+                <a:cs typeface="Be Vietnam Pro" pitchFamily="34" charset="-120"/>
+              </a:rPr>
+              <a:t> và</a:t>
             </a:r>
             <a:r>
               <a:rPr lang="en-US" sz="2400" dirty="0" spc="6" kern="0">
@@ -4625,62 +4702,29 @@
                 <a:ea typeface="Be Vietnam Pro" pitchFamily="34" charset="-122"/>
                 <a:cs typeface="Be Vietnam Pro" pitchFamily="34" charset="-120"/>
               </a:rPr>
-              <a:t> chương</a:t>
-            </a:r>
-            <a:r>
-              <a:rPr lang="en-US" sz="2400" dirty="0" spc="9" kern="0">
-                <a:solidFill>
-                  <a:srgbClr val="14161C"/>
-                </a:solidFill>
-                <a:latin typeface="Be Vietnam Pro" pitchFamily="34" charset="0"/>
-                <a:ea typeface="Be Vietnam Pro" pitchFamily="34" charset="-122"/>
-                <a:cs typeface="Be Vietnam Pro" pitchFamily="34" charset="-120"/>
-              </a:rPr>
-              <a:t> trình</a:t>
-            </a:r>
-            <a:r>
-              <a:rPr lang="en-US" sz="2400" dirty="0" spc="2" kern="0">
-                <a:solidFill>
-                  <a:srgbClr val="14161C"/>
-                </a:solidFill>
-                <a:latin typeface="Be Vietnam Pro" pitchFamily="34" charset="0"/>
-                <a:ea typeface="Be Vietnam Pro" pitchFamily="34" charset="-122"/>
-                <a:cs typeface="Be Vietnam Pro" pitchFamily="34" charset="-120"/>
-              </a:rPr>
-              <a:t> từ</a:t>
-            </a:r>
-            <a:r>
-              <a:rPr lang="en-US" sz="2400" dirty="0" spc="0" kern="0">
-                <a:solidFill>
-                  <a:srgbClr val="14161C"/>
-                </a:solidFill>
-                <a:latin typeface="Be Vietnam Pro" pitchFamily="34" charset="0"/>
-                <a:ea typeface="Be Vietnam Pro" pitchFamily="34" charset="-122"/>
-                <a:cs typeface="Be Vietnam Pro" pitchFamily="34" charset="-120"/>
-              </a:rPr>
-              <a:t> các</a:t>
-            </a:r>
-            <a:r>
-              <a:rPr lang="en-US" sz="2400" dirty="0" spc="13" kern="0">
-                <a:solidFill>
-                  <a:srgbClr val="14161C"/>
-                </a:solidFill>
-                <a:latin typeface="Be Vietnam Pro" pitchFamily="34" charset="0"/>
-                <a:ea typeface="Be Vietnam Pro" pitchFamily="34" charset="-122"/>
-                <a:cs typeface="Be Vietnam Pro" pitchFamily="34" charset="-120"/>
-              </a:rPr>
-              <a:t> đối</a:t>
-            </a:r>
-            <a:r>
-              <a:rPr lang="en-US" sz="2400" dirty="0" spc="7" kern="0">
-                <a:solidFill>
-                  <a:srgbClr val="14161C"/>
-                </a:solidFill>
-                <a:latin typeface="Be Vietnam Pro" pitchFamily="34" charset="0"/>
-                <a:ea typeface="Be Vietnam Pro" pitchFamily="34" charset="-122"/>
-                <a:cs typeface="Be Vietnam Pro" pitchFamily="34" charset="-120"/>
-              </a:rPr>
-              <a:t> tượng</a:t>
+              <a:t> phương</a:t>
+            </a:r>
+            <a:r>
+              <a:rPr lang="en-US" sz="2400" dirty="0" spc="8" kern="0">
+                <a:solidFill>
+                  <a:srgbClr val="14161C"/>
+                </a:solidFill>
+                <a:latin typeface="Be Vietnam Pro" pitchFamily="34" charset="0"/>
+                <a:ea typeface="Be Vietnam Pro" pitchFamily="34" charset="-122"/>
+                <a:cs typeface="Be Vietnam Pro" pitchFamily="34" charset="-120"/>
+              </a:rPr>
+              <a:t> thức</a:t>
+            </a:r>
+            <a:r>
+              <a:rPr lang="en-US" sz="2400" dirty="0" spc="3" kern="0">
+                <a:solidFill>
+                  <a:srgbClr val="14161C"/>
+                </a:solidFill>
+                <a:latin typeface="Be Vietnam Pro" pitchFamily="34" charset="0"/>
+                <a:ea typeface="Be Vietnam Pro" pitchFamily="34" charset="-122"/>
+                <a:cs typeface="Be Vietnam Pro" pitchFamily="34" charset="-120"/>
+              </a:rPr>
+              <a:t> add</a:t>
             </a:r>
             <a:endParaRPr lang="en-US" sz="2400" dirty="0"/>
           </a:p>
@@ -5018,7 +5062,7 @@
       </p:sp>
       <p:sp>
         <p:nvSpPr>
-          <p:cNvPr id="33" name="Text richtext-1792338596118-681164309"/>
+          <p:cNvPr id="33" name="Text 31"/>
           <p:cNvSpPr/>
           <p:nvPr/>
         </p:nvSpPr>
@@ -5037,38 +5081,80 @@
           <a:bodyPr wrap="square" lIns="0" tIns="13764" rIns="0" bIns="-13764" rtlCol="0" anchor="t"/>
           <a:lstStyle/>
           <a:p>
-            <a:pPr algn="l" marL="323850" indent="-231371">
+            <a:pPr algn="l" indent="0" marL="0">
               <a:lnSpc>
                 <a:spcPts val="3315"/>
               </a:lnSpc>
               <a:spcAft>
                 <a:spcPts val="1050"/>
               </a:spcAft>
-              <a:buSzPct val="100000"/>
-              <a:buFont typeface="Arial"/>
-              <a:buChar char="•"/>
+              <a:buNone/>
             </a:pPr>
             <a:r>
-              <a:rPr lang="en-US" sz="2550" dirty="0" spc="3" kern="0">
-                <a:solidFill>
-                  <a:srgbClr val="14161C"/>
-                </a:solidFill>
-                <a:latin typeface="Be Vietnam Pro" pitchFamily="34" charset="0"/>
-                <a:ea typeface="Be Vietnam Pro" pitchFamily="34" charset="-122"/>
-                <a:cs typeface="Be Vietnam Pro" pitchFamily="34" charset="-120"/>
-              </a:rPr>
-              <a:t>Nắm</a:t>
-            </a:r>
-            <a:r>
-              <a:rPr lang="en-US" sz="2550" dirty="0" spc="-4" kern="0">
-                <a:solidFill>
-                  <a:srgbClr val="14161C"/>
-                </a:solidFill>
-                <a:latin typeface="Be Vietnam Pro" pitchFamily="34" charset="0"/>
-                <a:ea typeface="Be Vietnam Pro" pitchFamily="34" charset="-122"/>
-                <a:cs typeface="Be Vietnam Pro" pitchFamily="34" charset="-120"/>
-              </a:rPr>
-              <a:t> bốn</a:t>
+              <a:rPr lang="en-US" sz="2550" dirty="0" spc="-5" kern="0">
+                <a:solidFill>
+                  <a:srgbClr val="14161C"/>
+                </a:solidFill>
+                <a:latin typeface="Be Vietnam Pro" pitchFamily="34" charset="0"/>
+                <a:ea typeface="Be Vietnam Pro" pitchFamily="34" charset="-122"/>
+                <a:cs typeface="Be Vietnam Pro" pitchFamily="34" charset="-120"/>
+              </a:rPr>
+              <a:t>Viết</a:t>
+            </a:r>
+            <a:r>
+              <a:rPr lang="en-US" sz="2550" dirty="0" spc="-3" kern="0">
+                <a:solidFill>
+                  <a:srgbClr val="14161C"/>
+                </a:solidFill>
+                <a:latin typeface="Be Vietnam Pro" pitchFamily="34" charset="0"/>
+                <a:ea typeface="Be Vietnam Pro" pitchFamily="34" charset="-122"/>
+                <a:cs typeface="Be Vietnam Pro" pitchFamily="34" charset="-120"/>
+              </a:rPr>
+              <a:t> bài</a:t>
+            </a:r>
+            <a:r>
+              <a:rPr lang="en-US" sz="2550" dirty="0" spc="-12" kern="0">
+                <a:solidFill>
+                  <a:srgbClr val="14161C"/>
+                </a:solidFill>
+                <a:latin typeface="Be Vietnam Pro" pitchFamily="34" charset="0"/>
+                <a:ea typeface="Be Vietnam Pro" pitchFamily="34" charset="-122"/>
+                <a:cs typeface="Be Vietnam Pro" pitchFamily="34" charset="-120"/>
+              </a:rPr>
+              <a:t> toán</a:t>
+            </a:r>
+            <a:r>
+              <a:rPr lang="en-US" sz="2550" dirty="0" spc="-2" kern="0">
+                <a:solidFill>
+                  <a:srgbClr val="14161C"/>
+                </a:solidFill>
+                <a:latin typeface="Be Vietnam Pro" pitchFamily="34" charset="0"/>
+                <a:ea typeface="Be Vietnam Pro" pitchFamily="34" charset="-122"/>
+                <a:cs typeface="Be Vietnam Pro" pitchFamily="34" charset="-120"/>
+              </a:rPr>
+              <a:t> theo</a:t>
+            </a:r>
+            <a:r>
+              <a:rPr lang="en-US" sz="2550" dirty="0" spc="-5" kern="0">
+                <a:solidFill>
+                  <a:srgbClr val="14161C"/>
+                </a:solidFill>
+                <a:latin typeface="Be Vietnam Pro" pitchFamily="34" charset="0"/>
+                <a:ea typeface="Be Vietnam Pro" pitchFamily="34" charset="-122"/>
+                <a:cs typeface="Be Vietnam Pro" pitchFamily="34" charset="-120"/>
+              </a:rPr>
+              <a:t> ba</a:t>
+            </a:r>
+            <a:r>
+              <a:rPr lang="en-US" sz="2550" dirty="0" spc="1" kern="0">
+                <a:solidFill>
+                  <a:srgbClr val="14161C"/>
+                </a:solidFill>
+                <a:latin typeface="Be Vietnam Pro" pitchFamily="34" charset="0"/>
+                <a:ea typeface="Be Vietnam Pro" pitchFamily="34" charset="-122"/>
+                <a:cs typeface="Be Vietnam Pro" pitchFamily="34" charset="-120"/>
+              </a:rPr>
+              <a:t> mô</a:t>
             </a:r>
             <a:r>
               <a:rPr lang="en-US" sz="2550" dirty="0" spc="0" kern="0">
@@ -5079,65 +5165,19 @@
                 <a:ea typeface="Be Vietnam Pro" pitchFamily="34" charset="-122"/>
                 <a:cs typeface="Be Vietnam Pro" pitchFamily="34" charset="-120"/>
               </a:rPr>
-              <a:t> ý</a:t>
-            </a:r>
-            <a:r>
-              <a:rPr lang="en-US" sz="2550" dirty="0" spc="-2" kern="0">
-                <a:solidFill>
-                  <a:srgbClr val="14161C"/>
-                </a:solidFill>
-                <a:latin typeface="Be Vietnam Pro" pitchFamily="34" charset="0"/>
-                <a:ea typeface="Be Vietnam Pro" pitchFamily="34" charset="-122"/>
-                <a:cs typeface="Be Vietnam Pro" pitchFamily="34" charset="-120"/>
-              </a:rPr>
-              <a:t> của</a:t>
-            </a:r>
-            <a:r>
-              <a:rPr lang="en-US" sz="2550" dirty="0" spc="20" kern="0">
-                <a:solidFill>
-                  <a:srgbClr val="14161C"/>
-                </a:solidFill>
-                <a:latin typeface="Be Vietnam Pro" pitchFamily="34" charset="0"/>
-                <a:ea typeface="Be Vietnam Pro" pitchFamily="34" charset="-122"/>
-                <a:cs typeface="Be Vietnam Pro" pitchFamily="34" charset="-120"/>
-              </a:rPr>
-              <a:t> từng</a:t>
-            </a:r>
-            <a:r>
-              <a:rPr lang="en-US" sz="2550" dirty="0" spc="1" kern="0">
-                <a:solidFill>
-                  <a:srgbClr val="14161C"/>
-                </a:solidFill>
-                <a:latin typeface="Be Vietnam Pro" pitchFamily="34" charset="0"/>
-                <a:ea typeface="Be Vietnam Pro" pitchFamily="34" charset="-122"/>
-                <a:cs typeface="Be Vietnam Pro" pitchFamily="34" charset="-120"/>
-              </a:rPr>
-              <a:t> mô</a:t>
-            </a:r>
-            <a:r>
-              <a:rPr lang="en-US" sz="2550" dirty="0" spc="0" kern="0">
-                <a:solidFill>
-                  <a:srgbClr val="14161C"/>
-                </a:solidFill>
-                <a:latin typeface="Be Vietnam Pro" pitchFamily="34" charset="0"/>
-                <a:ea typeface="Be Vietnam Pro" pitchFamily="34" charset="-122"/>
-                <a:cs typeface="Be Vietnam Pro" pitchFamily="34" charset="-120"/>
-              </a:rPr>
               <a:t> hình</a:t>
             </a:r>
             <a:endParaRPr lang="en-US" sz="2550" dirty="0"/>
           </a:p>
           <a:p>
-            <a:pPr algn="l" marL="323850" indent="-231371">
+            <a:pPr algn="l" indent="0" marL="0">
               <a:lnSpc>
                 <a:spcPts val="3315"/>
               </a:lnSpc>
               <a:spcAft>
                 <a:spcPts val="1050"/>
               </a:spcAft>
-              <a:buSzPct val="100000"/>
-              <a:buFont typeface="Arial"/>
-              <a:buChar char="•"/>
+              <a:buNone/>
             </a:pPr>
             <a:r>
               <a:rPr lang="en-US" sz="2550" dirty="0" spc="-2" kern="0">
@@ -5208,13 +5248,11 @@
             <a:endParaRPr lang="en-US" sz="2550" dirty="0"/>
           </a:p>
           <a:p>
-            <a:pPr algn="l" marL="323850" indent="-231371">
+            <a:pPr algn="l" indent="0" marL="0">
               <a:lnSpc>
                 <a:spcPts val="3315"/>
               </a:lnSpc>
-              <a:buSzPct val="100000"/>
-              <a:buFont typeface="Arial"/>
-              <a:buChar char="•"/>
+              <a:buNone/>
             </a:pPr>
             <a:r>
               <a:rPr lang="en-US" sz="2550" dirty="0" spc="-4" kern="0">
@@ -5620,15 +5658,26 @@
               <a:buNone/>
             </a:pPr>
             <a:r>
-              <a:rPr lang="en-US" sz="2700" dirty="0" spc="0" kern="0">
-                <a:solidFill>
-                  <a:srgbClr val="F3EEE3"/>
-                </a:solidFill>
-                <a:latin typeface="Be Vietnam Pro" pitchFamily="34" charset="0"/>
-                <a:ea typeface="Be Vietnam Pro" pitchFamily="34" charset="-122"/>
-                <a:cs typeface="Be Vietnam Pro" pitchFamily="34" charset="-120"/>
-              </a:rPr>
-              <a:t>Mô</a:t>
+              <a:rPr lang="en-US" sz="2700" dirty="0" spc="-1" kern="0">
+                <a:solidFill>
+                  <a:srgbClr val="F3EEE3"/>
+                </a:solidFill>
+                <a:latin typeface="Be Vietnam Pro" pitchFamily="34" charset="0"/>
+                <a:ea typeface="Be Vietnam Pro" pitchFamily="34" charset="-122"/>
+                <a:cs typeface="Be Vietnam Pro" pitchFamily="34" charset="-120"/>
+              </a:rPr>
+              <a:t>Danh</a:t>
+            </a:r>
+            <a:r>
+              <a:rPr lang="en-US" sz="2700" dirty="0" spc="-6" kern="0">
+                <a:solidFill>
+                  <a:srgbClr val="F3EEE3"/>
+                </a:solidFill>
+                <a:latin typeface="Be Vietnam Pro" pitchFamily="34" charset="0"/>
+                <a:ea typeface="Be Vietnam Pro" pitchFamily="34" charset="-122"/>
+                <a:cs typeface="Be Vietnam Pro" pitchFamily="34" charset="-120"/>
+              </a:rPr>
+              <a:t> sách</a:t>
             </a:r>
             <a:r>
               <a:rPr lang="en-US" sz="2700" dirty="0" spc="-3" kern="0">
@@ -5639,18 +5688,40 @@
                 <a:ea typeface="Be Vietnam Pro" pitchFamily="34" charset="-122"/>
                 <a:cs typeface="Be Vietnam Pro" pitchFamily="34" charset="-120"/>
               </a:rPr>
-              <a:t> hình</a:t>
-            </a:r>
-            <a:r>
-              <a:rPr lang="en-US" sz="2700" dirty="0" spc="-2" kern="0">
-                <a:solidFill>
-                  <a:srgbClr val="F3EEE3"/>
-                </a:solidFill>
-                <a:latin typeface="Be Vietnam Pro" pitchFamily="34" charset="0"/>
-                <a:ea typeface="Be Vietnam Pro" pitchFamily="34" charset="-122"/>
-                <a:cs typeface="Be Vietnam Pro" pitchFamily="34" charset="-120"/>
-              </a:rPr>
-              <a:t> mệnh</a:t>
+              <a:t> lệnh</a:t>
+            </a:r>
+            <a:r>
+              <a:rPr lang="en-US" sz="2700" dirty="0" spc="-5" kern="0">
+                <a:solidFill>
+                  <a:srgbClr val="F3EEE3"/>
+                </a:solidFill>
+                <a:latin typeface="Be Vietnam Pro" pitchFamily="34" charset="0"/>
+                <a:ea typeface="Be Vietnam Pro" pitchFamily="34" charset="-122"/>
+                <a:cs typeface="Be Vietnam Pro" pitchFamily="34" charset="-120"/>
+              </a:rPr>
+              <a:t> bảo</a:t>
+            </a:r>
+            <a:r>
+              <a:rPr lang="en-US" sz="2700" dirty="0" spc="-12" kern="0">
+                <a:solidFill>
+                  <a:srgbClr val="F3EEE3"/>
+                </a:solidFill>
+                <a:latin typeface="Be Vietnam Pro" pitchFamily="34" charset="0"/>
+                <a:ea typeface="Be Vietnam Pro" pitchFamily="34" charset="-122"/>
+                <a:cs typeface="Be Vietnam Pro" pitchFamily="34" charset="-120"/>
+              </a:rPr>
+              <a:t> máy</a:t>
+            </a:r>
+            <a:r>
+              <a:rPr lang="en-US" sz="2700" dirty="0" spc="-1" kern="0">
+                <a:solidFill>
+                  <a:srgbClr val="F3EEE3"/>
+                </a:solidFill>
+                <a:latin typeface="Be Vietnam Pro" pitchFamily="34" charset="0"/>
+                <a:ea typeface="Be Vietnam Pro" pitchFamily="34" charset="-122"/>
+                <a:cs typeface="Be Vietnam Pro" pitchFamily="34" charset="-120"/>
+              </a:rPr>
+              <a:t> làm</a:t>
             </a:r>
             <a:r>
               <a:rPr lang="en-US" sz="2700" dirty="0" spc="-3" kern="0">
@@ -5661,73 +5732,7 @@
                 <a:ea typeface="Be Vietnam Pro" pitchFamily="34" charset="-122"/>
                 <a:cs typeface="Be Vietnam Pro" pitchFamily="34" charset="-120"/>
               </a:rPr>
-              <a:t> lệnh nhìn</a:t>
-            </a:r>
-            <a:r>
-              <a:rPr lang="en-US" sz="2700" dirty="0" spc="5" kern="0">
-                <a:solidFill>
-                  <a:srgbClr val="F3EEE3"/>
-                </a:solidFill>
-                <a:latin typeface="Be Vietnam Pro" pitchFamily="34" charset="0"/>
-                <a:ea typeface="Be Vietnam Pro" pitchFamily="34" charset="-122"/>
-                <a:cs typeface="Be Vietnam Pro" pitchFamily="34" charset="-120"/>
-              </a:rPr>
-              <a:t> chương</a:t>
-            </a:r>
-            <a:r>
-              <a:rPr lang="en-US" sz="2700" dirty="0" spc="8" kern="0">
-                <a:solidFill>
-                  <a:srgbClr val="F3EEE3"/>
-                </a:solidFill>
-                <a:latin typeface="Be Vietnam Pro" pitchFamily="34" charset="0"/>
-                <a:ea typeface="Be Vietnam Pro" pitchFamily="34" charset="-122"/>
-                <a:cs typeface="Be Vietnam Pro" pitchFamily="34" charset="-120"/>
-              </a:rPr>
-              <a:t> trình</a:t>
-            </a:r>
-            <a:r>
-              <a:rPr lang="en-US" sz="2700" dirty="0" spc="-2" kern="0">
-                <a:solidFill>
-                  <a:srgbClr val="F3EEE3"/>
-                </a:solidFill>
-                <a:latin typeface="Be Vietnam Pro" pitchFamily="34" charset="0"/>
-                <a:ea typeface="Be Vietnam Pro" pitchFamily="34" charset="-122"/>
-                <a:cs typeface="Be Vietnam Pro" pitchFamily="34" charset="-120"/>
-              </a:rPr>
-              <a:t> là</a:t>
-            </a:r>
-            <a:r>
-              <a:rPr lang="en-US" sz="2700" dirty="0" spc="-7" kern="0">
-                <a:solidFill>
-                  <a:srgbClr val="F3EEE3"/>
-                </a:solidFill>
-                <a:latin typeface="Be Vietnam Pro" pitchFamily="34" charset="0"/>
-                <a:ea typeface="Be Vietnam Pro" pitchFamily="34" charset="-122"/>
-                <a:cs typeface="Be Vietnam Pro" pitchFamily="34" charset="-120"/>
-              </a:rPr>
-              <a:t> một</a:t>
-            </a:r>
-            <a:r>
-              <a:rPr lang="en-US" sz="2700" dirty="0" spc="0" kern="0">
-                <a:solidFill>
-                  <a:srgbClr val="F3EEE3"/>
-                </a:solidFill>
-                <a:latin typeface="Be Vietnam Pro" pitchFamily="34" charset="0"/>
-                <a:ea typeface="Be Vietnam Pro" pitchFamily="34" charset="-122"/>
-                <a:cs typeface="Be Vietnam Pro" pitchFamily="34" charset="-120"/>
-              </a:rPr>
-              <a:t> chuỗi</a:t>
-            </a:r>
-            <a:r>
-              <a:rPr lang="en-US" sz="2700" dirty="0" spc="-2" kern="0">
-                <a:solidFill>
-                  <a:srgbClr val="F3EEE3"/>
-                </a:solidFill>
-                <a:latin typeface="Be Vietnam Pro" pitchFamily="34" charset="0"/>
-                <a:ea typeface="Be Vietnam Pro" pitchFamily="34" charset="-122"/>
-                <a:cs typeface="Be Vietnam Pro" pitchFamily="34" charset="-120"/>
-              </a:rPr>
-              <a:t> lệnh.</a:t>
+              <a:t> gì.</a:t>
             </a:r>
             <a:endParaRPr lang="en-US" sz="2700" dirty="0"/>
           </a:p>
@@ -5805,15 +5810,15 @@
               <a:buNone/>
             </a:pPr>
             <a:r>
-              <a:rPr lang="en-US" sz="2250" b="1" dirty="0" spc="-4" kern="0">
-                <a:solidFill>
-                  <a:srgbClr val="14161C"/>
-                </a:solidFill>
-                <a:latin typeface="Be Vietnam Pro" pitchFamily="34" charset="0"/>
-                <a:ea typeface="Be Vietnam Pro" pitchFamily="34" charset="-122"/>
-                <a:cs typeface="Be Vietnam Pro" pitchFamily="34" charset="-120"/>
-              </a:rPr>
-              <a:t>mutable</a:t>
+              <a:rPr lang="en-US" sz="2250" b="1" dirty="0" spc="-9" kern="0">
+                <a:solidFill>
+                  <a:srgbClr val="14161C"/>
+                </a:solidFill>
+                <a:latin typeface="Be Vietnam Pro" pitchFamily="34" charset="0"/>
+                <a:ea typeface="Be Vietnam Pro" pitchFamily="34" charset="-122"/>
+                <a:cs typeface="Be Vietnam Pro" pitchFamily="34" charset="-120"/>
+              </a:rPr>
+              <a:t>total</a:t>
             </a:r>
             <a:endParaRPr lang="en-US" sz="2250" dirty="0"/>
           </a:p>
@@ -5967,6 +5972,61 @@
               <a:buNone/>
             </a:pPr>
             <a:r>
+              <a:rPr lang="en-US" sz="2550" dirty="0" spc="1" kern="0">
+                <a:solidFill>
+                  <a:srgbClr val="F3EEE3"/>
+                </a:solidFill>
+                <a:latin typeface="Be Vietnam Pro" pitchFamily="34" charset="0"/>
+                <a:ea typeface="Be Vietnam Pro" pitchFamily="34" charset="-122"/>
+                <a:cs typeface="Be Vietnam Pro" pitchFamily="34" charset="-120"/>
+              </a:rPr>
+              <a:t>Biến</a:t>
+            </a:r>
+            <a:r>
+              <a:rPr lang="en-US" sz="2550" dirty="0" spc="-20" kern="0">
+                <a:solidFill>
+                  <a:srgbClr val="F3EEE3"/>
+                </a:solidFill>
+                <a:latin typeface="Be Vietnam Pro" pitchFamily="34" charset="0"/>
+                <a:ea typeface="Be Vietnam Pro" pitchFamily="34" charset="-122"/>
+                <a:cs typeface="Be Vietnam Pro" pitchFamily="34" charset="-120"/>
+              </a:rPr>
+              <a:t> total</a:t>
+            </a:r>
+            <a:r>
+              <a:rPr lang="en-US" sz="2550" dirty="0" spc="12" kern="0">
+                <a:solidFill>
+                  <a:srgbClr val="F3EEE3"/>
+                </a:solidFill>
+                <a:latin typeface="Be Vietnam Pro" pitchFamily="34" charset="0"/>
+                <a:ea typeface="Be Vietnam Pro" pitchFamily="34" charset="-122"/>
+                <a:cs typeface="Be Vietnam Pro" pitchFamily="34" charset="-120"/>
+              </a:rPr>
+              <a:t> đổi</a:t>
+            </a:r>
+            <a:r>
+              <a:rPr lang="en-US" sz="2550" dirty="0" spc="1" kern="0">
+                <a:solidFill>
+                  <a:srgbClr val="F3EEE3"/>
+                </a:solidFill>
+                <a:latin typeface="Be Vietnam Pro" pitchFamily="34" charset="0"/>
+                <a:ea typeface="Be Vietnam Pro" pitchFamily="34" charset="-122"/>
+                <a:cs typeface="Be Vietnam Pro" pitchFamily="34" charset="-120"/>
+              </a:rPr>
+              <a:t> giá</a:t>
+            </a:r>
+            <a:r>
+              <a:rPr lang="en-US" sz="2550" dirty="0" spc="14" kern="0">
+                <a:solidFill>
+                  <a:srgbClr val="F3EEE3"/>
+                </a:solidFill>
+                <a:latin typeface="Be Vietnam Pro" pitchFamily="34" charset="0"/>
+                <a:ea typeface="Be Vietnam Pro" pitchFamily="34" charset="-122"/>
+                <a:cs typeface="Be Vietnam Pro" pitchFamily="34" charset="-120"/>
+              </a:rPr>
+              <a:t> trị</a:t>
+            </a:r>
+            <a:r>
               <a:rPr lang="en-US" sz="2550" dirty="0" spc="-6" kern="0">
                 <a:solidFill>
                   <a:srgbClr val="F3EEE3"/>
@@ -5975,84 +6035,7 @@
                 <a:ea typeface="Be Vietnam Pro" pitchFamily="34" charset="-122"/>
                 <a:cs typeface="Be Vietnam Pro" pitchFamily="34" charset="-120"/>
               </a:rPr>
-              <a:t>Dữ</a:t>
-            </a:r>
-            <a:r>
-              <a:rPr lang="en-US" sz="2550" dirty="0" spc="1" kern="0">
-                <a:solidFill>
-                  <a:srgbClr val="F3EEE3"/>
-                </a:solidFill>
-                <a:latin typeface="Be Vietnam Pro" pitchFamily="34" charset="0"/>
-                <a:ea typeface="Be Vietnam Pro" pitchFamily="34" charset="-122"/>
-                <a:cs typeface="Be Vietnam Pro" pitchFamily="34" charset="-120"/>
-              </a:rPr>
-              <a:t> liệu</a:t>
-            </a:r>
-            <a:r>
-              <a:rPr lang="en-US" sz="2550" dirty="0" spc="-7" kern="0">
-                <a:solidFill>
-                  <a:srgbClr val="F3EEE3"/>
-                </a:solidFill>
-                <a:latin typeface="Be Vietnam Pro" pitchFamily="34" charset="0"/>
-                <a:ea typeface="Be Vietnam Pro" pitchFamily="34" charset="-122"/>
-                <a:cs typeface="Be Vietnam Pro" pitchFamily="34" charset="-120"/>
-              </a:rPr>
-              <a:t> thay</a:t>
-            </a:r>
-            <a:r>
-              <a:rPr lang="en-US" sz="2550" dirty="0" spc="12" kern="0">
-                <a:solidFill>
-                  <a:srgbClr val="F3EEE3"/>
-                </a:solidFill>
-                <a:latin typeface="Be Vietnam Pro" pitchFamily="34" charset="0"/>
-                <a:ea typeface="Be Vietnam Pro" pitchFamily="34" charset="-122"/>
-                <a:cs typeface="Be Vietnam Pro" pitchFamily="34" charset="-120"/>
-              </a:rPr>
-              <a:t> đổi</a:t>
-            </a:r>
-            <a:r>
-              <a:rPr lang="en-US" sz="2550" dirty="0" spc="6" kern="0">
-                <a:solidFill>
-                  <a:srgbClr val="F3EEE3"/>
-                </a:solidFill>
-                <a:latin typeface="Be Vietnam Pro" pitchFamily="34" charset="0"/>
-                <a:ea typeface="Be Vietnam Pro" pitchFamily="34" charset="-122"/>
-                <a:cs typeface="Be Vietnam Pro" pitchFamily="34" charset="-120"/>
-              </a:rPr>
-              <a:t> được</a:t>
-            </a:r>
-            <a:r>
-              <a:rPr lang="en-US" sz="2550" dirty="0" spc="-18" kern="0">
-                <a:solidFill>
-                  <a:srgbClr val="F3EEE3"/>
-                </a:solidFill>
-                <a:latin typeface="Be Vietnam Pro" pitchFamily="34" charset="0"/>
-                <a:ea typeface="Be Vietnam Pro" pitchFamily="34" charset="-122"/>
-                <a:cs typeface="Be Vietnam Pro" pitchFamily="34" charset="-120"/>
-              </a:rPr>
-              <a:t> và</a:t>
-            </a:r>
-            <a:r>
-              <a:rPr lang="en-US" sz="2550" dirty="0" spc="1" kern="0">
-                <a:solidFill>
-                  <a:srgbClr val="F3EEE3"/>
-                </a:solidFill>
-                <a:latin typeface="Be Vietnam Pro" pitchFamily="34" charset="0"/>
-                <a:ea typeface="Be Vietnam Pro" pitchFamily="34" charset="-122"/>
-                <a:cs typeface="Be Vietnam Pro" pitchFamily="34" charset="-120"/>
-              </a:rPr>
-              <a:t> các</a:t>
-            </a:r>
-            <a:r>
-              <a:rPr lang="en-US" sz="2550" dirty="0" spc="6" kern="0">
-                <a:solidFill>
-                  <a:srgbClr val="F3EEE3"/>
-                </a:solidFill>
-                <a:latin typeface="Be Vietnam Pro" pitchFamily="34" charset="0"/>
-                <a:ea typeface="Be Vietnam Pro" pitchFamily="34" charset="-122"/>
-                <a:cs typeface="Be Vietnam Pro" pitchFamily="34" charset="-120"/>
-              </a:rPr>
-              <a:t> bước tường</a:t>
+              <a:t> sau</a:t>
             </a:r>
             <a:r>
               <a:rPr lang="en-US" sz="2550" dirty="0" spc="0" kern="0">
@@ -6063,29 +6046,29 @@
                 <a:ea typeface="Be Vietnam Pro" pitchFamily="34" charset="-122"/>
                 <a:cs typeface="Be Vietnam Pro" pitchFamily="34" charset="-120"/>
               </a:rPr>
-              <a:t> minh là</a:t>
-            </a:r>
-            <a:r>
-              <a:rPr lang="en-US" sz="2550" dirty="0" spc="21" kern="0">
-                <a:solidFill>
-                  <a:srgbClr val="F3EEE3"/>
-                </a:solidFill>
-                <a:latin typeface="Be Vietnam Pro" pitchFamily="34" charset="0"/>
-                <a:ea typeface="Be Vietnam Pro" pitchFamily="34" charset="-122"/>
-                <a:cs typeface="Be Vietnam Pro" pitchFamily="34" charset="-120"/>
-              </a:rPr>
-              <a:t> điểm</a:t>
-            </a:r>
-            <a:r>
-              <a:rPr lang="en-US" sz="2550" dirty="0" spc="0" kern="0">
-                <a:solidFill>
-                  <a:srgbClr val="F3EEE3"/>
-                </a:solidFill>
-                <a:latin typeface="Be Vietnam Pro" pitchFamily="34" charset="0"/>
-                <a:ea typeface="Be Vietnam Pro" pitchFamily="34" charset="-122"/>
-                <a:cs typeface="Be Vietnam Pro" pitchFamily="34" charset="-120"/>
-              </a:rPr>
-              <a:t> nhấn.</a:t>
+              <a:t> mỗi</a:t>
+            </a:r>
+            <a:r>
+              <a:rPr lang="en-US" sz="2550" dirty="0" spc="-12" kern="0">
+                <a:solidFill>
+                  <a:srgbClr val="F3EEE3"/>
+                </a:solidFill>
+                <a:latin typeface="Be Vietnam Pro" pitchFamily="34" charset="0"/>
+                <a:ea typeface="Be Vietnam Pro" pitchFamily="34" charset="-122"/>
+                <a:cs typeface="Be Vietnam Pro" pitchFamily="34" charset="-120"/>
+              </a:rPr>
+              <a:t> vòng</a:t>
+            </a:r>
+            <a:r>
+              <a:rPr lang="en-US" sz="2550" dirty="0" spc="2" kern="0">
+                <a:solidFill>
+                  <a:srgbClr val="F3EEE3"/>
+                </a:solidFill>
+                <a:latin typeface="Be Vietnam Pro" pitchFamily="34" charset="0"/>
+                <a:ea typeface="Be Vietnam Pro" pitchFamily="34" charset="-122"/>
+                <a:cs typeface="Be Vietnam Pro" pitchFamily="34" charset="-120"/>
+              </a:rPr>
+              <a:t> lặp.</a:t>
             </a:r>
             <a:endParaRPr lang="en-US" sz="2550" dirty="0"/>
           </a:p>
@@ -6208,7 +6191,7 @@
               <a:buNone/>
             </a:pPr>
             <a:r>
-              <a:rPr lang="en-US" sz="3000" dirty="0" spc="2" kern="0">
+              <a:rPr lang="en-US" sz="3000" dirty="0" spc="1" kern="0">
                 <a:solidFill>
                   <a:srgbClr val="7C93FF"/>
                 </a:solidFill>
@@ -6216,10 +6199,10 @@
                 <a:ea typeface="Bricolage Grotesque ExtraBold" pitchFamily="34" charset="-122"/>
                 <a:cs typeface="Bricolage Grotesque ExtraBold" pitchFamily="34" charset="-120"/>
               </a:rPr>
-              <a:t>Chuỗi</a:t>
-            </a:r>
-            <a:r>
-              <a:rPr lang="en-US" sz="3000" dirty="0" spc="0" kern="0">
+              <a:t>Biến</a:t>
+            </a:r>
+            <a:r>
+              <a:rPr lang="en-US" sz="3000" dirty="0" spc="-12" kern="0">
                 <a:solidFill>
                   <a:srgbClr val="7C93FF"/>
                 </a:solidFill>
@@ -6227,7 +6210,7 @@
                 <a:ea typeface="Bricolage Grotesque ExtraBold" pitchFamily="34" charset="-122"/>
                 <a:cs typeface="Bricolage Grotesque ExtraBold" pitchFamily="34" charset="-120"/>
               </a:rPr>
-              <a:t> lệnh</a:t>
+              <a:t> total</a:t>
             </a:r>
             <a:endParaRPr lang="en-US" sz="3000" dirty="0"/>
           </a:p>
@@ -6261,6 +6244,39 @@
               <a:buNone/>
             </a:pPr>
             <a:r>
+              <a:rPr lang="en-US" sz="2250" dirty="0" spc="-15" kern="0">
+                <a:solidFill>
+                  <a:srgbClr val="F3EEE3"/>
+                </a:solidFill>
+                <a:latin typeface="Be Vietnam Pro" pitchFamily="34" charset="0"/>
+                <a:ea typeface="Be Vietnam Pro" pitchFamily="34" charset="-122"/>
+                <a:cs typeface="Be Vietnam Pro" pitchFamily="34" charset="-120"/>
+              </a:rPr>
+              <a:t>Bắt</a:t>
+            </a:r>
+            <a:r>
+              <a:rPr lang="en-US" sz="2250" dirty="0" spc="11" kern="0">
+                <a:solidFill>
+                  <a:srgbClr val="F3EEE3"/>
+                </a:solidFill>
+                <a:latin typeface="Be Vietnam Pro" pitchFamily="34" charset="0"/>
+                <a:ea typeface="Be Vietnam Pro" pitchFamily="34" charset="-122"/>
+                <a:cs typeface="Be Vietnam Pro" pitchFamily="34" charset="-120"/>
+              </a:rPr>
+              <a:t> đầu</a:t>
+            </a:r>
+            <a:r>
+              <a:rPr lang="en-US" sz="2250" dirty="0" spc="-2" kern="0">
+                <a:solidFill>
+                  <a:srgbClr val="F3EEE3"/>
+                </a:solidFill>
+                <a:latin typeface="Be Vietnam Pro" pitchFamily="34" charset="0"/>
+                <a:ea typeface="Be Vietnam Pro" pitchFamily="34" charset="-122"/>
+                <a:cs typeface="Be Vietnam Pro" pitchFamily="34" charset="-120"/>
+              </a:rPr>
+              <a:t> bằng</a:t>
+            </a:r>
+            <a:r>
               <a:rPr lang="en-US" sz="2250" dirty="0" spc="-1" kern="0">
                 <a:solidFill>
                   <a:srgbClr val="F3EEE3"/>
@@ -6269,51 +6285,29 @@
                 <a:ea typeface="Be Vietnam Pro" pitchFamily="34" charset="-122"/>
                 <a:cs typeface="Be Vietnam Pro" pitchFamily="34" charset="-120"/>
               </a:rPr>
-              <a:t>Đổi</a:t>
-            </a:r>
-            <a:r>
-              <a:rPr lang="en-US" sz="2250" dirty="0" spc="-16" kern="0">
-                <a:solidFill>
-                  <a:srgbClr val="F3EEE3"/>
-                </a:solidFill>
-                <a:latin typeface="Be Vietnam Pro" pitchFamily="34" charset="0"/>
-                <a:ea typeface="Be Vietnam Pro" pitchFamily="34" charset="-122"/>
-                <a:cs typeface="Be Vietnam Pro" pitchFamily="34" charset="-120"/>
-              </a:rPr>
-              <a:t> trạng</a:t>
-            </a:r>
-            <a:r>
-              <a:rPr lang="en-US" sz="2250" dirty="0" spc="-2" kern="0">
-                <a:solidFill>
-                  <a:srgbClr val="F3EEE3"/>
-                </a:solidFill>
-                <a:latin typeface="Be Vietnam Pro" pitchFamily="34" charset="0"/>
-                <a:ea typeface="Be Vietnam Pro" pitchFamily="34" charset="-122"/>
-                <a:cs typeface="Be Vietnam Pro" pitchFamily="34" charset="-120"/>
-              </a:rPr>
-              <a:t> thái</a:t>
-            </a:r>
-            <a:r>
-              <a:rPr lang="en-US" sz="2250" dirty="0" spc="5" kern="0">
-                <a:solidFill>
-                  <a:srgbClr val="F3EEE3"/>
-                </a:solidFill>
-                <a:latin typeface="Be Vietnam Pro" pitchFamily="34" charset="0"/>
-                <a:ea typeface="Be Vietnam Pro" pitchFamily="34" charset="-122"/>
-                <a:cs typeface="Be Vietnam Pro" pitchFamily="34" charset="-120"/>
-              </a:rPr>
-              <a:t> chương</a:t>
-            </a:r>
-            <a:r>
-              <a:rPr lang="en-US" sz="2250" dirty="0" spc="7" kern="0">
-                <a:solidFill>
-                  <a:srgbClr val="F3EEE3"/>
-                </a:solidFill>
-                <a:latin typeface="Be Vietnam Pro" pitchFamily="34" charset="0"/>
-                <a:ea typeface="Be Vietnam Pro" pitchFamily="34" charset="-122"/>
-                <a:cs typeface="Be Vietnam Pro" pitchFamily="34" charset="-120"/>
-              </a:rPr>
-              <a:t> trình</a:t>
+              <a:t> 0,</a:t>
+            </a:r>
+            <a:r>
+              <a:rPr lang="en-US" sz="2250" dirty="0" spc="12" kern="0">
+                <a:solidFill>
+                  <a:srgbClr val="F3EEE3"/>
+                </a:solidFill>
+                <a:latin typeface="Be Vietnam Pro" pitchFamily="34" charset="0"/>
+                <a:ea typeface="Be Vietnam Pro" pitchFamily="34" charset="-122"/>
+                <a:cs typeface="Be Vietnam Pro" pitchFamily="34" charset="-120"/>
+              </a:rPr>
+              <a:t> đổi</a:t>
+            </a:r>
+            <a:r>
+              <a:rPr lang="en-US" sz="2250" dirty="0" spc="-4" kern="0">
+                <a:solidFill>
+                  <a:srgbClr val="F3EEE3"/>
+                </a:solidFill>
+                <a:latin typeface="Be Vietnam Pro" pitchFamily="34" charset="0"/>
+                <a:ea typeface="Be Vietnam Pro" pitchFamily="34" charset="-122"/>
+                <a:cs typeface="Be Vietnam Pro" pitchFamily="34" charset="-120"/>
+              </a:rPr>
+              <a:t> sau</a:t>
             </a:r>
             <a:r>
               <a:rPr lang="en-US" sz="2250" dirty="0" spc="0" kern="0">
@@ -6324,40 +6318,18 @@
                 <a:ea typeface="Be Vietnam Pro" pitchFamily="34" charset="-122"/>
                 <a:cs typeface="Be Vietnam Pro" pitchFamily="34" charset="-120"/>
               </a:rPr>
-              <a:t> qua</a:t>
-            </a:r>
-            <a:r>
-              <a:rPr lang="en-US" sz="2250" dirty="0" spc="-4" kern="0">
-                <a:solidFill>
-                  <a:srgbClr val="F3EEE3"/>
-                </a:solidFill>
-                <a:latin typeface="Be Vietnam Pro" pitchFamily="34" charset="0"/>
-                <a:ea typeface="Be Vietnam Pro" pitchFamily="34" charset="-122"/>
-                <a:cs typeface="Be Vietnam Pro" pitchFamily="34" charset="-120"/>
-              </a:rPr>
-              <a:t> một</a:t>
-            </a:r>
-            <a:r>
-              <a:rPr lang="en-US" sz="2250" dirty="0" spc="1" kern="0">
-                <a:solidFill>
-                  <a:srgbClr val="F3EEE3"/>
-                </a:solidFill>
-                <a:latin typeface="Be Vietnam Pro" pitchFamily="34" charset="0"/>
-                <a:ea typeface="Be Vietnam Pro" pitchFamily="34" charset="-122"/>
-                <a:cs typeface="Be Vietnam Pro" pitchFamily="34" charset="-120"/>
-              </a:rPr>
-              <a:t> chuỗi</a:t>
-            </a:r>
-            <a:r>
-              <a:rPr lang="en-US" sz="2250" dirty="0" spc="0" kern="0">
-                <a:solidFill>
-                  <a:srgbClr val="F3EEE3"/>
-                </a:solidFill>
-                <a:latin typeface="Be Vietnam Pro" pitchFamily="34" charset="0"/>
-                <a:ea typeface="Be Vietnam Pro" pitchFamily="34" charset="-122"/>
-                <a:cs typeface="Be Vietnam Pro" pitchFamily="34" charset="-120"/>
-              </a:rPr>
-              <a:t> lệnh</a:t>
+              <a:t> mỗi</a:t>
+            </a:r>
+            <a:r>
+              <a:rPr lang="en-US" sz="2250" dirty="0" spc="-9" kern="0">
+                <a:solidFill>
+                  <a:srgbClr val="F3EEE3"/>
+                </a:solidFill>
+                <a:latin typeface="Be Vietnam Pro" pitchFamily="34" charset="0"/>
+                <a:ea typeface="Be Vietnam Pro" pitchFamily="34" charset="-122"/>
+                <a:cs typeface="Be Vietnam Pro" pitchFamily="34" charset="-120"/>
+              </a:rPr>
+              <a:t> vòng</a:t>
             </a:r>
             <a:endParaRPr lang="en-US" sz="2250" dirty="0"/>
           </a:p>
@@ -6453,7 +6425,7 @@
               <a:buNone/>
             </a:pPr>
             <a:r>
-              <a:rPr lang="en-US" sz="3000" dirty="0" spc="2" kern="0">
+              <a:rPr lang="en-US" sz="3000" dirty="0" spc="-48" kern="0">
                 <a:solidFill>
                   <a:srgbClr val="7C93FF"/>
                 </a:solidFill>
@@ -6461,10 +6433,10 @@
                 <a:ea typeface="Bricolage Grotesque ExtraBold" pitchFamily="34" charset="-122"/>
                 <a:cs typeface="Bricolage Grotesque ExtraBold" pitchFamily="34" charset="-120"/>
               </a:rPr>
-              <a:t>Cấu</a:t>
-            </a:r>
-            <a:r>
-              <a:rPr lang="en-US" sz="3000" dirty="0" spc="3" kern="0">
+              <a:t>Vòng</a:t>
+            </a:r>
+            <a:r>
+              <a:rPr lang="en-US" sz="3000" dirty="0" spc="-1" kern="0">
                 <a:solidFill>
                   <a:srgbClr val="7C93FF"/>
                 </a:solidFill>
@@ -6472,29 +6444,7 @@
                 <a:ea typeface="Bricolage Grotesque ExtraBold" pitchFamily="34" charset="-122"/>
                 <a:cs typeface="Bricolage Grotesque ExtraBold" pitchFamily="34" charset="-120"/>
               </a:rPr>
-              <a:t> trúc</a:t>
-            </a:r>
-            <a:r>
-              <a:rPr lang="en-US" sz="3000" dirty="0" spc="11" kern="0">
-                <a:solidFill>
-                  <a:srgbClr val="7C93FF"/>
-                </a:solidFill>
-                <a:latin typeface="Bricolage Grotesque ExtraBold" pitchFamily="34" charset="0"/>
-                <a:ea typeface="Bricolage Grotesque ExtraBold" pitchFamily="34" charset="-122"/>
-                <a:cs typeface="Bricolage Grotesque ExtraBold" pitchFamily="34" charset="-120"/>
-              </a:rPr>
-              <a:t> điều</a:t>
-            </a:r>
-            <a:r>
-              <a:rPr lang="en-US" sz="3000" dirty="0" spc="0" kern="0">
-                <a:solidFill>
-                  <a:srgbClr val="7C93FF"/>
-                </a:solidFill>
-                <a:latin typeface="Bricolage Grotesque ExtraBold" pitchFamily="34" charset="0"/>
-                <a:ea typeface="Bricolage Grotesque ExtraBold" pitchFamily="34" charset="-122"/>
-                <a:cs typeface="Bricolage Grotesque ExtraBold" pitchFamily="34" charset="-120"/>
-              </a:rPr>
-              <a:t> khiển</a:t>
+              <a:t> lặp</a:t>
             </a:r>
             <a:endParaRPr lang="en-US" sz="3000" dirty="0"/>
           </a:p>
@@ -6528,26 +6478,48 @@
               <a:buNone/>
             </a:pPr>
             <a:r>
-              <a:rPr lang="en-US" sz="2250" dirty="0" spc="-24" kern="0">
-                <a:solidFill>
-                  <a:srgbClr val="F3EEE3"/>
-                </a:solidFill>
-                <a:latin typeface="Be Vietnam Pro" pitchFamily="34" charset="0"/>
-                <a:ea typeface="Be Vietnam Pro" pitchFamily="34" charset="-122"/>
-                <a:cs typeface="Be Vietnam Pro" pitchFamily="34" charset="-120"/>
-              </a:rPr>
-              <a:t>Vòng</a:t>
-            </a:r>
-            <a:r>
-              <a:rPr lang="en-US" sz="2250" dirty="0" spc="0" kern="0">
-                <a:solidFill>
-                  <a:srgbClr val="F3EEE3"/>
-                </a:solidFill>
-                <a:latin typeface="Be Vietnam Pro" pitchFamily="34" charset="0"/>
-                <a:ea typeface="Be Vietnam Pro" pitchFamily="34" charset="-122"/>
-                <a:cs typeface="Be Vietnam Pro" pitchFamily="34" charset="-120"/>
-              </a:rPr>
-              <a:t> lặp</a:t>
+              <a:rPr lang="en-US" sz="2250" dirty="0" spc="-4" kern="0">
+                <a:solidFill>
+                  <a:srgbClr val="F3EEE3"/>
+                </a:solidFill>
+                <a:latin typeface="Be Vietnam Pro" pitchFamily="34" charset="0"/>
+                <a:ea typeface="Be Vietnam Pro" pitchFamily="34" charset="-122"/>
+                <a:cs typeface="Be Vietnam Pro" pitchFamily="34" charset="-120"/>
+              </a:rPr>
+              <a:t>Đi</a:t>
+            </a:r>
+            <a:r>
+              <a:rPr lang="en-US" sz="2250" dirty="0" spc="1" kern="0">
+                <a:solidFill>
+                  <a:srgbClr val="F3EEE3"/>
+                </a:solidFill>
+                <a:latin typeface="Be Vietnam Pro" pitchFamily="34" charset="0"/>
+                <a:ea typeface="Be Vietnam Pro" pitchFamily="34" charset="-122"/>
+                <a:cs typeface="Be Vietnam Pro" pitchFamily="34" charset="-120"/>
+              </a:rPr>
+              <a:t> qua</a:t>
+            </a:r>
+            <a:r>
+              <a:rPr lang="en-US" sz="2250" dirty="0" spc="19" kern="0">
+                <a:solidFill>
+                  <a:srgbClr val="F3EEE3"/>
+                </a:solidFill>
+                <a:latin typeface="Be Vietnam Pro" pitchFamily="34" charset="0"/>
+                <a:ea typeface="Be Vietnam Pro" pitchFamily="34" charset="-122"/>
+                <a:cs typeface="Be Vietnam Pro" pitchFamily="34" charset="-120"/>
+              </a:rPr>
+              <a:t> từng</a:t>
+            </a:r>
+            <a:r>
+              <a:rPr lang="en-US" sz="2250" dirty="0" spc="-2" kern="0">
+                <a:solidFill>
+                  <a:srgbClr val="F3EEE3"/>
+                </a:solidFill>
+                <a:latin typeface="Be Vietnam Pro" pitchFamily="34" charset="0"/>
+                <a:ea typeface="Be Vietnam Pro" pitchFamily="34" charset="-122"/>
+                <a:cs typeface="Be Vietnam Pro" pitchFamily="34" charset="-120"/>
+              </a:rPr>
+              <a:t> số</a:t>
             </a:r>
             <a:r>
               <a:rPr lang="en-US" sz="2250" dirty="0" spc="-16" kern="0">
@@ -6558,62 +6530,7 @@
                 <a:ea typeface="Be Vietnam Pro" pitchFamily="34" charset="-122"/>
                 <a:cs typeface="Be Vietnam Pro" pitchFamily="34" charset="-120"/>
               </a:rPr>
-              <a:t> và</a:t>
-            </a:r>
-            <a:r>
-              <a:rPr lang="en-US" sz="2250" dirty="0" spc="0" kern="0">
-                <a:solidFill>
-                  <a:srgbClr val="F3EEE3"/>
-                </a:solidFill>
-                <a:latin typeface="Be Vietnam Pro" pitchFamily="34" charset="0"/>
-                <a:ea typeface="Be Vietnam Pro" pitchFamily="34" charset="-122"/>
-                <a:cs typeface="Be Vietnam Pro" pitchFamily="34" charset="-120"/>
-              </a:rPr>
-              <a:t> câu lệnh</a:t>
-            </a:r>
-            <a:r>
-              <a:rPr lang="en-US" sz="2250" dirty="0" spc="17" kern="0">
-                <a:solidFill>
-                  <a:srgbClr val="F3EEE3"/>
-                </a:solidFill>
-                <a:latin typeface="Be Vietnam Pro" pitchFamily="34" charset="0"/>
-                <a:ea typeface="Be Vietnam Pro" pitchFamily="34" charset="-122"/>
-                <a:cs typeface="Be Vietnam Pro" pitchFamily="34" charset="-120"/>
-              </a:rPr>
-              <a:t> điều</a:t>
-            </a:r>
-            <a:r>
-              <a:rPr lang="en-US" sz="2250" dirty="0" spc="-1" kern="0">
-                <a:solidFill>
-                  <a:srgbClr val="F3EEE3"/>
-                </a:solidFill>
-                <a:latin typeface="Be Vietnam Pro" pitchFamily="34" charset="0"/>
-                <a:ea typeface="Be Vietnam Pro" pitchFamily="34" charset="-122"/>
-                <a:cs typeface="Be Vietnam Pro" pitchFamily="34" charset="-120"/>
-              </a:rPr>
-              <a:t> kiện</a:t>
-            </a:r>
-            <a:r>
-              <a:rPr lang="en-US" sz="2250" dirty="0" spc="17" kern="0">
-                <a:solidFill>
-                  <a:srgbClr val="F3EEE3"/>
-                </a:solidFill>
-                <a:latin typeface="Be Vietnam Pro" pitchFamily="34" charset="0"/>
-                <a:ea typeface="Be Vietnam Pro" pitchFamily="34" charset="-122"/>
-                <a:cs typeface="Be Vietnam Pro" pitchFamily="34" charset="-120"/>
-              </a:rPr>
-              <a:t> điều</a:t>
-            </a:r>
-            <a:r>
-              <a:rPr lang="en-US" sz="2250" dirty="0" spc="-1" kern="0">
-                <a:solidFill>
-                  <a:srgbClr val="F3EEE3"/>
-                </a:solidFill>
-                <a:latin typeface="Be Vietnam Pro" pitchFamily="34" charset="0"/>
-                <a:ea typeface="Be Vietnam Pro" pitchFamily="34" charset="-122"/>
-                <a:cs typeface="Be Vietnam Pro" pitchFamily="34" charset="-120"/>
-              </a:rPr>
-              <a:t> khiển</a:t>
+              <a:t> trong</a:t>
             </a:r>
             <a:r>
               <a:rPr lang="en-US" sz="2250" dirty="0" spc="1" kern="0">
@@ -6624,18 +6541,18 @@
                 <a:ea typeface="Be Vietnam Pro" pitchFamily="34" charset="-122"/>
                 <a:cs typeface="Be Vietnam Pro" pitchFamily="34" charset="-120"/>
               </a:rPr>
-              <a:t> luồng</a:t>
-            </a:r>
-            <a:r>
-              <a:rPr lang="en-US" sz="2250" dirty="0" spc="-6" kern="0">
-                <a:solidFill>
-                  <a:srgbClr val="F3EEE3"/>
-                </a:solidFill>
-                <a:latin typeface="Be Vietnam Pro" pitchFamily="34" charset="0"/>
-                <a:ea typeface="Be Vietnam Pro" pitchFamily="34" charset="-122"/>
-                <a:cs typeface="Be Vietnam Pro" pitchFamily="34" charset="-120"/>
-              </a:rPr>
-              <a:t> chạy</a:t>
+              <a:t> danh</a:t>
+            </a:r>
+            <a:r>
+              <a:rPr lang="en-US" sz="2250" dirty="0" spc="-3" kern="0">
+                <a:solidFill>
+                  <a:srgbClr val="F3EEE3"/>
+                </a:solidFill>
+                <a:latin typeface="Be Vietnam Pro" pitchFamily="34" charset="0"/>
+                <a:ea typeface="Be Vietnam Pro" pitchFamily="34" charset="-122"/>
+                <a:cs typeface="Be Vietnam Pro" pitchFamily="34" charset="-120"/>
+              </a:rPr>
+              <a:t> sách</a:t>
             </a:r>
             <a:endParaRPr lang="en-US" sz="2250" dirty="0"/>
           </a:p>
@@ -6731,7 +6648,7 @@
               <a:buNone/>
             </a:pPr>
             <a:r>
-              <a:rPr lang="en-US" sz="3000" dirty="0" spc="4" kern="0">
+              <a:rPr lang="en-US" sz="3000" dirty="0" spc="2" kern="0">
                 <a:solidFill>
                   <a:srgbClr val="7C93FF"/>
                 </a:solidFill>
@@ -6739,10 +6656,10 @@
                 <a:ea typeface="Bricolage Grotesque ExtraBold" pitchFamily="34" charset="-122"/>
                 <a:cs typeface="Bricolage Grotesque ExtraBold" pitchFamily="34" charset="-120"/>
               </a:rPr>
-              <a:t>Dữ</a:t>
-            </a:r>
-            <a:r>
-              <a:rPr lang="en-US" sz="3000" dirty="0" spc="1" kern="0">
+              <a:t>Điều</a:t>
+            </a:r>
+            <a:r>
+              <a:rPr lang="en-US" sz="3000" dirty="0" spc="0" kern="0">
                 <a:solidFill>
                   <a:srgbClr val="7C93FF"/>
                 </a:solidFill>
@@ -6750,40 +6667,7 @@
                 <a:ea typeface="Bricolage Grotesque ExtraBold" pitchFamily="34" charset="-122"/>
                 <a:cs typeface="Bricolage Grotesque ExtraBold" pitchFamily="34" charset="-120"/>
               </a:rPr>
-              <a:t> liệu</a:t>
-            </a:r>
-            <a:r>
-              <a:rPr lang="en-US" sz="3000" dirty="0" spc="2" kern="0">
-                <a:solidFill>
-                  <a:srgbClr val="7C93FF"/>
-                </a:solidFill>
-                <a:latin typeface="Bricolage Grotesque ExtraBold" pitchFamily="34" charset="0"/>
-                <a:ea typeface="Bricolage Grotesque ExtraBold" pitchFamily="34" charset="-122"/>
-                <a:cs typeface="Bricolage Grotesque ExtraBold" pitchFamily="34" charset="-120"/>
-              </a:rPr>
-              <a:t> thay</a:t>
-            </a:r>
-            <a:r>
-              <a:rPr lang="en-US" sz="3000" dirty="0" spc="7" kern="0">
-                <a:solidFill>
-                  <a:srgbClr val="7C93FF"/>
-                </a:solidFill>
-                <a:latin typeface="Bricolage Grotesque ExtraBold" pitchFamily="34" charset="0"/>
-                <a:ea typeface="Bricolage Grotesque ExtraBold" pitchFamily="34" charset="-122"/>
-                <a:cs typeface="Bricolage Grotesque ExtraBold" pitchFamily="34" charset="-120"/>
-              </a:rPr>
-              <a:t> đổi</a:t>
-            </a:r>
-            <a:r>
-              <a:rPr lang="en-US" sz="3000" dirty="0" spc="-37" kern="0">
-                <a:solidFill>
-                  <a:srgbClr val="7C93FF"/>
-                </a:solidFill>
-                <a:latin typeface="Bricolage Grotesque ExtraBold" pitchFamily="34" charset="0"/>
-                <a:ea typeface="Bricolage Grotesque ExtraBold" pitchFamily="34" charset="-122"/>
-                <a:cs typeface="Bricolage Grotesque ExtraBold" pitchFamily="34" charset="-120"/>
-              </a:rPr>
-              <a:t> được</a:t>
+              <a:t> kiện</a:t>
             </a:r>
             <a:endParaRPr lang="en-US" sz="3000" dirty="0"/>
           </a:p>
@@ -6817,70 +6701,37 @@
               <a:buNone/>
             </a:pPr>
             <a:r>
-              <a:rPr lang="en-US" sz="2250" dirty="0" spc="-2" kern="0">
-                <a:solidFill>
-                  <a:srgbClr val="F3EEE3"/>
-                </a:solidFill>
-                <a:latin typeface="Be Vietnam Pro" pitchFamily="34" charset="0"/>
-                <a:ea typeface="Be Vietnam Pro" pitchFamily="34" charset="-122"/>
-                <a:cs typeface="Be Vietnam Pro" pitchFamily="34" charset="-120"/>
-              </a:rPr>
-              <a:t>Nhấn</a:t>
-            </a:r>
-            <a:r>
-              <a:rPr lang="en-US" sz="2250" dirty="0" spc="-1" kern="0">
-                <a:solidFill>
-                  <a:srgbClr val="F3EEE3"/>
-                </a:solidFill>
-                <a:latin typeface="Be Vietnam Pro" pitchFamily="34" charset="0"/>
-                <a:ea typeface="Be Vietnam Pro" pitchFamily="34" charset="-122"/>
-                <a:cs typeface="Be Vietnam Pro" pitchFamily="34" charset="-120"/>
-              </a:rPr>
-              <a:t> mạnh</a:t>
-            </a:r>
-            <a:r>
-              <a:rPr lang="en-US" sz="2250" dirty="0" spc="5" kern="0">
-                <a:solidFill>
-                  <a:srgbClr val="F3EEE3"/>
-                </a:solidFill>
-                <a:latin typeface="Be Vietnam Pro" pitchFamily="34" charset="0"/>
-                <a:ea typeface="Be Vietnam Pro" pitchFamily="34" charset="-122"/>
-                <a:cs typeface="Be Vietnam Pro" pitchFamily="34" charset="-120"/>
-              </a:rPr>
-              <a:t> dữ</a:t>
-            </a:r>
-            <a:r>
-              <a:rPr lang="en-US" sz="2250" dirty="0" spc="-1" kern="0">
-                <a:solidFill>
-                  <a:srgbClr val="F3EEE3"/>
-                </a:solidFill>
-                <a:latin typeface="Be Vietnam Pro" pitchFamily="34" charset="0"/>
-                <a:ea typeface="Be Vietnam Pro" pitchFamily="34" charset="-122"/>
-                <a:cs typeface="Be Vietnam Pro" pitchFamily="34" charset="-120"/>
-              </a:rPr>
-              <a:t> liệu</a:t>
-            </a:r>
-            <a:r>
-              <a:rPr lang="en-US" sz="2250" dirty="0" spc="-6" kern="0">
-                <a:solidFill>
-                  <a:srgbClr val="F3EEE3"/>
-                </a:solidFill>
-                <a:latin typeface="Be Vietnam Pro" pitchFamily="34" charset="0"/>
-                <a:ea typeface="Be Vietnam Pro" pitchFamily="34" charset="-122"/>
-                <a:cs typeface="Be Vietnam Pro" pitchFamily="34" charset="-120"/>
-              </a:rPr>
-              <a:t> mutable</a:t>
-            </a:r>
-            <a:r>
-              <a:rPr lang="en-US" sz="2250" dirty="0" spc="-18" kern="0">
-                <a:solidFill>
-                  <a:srgbClr val="F3EEE3"/>
-                </a:solidFill>
-                <a:latin typeface="Be Vietnam Pro" pitchFamily="34" charset="0"/>
-                <a:ea typeface="Be Vietnam Pro" pitchFamily="34" charset="-122"/>
-                <a:cs typeface="Be Vietnam Pro" pitchFamily="34" charset="-120"/>
-              </a:rPr>
-              <a:t> và</a:t>
+              <a:rPr lang="en-US" sz="2250" dirty="0" spc="0" kern="0">
+                <a:solidFill>
+                  <a:srgbClr val="F3EEE3"/>
+                </a:solidFill>
+                <a:latin typeface="Be Vietnam Pro" pitchFamily="34" charset="0"/>
+                <a:ea typeface="Be Vietnam Pro" pitchFamily="34" charset="-122"/>
+                <a:cs typeface="Be Vietnam Pro" pitchFamily="34" charset="-120"/>
+              </a:rPr>
+              <a:t>Chọn</a:t>
+            </a:r>
+            <a:r>
+              <a:rPr lang="en-US" sz="2250" dirty="0" spc="-3" kern="0">
+                <a:solidFill>
+                  <a:srgbClr val="F3EEE3"/>
+                </a:solidFill>
+                <a:latin typeface="Be Vietnam Pro" pitchFamily="34" charset="0"/>
+                <a:ea typeface="Be Vietnam Pro" pitchFamily="34" charset="-122"/>
+                <a:cs typeface="Be Vietnam Pro" pitchFamily="34" charset="-120"/>
+              </a:rPr>
+              <a:t> số</a:t>
+            </a:r>
+            <a:r>
+              <a:rPr lang="en-US" sz="2250" dirty="0" spc="0" kern="0">
+                <a:solidFill>
+                  <a:srgbClr val="F3EEE3"/>
+                </a:solidFill>
+                <a:latin typeface="Be Vietnam Pro" pitchFamily="34" charset="0"/>
+                <a:ea typeface="Be Vietnam Pro" pitchFamily="34" charset="-122"/>
+                <a:cs typeface="Be Vietnam Pro" pitchFamily="34" charset="-120"/>
+              </a:rPr>
+              <a:t> chẵn,</a:t>
             </a:r>
             <a:r>
               <a:rPr lang="en-US" sz="2250" dirty="0" spc="2" kern="0">
@@ -6891,40 +6742,40 @@
                 <a:ea typeface="Be Vietnam Pro" pitchFamily="34" charset="-122"/>
                 <a:cs typeface="Be Vietnam Pro" pitchFamily="34" charset="-120"/>
               </a:rPr>
-              <a:t> các</a:t>
-            </a:r>
-            <a:r>
-              <a:rPr lang="en-US" sz="2250" dirty="0" spc="10" kern="0">
-                <a:solidFill>
-                  <a:srgbClr val="F3EEE3"/>
-                </a:solidFill>
-                <a:latin typeface="Be Vietnam Pro" pitchFamily="34" charset="0"/>
-                <a:ea typeface="Be Vietnam Pro" pitchFamily="34" charset="-122"/>
-                <a:cs typeface="Be Vietnam Pro" pitchFamily="34" charset="-120"/>
-              </a:rPr>
-              <a:t> bước</a:t>
-            </a:r>
-            <a:r>
-              <a:rPr lang="en-US" sz="2250" dirty="0" spc="6" kern="0">
-                <a:solidFill>
-                  <a:srgbClr val="F3EEE3"/>
-                </a:solidFill>
-                <a:latin typeface="Be Vietnam Pro" pitchFamily="34" charset="0"/>
-                <a:ea typeface="Be Vietnam Pro" pitchFamily="34" charset="-122"/>
-                <a:cs typeface="Be Vietnam Pro" pitchFamily="34" charset="-120"/>
-              </a:rPr>
-              <a:t> tường</a:t>
-            </a:r>
-            <a:r>
-              <a:rPr lang="en-US" sz="2250" dirty="0" spc="0" kern="0">
-                <a:solidFill>
-                  <a:srgbClr val="F3EEE3"/>
-                </a:solidFill>
-                <a:latin typeface="Be Vietnam Pro" pitchFamily="34" charset="0"/>
-                <a:ea typeface="Be Vietnam Pro" pitchFamily="34" charset="-122"/>
-                <a:cs typeface="Be Vietnam Pro" pitchFamily="34" charset="-120"/>
-              </a:rPr>
-              <a:t> minh</a:t>
+              <a:t> cộng bình</a:t>
+            </a:r>
+            <a:r>
+              <a:rPr lang="en-US" sz="2250" dirty="0" spc="4" kern="0">
+                <a:solidFill>
+                  <a:srgbClr val="F3EEE3"/>
+                </a:solidFill>
+                <a:latin typeface="Be Vietnam Pro" pitchFamily="34" charset="0"/>
+                <a:ea typeface="Be Vietnam Pro" pitchFamily="34" charset="-122"/>
+                <a:cs typeface="Be Vietnam Pro" pitchFamily="34" charset="-120"/>
+              </a:rPr>
+              <a:t> phương</a:t>
+            </a:r>
+            <a:r>
+              <a:rPr lang="en-US" sz="2250" dirty="0" spc="-13" kern="0">
+                <a:solidFill>
+                  <a:srgbClr val="F3EEE3"/>
+                </a:solidFill>
+                <a:latin typeface="Be Vietnam Pro" pitchFamily="34" charset="0"/>
+                <a:ea typeface="Be Vietnam Pro" pitchFamily="34" charset="-122"/>
+                <a:cs typeface="Be Vietnam Pro" pitchFamily="34" charset="-120"/>
+              </a:rPr>
+              <a:t> vào</a:t>
+            </a:r>
+            <a:r>
+              <a:rPr lang="en-US" sz="2250" dirty="0" spc="-20" kern="0">
+                <a:solidFill>
+                  <a:srgbClr val="F3EEE3"/>
+                </a:solidFill>
+                <a:latin typeface="Be Vietnam Pro" pitchFamily="34" charset="0"/>
+                <a:ea typeface="Be Vietnam Pro" pitchFamily="34" charset="-122"/>
+                <a:cs typeface="Be Vietnam Pro" pitchFamily="34" charset="-120"/>
+              </a:rPr>
+              <a:t> total</a:t>
             </a:r>
             <a:endParaRPr lang="en-US" sz="2250" dirty="0"/>
           </a:p>
@@ -7020,7 +6871,7 @@
               <a:buNone/>
             </a:pPr>
             <a:r>
-              <a:rPr lang="en-US" sz="3000" dirty="0" spc="-22" kern="0">
+              <a:rPr lang="en-US" sz="3000" dirty="0" spc="1" kern="0">
                 <a:solidFill>
                   <a:srgbClr val="7C93FF"/>
                 </a:solidFill>
@@ -7028,10 +6879,10 @@
                 <a:ea typeface="Bricolage Grotesque ExtraBold" pitchFamily="34" charset="-122"/>
                 <a:cs typeface="Bricolage Grotesque ExtraBold" pitchFamily="34" charset="-120"/>
               </a:rPr>
-              <a:t>Ví</a:t>
-            </a:r>
-            <a:r>
-              <a:rPr lang="en-US" sz="3000" dirty="0" spc="-1" kern="0">
+              <a:t>Cùng</a:t>
+            </a:r>
+            <a:r>
+              <a:rPr lang="en-US" sz="3000" dirty="0" spc="-2" kern="0">
                 <a:solidFill>
                   <a:srgbClr val="7C93FF"/>
                 </a:solidFill>
@@ -7039,7 +6890,7 @@
                 <a:ea typeface="Bricolage Grotesque ExtraBold" pitchFamily="34" charset="-122"/>
                 <a:cs typeface="Bricolage Grotesque ExtraBold" pitchFamily="34" charset="-120"/>
               </a:rPr>
-              <a:t> dụ</a:t>
+              <a:t> họ</a:t>
             </a:r>
             <a:endParaRPr lang="en-US" sz="3000" dirty="0"/>
           </a:p>
@@ -7073,15 +6924,26 @@
               <a:buNone/>
             </a:pPr>
             <a:r>
-              <a:rPr lang="en-US" sz="2250" dirty="0" spc="-6" kern="0">
-                <a:solidFill>
-                  <a:srgbClr val="F3EEE3"/>
-                </a:solidFill>
-                <a:latin typeface="Be Vietnam Pro" pitchFamily="34" charset="0"/>
-                <a:ea typeface="Be Vietnam Pro" pitchFamily="34" charset="-122"/>
-                <a:cs typeface="Be Vietnam Pro" pitchFamily="34" charset="-120"/>
-              </a:rPr>
-              <a:t>C,</a:t>
+              <a:rPr lang="en-US" sz="2250" dirty="0" spc="-71" kern="0">
+                <a:solidFill>
+                  <a:srgbClr val="F3EEE3"/>
+                </a:solidFill>
+                <a:latin typeface="Be Vietnam Pro" pitchFamily="34" charset="0"/>
+                <a:ea typeface="Be Vietnam Pro" pitchFamily="34" charset="-122"/>
+                <a:cs typeface="Be Vietnam Pro" pitchFamily="34" charset="-120"/>
+              </a:rPr>
+              <a:t>Tài</a:t>
+            </a:r>
+            <a:r>
+              <a:rPr lang="en-US" sz="2250" dirty="0" spc="-2" kern="0">
+                <a:solidFill>
+                  <a:srgbClr val="F3EEE3"/>
+                </a:solidFill>
+                <a:latin typeface="Be Vietnam Pro" pitchFamily="34" charset="0"/>
+                <a:ea typeface="Be Vietnam Pro" pitchFamily="34" charset="-122"/>
+                <a:cs typeface="Be Vietnam Pro" pitchFamily="34" charset="-120"/>
+              </a:rPr>
+              <a:t> liệu</a:t>
             </a:r>
             <a:r>
               <a:rPr lang="en-US" sz="2250" dirty="0" spc="6" kern="0">
@@ -7092,10 +6954,32 @@
                 <a:ea typeface="Be Vietnam Pro" pitchFamily="34" charset="-122"/>
                 <a:cs typeface="Be Vietnam Pro" pitchFamily="34" charset="-120"/>
               </a:rPr>
-              <a:t> Python</a:t>
-            </a:r>
-            <a:r>
-              <a:rPr lang="en-US" sz="2250" dirty="0" spc="-16" kern="0">
+              <a:t> Python:</a:t>
+            </a:r>
+            <a:r>
+              <a:rPr lang="en-US" sz="2250" dirty="0" spc="-2" kern="0">
+                <a:solidFill>
+                  <a:srgbClr val="F3EEE3"/>
+                </a:solidFill>
+                <a:latin typeface="Be Vietnam Pro" pitchFamily="34" charset="0"/>
+                <a:ea typeface="Be Vietnam Pro" pitchFamily="34" charset="-122"/>
+                <a:cs typeface="Be Vietnam Pro" pitchFamily="34" charset="-120"/>
+              </a:rPr>
+              <a:t> C,</a:t>
+            </a:r>
+            <a:r>
+              <a:rPr lang="en-US" sz="2250" dirty="0" spc="-9" kern="0">
+                <a:solidFill>
+                  <a:srgbClr val="F3EEE3"/>
+                </a:solidFill>
+                <a:latin typeface="Be Vietnam Pro" pitchFamily="34" charset="0"/>
+                <a:ea typeface="Be Vietnam Pro" pitchFamily="34" charset="-122"/>
+                <a:cs typeface="Be Vietnam Pro" pitchFamily="34" charset="-120"/>
+              </a:rPr>
+              <a:t> Pascal</a:t>
+            </a:r>
+            <a:r>
+              <a:rPr lang="en-US" sz="2250" dirty="0" spc="-17" kern="0">
                 <a:solidFill>
                   <a:srgbClr val="F3EEE3"/>
                 </a:solidFill>
@@ -7106,59 +6990,26 @@
               <a:t> và</a:t>
             </a:r>
             <a:r>
-              <a:rPr lang="en-US" sz="2250" dirty="0" spc="-1" kern="0">
-                <a:solidFill>
-                  <a:srgbClr val="F3EEE3"/>
-                </a:solidFill>
-                <a:latin typeface="Be Vietnam Pro" pitchFamily="34" charset="0"/>
-                <a:ea typeface="Be Vietnam Pro" pitchFamily="34" charset="-122"/>
-                <a:cs typeface="Be Vietnam Pro" pitchFamily="34" charset="-120"/>
-              </a:rPr>
-              <a:t> hầu</a:t>
-            </a:r>
-            <a:r>
-              <a:rPr lang="en-US" sz="2250" dirty="0" spc="-5" kern="0">
-                <a:solidFill>
-                  <a:srgbClr val="F3EEE3"/>
-                </a:solidFill>
-                <a:latin typeface="Be Vietnam Pro" pitchFamily="34" charset="0"/>
-                <a:ea typeface="Be Vietnam Pro" pitchFamily="34" charset="-122"/>
-                <a:cs typeface="Be Vietnam Pro" pitchFamily="34" charset="-120"/>
-              </a:rPr>
-              <a:t> hết</a:t>
-            </a:r>
-            <a:r>
-              <a:rPr lang="en-US" sz="2250" dirty="0" spc="-7" kern="0">
-                <a:solidFill>
-                  <a:srgbClr val="F3EEE3"/>
-                </a:solidFill>
-                <a:latin typeface="Be Vietnam Pro" pitchFamily="34" charset="0"/>
-                <a:ea typeface="Be Vietnam Pro" pitchFamily="34" charset="-122"/>
-                <a:cs typeface="Be Vietnam Pro" pitchFamily="34" charset="-120"/>
-              </a:rPr>
-              <a:t> ngôn</a:t>
-            </a:r>
-            <a:r>
-              <a:rPr lang="en-US" sz="2250" dirty="0" spc="2" kern="0">
-                <a:solidFill>
-                  <a:srgbClr val="F3EEE3"/>
-                </a:solidFill>
-                <a:latin typeface="Be Vietnam Pro" pitchFamily="34" charset="0"/>
-                <a:ea typeface="Be Vietnam Pro" pitchFamily="34" charset="-122"/>
-                <a:cs typeface="Be Vietnam Pro" pitchFamily="34" charset="-120"/>
-              </a:rPr>
-              <a:t> ngữ thủ</a:t>
-            </a:r>
-            <a:r>
-              <a:rPr lang="en-US" sz="2250" dirty="0" spc="4" kern="0">
-                <a:solidFill>
-                  <a:srgbClr val="F3EEE3"/>
-                </a:solidFill>
-                <a:latin typeface="Be Vietnam Pro" pitchFamily="34" charset="0"/>
-                <a:ea typeface="Be Vietnam Pro" pitchFamily="34" charset="-122"/>
-                <a:cs typeface="Be Vietnam Pro" pitchFamily="34" charset="-120"/>
-              </a:rPr>
-              <a:t> tục</a:t>
+              <a:rPr lang="en-US" sz="2250" dirty="0" spc="1" kern="0">
+                <a:solidFill>
+                  <a:srgbClr val="F3EEE3"/>
+                </a:solidFill>
+                <a:latin typeface="Be Vietnam Pro" pitchFamily="34" charset="0"/>
+                <a:ea typeface="Be Vietnam Pro" pitchFamily="34" charset="-122"/>
+                <a:cs typeface="Be Vietnam Pro" pitchFamily="34" charset="-120"/>
+              </a:rPr>
+              <a:t> shell</a:t>
+            </a:r>
+            <a:r>
+              <a:rPr lang="en-US" sz="2250" dirty="0" spc="-2" kern="0">
+                <a:solidFill>
+                  <a:srgbClr val="F3EEE3"/>
+                </a:solidFill>
+                <a:latin typeface="Be Vietnam Pro" pitchFamily="34" charset="0"/>
+                <a:ea typeface="Be Vietnam Pro" pitchFamily="34" charset="-122"/>
+                <a:cs typeface="Be Vietnam Pro" pitchFamily="34" charset="-120"/>
+              </a:rPr>
+              <a:t> Unix</a:t>
             </a:r>
             <a:endParaRPr lang="en-US" sz="2250" dirty="0"/>
           </a:p>
@@ -7728,10 +7579,10 @@
                 <a:ea typeface="Be Vietnam Pro" pitchFamily="34" charset="-122"/>
                 <a:cs typeface="Be Vietnam Pro" pitchFamily="34" charset="-120"/>
               </a:rPr>
-              <a:t> thuần</a:t>
-            </a:r>
-            <a:r>
-              <a:rPr lang="en-US" sz="3150" b="1" dirty="0" spc="-29" kern="0">
+              <a:t> thuần,</a:t>
+            </a:r>
+            <a:r>
+              <a:rPr lang="en-US" sz="3150" b="1" dirty="0" spc="-10" kern="0">
                 <a:solidFill>
                   <a:srgbClr val="0F766E"/>
                 </a:solidFill>
@@ -7739,10 +7590,10 @@
                 <a:ea typeface="Be Vietnam Pro" pitchFamily="34" charset="-122"/>
                 <a:cs typeface="Be Vietnam Pro" pitchFamily="34" charset="-120"/>
               </a:rPr>
-              <a:t> và</a:t>
-            </a:r>
-            <a:r>
-              <a:rPr lang="en-US" sz="3150" b="1" dirty="0" spc="-8" kern="0">
+              <a:t> không</a:t>
+            </a:r>
+            <a:r>
+              <a:rPr lang="en-US" sz="3150" b="1" dirty="0" spc="5" kern="0">
                 <a:solidFill>
                   <a:srgbClr val="0F766E"/>
                 </a:solidFill>
@@ -7750,10 +7601,10 @@
                 <a:ea typeface="Be Vietnam Pro" pitchFamily="34" charset="-122"/>
                 <a:cs typeface="Be Vietnam Pro" pitchFamily="34" charset="-120"/>
               </a:rPr>
-              <a:t> bất</a:t>
-            </a:r>
-            <a:r>
-              <a:rPr lang="en-US" sz="3150" b="1" dirty="0" spc="-5" kern="0">
+              <a:t> đổi</a:t>
+            </a:r>
+            <a:r>
+              <a:rPr lang="en-US" sz="3150" b="1" dirty="0" spc="-6" kern="0">
                 <a:solidFill>
                   <a:srgbClr val="0F766E"/>
                 </a:solidFill>
@@ -7762,6 +7613,17 @@
                 <a:cs typeface="Be Vietnam Pro" pitchFamily="34" charset="-120"/>
               </a:rPr>
               <a:t> biến</a:t>
+            </a:r>
+            <a:r>
+              <a:rPr lang="en-US" sz="3150" b="1" dirty="0" spc="-1" kern="0">
+                <a:solidFill>
+                  <a:srgbClr val="0F766E"/>
+                </a:solidFill>
+                <a:latin typeface="Be Vietnam Pro" pitchFamily="34" charset="0"/>
+                <a:ea typeface="Be Vietnam Pro" pitchFamily="34" charset="-122"/>
+                <a:cs typeface="Be Vietnam Pro" pitchFamily="34" charset="-120"/>
+              </a:rPr>
+              <a:t> nào</a:t>
             </a:r>
             <a:endParaRPr lang="en-US" sz="3150" dirty="0"/>
           </a:p>
@@ -7803,7 +7665,62 @@
                 <a:ea typeface="Be Vietnam Pro" pitchFamily="34" charset="-122"/>
                 <a:cs typeface="Be Vietnam Pro" pitchFamily="34" charset="-120"/>
               </a:rPr>
-              <a:t>Mô</a:t>
+              <a:t>Chia</a:t>
+            </a:r>
+            <a:r>
+              <a:rPr lang="en-US" sz="2700" dirty="0" spc="-5" kern="0">
+                <a:solidFill>
+                  <a:srgbClr val="14161C"/>
+                </a:solidFill>
+                <a:latin typeface="Be Vietnam Pro" pitchFamily="34" charset="0"/>
+                <a:ea typeface="Be Vietnam Pro" pitchFamily="34" charset="-122"/>
+                <a:cs typeface="Be Vietnam Pro" pitchFamily="34" charset="-120"/>
+              </a:rPr>
+              <a:t> bài</a:t>
+            </a:r>
+            <a:r>
+              <a:rPr lang="en-US" sz="2700" dirty="0" spc="-14" kern="0">
+                <a:solidFill>
+                  <a:srgbClr val="14161C"/>
+                </a:solidFill>
+                <a:latin typeface="Be Vietnam Pro" pitchFamily="34" charset="0"/>
+                <a:ea typeface="Be Vietnam Pro" pitchFamily="34" charset="-122"/>
+                <a:cs typeface="Be Vietnam Pro" pitchFamily="34" charset="-120"/>
+              </a:rPr>
+              <a:t> toán</a:t>
+            </a:r>
+            <a:r>
+              <a:rPr lang="en-US" sz="2700" dirty="0" spc="-1" kern="0">
+                <a:solidFill>
+                  <a:srgbClr val="14161C"/>
+                </a:solidFill>
+                <a:latin typeface="Be Vietnam Pro" pitchFamily="34" charset="0"/>
+                <a:ea typeface="Be Vietnam Pro" pitchFamily="34" charset="-122"/>
+                <a:cs typeface="Be Vietnam Pro" pitchFamily="34" charset="-120"/>
+              </a:rPr>
+              <a:t> thành</a:t>
+            </a:r>
+            <a:r>
+              <a:rPr lang="en-US" sz="2700" dirty="0" spc="2" kern="0">
+                <a:solidFill>
+                  <a:srgbClr val="14161C"/>
+                </a:solidFill>
+                <a:latin typeface="Be Vietnam Pro" pitchFamily="34" charset="0"/>
+                <a:ea typeface="Be Vietnam Pro" pitchFamily="34" charset="-122"/>
+                <a:cs typeface="Be Vietnam Pro" pitchFamily="34" charset="-120"/>
+              </a:rPr>
+              <a:t> các</a:t>
+            </a:r>
+            <a:r>
+              <a:rPr lang="en-US" sz="2700" dirty="0" spc="-1" kern="0">
+                <a:solidFill>
+                  <a:srgbClr val="14161C"/>
+                </a:solidFill>
+                <a:latin typeface="Be Vietnam Pro" pitchFamily="34" charset="0"/>
+                <a:ea typeface="Be Vietnam Pro" pitchFamily="34" charset="-122"/>
+                <a:cs typeface="Be Vietnam Pro" pitchFamily="34" charset="-120"/>
+              </a:rPr>
+              <a:t> hàm</a:t>
             </a:r>
             <a:r>
               <a:rPr lang="en-US" sz="2700" dirty="0" spc="-3" kern="0">
@@ -7814,73 +7731,7 @@
                 <a:ea typeface="Be Vietnam Pro" pitchFamily="34" charset="-122"/>
                 <a:cs typeface="Be Vietnam Pro" pitchFamily="34" charset="-120"/>
               </a:rPr>
-              <a:t> hình</a:t>
-            </a:r>
-            <a:r>
-              <a:rPr lang="en-US" sz="2700" dirty="0" spc="-1" kern="0">
-                <a:solidFill>
-                  <a:srgbClr val="14161C"/>
-                </a:solidFill>
-                <a:latin typeface="Be Vietnam Pro" pitchFamily="34" charset="0"/>
-                <a:ea typeface="Be Vietnam Pro" pitchFamily="34" charset="-122"/>
-                <a:cs typeface="Be Vietnam Pro" pitchFamily="34" charset="-120"/>
-              </a:rPr>
-              <a:t> hàm tính</a:t>
-            </a:r>
-            <a:r>
-              <a:rPr lang="en-US" sz="2700" dirty="0" spc="-15" kern="0">
-                <a:solidFill>
-                  <a:srgbClr val="14161C"/>
-                </a:solidFill>
-                <a:latin typeface="Be Vietnam Pro" pitchFamily="34" charset="0"/>
-                <a:ea typeface="Be Vietnam Pro" pitchFamily="34" charset="-122"/>
-                <a:cs typeface="Be Vietnam Pro" pitchFamily="34" charset="-120"/>
-              </a:rPr>
-              <a:t> toán</a:t>
-            </a:r>
-            <a:r>
-              <a:rPr lang="en-US" sz="2700" dirty="0" spc="-2" kern="0">
-                <a:solidFill>
-                  <a:srgbClr val="14161C"/>
-                </a:solidFill>
-                <a:latin typeface="Be Vietnam Pro" pitchFamily="34" charset="0"/>
-                <a:ea typeface="Be Vietnam Pro" pitchFamily="34" charset="-122"/>
-                <a:cs typeface="Be Vietnam Pro" pitchFamily="34" charset="-120"/>
-              </a:rPr>
-              <a:t> không</a:t>
-            </a:r>
-            <a:r>
-              <a:rPr lang="en-US" sz="2700" dirty="0" spc="0" kern="0">
-                <a:solidFill>
-                  <a:srgbClr val="14161C"/>
-                </a:solidFill>
-                <a:latin typeface="Be Vietnam Pro" pitchFamily="34" charset="0"/>
-                <a:ea typeface="Be Vietnam Pro" pitchFamily="34" charset="-122"/>
-                <a:cs typeface="Be Vietnam Pro" pitchFamily="34" charset="-120"/>
-              </a:rPr>
-              <a:t> có</a:t>
-            </a:r>
-            <a:r>
-              <a:rPr lang="en-US" sz="2700" dirty="0" spc="-12" kern="0">
-                <a:solidFill>
-                  <a:srgbClr val="14161C"/>
-                </a:solidFill>
-                <a:latin typeface="Be Vietnam Pro" pitchFamily="34" charset="0"/>
-                <a:ea typeface="Be Vietnam Pro" pitchFamily="34" charset="-122"/>
-                <a:cs typeface="Be Vietnam Pro" pitchFamily="34" charset="-120"/>
-              </a:rPr>
-              <a:t> tác</a:t>
-            </a:r>
-            <a:r>
-              <a:rPr lang="en-US" sz="2700" dirty="0" spc="-3" kern="0">
-                <a:solidFill>
-                  <a:srgbClr val="14161C"/>
-                </a:solidFill>
-                <a:latin typeface="Be Vietnam Pro" pitchFamily="34" charset="0"/>
-                <a:ea typeface="Be Vietnam Pro" pitchFamily="34" charset="-122"/>
-                <a:cs typeface="Be Vietnam Pro" pitchFamily="34" charset="-120"/>
-              </a:rPr>
-              <a:t> dụng phụ.</a:t>
+              <a:t> nhỏ.</a:t>
             </a:r>
             <a:endParaRPr lang="en-US" sz="2700" dirty="0"/>
           </a:p>
@@ -8001,15 +7852,15 @@
               <a:buNone/>
             </a:pPr>
             <a:r>
-              <a:rPr lang="en-US" sz="2250" b="1" dirty="0" spc="-8" kern="0">
-                <a:solidFill>
-                  <a:srgbClr val="F3EEE3"/>
-                </a:solidFill>
-                <a:latin typeface="Be Vietnam Pro" pitchFamily="34" charset="0"/>
-                <a:ea typeface="Be Vietnam Pro" pitchFamily="34" charset="-122"/>
-                <a:cs typeface="Be Vietnam Pro" pitchFamily="34" charset="-120"/>
-              </a:rPr>
-              <a:t>bất</a:t>
+              <a:rPr lang="en-US" sz="2250" b="1" dirty="0" spc="2" kern="0">
+                <a:solidFill>
+                  <a:srgbClr val="F3EEE3"/>
+                </a:solidFill>
+                <a:latin typeface="Be Vietnam Pro" pitchFamily="34" charset="0"/>
+                <a:ea typeface="Be Vietnam Pro" pitchFamily="34" charset="-122"/>
+                <a:cs typeface="Be Vietnam Pro" pitchFamily="34" charset="-120"/>
+              </a:rPr>
+              <a:t>map,</a:t>
             </a:r>
             <a:r>
               <a:rPr lang="en-US" sz="2250" b="1" dirty="0" spc="-1" kern="0">
@@ -8020,7 +7871,7 @@
                 <a:ea typeface="Be Vietnam Pro" pitchFamily="34" charset="-122"/>
                 <a:cs typeface="Be Vietnam Pro" pitchFamily="34" charset="-120"/>
               </a:rPr>
-              <a:t> biến</a:t>
+              <a:t> filter</a:t>
             </a:r>
             <a:endParaRPr lang="en-US" sz="2250" dirty="0"/>
           </a:p>
@@ -8126,15 +7977,48 @@
               <a:buNone/>
             </a:pPr>
             <a:r>
-              <a:rPr lang="en-US" sz="2550" dirty="0" spc="-77" kern="0">
-                <a:solidFill>
-                  <a:srgbClr val="14161C"/>
-                </a:solidFill>
-                <a:latin typeface="Be Vietnam Pro" pitchFamily="34" charset="0"/>
-                <a:ea typeface="Be Vietnam Pro" pitchFamily="34" charset="-122"/>
-                <a:cs typeface="Be Vietnam Pro" pitchFamily="34" charset="-120"/>
-              </a:rPr>
-              <a:t>Tác</a:t>
+              <a:rPr lang="en-US" sz="2550" dirty="0" spc="0" kern="0">
+                <a:solidFill>
+                  <a:srgbClr val="14161C"/>
+                </a:solidFill>
+                <a:latin typeface="Be Vietnam Pro" pitchFamily="34" charset="0"/>
+                <a:ea typeface="Be Vietnam Pro" pitchFamily="34" charset="-122"/>
+                <a:cs typeface="Be Vietnam Pro" pitchFamily="34" charset="-120"/>
+              </a:rPr>
+              <a:t>Hàm</a:t>
+            </a:r>
+            <a:r>
+              <a:rPr lang="en-US" sz="2550" dirty="0" spc="2" kern="0">
+                <a:solidFill>
+                  <a:srgbClr val="14161C"/>
+                </a:solidFill>
+                <a:latin typeface="Be Vietnam Pro" pitchFamily="34" charset="0"/>
+                <a:ea typeface="Be Vietnam Pro" pitchFamily="34" charset="-122"/>
+                <a:cs typeface="Be Vietnam Pro" pitchFamily="34" charset="-120"/>
+              </a:rPr>
+              <a:t> thuần</a:t>
+            </a:r>
+            <a:r>
+              <a:rPr lang="en-US" sz="2550" dirty="0" spc="0" kern="0">
+                <a:solidFill>
+                  <a:srgbClr val="14161C"/>
+                </a:solidFill>
+                <a:latin typeface="Be Vietnam Pro" pitchFamily="34" charset="0"/>
+                <a:ea typeface="Be Vietnam Pro" pitchFamily="34" charset="-122"/>
+                <a:cs typeface="Be Vietnam Pro" pitchFamily="34" charset="-120"/>
+              </a:rPr>
+              <a:t> không có</a:t>
+            </a:r>
+            <a:r>
+              <a:rPr lang="en-US" sz="2550" dirty="0" spc="-11" kern="0">
+                <a:solidFill>
+                  <a:srgbClr val="14161C"/>
+                </a:solidFill>
+                <a:latin typeface="Be Vietnam Pro" pitchFamily="34" charset="0"/>
+                <a:ea typeface="Be Vietnam Pro" pitchFamily="34" charset="-122"/>
+                <a:cs typeface="Be Vietnam Pro" pitchFamily="34" charset="-120"/>
+              </a:rPr>
+              <a:t> tác</a:t>
             </a:r>
             <a:r>
               <a:rPr lang="en-US" sz="2550" dirty="0" spc="-1" kern="0">
@@ -8159,59 +8043,15 @@
               <a:t> phụ (side</a:t>
             </a:r>
             <a:r>
-              <a:rPr lang="en-US" sz="2550" dirty="0" spc="-18" kern="0">
-                <a:solidFill>
-                  <a:srgbClr val="14161C"/>
-                </a:solidFill>
-                <a:latin typeface="Be Vietnam Pro" pitchFamily="34" charset="0"/>
-                <a:ea typeface="Be Vietnam Pro" pitchFamily="34" charset="-122"/>
-                <a:cs typeface="Be Vietnam Pro" pitchFamily="34" charset="-120"/>
-              </a:rPr>
-              <a:t> effect)</a:t>
-            </a:r>
-            <a:r>
-              <a:rPr lang="en-US" sz="2550" dirty="0" spc="1" kern="0">
-                <a:solidFill>
-                  <a:srgbClr val="14161C"/>
-                </a:solidFill>
-                <a:latin typeface="Be Vietnam Pro" pitchFamily="34" charset="0"/>
-                <a:ea typeface="Be Vietnam Pro" pitchFamily="34" charset="-122"/>
-                <a:cs typeface="Be Vietnam Pro" pitchFamily="34" charset="-120"/>
-              </a:rPr>
-              <a:t> là</a:t>
-            </a:r>
-            <a:r>
-              <a:rPr lang="en-US" sz="2550" dirty="0" spc="22" kern="0">
-                <a:solidFill>
-                  <a:srgbClr val="14161C"/>
-                </a:solidFill>
-                <a:latin typeface="Be Vietnam Pro" pitchFamily="34" charset="0"/>
-                <a:ea typeface="Be Vietnam Pro" pitchFamily="34" charset="-122"/>
-                <a:cs typeface="Be Vietnam Pro" pitchFamily="34" charset="-120"/>
-              </a:rPr>
-              <a:t> điều</a:t>
-            </a:r>
-            <a:r>
-              <a:rPr lang="en-US" sz="2550" dirty="0" spc="1" kern="0">
-                <a:solidFill>
-                  <a:srgbClr val="14161C"/>
-                </a:solidFill>
-                <a:latin typeface="Be Vietnam Pro" pitchFamily="34" charset="0"/>
-                <a:ea typeface="Be Vietnam Pro" pitchFamily="34" charset="-122"/>
-                <a:cs typeface="Be Vietnam Pro" pitchFamily="34" charset="-120"/>
-              </a:rPr>
-              <a:t> hàm thuần không</a:t>
-            </a:r>
-            <a:r>
-              <a:rPr lang="en-US" sz="2550" dirty="0" spc="0" kern="0">
-                <a:solidFill>
-                  <a:srgbClr val="14161C"/>
-                </a:solidFill>
-                <a:latin typeface="Be Vietnam Pro" pitchFamily="34" charset="0"/>
-                <a:ea typeface="Be Vietnam Pro" pitchFamily="34" charset="-122"/>
-                <a:cs typeface="Be Vietnam Pro" pitchFamily="34" charset="-120"/>
-              </a:rPr>
-              <a:t> có.</a:t>
+              <a:rPr lang="en-US" sz="2550" dirty="0" spc="-15" kern="0">
+                <a:solidFill>
+                  <a:srgbClr val="14161C"/>
+                </a:solidFill>
+                <a:latin typeface="Be Vietnam Pro" pitchFamily="34" charset="0"/>
+                <a:ea typeface="Be Vietnam Pro" pitchFamily="34" charset="-122"/>
+                <a:cs typeface="Be Vietnam Pro" pitchFamily="34" charset="-120"/>
+              </a:rPr>
+              <a:t> effect).</a:t>
             </a:r>
             <a:endParaRPr lang="en-US" sz="2550" dirty="0"/>
           </a:p>
@@ -8334,7 +8174,7 @@
               <a:buNone/>
             </a:pPr>
             <a:r>
-              <a:rPr lang="en-US" sz="3000" dirty="0" spc="3" kern="0">
+              <a:rPr lang="en-US" sz="3000" dirty="0" spc="-21" kern="0">
                 <a:solidFill>
                   <a:srgbClr val="0F766E"/>
                 </a:solidFill>
@@ -8342,18 +8182,7 @@
                 <a:ea typeface="Bricolage Grotesque ExtraBold" pitchFamily="34" charset="-122"/>
                 <a:cs typeface="Bricolage Grotesque ExtraBold" pitchFamily="34" charset="-120"/>
               </a:rPr>
-              <a:t>Hàm</a:t>
-            </a:r>
-            <a:r>
-              <a:rPr lang="en-US" sz="3000" dirty="0" spc="-1" kern="0">
-                <a:solidFill>
-                  <a:srgbClr val="0F766E"/>
-                </a:solidFill>
-                <a:latin typeface="Bricolage Grotesque ExtraBold" pitchFamily="34" charset="0"/>
-                <a:ea typeface="Bricolage Grotesque ExtraBold" pitchFamily="34" charset="-122"/>
-                <a:cs typeface="Bricolage Grotesque ExtraBold" pitchFamily="34" charset="-120"/>
-              </a:rPr>
-              <a:t> thuần</a:t>
+              <a:t>is_even</a:t>
             </a:r>
             <a:endParaRPr lang="en-US" sz="3000" dirty="0"/>
           </a:p>
@@ -8387,59 +8216,48 @@
               <a:buNone/>
             </a:pPr>
             <a:r>
-              <a:rPr lang="en-US" sz="2250" dirty="0" spc="-1" kern="0">
-                <a:solidFill>
-                  <a:srgbClr val="14161C"/>
-                </a:solidFill>
-                <a:latin typeface="Be Vietnam Pro" pitchFamily="34" charset="0"/>
-                <a:ea typeface="Be Vietnam Pro" pitchFamily="34" charset="-122"/>
-                <a:cs typeface="Be Vietnam Pro" pitchFamily="34" charset="-120"/>
-              </a:rPr>
-              <a:t>Tính</a:t>
-            </a:r>
-            <a:r>
-              <a:rPr lang="en-US" sz="2250" dirty="0" spc="-12" kern="0">
-                <a:solidFill>
-                  <a:srgbClr val="14161C"/>
-                </a:solidFill>
-                <a:latin typeface="Be Vietnam Pro" pitchFamily="34" charset="0"/>
-                <a:ea typeface="Be Vietnam Pro" pitchFamily="34" charset="-122"/>
-                <a:cs typeface="Be Vietnam Pro" pitchFamily="34" charset="-120"/>
-              </a:rPr>
-              <a:t> toán</a:t>
-            </a:r>
-            <a:r>
-              <a:rPr lang="en-US" sz="2250" dirty="0" spc="1" kern="0">
-                <a:solidFill>
-                  <a:srgbClr val="14161C"/>
-                </a:solidFill>
-                <a:latin typeface="Be Vietnam Pro" pitchFamily="34" charset="0"/>
-                <a:ea typeface="Be Vietnam Pro" pitchFamily="34" charset="-122"/>
-                <a:cs typeface="Be Vietnam Pro" pitchFamily="34" charset="-120"/>
-              </a:rPr>
-              <a:t> không</a:t>
-            </a:r>
-            <a:r>
-              <a:rPr lang="en-US" sz="2250" dirty="0" spc="5" kern="0">
-                <a:solidFill>
-                  <a:srgbClr val="14161C"/>
-                </a:solidFill>
-                <a:latin typeface="Be Vietnam Pro" pitchFamily="34" charset="0"/>
-                <a:ea typeface="Be Vietnam Pro" pitchFamily="34" charset="-122"/>
-                <a:cs typeface="Be Vietnam Pro" pitchFamily="34" charset="-120"/>
-              </a:rPr>
-              <a:t> có</a:t>
-            </a:r>
-            <a:r>
-              <a:rPr lang="en-US" sz="2250" dirty="0" spc="-10" kern="0">
-                <a:solidFill>
-                  <a:srgbClr val="14161C"/>
-                </a:solidFill>
-                <a:latin typeface="Be Vietnam Pro" pitchFamily="34" charset="0"/>
-                <a:ea typeface="Be Vietnam Pro" pitchFamily="34" charset="-122"/>
-                <a:cs typeface="Be Vietnam Pro" pitchFamily="34" charset="-120"/>
-              </a:rPr>
-              <a:t> tác</a:t>
+              <a:rPr lang="en-US" sz="2250" dirty="0" spc="-2" kern="0">
+                <a:solidFill>
+                  <a:srgbClr val="14161C"/>
+                </a:solidFill>
+                <a:latin typeface="Be Vietnam Pro" pitchFamily="34" charset="0"/>
+                <a:ea typeface="Be Vietnam Pro" pitchFamily="34" charset="-122"/>
+                <a:cs typeface="Be Vietnam Pro" pitchFamily="34" charset="-120"/>
+              </a:rPr>
+              <a:t>Nhận</a:t>
+            </a:r>
+            <a:r>
+              <a:rPr lang="en-US" sz="2250" dirty="0" spc="-4" kern="0">
+                <a:solidFill>
+                  <a:srgbClr val="14161C"/>
+                </a:solidFill>
+                <a:latin typeface="Be Vietnam Pro" pitchFamily="34" charset="0"/>
+                <a:ea typeface="Be Vietnam Pro" pitchFamily="34" charset="-122"/>
+                <a:cs typeface="Be Vietnam Pro" pitchFamily="34" charset="-120"/>
+              </a:rPr>
+              <a:t> một</a:t>
+            </a:r>
+            <a:r>
+              <a:rPr lang="en-US" sz="2250" dirty="0" spc="-3" kern="0">
+                <a:solidFill>
+                  <a:srgbClr val="14161C"/>
+                </a:solidFill>
+                <a:latin typeface="Be Vietnam Pro" pitchFamily="34" charset="0"/>
+                <a:ea typeface="Be Vietnam Pro" pitchFamily="34" charset="-122"/>
+                <a:cs typeface="Be Vietnam Pro" pitchFamily="34" charset="-120"/>
+              </a:rPr>
+              <a:t> số,</a:t>
+            </a:r>
+            <a:r>
+              <a:rPr lang="en-US" sz="2250" dirty="0" spc="-24" kern="0">
+                <a:solidFill>
+                  <a:srgbClr val="14161C"/>
+                </a:solidFill>
+                <a:latin typeface="Be Vietnam Pro" pitchFamily="34" charset="0"/>
+                <a:ea typeface="Be Vietnam Pro" pitchFamily="34" charset="-122"/>
+                <a:cs typeface="Be Vietnam Pro" pitchFamily="34" charset="-120"/>
+              </a:rPr>
+              <a:t> trả</a:t>
             </a:r>
             <a:r>
               <a:rPr lang="en-US" sz="2250" dirty="0" spc="2" kern="0">
@@ -8450,40 +8268,29 @@
                 <a:ea typeface="Be Vietnam Pro" pitchFamily="34" charset="-122"/>
                 <a:cs typeface="Be Vietnam Pro" pitchFamily="34" charset="-120"/>
               </a:rPr>
-              <a:t> dụng</a:t>
-            </a:r>
-            <a:r>
-              <a:rPr lang="en-US" sz="2250" dirty="0" spc="4" kern="0">
-                <a:solidFill>
-                  <a:srgbClr val="14161C"/>
-                </a:solidFill>
-                <a:latin typeface="Be Vietnam Pro" pitchFamily="34" charset="0"/>
-                <a:ea typeface="Be Vietnam Pro" pitchFamily="34" charset="-122"/>
-                <a:cs typeface="Be Vietnam Pro" pitchFamily="34" charset="-120"/>
-              </a:rPr>
-              <a:t> phụ</a:t>
-            </a:r>
-            <a:r>
-              <a:rPr lang="en-US" sz="2250" dirty="0" spc="1" kern="0">
-                <a:solidFill>
-                  <a:srgbClr val="14161C"/>
-                </a:solidFill>
-                <a:latin typeface="Be Vietnam Pro" pitchFamily="34" charset="0"/>
-                <a:ea typeface="Be Vietnam Pro" pitchFamily="34" charset="-122"/>
-                <a:cs typeface="Be Vietnam Pro" pitchFamily="34" charset="-120"/>
-              </a:rPr>
-              <a:t> (side</a:t>
-            </a:r>
-            <a:r>
-              <a:rPr lang="en-US" sz="2250" dirty="0" spc="-13" kern="0">
-                <a:solidFill>
-                  <a:srgbClr val="14161C"/>
-                </a:solidFill>
-                <a:latin typeface="Be Vietnam Pro" pitchFamily="34" charset="0"/>
-                <a:ea typeface="Be Vietnam Pro" pitchFamily="34" charset="-122"/>
-                <a:cs typeface="Be Vietnam Pro" pitchFamily="34" charset="-120"/>
-              </a:rPr>
-              <a:t> effect)</a:t>
+              <a:t> đúng</a:t>
+            </a:r>
+            <a:r>
+              <a:rPr lang="en-US" sz="2250" dirty="0" spc="-3" kern="0">
+                <a:solidFill>
+                  <a:srgbClr val="14161C"/>
+                </a:solidFill>
+                <a:latin typeface="Be Vietnam Pro" pitchFamily="34" charset="0"/>
+                <a:ea typeface="Be Vietnam Pro" pitchFamily="34" charset="-122"/>
+                <a:cs typeface="Be Vietnam Pro" pitchFamily="34" charset="-120"/>
+              </a:rPr>
+              <a:t> hoặc</a:t>
+            </a:r>
+            <a:r>
+              <a:rPr lang="en-US" sz="2250" dirty="0" spc="-6" kern="0">
+                <a:solidFill>
+                  <a:srgbClr val="14161C"/>
+                </a:solidFill>
+                <a:latin typeface="Be Vietnam Pro" pitchFamily="34" charset="0"/>
+                <a:ea typeface="Be Vietnam Pro" pitchFamily="34" charset="-122"/>
+                <a:cs typeface="Be Vietnam Pro" pitchFamily="34" charset="-120"/>
+              </a:rPr>
+              <a:t> sai</a:t>
             </a:r>
             <a:endParaRPr lang="en-US" sz="2250" dirty="0"/>
           </a:p>
@@ -8579,7 +8386,7 @@
               <a:buNone/>
             </a:pPr>
             <a:r>
-              <a:rPr lang="en-US" sz="3000" dirty="0" spc="2" kern="0">
+              <a:rPr lang="en-US" sz="3000" dirty="0" spc="-7" kern="0">
                 <a:solidFill>
                   <a:srgbClr val="0F766E"/>
                 </a:solidFill>
@@ -8587,18 +8394,7 @@
                 <a:ea typeface="Bricolage Grotesque ExtraBold" pitchFamily="34" charset="-122"/>
                 <a:cs typeface="Bricolage Grotesque ExtraBold" pitchFamily="34" charset="-120"/>
               </a:rPr>
-              <a:t>Bất</a:t>
-            </a:r>
-            <a:r>
-              <a:rPr lang="en-US" sz="3000" dirty="0" spc="1" kern="0">
-                <a:solidFill>
-                  <a:srgbClr val="0F766E"/>
-                </a:solidFill>
-                <a:latin typeface="Bricolage Grotesque ExtraBold" pitchFamily="34" charset="0"/>
-                <a:ea typeface="Bricolage Grotesque ExtraBold" pitchFamily="34" charset="-122"/>
-                <a:cs typeface="Bricolage Grotesque ExtraBold" pitchFamily="34" charset="-120"/>
-              </a:rPr>
-              <a:t> biến</a:t>
+              <a:t>square</a:t>
             </a:r>
             <a:endParaRPr lang="en-US" sz="3000" dirty="0"/>
           </a:p>
@@ -8632,15 +8428,48 @@
               <a:buNone/>
             </a:pPr>
             <a:r>
-              <a:rPr lang="en-US" sz="2250" dirty="0" spc="-14" kern="0">
-                <a:solidFill>
-                  <a:srgbClr val="14161C"/>
-                </a:solidFill>
-                <a:latin typeface="Be Vietnam Pro" pitchFamily="34" charset="0"/>
-                <a:ea typeface="Be Vietnam Pro" pitchFamily="34" charset="-122"/>
-                <a:cs typeface="Be Vietnam Pro" pitchFamily="34" charset="-120"/>
-              </a:rPr>
-              <a:t>Khuyến</a:t>
+              <a:rPr lang="en-US" sz="2250" dirty="0" spc="-2" kern="0">
+                <a:solidFill>
+                  <a:srgbClr val="14161C"/>
+                </a:solidFill>
+                <a:latin typeface="Be Vietnam Pro" pitchFamily="34" charset="0"/>
+                <a:ea typeface="Be Vietnam Pro" pitchFamily="34" charset="-122"/>
+                <a:cs typeface="Be Vietnam Pro" pitchFamily="34" charset="-120"/>
+              </a:rPr>
+              <a:t>Nhận</a:t>
+            </a:r>
+            <a:r>
+              <a:rPr lang="en-US" sz="2250" dirty="0" spc="-4" kern="0">
+                <a:solidFill>
+                  <a:srgbClr val="14161C"/>
+                </a:solidFill>
+                <a:latin typeface="Be Vietnam Pro" pitchFamily="34" charset="0"/>
+                <a:ea typeface="Be Vietnam Pro" pitchFamily="34" charset="-122"/>
+                <a:cs typeface="Be Vietnam Pro" pitchFamily="34" charset="-120"/>
+              </a:rPr>
+              <a:t> một</a:t>
+            </a:r>
+            <a:r>
+              <a:rPr lang="en-US" sz="2250" dirty="0" spc="-3" kern="0">
+                <a:solidFill>
+                  <a:srgbClr val="14161C"/>
+                </a:solidFill>
+                <a:latin typeface="Be Vietnam Pro" pitchFamily="34" charset="0"/>
+                <a:ea typeface="Be Vietnam Pro" pitchFamily="34" charset="-122"/>
+                <a:cs typeface="Be Vietnam Pro" pitchFamily="34" charset="-120"/>
+              </a:rPr>
+              <a:t> số,</a:t>
+            </a:r>
+            <a:r>
+              <a:rPr lang="en-US" sz="2250" dirty="0" spc="-24" kern="0">
+                <a:solidFill>
+                  <a:srgbClr val="14161C"/>
+                </a:solidFill>
+                <a:latin typeface="Be Vietnam Pro" pitchFamily="34" charset="0"/>
+                <a:ea typeface="Be Vietnam Pro" pitchFamily="34" charset="-122"/>
+                <a:cs typeface="Be Vietnam Pro" pitchFamily="34" charset="-120"/>
+              </a:rPr>
+              <a:t> trả</a:t>
             </a:r>
             <a:r>
               <a:rPr lang="en-US" sz="2250" dirty="0" spc="1" kern="0">
@@ -8651,95 +8480,18 @@
                 <a:ea typeface="Be Vietnam Pro" pitchFamily="34" charset="-122"/>
                 <a:cs typeface="Be Vietnam Pro" pitchFamily="34" charset="-120"/>
               </a:rPr>
-              <a:t> khích</a:t>
-            </a:r>
-            <a:r>
-              <a:rPr lang="en-US" sz="2250" dirty="0" spc="-13" kern="0">
-                <a:solidFill>
-                  <a:srgbClr val="14161C"/>
-                </a:solidFill>
-                <a:latin typeface="Be Vietnam Pro" pitchFamily="34" charset="0"/>
-                <a:ea typeface="Be Vietnam Pro" pitchFamily="34" charset="-122"/>
-                <a:cs typeface="Be Vietnam Pro" pitchFamily="34" charset="-120"/>
-              </a:rPr>
-              <a:t> bất</a:t>
-            </a:r>
-            <a:r>
-              <a:rPr lang="en-US" sz="2250" dirty="0" spc="0" kern="0">
-                <a:solidFill>
-                  <a:srgbClr val="14161C"/>
-                </a:solidFill>
-                <a:latin typeface="Be Vietnam Pro" pitchFamily="34" charset="0"/>
-                <a:ea typeface="Be Vietnam Pro" pitchFamily="34" charset="-122"/>
-                <a:cs typeface="Be Vietnam Pro" pitchFamily="34" charset="-120"/>
-              </a:rPr>
-              <a:t> biến</a:t>
-            </a:r>
-            <a:r>
-              <a:rPr lang="en-US" sz="2250" dirty="0" spc="-6" kern="0">
-                <a:solidFill>
-                  <a:srgbClr val="14161C"/>
-                </a:solidFill>
-                <a:latin typeface="Be Vietnam Pro" pitchFamily="34" charset="0"/>
-                <a:ea typeface="Be Vietnam Pro" pitchFamily="34" charset="-122"/>
-                <a:cs typeface="Be Vietnam Pro" pitchFamily="34" charset="-120"/>
-              </a:rPr>
-              <a:t> (immutability),</a:t>
-            </a:r>
-            <a:r>
-              <a:rPr lang="en-US" sz="2250" dirty="0" spc="-16" kern="0">
-                <a:solidFill>
-                  <a:srgbClr val="14161C"/>
-                </a:solidFill>
-                <a:latin typeface="Be Vietnam Pro" pitchFamily="34" charset="0"/>
-                <a:ea typeface="Be Vietnam Pro" pitchFamily="34" charset="-122"/>
-                <a:cs typeface="Be Vietnam Pro" pitchFamily="34" charset="-120"/>
-              </a:rPr>
-              <a:t> tránh trạng</a:t>
-            </a:r>
-            <a:r>
-              <a:rPr lang="en-US" sz="2250" dirty="0" spc="-2" kern="0">
-                <a:solidFill>
-                  <a:srgbClr val="14161C"/>
-                </a:solidFill>
-                <a:latin typeface="Be Vietnam Pro" pitchFamily="34" charset="0"/>
-                <a:ea typeface="Be Vietnam Pro" pitchFamily="34" charset="-122"/>
-                <a:cs typeface="Be Vietnam Pro" pitchFamily="34" charset="-120"/>
-              </a:rPr>
-              <a:t> thái</a:t>
-            </a:r>
-            <a:r>
-              <a:rPr lang="en-US" sz="2250" dirty="0" spc="-7" kern="0">
-                <a:solidFill>
-                  <a:srgbClr val="14161C"/>
-                </a:solidFill>
-                <a:latin typeface="Be Vietnam Pro" pitchFamily="34" charset="0"/>
-                <a:ea typeface="Be Vietnam Pro" pitchFamily="34" charset="-122"/>
-                <a:cs typeface="Be Vietnam Pro" pitchFamily="34" charset="-120"/>
-              </a:rPr>
-              <a:t> thay</a:t>
-            </a:r>
-            <a:r>
-              <a:rPr lang="en-US" sz="2250" dirty="0" spc="13" kern="0">
-                <a:solidFill>
-                  <a:srgbClr val="14161C"/>
-                </a:solidFill>
-                <a:latin typeface="Be Vietnam Pro" pitchFamily="34" charset="0"/>
-                <a:ea typeface="Be Vietnam Pro" pitchFamily="34" charset="-122"/>
-                <a:cs typeface="Be Vietnam Pro" pitchFamily="34" charset="-120"/>
-              </a:rPr>
-              <a:t> đổi</a:t>
-            </a:r>
-            <a:r>
-              <a:rPr lang="en-US" sz="2250" dirty="0" spc="9" kern="0">
-                <a:solidFill>
-                  <a:srgbClr val="14161C"/>
-                </a:solidFill>
-                <a:latin typeface="Be Vietnam Pro" pitchFamily="34" charset="0"/>
-                <a:ea typeface="Be Vietnam Pro" pitchFamily="34" charset="-122"/>
-                <a:cs typeface="Be Vietnam Pro" pitchFamily="34" charset="-120"/>
-              </a:rPr>
-              <a:t> được</a:t>
+              <a:t> bình</a:t>
+            </a:r>
+            <a:r>
+              <a:rPr lang="en-US" sz="2250" dirty="0" spc="5" kern="0">
+                <a:solidFill>
+                  <a:srgbClr val="14161C"/>
+                </a:solidFill>
+                <a:latin typeface="Be Vietnam Pro" pitchFamily="34" charset="0"/>
+                <a:ea typeface="Be Vietnam Pro" pitchFamily="34" charset="-122"/>
+                <a:cs typeface="Be Vietnam Pro" pitchFamily="34" charset="-120"/>
+              </a:rPr>
+              <a:t> phương</a:t>
             </a:r>
             <a:endParaRPr lang="en-US" sz="2250" dirty="0"/>
           </a:p>
@@ -8835,7 +8587,7 @@
               <a:buNone/>
             </a:pPr>
             <a:r>
-              <a:rPr lang="en-US" sz="3000" dirty="0" kern="0">
+              <a:rPr lang="en-US" sz="3000" dirty="0" spc="1" kern="0">
                 <a:solidFill>
                   <a:srgbClr val="0F766E"/>
                 </a:solidFill>
@@ -8843,7 +8595,29 @@
                 <a:ea typeface="Bricolage Grotesque ExtraBold" pitchFamily="34" charset="-122"/>
                 <a:cs typeface="Bricolage Grotesque ExtraBold" pitchFamily="34" charset="-120"/>
               </a:rPr>
-              <a:t>Công cụ</a:t>
+              <a:t>sum,</a:t>
+            </a:r>
+            <a:r>
+              <a:rPr lang="en-US" sz="3000" dirty="0" spc="-3" kern="0">
+                <a:solidFill>
+                  <a:srgbClr val="0F766E"/>
+                </a:solidFill>
+                <a:latin typeface="Bricolage Grotesque ExtraBold" pitchFamily="34" charset="0"/>
+                <a:ea typeface="Bricolage Grotesque ExtraBold" pitchFamily="34" charset="-122"/>
+                <a:cs typeface="Bricolage Grotesque ExtraBold" pitchFamily="34" charset="-120"/>
+              </a:rPr>
+              <a:t> map,</a:t>
+            </a:r>
+            <a:r>
+              <a:rPr lang="en-US" sz="3000" dirty="0" spc="-4" kern="0">
+                <a:solidFill>
+                  <a:srgbClr val="0F766E"/>
+                </a:solidFill>
+                <a:latin typeface="Bricolage Grotesque ExtraBold" pitchFamily="34" charset="0"/>
+                <a:ea typeface="Bricolage Grotesque ExtraBold" pitchFamily="34" charset="-122"/>
+                <a:cs typeface="Bricolage Grotesque ExtraBold" pitchFamily="34" charset="-120"/>
+              </a:rPr>
+              <a:t> filter</a:t>
             </a:r>
             <a:endParaRPr lang="en-US" sz="3000" dirty="0"/>
           </a:p>
@@ -8877,15 +8651,26 @@
               <a:buNone/>
             </a:pPr>
             <a:r>
-              <a:rPr lang="en-US" sz="2250" dirty="0" spc="-5" kern="0">
-                <a:solidFill>
-                  <a:srgbClr val="14161C"/>
-                </a:solidFill>
-                <a:latin typeface="Be Vietnam Pro" pitchFamily="34" charset="0"/>
-                <a:ea typeface="Be Vietnam Pro" pitchFamily="34" charset="-122"/>
-                <a:cs typeface="Be Vietnam Pro" pitchFamily="34" charset="-120"/>
-              </a:rPr>
-              <a:t>Hàm</a:t>
+              <a:rPr lang="en-US" sz="2250" dirty="0" spc="-2" kern="0">
+                <a:solidFill>
+                  <a:srgbClr val="14161C"/>
+                </a:solidFill>
+                <a:latin typeface="Be Vietnam Pro" pitchFamily="34" charset="0"/>
+                <a:ea typeface="Be Vietnam Pro" pitchFamily="34" charset="-122"/>
+                <a:cs typeface="Be Vietnam Pro" pitchFamily="34" charset="-120"/>
+              </a:rPr>
+              <a:t>Nối</a:t>
+            </a:r>
+            <a:r>
+              <a:rPr lang="en-US" sz="2250" dirty="0" spc="2" kern="0">
+                <a:solidFill>
+                  <a:srgbClr val="14161C"/>
+                </a:solidFill>
+                <a:latin typeface="Be Vietnam Pro" pitchFamily="34" charset="0"/>
+                <a:ea typeface="Be Vietnam Pro" pitchFamily="34" charset="-122"/>
+                <a:cs typeface="Be Vietnam Pro" pitchFamily="34" charset="-120"/>
+              </a:rPr>
+              <a:t> các</a:t>
             </a:r>
             <a:r>
               <a:rPr lang="en-US" sz="2250" dirty="0" spc="-1" kern="0">
@@ -8896,18 +8681,18 @@
                 <a:ea typeface="Be Vietnam Pro" pitchFamily="34" charset="-122"/>
                 <a:cs typeface="Be Vietnam Pro" pitchFamily="34" charset="-120"/>
               </a:rPr>
-              <a:t> bậc cao,</a:t>
-            </a:r>
-            <a:r>
-              <a:rPr lang="en-US" sz="2250" dirty="0" spc="16" kern="0">
-                <a:solidFill>
-                  <a:srgbClr val="14161C"/>
-                </a:solidFill>
-                <a:latin typeface="Be Vietnam Pro" pitchFamily="34" charset="0"/>
-                <a:ea typeface="Be Vietnam Pro" pitchFamily="34" charset="-122"/>
-                <a:cs typeface="Be Vietnam Pro" pitchFamily="34" charset="-120"/>
-              </a:rPr>
-              <a:t> đệ</a:t>
+              <a:t> hàm</a:t>
+            </a:r>
+            <a:r>
+              <a:rPr lang="en-US" sz="2250" dirty="0" spc="-16" kern="0">
+                <a:solidFill>
+                  <a:srgbClr val="14161C"/>
+                </a:solidFill>
+                <a:latin typeface="Be Vietnam Pro" pitchFamily="34" charset="0"/>
+                <a:ea typeface="Be Vietnam Pro" pitchFamily="34" charset="-122"/>
+                <a:cs typeface="Be Vietnam Pro" pitchFamily="34" charset="-120"/>
+              </a:rPr>
+              <a:t> trên,</a:t>
             </a:r>
             <a:r>
               <a:rPr lang="en-US" sz="2250" dirty="0" spc="1" kern="0">
@@ -8918,62 +8703,40 @@
                 <a:ea typeface="Be Vietnam Pro" pitchFamily="34" charset="-122"/>
                 <a:cs typeface="Be Vietnam Pro" pitchFamily="34" charset="-120"/>
               </a:rPr>
-              <a:t> quy</a:t>
-            </a:r>
-            <a:r>
-              <a:rPr lang="en-US" sz="2250" dirty="0" spc="-16" kern="0">
-                <a:solidFill>
-                  <a:srgbClr val="14161C"/>
-                </a:solidFill>
-                <a:latin typeface="Be Vietnam Pro" pitchFamily="34" charset="0"/>
-                <a:ea typeface="Be Vietnam Pro" pitchFamily="34" charset="-122"/>
-                <a:cs typeface="Be Vietnam Pro" pitchFamily="34" charset="-120"/>
-              </a:rPr>
-              <a:t> và</a:t>
-            </a:r>
-            <a:r>
-              <a:rPr lang="en-US" sz="2250" dirty="0" spc="1" kern="0">
-                <a:solidFill>
-                  <a:srgbClr val="14161C"/>
-                </a:solidFill>
-                <a:latin typeface="Be Vietnam Pro" pitchFamily="34" charset="0"/>
-                <a:ea typeface="Be Vietnam Pro" pitchFamily="34" charset="-122"/>
-                <a:cs typeface="Be Vietnam Pro" pitchFamily="34" charset="-120"/>
-              </a:rPr>
-              <a:t> lập</a:t>
-            </a:r>
-            <a:r>
-              <a:rPr lang="en-US" sz="2250" dirty="0" spc="7" kern="0">
-                <a:solidFill>
-                  <a:srgbClr val="14161C"/>
-                </a:solidFill>
-                <a:latin typeface="Be Vietnam Pro" pitchFamily="34" charset="0"/>
-                <a:ea typeface="Be Vietnam Pro" pitchFamily="34" charset="-122"/>
-                <a:cs typeface="Be Vietnam Pro" pitchFamily="34" charset="-120"/>
-              </a:rPr>
-              <a:t> trình</a:t>
-            </a:r>
-            <a:r>
-              <a:rPr lang="en-US" sz="2250" dirty="0" spc="-2" kern="0">
-                <a:solidFill>
-                  <a:srgbClr val="14161C"/>
-                </a:solidFill>
-                <a:latin typeface="Be Vietnam Pro" pitchFamily="34" charset="0"/>
-                <a:ea typeface="Be Vietnam Pro" pitchFamily="34" charset="-122"/>
-                <a:cs typeface="Be Vietnam Pro" pitchFamily="34" charset="-120"/>
-              </a:rPr>
-              <a:t> khai</a:t>
-            </a:r>
-            <a:r>
-              <a:rPr lang="en-US" sz="2250" dirty="0" spc="-3" kern="0">
-                <a:solidFill>
-                  <a:srgbClr val="14161C"/>
-                </a:solidFill>
-                <a:latin typeface="Be Vietnam Pro" pitchFamily="34" charset="0"/>
-                <a:ea typeface="Be Vietnam Pro" pitchFamily="34" charset="-122"/>
-                <a:cs typeface="Be Vietnam Pro" pitchFamily="34" charset="-120"/>
-              </a:rPr>
-              <a:t> báo</a:t>
+              <a:t> không</a:t>
+            </a:r>
+            <a:r>
+              <a:rPr lang="en-US" sz="2250" dirty="0" spc="12" kern="0">
+                <a:solidFill>
+                  <a:srgbClr val="14161C"/>
+                </a:solidFill>
+                <a:latin typeface="Be Vietnam Pro" pitchFamily="34" charset="0"/>
+                <a:ea typeface="Be Vietnam Pro" pitchFamily="34" charset="-122"/>
+                <a:cs typeface="Be Vietnam Pro" pitchFamily="34" charset="-120"/>
+              </a:rPr>
+              <a:t> đổi</a:t>
+            </a:r>
+            <a:r>
+              <a:rPr lang="en-US" sz="2250" dirty="0" spc="0" kern="0">
+                <a:solidFill>
+                  <a:srgbClr val="14161C"/>
+                </a:solidFill>
+                <a:latin typeface="Be Vietnam Pro" pitchFamily="34" charset="0"/>
+                <a:ea typeface="Be Vietnam Pro" pitchFamily="34" charset="-122"/>
+                <a:cs typeface="Be Vietnam Pro" pitchFamily="34" charset="-120"/>
+              </a:rPr>
+              <a:t> biến</a:t>
+            </a:r>
+            <a:r>
+              <a:rPr lang="en-US" sz="2250" dirty="0" spc="-1" kern="0">
+                <a:solidFill>
+                  <a:srgbClr val="14161C"/>
+                </a:solidFill>
+                <a:latin typeface="Be Vietnam Pro" pitchFamily="34" charset="0"/>
+                <a:ea typeface="Be Vietnam Pro" pitchFamily="34" charset="-122"/>
+                <a:cs typeface="Be Vietnam Pro" pitchFamily="34" charset="-120"/>
+              </a:rPr>
+              <a:t> nào</a:t>
             </a:r>
             <a:endParaRPr lang="en-US" sz="2250" dirty="0"/>
           </a:p>
@@ -9069,7 +8832,7 @@
               <a:buNone/>
             </a:pPr>
             <a:r>
-              <a:rPr lang="en-US" sz="3000" dirty="0" spc="-22" kern="0">
+              <a:rPr lang="en-US" sz="3000" dirty="0" spc="3" kern="0">
                 <a:solidFill>
                   <a:srgbClr val="0F766E"/>
                 </a:solidFill>
@@ -9077,10 +8840,10 @@
                 <a:ea typeface="Bricolage Grotesque ExtraBold" pitchFamily="34" charset="-122"/>
                 <a:cs typeface="Bricolage Grotesque ExtraBold" pitchFamily="34" charset="-120"/>
               </a:rPr>
-              <a:t>Ví</a:t>
-            </a:r>
-            <a:r>
-              <a:rPr lang="en-US" sz="3000" dirty="0" spc="-1" kern="0">
+              <a:t>Hàm</a:t>
+            </a:r>
+            <a:r>
+              <a:rPr lang="en-US" sz="3000" dirty="0" spc="0" kern="0">
                 <a:solidFill>
                   <a:srgbClr val="0F766E"/>
                 </a:solidFill>
@@ -9088,7 +8851,18 @@
                 <a:ea typeface="Bricolage Grotesque ExtraBold" pitchFamily="34" charset="-122"/>
                 <a:cs typeface="Bricolage Grotesque ExtraBold" pitchFamily="34" charset="-120"/>
               </a:rPr>
-              <a:t> dụ</a:t>
+              <a:t> bậc</a:t>
+            </a:r>
+            <a:r>
+              <a:rPr lang="en-US" sz="3000" dirty="0" spc="2" kern="0">
+                <a:solidFill>
+                  <a:srgbClr val="0F766E"/>
+                </a:solidFill>
+                <a:latin typeface="Bricolage Grotesque ExtraBold" pitchFamily="34" charset="0"/>
+                <a:ea typeface="Bricolage Grotesque ExtraBold" pitchFamily="34" charset="-122"/>
+                <a:cs typeface="Bricolage Grotesque ExtraBold" pitchFamily="34" charset="-120"/>
+              </a:rPr>
+              <a:t> cao</a:t>
             </a:r>
             <a:endParaRPr lang="en-US" sz="3000" dirty="0"/>
           </a:p>
@@ -9122,26 +8896,37 @@
               <a:buNone/>
             </a:pPr>
             <a:r>
-              <a:rPr lang="en-US" sz="2250" dirty="0" spc="-15" kern="0">
-                <a:solidFill>
-                  <a:srgbClr val="14161C"/>
-                </a:solidFill>
-                <a:latin typeface="Be Vietnam Pro" pitchFamily="34" charset="0"/>
-                <a:ea typeface="Be Vietnam Pro" pitchFamily="34" charset="-122"/>
-                <a:cs typeface="Be Vietnam Pro" pitchFamily="34" charset="-120"/>
-              </a:rPr>
-              <a:t>Haskell,</a:t>
-            </a:r>
-            <a:r>
-              <a:rPr lang="en-US" sz="2250" dirty="0" spc="2" kern="0">
-                <a:solidFill>
-                  <a:srgbClr val="14161C"/>
-                </a:solidFill>
-                <a:latin typeface="Be Vietnam Pro" pitchFamily="34" charset="0"/>
-                <a:ea typeface="Be Vietnam Pro" pitchFamily="34" charset="-122"/>
-                <a:cs typeface="Be Vietnam Pro" pitchFamily="34" charset="-120"/>
-              </a:rPr>
-              <a:t> Lisp,</a:t>
+              <a:rPr lang="en-US" sz="2250" dirty="0" spc="-1" kern="0">
+                <a:solidFill>
+                  <a:srgbClr val="14161C"/>
+                </a:solidFill>
+                <a:latin typeface="Be Vietnam Pro" pitchFamily="34" charset="0"/>
+                <a:ea typeface="Be Vietnam Pro" pitchFamily="34" charset="-122"/>
+                <a:cs typeface="Be Vietnam Pro" pitchFamily="34" charset="-120"/>
+              </a:rPr>
+              <a:t>map</a:t>
+            </a:r>
+            <a:r>
+              <a:rPr lang="en-US" sz="2250" dirty="0" spc="-17" kern="0">
+                <a:solidFill>
+                  <a:srgbClr val="14161C"/>
+                </a:solidFill>
+                <a:latin typeface="Be Vietnam Pro" pitchFamily="34" charset="0"/>
+                <a:ea typeface="Be Vietnam Pro" pitchFamily="34" charset="-122"/>
+                <a:cs typeface="Be Vietnam Pro" pitchFamily="34" charset="-120"/>
+              </a:rPr>
+              <a:t> và</a:t>
+            </a:r>
+            <a:r>
+              <a:rPr lang="en-US" sz="2250" dirty="0" spc="-5" kern="0">
+                <a:solidFill>
+                  <a:srgbClr val="14161C"/>
+                </a:solidFill>
+                <a:latin typeface="Be Vietnam Pro" pitchFamily="34" charset="0"/>
+                <a:ea typeface="Be Vietnam Pro" pitchFamily="34" charset="-122"/>
+                <a:cs typeface="Be Vietnam Pro" pitchFamily="34" charset="-120"/>
+              </a:rPr>
+              <a:t> filter</a:t>
             </a:r>
             <a:r>
               <a:rPr lang="en-US" sz="2250" dirty="0" spc="0" kern="0">
@@ -9152,29 +8937,29 @@
                 <a:ea typeface="Be Vietnam Pro" pitchFamily="34" charset="-122"/>
                 <a:cs typeface="Be Vietnam Pro" pitchFamily="34" charset="-120"/>
               </a:rPr>
-              <a:t> Scala</a:t>
-            </a:r>
-            <a:r>
-              <a:rPr lang="en-US" sz="2250" dirty="0" spc="-17" kern="0">
-                <a:solidFill>
-                  <a:srgbClr val="14161C"/>
-                </a:solidFill>
-                <a:latin typeface="Be Vietnam Pro" pitchFamily="34" charset="0"/>
-                <a:ea typeface="Be Vietnam Pro" pitchFamily="34" charset="-122"/>
-                <a:cs typeface="Be Vietnam Pro" pitchFamily="34" charset="-120"/>
-              </a:rPr>
-              <a:t> và</a:t>
-            </a:r>
-            <a:r>
-              <a:rPr lang="en-US" sz="2250" dirty="0" spc="0" kern="0">
-                <a:solidFill>
-                  <a:srgbClr val="14161C"/>
-                </a:solidFill>
-                <a:latin typeface="Be Vietnam Pro" pitchFamily="34" charset="0"/>
-                <a:ea typeface="Be Vietnam Pro" pitchFamily="34" charset="-122"/>
-                <a:cs typeface="Be Vietnam Pro" pitchFamily="34" charset="-120"/>
-              </a:rPr>
-              <a:t> tính năng</a:t>
+              <a:t> nhận</a:t>
+            </a:r>
+            <a:r>
+              <a:rPr lang="en-US" sz="2250" dirty="0" spc="-3" kern="0">
+                <a:solidFill>
+                  <a:srgbClr val="14161C"/>
+                </a:solidFill>
+                <a:latin typeface="Be Vietnam Pro" pitchFamily="34" charset="0"/>
+                <a:ea typeface="Be Vietnam Pro" pitchFamily="34" charset="-122"/>
+                <a:cs typeface="Be Vietnam Pro" pitchFamily="34" charset="-120"/>
+              </a:rPr>
+              <a:t> một</a:t>
+            </a:r>
+            <a:r>
+              <a:rPr lang="en-US" sz="2250" dirty="0" spc="-2" kern="0">
+                <a:solidFill>
+                  <a:srgbClr val="14161C"/>
+                </a:solidFill>
+                <a:latin typeface="Be Vietnam Pro" pitchFamily="34" charset="0"/>
+                <a:ea typeface="Be Vietnam Pro" pitchFamily="34" charset="-122"/>
+                <a:cs typeface="Be Vietnam Pro" pitchFamily="34" charset="-120"/>
+              </a:rPr>
+              <a:t> hàm</a:t>
             </a:r>
             <a:r>
               <a:rPr lang="en-US" sz="2250" dirty="0" spc="-1" kern="0">
@@ -9185,29 +8970,29 @@
                 <a:ea typeface="Be Vietnam Pro" pitchFamily="34" charset="-122"/>
                 <a:cs typeface="Be Vietnam Pro" pitchFamily="34" charset="-120"/>
               </a:rPr>
-              <a:t> hàm</a:t>
-            </a:r>
-            <a:r>
-              <a:rPr lang="en-US" sz="2250" dirty="0" spc="-16" kern="0">
-                <a:solidFill>
-                  <a:srgbClr val="14161C"/>
-                </a:solidFill>
-                <a:latin typeface="Be Vietnam Pro" pitchFamily="34" charset="0"/>
-                <a:ea typeface="Be Vietnam Pro" pitchFamily="34" charset="-122"/>
-                <a:cs typeface="Be Vietnam Pro" pitchFamily="34" charset="-120"/>
-              </a:rPr>
-              <a:t> trong</a:t>
-            </a:r>
-            <a:r>
-              <a:rPr lang="en-US" sz="2250" dirty="0" spc="-7" kern="0">
-                <a:solidFill>
-                  <a:srgbClr val="14161C"/>
-                </a:solidFill>
-                <a:latin typeface="Be Vietnam Pro" pitchFamily="34" charset="0"/>
-                <a:ea typeface="Be Vietnam Pro" pitchFamily="34" charset="-122"/>
-                <a:cs typeface="Be Vietnam Pro" pitchFamily="34" charset="-120"/>
-              </a:rPr>
-              <a:t> JavaScript</a:t>
+              <a:t> làm</a:t>
+            </a:r>
+            <a:r>
+              <a:rPr lang="en-US" sz="2250" dirty="0" spc="11" kern="0">
+                <a:solidFill>
+                  <a:srgbClr val="14161C"/>
+                </a:solidFill>
+                <a:latin typeface="Be Vietnam Pro" pitchFamily="34" charset="0"/>
+                <a:ea typeface="Be Vietnam Pro" pitchFamily="34" charset="-122"/>
+                <a:cs typeface="Be Vietnam Pro" pitchFamily="34" charset="-120"/>
+              </a:rPr>
+              <a:t> đầu</a:t>
+            </a:r>
+            <a:r>
+              <a:rPr lang="en-US" sz="2250" dirty="0" spc="-14" kern="0">
+                <a:solidFill>
+                  <a:srgbClr val="14161C"/>
+                </a:solidFill>
+                <a:latin typeface="Be Vietnam Pro" pitchFamily="34" charset="0"/>
+                <a:ea typeface="Be Vietnam Pro" pitchFamily="34" charset="-122"/>
+                <a:cs typeface="Be Vietnam Pro" pitchFamily="34" charset="-120"/>
+              </a:rPr>
+              <a:t> vào</a:t>
             </a:r>
             <a:endParaRPr lang="en-US" sz="2250" dirty="0"/>
           </a:p>
@@ -9802,7 +9587,7 @@
               <a:buNone/>
             </a:pPr>
             <a:r>
-              <a:rPr lang="en-US" sz="3150" b="1" dirty="0" spc="38" kern="0">
+              <a:rPr lang="en-US" sz="3150" b="1" dirty="0" spc="-4" kern="0">
                 <a:solidFill>
                   <a:srgbClr val="FFB454"/>
                 </a:solidFill>
@@ -9810,10 +9595,10 @@
                 <a:ea typeface="Be Vietnam Pro" pitchFamily="34" charset="-122"/>
                 <a:cs typeface="Be Vietnam Pro" pitchFamily="34" charset="-120"/>
               </a:rPr>
-              <a:t>Dựng</a:t>
-            </a:r>
-            <a:r>
-              <a:rPr lang="en-US" sz="3150" b="1" dirty="0" spc="5" kern="0">
+              <a:t>Đối</a:t>
+            </a:r>
+            <a:r>
+              <a:rPr lang="en-US" sz="3150" b="1" dirty="0" spc="8" kern="0">
                 <a:solidFill>
                   <a:srgbClr val="FFB454"/>
                 </a:solidFill>
@@ -9821,10 +9606,10 @@
                 <a:ea typeface="Be Vietnam Pro" pitchFamily="34" charset="-122"/>
                 <a:cs typeface="Be Vietnam Pro" pitchFamily="34" charset="-120"/>
               </a:rPr>
-              <a:t> chương</a:t>
-            </a:r>
-            <a:r>
-              <a:rPr lang="en-US" sz="3150" b="1" dirty="0" spc="9" kern="0">
+              <a:t> tượng</a:t>
+            </a:r>
+            <a:r>
+              <a:rPr lang="en-US" sz="3150" b="1" dirty="0" spc="0" kern="0">
                 <a:solidFill>
                   <a:srgbClr val="FFB454"/>
                 </a:solidFill>
@@ -9832,10 +9617,10 @@
                 <a:ea typeface="Be Vietnam Pro" pitchFamily="34" charset="-122"/>
                 <a:cs typeface="Be Vietnam Pro" pitchFamily="34" charset="-120"/>
               </a:rPr>
-              <a:t> trình</a:t>
-            </a:r>
-            <a:r>
-              <a:rPr lang="en-US" sz="3150" b="1" dirty="0" spc="2" kern="0">
+              <a:t> giữ</a:t>
+            </a:r>
+            <a:r>
+              <a:rPr lang="en-US" sz="3150" b="1" dirty="0" spc="-12" kern="0">
                 <a:solidFill>
                   <a:srgbClr val="FFB454"/>
                 </a:solidFill>
@@ -9843,10 +9628,10 @@
                 <a:ea typeface="Be Vietnam Pro" pitchFamily="34" charset="-122"/>
                 <a:cs typeface="Be Vietnam Pro" pitchFamily="34" charset="-120"/>
               </a:rPr>
-              <a:t> từ</a:t>
-            </a:r>
-            <a:r>
-              <a:rPr lang="en-US" sz="3150" b="1" dirty="0" spc="-3" kern="0">
+              <a:t> trạng</a:t>
+            </a:r>
+            <a:r>
+              <a:rPr lang="en-US" sz="3150" b="1" dirty="0" spc="-2" kern="0">
                 <a:solidFill>
                   <a:srgbClr val="FFB454"/>
                 </a:solidFill>
@@ -9854,10 +9639,10 @@
                 <a:ea typeface="Be Vietnam Pro" pitchFamily="34" charset="-122"/>
                 <a:cs typeface="Be Vietnam Pro" pitchFamily="34" charset="-120"/>
               </a:rPr>
-              <a:t> các</a:t>
-            </a:r>
-            <a:r>
-              <a:rPr lang="en-US" sz="3150" b="1" dirty="0" spc="6" kern="0">
+              <a:t> thái</a:t>
+            </a:r>
+            <a:r>
+              <a:rPr lang="en-US" sz="3150" b="1" dirty="0" spc="-28" kern="0">
                 <a:solidFill>
                   <a:srgbClr val="FFB454"/>
                 </a:solidFill>
@@ -9865,10 +9650,10 @@
                 <a:ea typeface="Be Vietnam Pro" pitchFamily="34" charset="-122"/>
                 <a:cs typeface="Be Vietnam Pro" pitchFamily="34" charset="-120"/>
               </a:rPr>
-              <a:t> đối</a:t>
-            </a:r>
-            <a:r>
-              <a:rPr lang="en-US" sz="3150" b="1" dirty="0" spc="8" kern="0">
+              <a:t> và</a:t>
+            </a:r>
+            <a:r>
+              <a:rPr lang="en-US" sz="3150" b="1" dirty="0" spc="4" kern="0">
                 <a:solidFill>
                   <a:srgbClr val="FFB454"/>
                 </a:solidFill>
@@ -9876,7 +9661,18 @@
                 <a:ea typeface="Be Vietnam Pro" pitchFamily="34" charset="-122"/>
                 <a:cs typeface="Be Vietnam Pro" pitchFamily="34" charset="-120"/>
               </a:rPr>
-              <a:t> tượng</a:t>
+              <a:t> phương</a:t>
+            </a:r>
+            <a:r>
+              <a:rPr lang="en-US" sz="3150" b="1" dirty="0" spc="15" kern="0">
+                <a:solidFill>
+                  <a:srgbClr val="FFB454"/>
+                </a:solidFill>
+                <a:latin typeface="Be Vietnam Pro" pitchFamily="34" charset="0"/>
+                <a:ea typeface="Be Vietnam Pro" pitchFamily="34" charset="-122"/>
+                <a:cs typeface="Be Vietnam Pro" pitchFamily="34" charset="-120"/>
+              </a:rPr>
+              <a:t> thức</a:t>
             </a:r>
             <a:endParaRPr lang="en-US" sz="3150" dirty="0"/>
           </a:p>
@@ -9910,6 +9706,17 @@
               <a:buNone/>
             </a:pPr>
             <a:r>
+              <a:rPr lang="en-US" sz="2700" dirty="0" spc="-60" kern="0">
+                <a:solidFill>
+                  <a:srgbClr val="F3EEE3"/>
+                </a:solidFill>
+                <a:latin typeface="Be Vietnam Pro" pitchFamily="34" charset="0"/>
+                <a:ea typeface="Be Vietnam Pro" pitchFamily="34" charset="-122"/>
+                <a:cs typeface="Be Vietnam Pro" pitchFamily="34" charset="-120"/>
+              </a:rPr>
+              <a:t>Trạng</a:t>
+            </a:r>
+            <a:r>
               <a:rPr lang="en-US" sz="2700" dirty="0" spc="0" kern="0">
                 <a:solidFill>
                   <a:srgbClr val="F3EEE3"/>
@@ -9918,84 +9725,62 @@
                 <a:ea typeface="Be Vietnam Pro" pitchFamily="34" charset="-122"/>
                 <a:cs typeface="Be Vietnam Pro" pitchFamily="34" charset="-120"/>
               </a:rPr>
-              <a:t>Đối</a:t>
-            </a:r>
-            <a:r>
-              <a:rPr lang="en-US" sz="2700" dirty="0" spc="7" kern="0">
-                <a:solidFill>
-                  <a:srgbClr val="F3EEE3"/>
-                </a:solidFill>
-                <a:latin typeface="Be Vietnam Pro" pitchFamily="34" charset="0"/>
-                <a:ea typeface="Be Vietnam Pro" pitchFamily="34" charset="-122"/>
-                <a:cs typeface="Be Vietnam Pro" pitchFamily="34" charset="-120"/>
-              </a:rPr>
-              <a:t> tượng</a:t>
-            </a:r>
-            <a:r>
-              <a:rPr lang="en-US" sz="2700" dirty="0" spc="6" kern="0">
-                <a:solidFill>
-                  <a:srgbClr val="F3EEE3"/>
-                </a:solidFill>
-                <a:latin typeface="Be Vietnam Pro" pitchFamily="34" charset="0"/>
-                <a:ea typeface="Be Vietnam Pro" pitchFamily="34" charset="-122"/>
-                <a:cs typeface="Be Vietnam Pro" pitchFamily="34" charset="-120"/>
-              </a:rPr>
-              <a:t> chứa</a:t>
-            </a:r>
-            <a:r>
-              <a:rPr lang="en-US" sz="2700" dirty="0" spc="-3" kern="0">
-                <a:solidFill>
-                  <a:srgbClr val="F3EEE3"/>
-                </a:solidFill>
-                <a:latin typeface="Be Vietnam Pro" pitchFamily="34" charset="0"/>
-                <a:ea typeface="Be Vietnam Pro" pitchFamily="34" charset="-122"/>
-                <a:cs typeface="Be Vietnam Pro" pitchFamily="34" charset="-120"/>
-              </a:rPr>
-              <a:t> dữ</a:t>
-            </a:r>
-            <a:r>
-              <a:rPr lang="en-US" sz="2700" dirty="0" spc="-1" kern="0">
-                <a:solidFill>
-                  <a:srgbClr val="F3EEE3"/>
-                </a:solidFill>
-                <a:latin typeface="Be Vietnam Pro" pitchFamily="34" charset="0"/>
-                <a:ea typeface="Be Vietnam Pro" pitchFamily="34" charset="-122"/>
-                <a:cs typeface="Be Vietnam Pro" pitchFamily="34" charset="-120"/>
-              </a:rPr>
-              <a:t> liệu</a:t>
-            </a:r>
-            <a:r>
-              <a:rPr lang="en-US" sz="2700" dirty="0" spc="-17" kern="0">
-                <a:solidFill>
-                  <a:srgbClr val="F3EEE3"/>
-                </a:solidFill>
-                <a:latin typeface="Be Vietnam Pro" pitchFamily="34" charset="0"/>
-                <a:ea typeface="Be Vietnam Pro" pitchFamily="34" charset="-122"/>
-                <a:cs typeface="Be Vietnam Pro" pitchFamily="34" charset="-120"/>
-              </a:rPr>
-              <a:t> và</a:t>
-            </a:r>
-            <a:r>
-              <a:rPr lang="en-US" sz="2700" dirty="0" spc="4" kern="0">
-                <a:solidFill>
-                  <a:srgbClr val="F3EEE3"/>
-                </a:solidFill>
-                <a:latin typeface="Be Vietnam Pro" pitchFamily="34" charset="0"/>
-                <a:ea typeface="Be Vietnam Pro" pitchFamily="34" charset="-122"/>
-                <a:cs typeface="Be Vietnam Pro" pitchFamily="34" charset="-120"/>
-              </a:rPr>
-              <a:t> phương</a:t>
-            </a:r>
-            <a:r>
-              <a:rPr lang="en-US" sz="2700" dirty="0" spc="7" kern="0">
-                <a:solidFill>
-                  <a:srgbClr val="F3EEE3"/>
-                </a:solidFill>
-                <a:latin typeface="Be Vietnam Pro" pitchFamily="34" charset="0"/>
-                <a:ea typeface="Be Vietnam Pro" pitchFamily="34" charset="-122"/>
-                <a:cs typeface="Be Vietnam Pro" pitchFamily="34" charset="-120"/>
-              </a:rPr>
-              <a:t> thức.</a:t>
+              <a:t> thái</a:t>
+            </a:r>
+            <a:r>
+              <a:rPr lang="en-US" sz="2700" dirty="0" spc="-22" kern="0">
+                <a:solidFill>
+                  <a:srgbClr val="F3EEE3"/>
+                </a:solidFill>
+                <a:latin typeface="Be Vietnam Pro" pitchFamily="34" charset="0"/>
+                <a:ea typeface="Be Vietnam Pro" pitchFamily="34" charset="-122"/>
+                <a:cs typeface="Be Vietnam Pro" pitchFamily="34" charset="-120"/>
+              </a:rPr>
+              <a:t> total</a:t>
+            </a:r>
+            <a:r>
+              <a:rPr lang="en-US" sz="2700" dirty="0" spc="-2" kern="0">
+                <a:solidFill>
+                  <a:srgbClr val="F3EEE3"/>
+                </a:solidFill>
+                <a:latin typeface="Be Vietnam Pro" pitchFamily="34" charset="0"/>
+                <a:ea typeface="Be Vietnam Pro" pitchFamily="34" charset="-122"/>
+                <a:cs typeface="Be Vietnam Pro" pitchFamily="34" charset="-120"/>
+              </a:rPr>
+              <a:t> nằm</a:t>
+            </a:r>
+            <a:r>
+              <a:rPr lang="en-US" sz="2700" dirty="0" spc="-20" kern="0">
+                <a:solidFill>
+                  <a:srgbClr val="F3EEE3"/>
+                </a:solidFill>
+                <a:latin typeface="Be Vietnam Pro" pitchFamily="34" charset="0"/>
+                <a:ea typeface="Be Vietnam Pro" pitchFamily="34" charset="-122"/>
+                <a:cs typeface="Be Vietnam Pro" pitchFamily="34" charset="-120"/>
+              </a:rPr>
+              <a:t> trong</a:t>
+            </a:r>
+            <a:r>
+              <a:rPr lang="en-US" sz="2700" dirty="0" spc="12" kern="0">
+                <a:solidFill>
+                  <a:srgbClr val="F3EEE3"/>
+                </a:solidFill>
+                <a:latin typeface="Be Vietnam Pro" pitchFamily="34" charset="0"/>
+                <a:ea typeface="Be Vietnam Pro" pitchFamily="34" charset="-122"/>
+                <a:cs typeface="Be Vietnam Pro" pitchFamily="34" charset="-120"/>
+              </a:rPr>
+              <a:t> đối</a:t>
+            </a:r>
+            <a:r>
+              <a:rPr lang="en-US" sz="2700" dirty="0" spc="5" kern="0">
+                <a:solidFill>
+                  <a:srgbClr val="F3EEE3"/>
+                </a:solidFill>
+                <a:latin typeface="Be Vietnam Pro" pitchFamily="34" charset="0"/>
+                <a:ea typeface="Be Vietnam Pro" pitchFamily="34" charset="-122"/>
+                <a:cs typeface="Be Vietnam Pro" pitchFamily="34" charset="-120"/>
+              </a:rPr>
+              <a:t> tượng.</a:t>
             </a:r>
             <a:endParaRPr lang="en-US" sz="2700" dirty="0"/>
           </a:p>
@@ -10073,15 +9858,15 @@
               <a:buNone/>
             </a:pPr>
             <a:r>
-              <a:rPr lang="en-US" sz="2250" b="1" dirty="0" spc="-6" kern="0">
-                <a:solidFill>
-                  <a:srgbClr val="14161C"/>
-                </a:solidFill>
-                <a:latin typeface="Be Vietnam Pro" pitchFamily="34" charset="0"/>
-                <a:ea typeface="Be Vietnam Pro" pitchFamily="34" charset="-122"/>
-                <a:cs typeface="Be Vietnam Pro" pitchFamily="34" charset="-120"/>
-              </a:rPr>
-              <a:t>interface</a:t>
+              <a:rPr lang="en-US" sz="2250" b="1" dirty="0" spc="4" kern="0">
+                <a:solidFill>
+                  <a:srgbClr val="14161C"/>
+                </a:solidFill>
+                <a:latin typeface="Be Vietnam Pro" pitchFamily="34" charset="0"/>
+                <a:ea typeface="Be Vietnam Pro" pitchFamily="34" charset="-122"/>
+                <a:cs typeface="Be Vietnam Pro" pitchFamily="34" charset="-120"/>
+              </a:rPr>
+              <a:t>add</a:t>
             </a:r>
             <a:endParaRPr lang="en-US" sz="2250" dirty="0"/>
           </a:p>
@@ -10243,18 +10028,18 @@
                 <a:ea typeface="Be Vietnam Pro" pitchFamily="34" charset="-122"/>
                 <a:cs typeface="Be Vietnam Pro" pitchFamily="34" charset="-120"/>
               </a:rPr>
-              <a:t>Ba</a:t>
-            </a:r>
-            <a:r>
-              <a:rPr lang="en-US" sz="2550" dirty="0" spc="-1" kern="0">
-                <a:solidFill>
-                  <a:srgbClr val="F3EEE3"/>
-                </a:solidFill>
-                <a:latin typeface="Be Vietnam Pro" pitchFamily="34" charset="0"/>
-                <a:ea typeface="Be Vietnam Pro" pitchFamily="34" charset="-122"/>
-                <a:cs typeface="Be Vietnam Pro" pitchFamily="34" charset="-120"/>
-              </a:rPr>
-              <a:t> ý</a:t>
+              <a:t>Bên</a:t>
+            </a:r>
+            <a:r>
+              <a:rPr lang="en-US" sz="2550" dirty="0" spc="-11" kern="0">
+                <a:solidFill>
+                  <a:srgbClr val="F3EEE3"/>
+                </a:solidFill>
+                <a:latin typeface="Be Vietnam Pro" pitchFamily="34" charset="0"/>
+                <a:ea typeface="Be Vietnam Pro" pitchFamily="34" charset="-122"/>
+                <a:cs typeface="Be Vietnam Pro" pitchFamily="34" charset="-120"/>
+              </a:rPr>
+              <a:t> ngoài</a:t>
             </a:r>
             <a:r>
               <a:rPr lang="en-US" sz="2550" dirty="0" spc="1" kern="0">
@@ -10265,84 +10050,62 @@
                 <a:ea typeface="Be Vietnam Pro" pitchFamily="34" charset="-122"/>
                 <a:cs typeface="Be Vietnam Pro" pitchFamily="34" charset="-120"/>
               </a:rPr>
-              <a:t> chính:</a:t>
-            </a:r>
-            <a:r>
-              <a:rPr lang="en-US" sz="2550" dirty="0" spc="-37" kern="0">
-                <a:solidFill>
-                  <a:srgbClr val="F3EEE3"/>
-                </a:solidFill>
-                <a:latin typeface="Be Vietnam Pro" pitchFamily="34" charset="0"/>
-                <a:ea typeface="Be Vietnam Pro" pitchFamily="34" charset="-122"/>
-                <a:cs typeface="Be Vietnam Pro" pitchFamily="34" charset="-120"/>
-              </a:rPr>
-              <a:t> kế</a:t>
-            </a:r>
-            <a:r>
-              <a:rPr lang="en-US" sz="2550" dirty="0" spc="5" kern="0">
-                <a:solidFill>
-                  <a:srgbClr val="F3EEE3"/>
-                </a:solidFill>
-                <a:latin typeface="Be Vietnam Pro" pitchFamily="34" charset="0"/>
-                <a:ea typeface="Be Vietnam Pro" pitchFamily="34" charset="-122"/>
-                <a:cs typeface="Be Vietnam Pro" pitchFamily="34" charset="-120"/>
-              </a:rPr>
-              <a:t> thừa,</a:t>
-            </a:r>
-            <a:r>
-              <a:rPr lang="en-US" sz="2550" dirty="0" spc="10" kern="0">
-                <a:solidFill>
-                  <a:srgbClr val="F3EEE3"/>
-                </a:solidFill>
-                <a:latin typeface="Be Vietnam Pro" pitchFamily="34" charset="0"/>
-                <a:ea typeface="Be Vietnam Pro" pitchFamily="34" charset="-122"/>
-                <a:cs typeface="Be Vietnam Pro" pitchFamily="34" charset="-120"/>
-              </a:rPr>
-              <a:t> đóng</a:t>
-            </a:r>
-            <a:r>
-              <a:rPr lang="en-US" sz="2550" dirty="0" spc="-12" kern="0">
-                <a:solidFill>
-                  <a:srgbClr val="F3EEE3"/>
-                </a:solidFill>
-                <a:latin typeface="Be Vietnam Pro" pitchFamily="34" charset="0"/>
-                <a:ea typeface="Be Vietnam Pro" pitchFamily="34" charset="-122"/>
-                <a:cs typeface="Be Vietnam Pro" pitchFamily="34" charset="-120"/>
-              </a:rPr>
-              <a:t> gói</a:t>
-            </a:r>
-            <a:r>
-              <a:rPr lang="en-US" sz="2550" dirty="0" spc="-19" kern="0">
-                <a:solidFill>
-                  <a:srgbClr val="F3EEE3"/>
-                </a:solidFill>
-                <a:latin typeface="Be Vietnam Pro" pitchFamily="34" charset="0"/>
-                <a:ea typeface="Be Vietnam Pro" pitchFamily="34" charset="-122"/>
-                <a:cs typeface="Be Vietnam Pro" pitchFamily="34" charset="-120"/>
-              </a:rPr>
-              <a:t> và</a:t>
-            </a:r>
-            <a:r>
-              <a:rPr lang="en-US" sz="2550" dirty="0" spc="17" kern="0">
-                <a:solidFill>
-                  <a:srgbClr val="F3EEE3"/>
-                </a:solidFill>
-                <a:latin typeface="Be Vietnam Pro" pitchFamily="34" charset="0"/>
-                <a:ea typeface="Be Vietnam Pro" pitchFamily="34" charset="-122"/>
-                <a:cs typeface="Be Vietnam Pro" pitchFamily="34" charset="-120"/>
-              </a:rPr>
-              <a:t> đa</a:t>
-            </a:r>
-            <a:r>
-              <a:rPr lang="en-US" sz="2550" dirty="0" spc="1" kern="0">
-                <a:solidFill>
-                  <a:srgbClr val="F3EEE3"/>
-                </a:solidFill>
-                <a:latin typeface="Be Vietnam Pro" pitchFamily="34" charset="0"/>
-                <a:ea typeface="Be Vietnam Pro" pitchFamily="34" charset="-122"/>
-                <a:cs typeface="Be Vietnam Pro" pitchFamily="34" charset="-120"/>
-              </a:rPr>
-              <a:t> hình.</a:t>
+              <a:t> chỉ</a:t>
+            </a:r>
+            <a:r>
+              <a:rPr lang="en-US" sz="2550" dirty="0" spc="-13" kern="0">
+                <a:solidFill>
+                  <a:srgbClr val="F3EEE3"/>
+                </a:solidFill>
+                <a:latin typeface="Be Vietnam Pro" pitchFamily="34" charset="0"/>
+                <a:ea typeface="Be Vietnam Pro" pitchFamily="34" charset="-122"/>
+                <a:cs typeface="Be Vietnam Pro" pitchFamily="34" charset="-120"/>
+              </a:rPr>
+              <a:t> gọi</a:t>
+            </a:r>
+            <a:r>
+              <a:rPr lang="en-US" sz="2550" dirty="0" spc="0" kern="0">
+                <a:solidFill>
+                  <a:srgbClr val="F3EEE3"/>
+                </a:solidFill>
+                <a:latin typeface="Be Vietnam Pro" pitchFamily="34" charset="0"/>
+                <a:ea typeface="Be Vietnam Pro" pitchFamily="34" charset="-122"/>
+                <a:cs typeface="Be Vietnam Pro" pitchFamily="34" charset="-120"/>
+              </a:rPr>
+              <a:t> add</a:t>
+            </a:r>
+            <a:r>
+              <a:rPr lang="en-US" sz="2550" dirty="0" spc="-26" kern="0">
+                <a:solidFill>
+                  <a:srgbClr val="F3EEE3"/>
+                </a:solidFill>
+                <a:latin typeface="Be Vietnam Pro" pitchFamily="34" charset="0"/>
+                <a:ea typeface="Be Vietnam Pro" pitchFamily="34" charset="-122"/>
+                <a:cs typeface="Be Vietnam Pro" pitchFamily="34" charset="-120"/>
+              </a:rPr>
+              <a:t> rồi</a:t>
+            </a:r>
+            <a:r>
+              <a:rPr lang="en-US" sz="2550" dirty="0" spc="9" kern="0">
+                <a:solidFill>
+                  <a:srgbClr val="F3EEE3"/>
+                </a:solidFill>
+                <a:latin typeface="Be Vietnam Pro" pitchFamily="34" charset="0"/>
+                <a:ea typeface="Be Vietnam Pro" pitchFamily="34" charset="-122"/>
+                <a:cs typeface="Be Vietnam Pro" pitchFamily="34" charset="-120"/>
+              </a:rPr>
+              <a:t> đọc</a:t>
+            </a:r>
+            <a:r>
+              <a:rPr lang="en-US" sz="2550" dirty="0" spc="-17" kern="0">
+                <a:solidFill>
+                  <a:srgbClr val="F3EEE3"/>
+                </a:solidFill>
+                <a:latin typeface="Be Vietnam Pro" pitchFamily="34" charset="0"/>
+                <a:ea typeface="Be Vietnam Pro" pitchFamily="34" charset="-122"/>
+                <a:cs typeface="Be Vietnam Pro" pitchFamily="34" charset="-120"/>
+              </a:rPr>
+              <a:t> total.</a:t>
             </a:r>
             <a:endParaRPr lang="en-US" sz="2550" dirty="0"/>
           </a:p>
@@ -10465,7 +10228,7 @@
               <a:buNone/>
             </a:pPr>
             <a:r>
-              <a:rPr lang="en-US" sz="3000" dirty="0" spc="2" kern="0">
+              <a:rPr lang="en-US" sz="3000" dirty="0" spc="0" kern="0">
                 <a:solidFill>
                   <a:srgbClr val="FFB454"/>
                 </a:solidFill>
@@ -10473,10 +10236,10 @@
                 <a:ea typeface="Bricolage Grotesque ExtraBold" pitchFamily="34" charset="-122"/>
                 <a:cs typeface="Bricolage Grotesque ExtraBold" pitchFamily="34" charset="-120"/>
               </a:rPr>
-              <a:t>Mô</a:t>
-            </a:r>
-            <a:r>
-              <a:rPr lang="en-US" sz="3000" dirty="0" spc="-7" kern="0">
+              <a:t>Đối</a:t>
+            </a:r>
+            <a:r>
+              <a:rPr lang="en-US" sz="3000" dirty="0" spc="-32" kern="0">
                 <a:solidFill>
                   <a:srgbClr val="FFB454"/>
                 </a:solidFill>
@@ -10484,18 +10247,7 @@
                 <a:ea typeface="Bricolage Grotesque ExtraBold" pitchFamily="34" charset="-122"/>
                 <a:cs typeface="Bricolage Grotesque ExtraBold" pitchFamily="34" charset="-120"/>
               </a:rPr>
-              <a:t> hình</a:t>
-            </a:r>
-            <a:r>
-              <a:rPr lang="en-US" sz="3000" dirty="0" spc="-4" kern="0">
-                <a:solidFill>
-                  <a:srgbClr val="FFB454"/>
-                </a:solidFill>
-                <a:latin typeface="Bricolage Grotesque ExtraBold" pitchFamily="34" charset="0"/>
-                <a:ea typeface="Bricolage Grotesque ExtraBold" pitchFamily="34" charset="-122"/>
-                <a:cs typeface="Bricolage Grotesque ExtraBold" pitchFamily="34" charset="-120"/>
-              </a:rPr>
-              <a:t> hóa</a:t>
+              <a:t> tượng</a:t>
             </a:r>
             <a:endParaRPr lang="en-US" sz="3000" dirty="0"/>
           </a:p>
@@ -10529,15 +10281,15 @@
               <a:buNone/>
             </a:pPr>
             <a:r>
-              <a:rPr lang="en-US" sz="2250" dirty="0" spc="10" kern="0">
-                <a:solidFill>
-                  <a:srgbClr val="F3EEE3"/>
-                </a:solidFill>
-                <a:latin typeface="Be Vietnam Pro" pitchFamily="34" charset="0"/>
-                <a:ea typeface="Be Vietnam Pro" pitchFamily="34" charset="-122"/>
-                <a:cs typeface="Be Vietnam Pro" pitchFamily="34" charset="-120"/>
-              </a:rPr>
-              <a:t>Thực</a:t>
+              <a:rPr lang="en-US" sz="2250" dirty="0" spc="-11" kern="0">
+                <a:solidFill>
+                  <a:srgbClr val="F3EEE3"/>
+                </a:solidFill>
+                <a:latin typeface="Be Vietnam Pro" pitchFamily="34" charset="0"/>
+                <a:ea typeface="Be Vietnam Pro" pitchFamily="34" charset="-122"/>
+                <a:cs typeface="Be Vietnam Pro" pitchFamily="34" charset="-120"/>
+              </a:rPr>
+              <a:t>SquareSum</a:t>
             </a:r>
             <a:r>
               <a:rPr lang="en-US" sz="2250" dirty="0" spc="0" kern="0">
@@ -10548,128 +10300,51 @@
                 <a:ea typeface="Be Vietnam Pro" pitchFamily="34" charset="-122"/>
                 <a:cs typeface="Be Vietnam Pro" pitchFamily="34" charset="-120"/>
               </a:rPr>
-              <a:t> thể</a:t>
-            </a:r>
-            <a:r>
-              <a:rPr lang="en-US" sz="2250" dirty="0" spc="10" kern="0">
-                <a:solidFill>
-                  <a:srgbClr val="F3EEE3"/>
-                </a:solidFill>
-                <a:latin typeface="Be Vietnam Pro" pitchFamily="34" charset="0"/>
-                <a:ea typeface="Be Vietnam Pro" pitchFamily="34" charset="-122"/>
-                <a:cs typeface="Be Vietnam Pro" pitchFamily="34" charset="-120"/>
-              </a:rPr>
-              <a:t> thực</a:t>
-            </a:r>
-            <a:r>
-              <a:rPr lang="en-US" sz="2250" dirty="0" spc="-15" kern="0">
-                <a:solidFill>
-                  <a:srgbClr val="F3EEE3"/>
-                </a:solidFill>
-                <a:latin typeface="Be Vietnam Pro" pitchFamily="34" charset="0"/>
-                <a:ea typeface="Be Vietnam Pro" pitchFamily="34" charset="-122"/>
-                <a:cs typeface="Be Vietnam Pro" pitchFamily="34" charset="-120"/>
-              </a:rPr>
-              <a:t> tế</a:t>
-            </a:r>
-            <a:r>
-              <a:rPr lang="en-US" sz="2250" dirty="0" spc="0" kern="0">
-                <a:solidFill>
-                  <a:srgbClr val="F3EEE3"/>
-                </a:solidFill>
-                <a:latin typeface="Be Vietnam Pro" pitchFamily="34" charset="0"/>
-                <a:ea typeface="Be Vietnam Pro" pitchFamily="34" charset="-122"/>
-                <a:cs typeface="Be Vietnam Pro" pitchFamily="34" charset="-120"/>
-              </a:rPr>
-              <a:t> thành</a:t>
-            </a:r>
-            <a:r>
-              <a:rPr lang="en-US" sz="2250" dirty="0" spc="13" kern="0">
-                <a:solidFill>
-                  <a:srgbClr val="F3EEE3"/>
-                </a:solidFill>
-                <a:latin typeface="Be Vietnam Pro" pitchFamily="34" charset="0"/>
-                <a:ea typeface="Be Vietnam Pro" pitchFamily="34" charset="-122"/>
-                <a:cs typeface="Be Vietnam Pro" pitchFamily="34" charset="-120"/>
-              </a:rPr>
-              <a:t> đối</a:t>
-            </a:r>
-            <a:r>
-              <a:rPr lang="en-US" sz="2250" dirty="0" spc="6" kern="0">
-                <a:solidFill>
-                  <a:srgbClr val="F3EEE3"/>
-                </a:solidFill>
-                <a:latin typeface="Be Vietnam Pro" pitchFamily="34" charset="0"/>
-                <a:ea typeface="Be Vietnam Pro" pitchFamily="34" charset="-122"/>
-                <a:cs typeface="Be Vietnam Pro" pitchFamily="34" charset="-120"/>
-              </a:rPr>
-              <a:t> tượng</a:t>
-            </a:r>
-            <a:r>
-              <a:rPr lang="en-US" sz="2250" dirty="0" spc="8" kern="0">
-                <a:solidFill>
-                  <a:srgbClr val="F3EEE3"/>
-                </a:solidFill>
-                <a:latin typeface="Be Vietnam Pro" pitchFamily="34" charset="0"/>
-                <a:ea typeface="Be Vietnam Pro" pitchFamily="34" charset="-122"/>
-                <a:cs typeface="Be Vietnam Pro" pitchFamily="34" charset="-120"/>
-              </a:rPr>
-              <a:t> chứa</a:t>
-            </a:r>
-            <a:r>
-              <a:rPr lang="en-US" sz="2250" dirty="0" spc="6" kern="0">
-                <a:solidFill>
-                  <a:srgbClr val="F3EEE3"/>
-                </a:solidFill>
-                <a:latin typeface="Be Vietnam Pro" pitchFamily="34" charset="0"/>
-                <a:ea typeface="Be Vietnam Pro" pitchFamily="34" charset="-122"/>
-                <a:cs typeface="Be Vietnam Pro" pitchFamily="34" charset="-120"/>
-              </a:rPr>
-              <a:t> dữ</a:t>
-            </a:r>
-            <a:r>
-              <a:rPr lang="en-US" sz="2250" dirty="0" spc="-2" kern="0">
-                <a:solidFill>
-                  <a:srgbClr val="F3EEE3"/>
-                </a:solidFill>
-                <a:latin typeface="Be Vietnam Pro" pitchFamily="34" charset="0"/>
-                <a:ea typeface="Be Vietnam Pro" pitchFamily="34" charset="-122"/>
-                <a:cs typeface="Be Vietnam Pro" pitchFamily="34" charset="-120"/>
-              </a:rPr>
-              <a:t> liệu</a:t>
-            </a:r>
-            <a:r>
-              <a:rPr lang="en-US" sz="2250" dirty="0" spc="-17" kern="0">
-                <a:solidFill>
-                  <a:srgbClr val="F3EEE3"/>
-                </a:solidFill>
-                <a:latin typeface="Be Vietnam Pro" pitchFamily="34" charset="0"/>
-                <a:ea typeface="Be Vietnam Pro" pitchFamily="34" charset="-122"/>
-                <a:cs typeface="Be Vietnam Pro" pitchFamily="34" charset="-120"/>
-              </a:rPr>
-              <a:t> và</a:t>
-            </a:r>
-            <a:r>
-              <a:rPr lang="en-US" sz="2250" dirty="0" spc="5" kern="0">
-                <a:solidFill>
-                  <a:srgbClr val="F3EEE3"/>
-                </a:solidFill>
-                <a:latin typeface="Be Vietnam Pro" pitchFamily="34" charset="0"/>
-                <a:ea typeface="Be Vietnam Pro" pitchFamily="34" charset="-122"/>
-                <a:cs typeface="Be Vietnam Pro" pitchFamily="34" charset="-120"/>
-              </a:rPr>
-              <a:t> phương</a:t>
-            </a:r>
-            <a:r>
-              <a:rPr lang="en-US" sz="2250" dirty="0" spc="9" kern="0">
-                <a:solidFill>
-                  <a:srgbClr val="F3EEE3"/>
-                </a:solidFill>
-                <a:latin typeface="Be Vietnam Pro" pitchFamily="34" charset="0"/>
-                <a:ea typeface="Be Vietnam Pro" pitchFamily="34" charset="-122"/>
-                <a:cs typeface="Be Vietnam Pro" pitchFamily="34" charset="-120"/>
-              </a:rPr>
-              <a:t> thức</a:t>
+              <a:t> giữ</a:t>
+            </a:r>
+            <a:r>
+              <a:rPr lang="en-US" sz="2250" dirty="0" spc="-19" kern="0">
+                <a:solidFill>
+                  <a:srgbClr val="F3EEE3"/>
+                </a:solidFill>
+                <a:latin typeface="Be Vietnam Pro" pitchFamily="34" charset="0"/>
+                <a:ea typeface="Be Vietnam Pro" pitchFamily="34" charset="-122"/>
+                <a:cs typeface="Be Vietnam Pro" pitchFamily="34" charset="-120"/>
+              </a:rPr>
+              <a:t> total</a:t>
+            </a:r>
+            <a:r>
+              <a:rPr lang="en-US" sz="2250" dirty="0" spc="3" kern="0">
+                <a:solidFill>
+                  <a:srgbClr val="F3EEE3"/>
+                </a:solidFill>
+                <a:latin typeface="Be Vietnam Pro" pitchFamily="34" charset="0"/>
+                <a:ea typeface="Be Vietnam Pro" pitchFamily="34" charset="-122"/>
+                <a:cs typeface="Be Vietnam Pro" pitchFamily="34" charset="-120"/>
+              </a:rPr>
+              <a:t> ở</a:t>
+            </a:r>
+            <a:r>
+              <a:rPr lang="en-US" sz="2250" dirty="0" spc="-1" kern="0">
+                <a:solidFill>
+                  <a:srgbClr val="F3EEE3"/>
+                </a:solidFill>
+                <a:latin typeface="Be Vietnam Pro" pitchFamily="34" charset="0"/>
+                <a:ea typeface="Be Vietnam Pro" pitchFamily="34" charset="-122"/>
+                <a:cs typeface="Be Vietnam Pro" pitchFamily="34" charset="-120"/>
+              </a:rPr>
+              <a:t> bên</a:t>
+            </a:r>
+            <a:r>
+              <a:rPr lang="en-US" sz="2250" dirty="0" spc="-16" kern="0">
+                <a:solidFill>
+                  <a:srgbClr val="F3EEE3"/>
+                </a:solidFill>
+                <a:latin typeface="Be Vietnam Pro" pitchFamily="34" charset="0"/>
+                <a:ea typeface="Be Vietnam Pro" pitchFamily="34" charset="-122"/>
+                <a:cs typeface="Be Vietnam Pro" pitchFamily="34" charset="-120"/>
+              </a:rPr>
+              <a:t> trong</a:t>
             </a:r>
             <a:endParaRPr lang="en-US" sz="2250" dirty="0"/>
           </a:p>
@@ -10765,7 +10440,7 @@
               <a:buNone/>
             </a:pPr>
             <a:r>
-              <a:rPr lang="en-US" sz="3000" dirty="0" spc="2" kern="0">
+              <a:rPr lang="en-US" sz="3000" dirty="0" spc="-33" kern="0">
                 <a:solidFill>
                   <a:srgbClr val="FFB454"/>
                 </a:solidFill>
@@ -10773,10 +10448,10 @@
                 <a:ea typeface="Bricolage Grotesque ExtraBold" pitchFamily="34" charset="-122"/>
                 <a:cs typeface="Bricolage Grotesque ExtraBold" pitchFamily="34" charset="-120"/>
               </a:rPr>
-              <a:t>Ba</a:t>
-            </a:r>
-            <a:r>
-              <a:rPr lang="en-US" sz="3000" dirty="0" spc="0" kern="0">
+              <a:t>Phương</a:t>
+            </a:r>
+            <a:r>
+              <a:rPr lang="en-US" sz="3000" dirty="0" spc="-23" kern="0">
                 <a:solidFill>
                   <a:srgbClr val="FFB454"/>
                 </a:solidFill>
@@ -10784,7 +10459,18 @@
                 <a:ea typeface="Bricolage Grotesque ExtraBold" pitchFamily="34" charset="-122"/>
                 <a:cs typeface="Bricolage Grotesque ExtraBold" pitchFamily="34" charset="-120"/>
               </a:rPr>
-              <a:t> ý</a:t>
+              <a:t> thức</a:t>
+            </a:r>
+            <a:r>
+              <a:rPr lang="en-US" sz="3000" dirty="0" spc="3" kern="0">
+                <a:solidFill>
+                  <a:srgbClr val="FFB454"/>
+                </a:solidFill>
+                <a:latin typeface="Bricolage Grotesque ExtraBold" pitchFamily="34" charset="0"/>
+                <a:ea typeface="Bricolage Grotesque ExtraBold" pitchFamily="34" charset="-122"/>
+                <a:cs typeface="Bricolage Grotesque ExtraBold" pitchFamily="34" charset="-120"/>
+              </a:rPr>
+              <a:t> add</a:t>
             </a:r>
             <a:endParaRPr lang="en-US" sz="3000" dirty="0"/>
           </a:p>
@@ -10818,81 +10504,81 @@
               <a:buNone/>
             </a:pPr>
             <a:r>
-              <a:rPr lang="en-US" sz="2250" dirty="0" spc="-57" kern="0">
-                <a:solidFill>
-                  <a:srgbClr val="F3EEE3"/>
-                </a:solidFill>
-                <a:latin typeface="Be Vietnam Pro" pitchFamily="34" charset="0"/>
-                <a:ea typeface="Be Vietnam Pro" pitchFamily="34" charset="-122"/>
-                <a:cs typeface="Be Vietnam Pro" pitchFamily="34" charset="-120"/>
-              </a:rPr>
-              <a:t>Kế</a:t>
-            </a:r>
-            <a:r>
-              <a:rPr lang="en-US" sz="2250" dirty="0" spc="5" kern="0">
-                <a:solidFill>
-                  <a:srgbClr val="F3EEE3"/>
-                </a:solidFill>
-                <a:latin typeface="Be Vietnam Pro" pitchFamily="34" charset="0"/>
-                <a:ea typeface="Be Vietnam Pro" pitchFamily="34" charset="-122"/>
-                <a:cs typeface="Be Vietnam Pro" pitchFamily="34" charset="-120"/>
-              </a:rPr>
-              <a:t> thừa,</a:t>
-            </a:r>
-            <a:r>
-              <a:rPr lang="en-US" sz="2250" dirty="0" spc="11" kern="0">
-                <a:solidFill>
-                  <a:srgbClr val="F3EEE3"/>
-                </a:solidFill>
-                <a:latin typeface="Be Vietnam Pro" pitchFamily="34" charset="0"/>
-                <a:ea typeface="Be Vietnam Pro" pitchFamily="34" charset="-122"/>
-                <a:cs typeface="Be Vietnam Pro" pitchFamily="34" charset="-120"/>
-              </a:rPr>
-              <a:t> đóng</a:t>
-            </a:r>
-            <a:r>
-              <a:rPr lang="en-US" sz="2250" dirty="0" spc="-11" kern="0">
-                <a:solidFill>
-                  <a:srgbClr val="F3EEE3"/>
-                </a:solidFill>
-                <a:latin typeface="Be Vietnam Pro" pitchFamily="34" charset="0"/>
-                <a:ea typeface="Be Vietnam Pro" pitchFamily="34" charset="-122"/>
-                <a:cs typeface="Be Vietnam Pro" pitchFamily="34" charset="-120"/>
-              </a:rPr>
-              <a:t> gói</a:t>
-            </a:r>
-            <a:r>
-              <a:rPr lang="en-US" sz="2250" dirty="0" spc="-16" kern="0">
-                <a:solidFill>
-                  <a:srgbClr val="F3EEE3"/>
-                </a:solidFill>
-                <a:latin typeface="Be Vietnam Pro" pitchFamily="34" charset="0"/>
-                <a:ea typeface="Be Vietnam Pro" pitchFamily="34" charset="-122"/>
-                <a:cs typeface="Be Vietnam Pro" pitchFamily="34" charset="-120"/>
-              </a:rPr>
-              <a:t> và</a:t>
-            </a:r>
-            <a:r>
-              <a:rPr lang="en-US" sz="2250" dirty="0" spc="15" kern="0">
-                <a:solidFill>
-                  <a:srgbClr val="F3EEE3"/>
-                </a:solidFill>
-                <a:latin typeface="Be Vietnam Pro" pitchFamily="34" charset="0"/>
-                <a:ea typeface="Be Vietnam Pro" pitchFamily="34" charset="-122"/>
-                <a:cs typeface="Be Vietnam Pro" pitchFamily="34" charset="-120"/>
-              </a:rPr>
-              <a:t> đa</a:t>
-            </a:r>
-            <a:r>
-              <a:rPr lang="en-US" sz="2250" dirty="0" spc="0" kern="0">
-                <a:solidFill>
-                  <a:srgbClr val="F3EEE3"/>
-                </a:solidFill>
-                <a:latin typeface="Be Vietnam Pro" pitchFamily="34" charset="0"/>
-                <a:ea typeface="Be Vietnam Pro" pitchFamily="34" charset="-122"/>
-                <a:cs typeface="Be Vietnam Pro" pitchFamily="34" charset="-120"/>
-              </a:rPr>
-              <a:t> hình</a:t>
+              <a:rPr lang="en-US" sz="2250" dirty="0" spc="-2" kern="0">
+                <a:solidFill>
+                  <a:srgbClr val="F3EEE3"/>
+                </a:solidFill>
+                <a:latin typeface="Be Vietnam Pro" pitchFamily="34" charset="0"/>
+                <a:ea typeface="Be Vietnam Pro" pitchFamily="34" charset="-122"/>
+                <a:cs typeface="Be Vietnam Pro" pitchFamily="34" charset="-120"/>
+              </a:rPr>
+              <a:t>Nhận</a:t>
+            </a:r>
+            <a:r>
+              <a:rPr lang="en-US" sz="2250" dirty="0" spc="20" kern="0">
+                <a:solidFill>
+                  <a:srgbClr val="F3EEE3"/>
+                </a:solidFill>
+                <a:latin typeface="Be Vietnam Pro" pitchFamily="34" charset="0"/>
+                <a:ea typeface="Be Vietnam Pro" pitchFamily="34" charset="-122"/>
+                <a:cs typeface="Be Vietnam Pro" pitchFamily="34" charset="-120"/>
+              </a:rPr>
+              <a:t> từng</a:t>
+            </a:r>
+            <a:r>
+              <a:rPr lang="en-US" sz="2250" dirty="0" spc="-4" kern="0">
+                <a:solidFill>
+                  <a:srgbClr val="F3EEE3"/>
+                </a:solidFill>
+                <a:latin typeface="Be Vietnam Pro" pitchFamily="34" charset="0"/>
+                <a:ea typeface="Be Vietnam Pro" pitchFamily="34" charset="-122"/>
+                <a:cs typeface="Be Vietnam Pro" pitchFamily="34" charset="-120"/>
+              </a:rPr>
+              <a:t> số,</a:t>
+            </a:r>
+            <a:r>
+              <a:rPr lang="en-US" sz="2250" dirty="0" spc="4" kern="0">
+                <a:solidFill>
+                  <a:srgbClr val="F3EEE3"/>
+                </a:solidFill>
+                <a:latin typeface="Be Vietnam Pro" pitchFamily="34" charset="0"/>
+                <a:ea typeface="Be Vietnam Pro" pitchFamily="34" charset="-122"/>
+                <a:cs typeface="Be Vietnam Pro" pitchFamily="34" charset="-120"/>
+              </a:rPr>
+              <a:t> tự</a:t>
+            </a:r>
+            <a:r>
+              <a:rPr lang="en-US" sz="2250" dirty="0" spc="2" kern="0">
+                <a:solidFill>
+                  <a:srgbClr val="F3EEE3"/>
+                </a:solidFill>
+                <a:latin typeface="Be Vietnam Pro" pitchFamily="34" charset="0"/>
+                <a:ea typeface="Be Vietnam Pro" pitchFamily="34" charset="-122"/>
+                <a:cs typeface="Be Vietnam Pro" pitchFamily="34" charset="-120"/>
+              </a:rPr>
+              <a:t> cập</a:t>
+            </a:r>
+            <a:r>
+              <a:rPr lang="en-US" sz="2250" dirty="0" spc="-9" kern="0">
+                <a:solidFill>
+                  <a:srgbClr val="F3EEE3"/>
+                </a:solidFill>
+                <a:latin typeface="Be Vietnam Pro" pitchFamily="34" charset="0"/>
+                <a:ea typeface="Be Vietnam Pro" pitchFamily="34" charset="-122"/>
+                <a:cs typeface="Be Vietnam Pro" pitchFamily="34" charset="-120"/>
+              </a:rPr>
+              <a:t> nhật</a:t>
+            </a:r>
+            <a:r>
+              <a:rPr lang="en-US" sz="2250" dirty="0" spc="-20" kern="0">
+                <a:solidFill>
+                  <a:srgbClr val="F3EEE3"/>
+                </a:solidFill>
+                <a:latin typeface="Be Vietnam Pro" pitchFamily="34" charset="0"/>
+                <a:ea typeface="Be Vietnam Pro" pitchFamily="34" charset="-122"/>
+                <a:cs typeface="Be Vietnam Pro" pitchFamily="34" charset="-120"/>
+              </a:rPr>
+              <a:t> total</a:t>
             </a:r>
             <a:endParaRPr lang="en-US" sz="2250" dirty="0"/>
           </a:p>
@@ -10988,7 +10674,7 @@
               <a:buNone/>
             </a:pPr>
             <a:r>
-              <a:rPr lang="en-US" sz="3000" dirty="0" spc="3" kern="0">
+              <a:rPr lang="en-US" sz="3000" dirty="0" spc="4" kern="0">
                 <a:solidFill>
                   <a:srgbClr val="FFB454"/>
                 </a:solidFill>
@@ -10996,7 +10682,7 @@
                 <a:ea typeface="Bricolage Grotesque ExtraBold" pitchFamily="34" charset="-122"/>
                 <a:cs typeface="Bricolage Grotesque ExtraBold" pitchFamily="34" charset="-120"/>
               </a:rPr>
-              <a:t>Cách dựng</a:t>
+              <a:t>Mã</a:t>
             </a:r>
             <a:r>
               <a:rPr lang="en-US" sz="3000" dirty="0" spc="1" kern="0">
@@ -11007,7 +10693,18 @@
                 <a:ea typeface="Bricolage Grotesque ExtraBold" pitchFamily="34" charset="-122"/>
                 <a:cs typeface="Bricolage Grotesque ExtraBold" pitchFamily="34" charset="-120"/>
               </a:rPr>
-              <a:t> mã</a:t>
+              <a:t> bên</a:t>
+            </a:r>
+            <a:r>
+              <a:rPr lang="en-US" sz="3000" dirty="0" spc="-15" kern="0">
+                <a:solidFill>
+                  <a:srgbClr val="FFB454"/>
+                </a:solidFill>
+                <a:latin typeface="Bricolage Grotesque ExtraBold" pitchFamily="34" charset="0"/>
+                <a:ea typeface="Bricolage Grotesque ExtraBold" pitchFamily="34" charset="-122"/>
+                <a:cs typeface="Bricolage Grotesque ExtraBold" pitchFamily="34" charset="-120"/>
+              </a:rPr>
+              <a:t> ngoài</a:t>
             </a:r>
             <a:endParaRPr lang="en-US" sz="3000" dirty="0"/>
           </a:p>
@@ -11041,6 +10738,28 @@
               <a:buNone/>
             </a:pPr>
             <a:r>
+              <a:rPr lang="en-US" sz="2250" dirty="0" spc="-1" kern="0">
+                <a:solidFill>
+                  <a:srgbClr val="F3EEE3"/>
+                </a:solidFill>
+                <a:latin typeface="Be Vietnam Pro" pitchFamily="34" charset="0"/>
+                <a:ea typeface="Be Vietnam Pro" pitchFamily="34" charset="-122"/>
+                <a:cs typeface="Be Vietnam Pro" pitchFamily="34" charset="-120"/>
+              </a:rPr>
+              <a:t>Gọi</a:t>
+            </a:r>
+            <a:r>
+              <a:rPr lang="en-US" sz="2250" dirty="0" spc="2" kern="0">
+                <a:solidFill>
+                  <a:srgbClr val="F3EEE3"/>
+                </a:solidFill>
+                <a:latin typeface="Be Vietnam Pro" pitchFamily="34" charset="0"/>
+                <a:ea typeface="Be Vietnam Pro" pitchFamily="34" charset="-122"/>
+                <a:cs typeface="Be Vietnam Pro" pitchFamily="34" charset="-120"/>
+              </a:rPr>
+              <a:t> add</a:t>
+            </a:r>
+            <a:r>
               <a:rPr lang="en-US" sz="2250" dirty="0" spc="1" kern="0">
                 <a:solidFill>
                   <a:srgbClr val="F3EEE3"/>
@@ -11049,7 +10768,29 @@
                 <a:ea typeface="Be Vietnam Pro" pitchFamily="34" charset="-122"/>
                 <a:cs typeface="Be Vietnam Pro" pitchFamily="34" charset="-120"/>
               </a:rPr>
-              <a:t>Dùng lớp,</a:t>
+              <a:t> lặp</a:t>
+            </a:r>
+            <a:r>
+              <a:rPr lang="en-US" sz="2250" dirty="0" spc="-3" kern="0">
+                <a:solidFill>
+                  <a:srgbClr val="F3EEE3"/>
+                </a:solidFill>
+                <a:latin typeface="Be Vietnam Pro" pitchFamily="34" charset="0"/>
+                <a:ea typeface="Be Vietnam Pro" pitchFamily="34" charset="-122"/>
+                <a:cs typeface="Be Vietnam Pro" pitchFamily="34" charset="-120"/>
+              </a:rPr>
+              <a:t> lại,</a:t>
+            </a:r>
+            <a:r>
+              <a:rPr lang="en-US" sz="2250" dirty="0" spc="-23" kern="0">
+                <a:solidFill>
+                  <a:srgbClr val="F3EEE3"/>
+                </a:solidFill>
+                <a:latin typeface="Be Vietnam Pro" pitchFamily="34" charset="0"/>
+                <a:ea typeface="Be Vietnam Pro" pitchFamily="34" charset="-122"/>
+                <a:cs typeface="Be Vietnam Pro" pitchFamily="34" charset="-120"/>
+              </a:rPr>
+              <a:t> rồi</a:t>
             </a:r>
             <a:r>
               <a:rPr lang="en-US" sz="2250" dirty="0" spc="13" kern="0">
@@ -11060,62 +10801,18 @@
                 <a:ea typeface="Be Vietnam Pro" pitchFamily="34" charset="-122"/>
                 <a:cs typeface="Be Vietnam Pro" pitchFamily="34" charset="-120"/>
               </a:rPr>
-              <a:t> đối</a:t>
-            </a:r>
-            <a:r>
-              <a:rPr lang="en-US" sz="2250" dirty="0" spc="6" kern="0">
-                <a:solidFill>
-                  <a:srgbClr val="F3EEE3"/>
-                </a:solidFill>
-                <a:latin typeface="Be Vietnam Pro" pitchFamily="34" charset="0"/>
-                <a:ea typeface="Be Vietnam Pro" pitchFamily="34" charset="-122"/>
-                <a:cs typeface="Be Vietnam Pro" pitchFamily="34" charset="-120"/>
-              </a:rPr>
-              <a:t> tượng</a:t>
-            </a:r>
-            <a:r>
-              <a:rPr lang="en-US" sz="2250" dirty="0" spc="-16" kern="0">
-                <a:solidFill>
-                  <a:srgbClr val="F3EEE3"/>
-                </a:solidFill>
-                <a:latin typeface="Be Vietnam Pro" pitchFamily="34" charset="0"/>
-                <a:ea typeface="Be Vietnam Pro" pitchFamily="34" charset="-122"/>
-                <a:cs typeface="Be Vietnam Pro" pitchFamily="34" charset="-120"/>
-              </a:rPr>
-              <a:t> và</a:t>
-            </a:r>
-            <a:r>
-              <a:rPr lang="en-US" sz="2250" dirty="0" spc="-3" kern="0">
-                <a:solidFill>
-                  <a:srgbClr val="F3EEE3"/>
-                </a:solidFill>
-                <a:latin typeface="Be Vietnam Pro" pitchFamily="34" charset="0"/>
-                <a:ea typeface="Be Vietnam Pro" pitchFamily="34" charset="-122"/>
-                <a:cs typeface="Be Vietnam Pro" pitchFamily="34" charset="-120"/>
-              </a:rPr>
-              <a:t> giao</a:t>
-            </a:r>
-            <a:r>
-              <a:rPr lang="en-US" sz="2250" dirty="0" spc="0" kern="0">
-                <a:solidFill>
-                  <a:srgbClr val="F3EEE3"/>
-                </a:solidFill>
-                <a:latin typeface="Be Vietnam Pro" pitchFamily="34" charset="0"/>
-                <a:ea typeface="Be Vietnam Pro" pitchFamily="34" charset="-122"/>
-                <a:cs typeface="Be Vietnam Pro" pitchFamily="34" charset="-120"/>
-              </a:rPr>
-              <a:t> diện</a:t>
-            </a:r>
-            <a:r>
-              <a:rPr lang="en-US" sz="2250" dirty="0" spc="-11" kern="0">
-                <a:solidFill>
-                  <a:srgbClr val="F3EEE3"/>
-                </a:solidFill>
-                <a:latin typeface="Be Vietnam Pro" pitchFamily="34" charset="0"/>
-                <a:ea typeface="Be Vietnam Pro" pitchFamily="34" charset="-122"/>
-                <a:cs typeface="Be Vietnam Pro" pitchFamily="34" charset="-120"/>
-              </a:rPr>
-              <a:t> (interface)</a:t>
+              <a:t> đọc</a:t>
+            </a:r>
+            <a:r>
+              <a:rPr lang="en-US" sz="2250" dirty="0" spc="-20" kern="0">
+                <a:solidFill>
+                  <a:srgbClr val="F3EEE3"/>
+                </a:solidFill>
+                <a:latin typeface="Be Vietnam Pro" pitchFamily="34" charset="0"/>
+                <a:ea typeface="Be Vietnam Pro" pitchFamily="34" charset="-122"/>
+                <a:cs typeface="Be Vietnam Pro" pitchFamily="34" charset="-120"/>
+              </a:rPr>
+              <a:t> total</a:t>
             </a:r>
             <a:endParaRPr lang="en-US" sz="2250" dirty="0"/>
           </a:p>
@@ -11211,7 +10908,7 @@
               <a:buNone/>
             </a:pPr>
             <a:r>
-              <a:rPr lang="en-US" sz="3000" dirty="0" spc="-22" kern="0">
+              <a:rPr lang="en-US" sz="3000" dirty="0" spc="0" kern="0">
                 <a:solidFill>
                   <a:srgbClr val="FFB454"/>
                 </a:solidFill>
@@ -11219,10 +10916,10 @@
                 <a:ea typeface="Bricolage Grotesque ExtraBold" pitchFamily="34" charset="-122"/>
                 <a:cs typeface="Bricolage Grotesque ExtraBold" pitchFamily="34" charset="-120"/>
               </a:rPr>
-              <a:t>Ví</a:t>
-            </a:r>
-            <a:r>
-              <a:rPr lang="en-US" sz="3000" dirty="0" spc="-1" kern="0">
+              <a:t>Đổi</a:t>
+            </a:r>
+            <a:r>
+              <a:rPr lang="en-US" sz="3000" dirty="0" spc="1" kern="0">
                 <a:solidFill>
                   <a:srgbClr val="FFB454"/>
                 </a:solidFill>
@@ -11230,7 +10927,7 @@
                 <a:ea typeface="Bricolage Grotesque ExtraBold" pitchFamily="34" charset="-122"/>
                 <a:cs typeface="Bricolage Grotesque ExtraBold" pitchFamily="34" charset="-120"/>
               </a:rPr>
-              <a:t> dụ</a:t>
+              <a:t> lại</a:t>
             </a:r>
             <a:endParaRPr lang="en-US" sz="3000" dirty="0"/>
           </a:p>
@@ -11264,37 +10961,48 @@
               <a:buNone/>
             </a:pPr>
             <a:r>
-              <a:rPr lang="en-US" sz="2250" dirty="0" spc="-23" kern="0">
-                <a:solidFill>
-                  <a:srgbClr val="F3EEE3"/>
-                </a:solidFill>
-                <a:latin typeface="Be Vietnam Pro" pitchFamily="34" charset="0"/>
-                <a:ea typeface="Be Vietnam Pro" pitchFamily="34" charset="-122"/>
-                <a:cs typeface="Be Vietnam Pro" pitchFamily="34" charset="-120"/>
-              </a:rPr>
-              <a:t>Java,</a:t>
-            </a:r>
-            <a:r>
-              <a:rPr lang="en-US" sz="2250" dirty="0" spc="1" kern="0">
-                <a:solidFill>
-                  <a:srgbClr val="F3EEE3"/>
-                </a:solidFill>
-                <a:latin typeface="Be Vietnam Pro" pitchFamily="34" charset="0"/>
-                <a:ea typeface="Be Vietnam Pro" pitchFamily="34" charset="-122"/>
-                <a:cs typeface="Be Vietnam Pro" pitchFamily="34" charset="-120"/>
-              </a:rPr>
-              <a:t> C++,</a:t>
-            </a:r>
-            <a:r>
-              <a:rPr lang="en-US" sz="2250" dirty="0" spc="6" kern="0">
-                <a:solidFill>
-                  <a:srgbClr val="F3EEE3"/>
-                </a:solidFill>
-                <a:latin typeface="Be Vietnam Pro" pitchFamily="34" charset="0"/>
-                <a:ea typeface="Be Vietnam Pro" pitchFamily="34" charset="-122"/>
-                <a:cs typeface="Be Vietnam Pro" pitchFamily="34" charset="-120"/>
-              </a:rPr>
-              <a:t> Python</a:t>
+              <a:rPr lang="en-US" sz="2250" dirty="0" spc="-4" kern="0">
+                <a:solidFill>
+                  <a:srgbClr val="F3EEE3"/>
+                </a:solidFill>
+                <a:latin typeface="Be Vietnam Pro" pitchFamily="34" charset="0"/>
+                <a:ea typeface="Be Vietnam Pro" pitchFamily="34" charset="-122"/>
+                <a:cs typeface="Be Vietnam Pro" pitchFamily="34" charset="-120"/>
+              </a:rPr>
+              <a:t>Dài</a:t>
+            </a:r>
+            <a:r>
+              <a:rPr lang="en-US" sz="2250" dirty="0" spc="-8" kern="0">
+                <a:solidFill>
+                  <a:srgbClr val="F3EEE3"/>
+                </a:solidFill>
+                <a:latin typeface="Be Vietnam Pro" pitchFamily="34" charset="0"/>
+                <a:ea typeface="Be Vietnam Pro" pitchFamily="34" charset="-122"/>
+                <a:cs typeface="Be Vietnam Pro" pitchFamily="34" charset="-120"/>
+              </a:rPr>
+              <a:t> nhất,</a:t>
+            </a:r>
+            <a:r>
+              <a:rPr lang="en-US" sz="2250" dirty="0" spc="15" kern="0">
+                <a:solidFill>
+                  <a:srgbClr val="F3EEE3"/>
+                </a:solidFill>
+                <a:latin typeface="Be Vietnam Pro" pitchFamily="34" charset="0"/>
+                <a:ea typeface="Be Vietnam Pro" pitchFamily="34" charset="-122"/>
+                <a:cs typeface="Be Vietnam Pro" pitchFamily="34" charset="-120"/>
+              </a:rPr>
+              <a:t> nhưng</a:t>
+            </a:r>
+            <a:r>
+              <a:rPr lang="en-US" sz="2250" dirty="0" spc="-13" kern="0">
+                <a:solidFill>
+                  <a:srgbClr val="F3EEE3"/>
+                </a:solidFill>
+                <a:latin typeface="Be Vietnam Pro" pitchFamily="34" charset="0"/>
+                <a:ea typeface="Be Vietnam Pro" pitchFamily="34" charset="-122"/>
+                <a:cs typeface="Be Vietnam Pro" pitchFamily="34" charset="-120"/>
+              </a:rPr>
+              <a:t> gom</a:t>
             </a:r>
             <a:r>
               <a:rPr lang="en-US" sz="2250" dirty="0" spc="-16" kern="0">
@@ -11305,18 +11013,40 @@
                 <a:ea typeface="Be Vietnam Pro" pitchFamily="34" charset="-122"/>
                 <a:cs typeface="Be Vietnam Pro" pitchFamily="34" charset="-120"/>
               </a:rPr>
-              <a:t> và</a:t>
-            </a:r>
-            <a:r>
-              <a:rPr lang="en-US" sz="2250" dirty="0" spc="-36" kern="0">
-                <a:solidFill>
-                  <a:srgbClr val="F3EEE3"/>
-                </a:solidFill>
-                <a:latin typeface="Be Vietnam Pro" pitchFamily="34" charset="0"/>
-                <a:ea typeface="Be Vietnam Pro" pitchFamily="34" charset="-122"/>
-                <a:cs typeface="Be Vietnam Pro" pitchFamily="34" charset="-120"/>
-              </a:rPr>
-              <a:t> Ruby</a:t>
+              <a:t> trạng</a:t>
+            </a:r>
+            <a:r>
+              <a:rPr lang="en-US" sz="2250" dirty="0" spc="-2" kern="0">
+                <a:solidFill>
+                  <a:srgbClr val="F3EEE3"/>
+                </a:solidFill>
+                <a:latin typeface="Be Vietnam Pro" pitchFamily="34" charset="0"/>
+                <a:ea typeface="Be Vietnam Pro" pitchFamily="34" charset="-122"/>
+                <a:cs typeface="Be Vietnam Pro" pitchFamily="34" charset="-120"/>
+              </a:rPr>
+              <a:t> thái</a:t>
+            </a:r>
+            <a:r>
+              <a:rPr lang="en-US" sz="2250" dirty="0" spc="-4" kern="0">
+                <a:solidFill>
+                  <a:srgbClr val="F3EEE3"/>
+                </a:solidFill>
+                <a:latin typeface="Be Vietnam Pro" pitchFamily="34" charset="0"/>
+                <a:ea typeface="Be Vietnam Pro" pitchFamily="34" charset="-122"/>
+                <a:cs typeface="Be Vietnam Pro" pitchFamily="34" charset="-120"/>
+              </a:rPr>
+              <a:t> một</a:t>
+            </a:r>
+            <a:r>
+              <a:rPr lang="en-US" sz="2250" dirty="0" spc="4" kern="0">
+                <a:solidFill>
+                  <a:srgbClr val="F3EEE3"/>
+                </a:solidFill>
+                <a:latin typeface="Be Vietnam Pro" pitchFamily="34" charset="0"/>
+                <a:ea typeface="Be Vietnam Pro" pitchFamily="34" charset="-122"/>
+                <a:cs typeface="Be Vietnam Pro" pitchFamily="34" charset="-120"/>
+              </a:rPr>
+              <a:t> chỗ</a:t>
             </a:r>
             <a:endParaRPr lang="en-US" sz="2250" dirty="0"/>
           </a:p>
@@ -12769,7 +12499,40 @@
                 <a:ea typeface="Be Vietnam Pro" pitchFamily="34" charset="-122"/>
                 <a:cs typeface="Be Vietnam Pro" pitchFamily="34" charset="-120"/>
               </a:rPr>
-              <a:t>Được</a:t>
+              <a:t>SQL:</a:t>
+            </a:r>
+            <a:r>
+              <a:rPr lang="en-US" sz="2100" dirty="0" spc="-4" kern="0">
+                <a:solidFill>
+                  <a:srgbClr val="14161C"/>
+                </a:solidFill>
+                <a:latin typeface="Be Vietnam Pro" pitchFamily="34" charset="0"/>
+                <a:ea typeface="Be Vietnam Pro" pitchFamily="34" charset="-122"/>
+                <a:cs typeface="Be Vietnam Pro" pitchFamily="34" charset="-120"/>
+              </a:rPr>
+              <a:t> mô</a:t>
+            </a:r>
+            <a:r>
+              <a:rPr lang="en-US" sz="2100" dirty="0" spc="-17" kern="0">
+                <a:solidFill>
+                  <a:srgbClr val="14161C"/>
+                </a:solidFill>
+                <a:latin typeface="Be Vietnam Pro" pitchFamily="34" charset="0"/>
+                <a:ea typeface="Be Vietnam Pro" pitchFamily="34" charset="-122"/>
+                <a:cs typeface="Be Vietnam Pro" pitchFamily="34" charset="-120"/>
+              </a:rPr>
+              <a:t> tả</a:t>
+            </a:r>
+            <a:r>
+              <a:rPr lang="en-US" sz="2100" dirty="0" spc="-2" kern="0">
+                <a:solidFill>
+                  <a:srgbClr val="14161C"/>
+                </a:solidFill>
+                <a:latin typeface="Be Vietnam Pro" pitchFamily="34" charset="0"/>
+                <a:ea typeface="Be Vietnam Pro" pitchFamily="34" charset="-122"/>
+                <a:cs typeface="Be Vietnam Pro" pitchFamily="34" charset="-120"/>
+              </a:rPr>
+              <a:t> dữ</a:t>
             </a:r>
             <a:r>
               <a:rPr lang="en-US" sz="2100" dirty="0" spc="1" kern="0">
@@ -12780,7 +12543,18 @@
                 <a:ea typeface="Be Vietnam Pro" pitchFamily="34" charset="-122"/>
                 <a:cs typeface="Be Vietnam Pro" pitchFamily="34" charset="-120"/>
               </a:rPr>
-              <a:t> nêu</a:t>
+              <a:t> liệu</a:t>
+            </a:r>
+            <a:r>
+              <a:rPr lang="en-US" sz="2100" dirty="0" spc="-2" kern="0">
+                <a:solidFill>
+                  <a:srgbClr val="14161C"/>
+                </a:solidFill>
+                <a:latin typeface="Be Vietnam Pro" pitchFamily="34" charset="0"/>
+                <a:ea typeface="Be Vietnam Pro" pitchFamily="34" charset="-122"/>
+                <a:cs typeface="Be Vietnam Pro" pitchFamily="34" charset="-120"/>
+              </a:rPr>
+              <a:t> muốn</a:t>
             </a:r>
             <a:r>
               <a:rPr lang="en-US" sz="2100" dirty="0" spc="-10" kern="0">
@@ -12791,51 +12565,7 @@
                 <a:ea typeface="Be Vietnam Pro" pitchFamily="34" charset="-122"/>
                 <a:cs typeface="Be Vietnam Pro" pitchFamily="34" charset="-120"/>
               </a:rPr>
-              <a:t> tên</a:t>
-            </a:r>
-            <a:r>
-              <a:rPr lang="en-US" sz="2100" dirty="0" spc="0" kern="0">
-                <a:solidFill>
-                  <a:srgbClr val="14161C"/>
-                </a:solidFill>
-                <a:latin typeface="Be Vietnam Pro" pitchFamily="34" charset="0"/>
-                <a:ea typeface="Be Vietnam Pro" pitchFamily="34" charset="-122"/>
-                <a:cs typeface="Be Vietnam Pro" pitchFamily="34" charset="-120"/>
-              </a:rPr>
-              <a:t> cùng</a:t>
-            </a:r>
-            <a:r>
-              <a:rPr lang="en-US" sz="2100" dirty="0" spc="-7" kern="0">
-                <a:solidFill>
-                  <a:srgbClr val="14161C"/>
-                </a:solidFill>
-                <a:latin typeface="Be Vietnam Pro" pitchFamily="34" charset="0"/>
-                <a:ea typeface="Be Vietnam Pro" pitchFamily="34" charset="-122"/>
-                <a:cs typeface="Be Vietnam Pro" pitchFamily="34" charset="-120"/>
-              </a:rPr>
-              <a:t> ba</a:t>
-            </a:r>
-            <a:r>
-              <a:rPr lang="en-US" sz="2100" dirty="0" spc="-2" kern="0">
-                <a:solidFill>
-                  <a:srgbClr val="14161C"/>
-                </a:solidFill>
-                <a:latin typeface="Be Vietnam Pro" pitchFamily="34" charset="0"/>
-                <a:ea typeface="Be Vietnam Pro" pitchFamily="34" charset="-122"/>
-                <a:cs typeface="Be Vietnam Pro" pitchFamily="34" charset="-120"/>
-              </a:rPr>
-              <a:t> lối còn</a:t>
-            </a:r>
-            <a:r>
-              <a:rPr lang="en-US" sz="2100" dirty="0" spc="-1" kern="0">
-                <a:solidFill>
-                  <a:srgbClr val="14161C"/>
-                </a:solidFill>
-                <a:latin typeface="Be Vietnam Pro" pitchFamily="34" charset="0"/>
-                <a:ea typeface="Be Vietnam Pro" pitchFamily="34" charset="-122"/>
-                <a:cs typeface="Be Vietnam Pro" pitchFamily="34" charset="-120"/>
-              </a:rPr>
-              <a:t> lại</a:t>
+              <a:t> lấy</a:t>
             </a:r>
             <a:endParaRPr lang="en-US" sz="2100" dirty="0"/>
           </a:p>
@@ -14676,6 +14406,39 @@
               <a:buNone/>
             </a:pPr>
             <a:r>
+              <a:rPr lang="en-US" sz="3000" b="1" dirty="0" spc="-15" kern="0">
+                <a:solidFill>
+                  <a:srgbClr val="FF6A4D"/>
+                </a:solidFill>
+                <a:latin typeface="Be Vietnam Pro" pitchFamily="34" charset="0"/>
+                <a:ea typeface="Be Vietnam Pro" pitchFamily="34" charset="-122"/>
+                <a:cs typeface="Be Vietnam Pro" pitchFamily="34" charset="-120"/>
+              </a:rPr>
+              <a:t>Một</a:t>
+            </a:r>
+            <a:r>
+              <a:rPr lang="en-US" sz="3000" b="1" dirty="0" spc="-14" kern="0">
+                <a:solidFill>
+                  <a:srgbClr val="FF6A4D"/>
+                </a:solidFill>
+                <a:latin typeface="Be Vietnam Pro" pitchFamily="34" charset="0"/>
+                <a:ea typeface="Be Vietnam Pro" pitchFamily="34" charset="-122"/>
+                <a:cs typeface="Be Vietnam Pro" pitchFamily="34" charset="-120"/>
+              </a:rPr>
+              <a:t> ngôn</a:t>
+            </a:r>
+            <a:r>
+              <a:rPr lang="en-US" sz="3000" b="1" dirty="0" spc="-3" kern="0">
+                <a:solidFill>
+                  <a:srgbClr val="FF6A4D"/>
+                </a:solidFill>
+                <a:latin typeface="Be Vietnam Pro" pitchFamily="34" charset="0"/>
+                <a:ea typeface="Be Vietnam Pro" pitchFamily="34" charset="-122"/>
+                <a:cs typeface="Be Vietnam Pro" pitchFamily="34" charset="-120"/>
+              </a:rPr>
+              <a:t> ngữ,</a:t>
+            </a:r>
+            <a:r>
               <a:rPr lang="en-US" sz="3000" b="1" dirty="0" spc="0" kern="0">
                 <a:solidFill>
                   <a:srgbClr val="FF6A4D"/>
@@ -14684,10 +14447,10 @@
                 <a:ea typeface="Be Vietnam Pro" pitchFamily="34" charset="-122"/>
                 <a:cs typeface="Be Vietnam Pro" pitchFamily="34" charset="-120"/>
               </a:rPr>
-              <a:t>Python</a:t>
-            </a:r>
-            <a:r>
-              <a:rPr lang="en-US" sz="3000" b="1" dirty="0" spc="-2" kern="0">
+              <a:t> nhiều</a:t>
+            </a:r>
+            <a:r>
+              <a:rPr lang="en-US" sz="3000" b="1" dirty="0" spc="-5" kern="0">
                 <a:solidFill>
                   <a:srgbClr val="FF6A4D"/>
                 </a:solidFill>
@@ -14695,10 +14458,10 @@
                 <a:ea typeface="Be Vietnam Pro" pitchFamily="34" charset="-122"/>
                 <a:cs typeface="Be Vietnam Pro" pitchFamily="34" charset="-120"/>
               </a:rPr>
-              <a:t> nằm</a:t>
-            </a:r>
-            <a:r>
-              <a:rPr lang="en-US" sz="3000" b="1" dirty="0" spc="1" kern="0">
+              <a:t> mô</a:t>
+            </a:r>
+            <a:r>
+              <a:rPr lang="en-US" sz="3000" b="1" dirty="0" spc="0" kern="0">
                 <a:solidFill>
                   <a:srgbClr val="FF6A4D"/>
                 </a:solidFill>
@@ -14706,29 +14469,7 @@
                 <a:ea typeface="Be Vietnam Pro" pitchFamily="34" charset="-122"/>
                 <a:cs typeface="Be Vietnam Pro" pitchFamily="34" charset="-120"/>
               </a:rPr>
-              <a:t> ở</a:t>
-            </a:r>
-            <a:r>
-              <a:rPr lang="en-US" sz="3000" b="1" dirty="0" spc="-2" kern="0">
-                <a:solidFill>
-                  <a:srgbClr val="FF6A4D"/>
-                </a:solidFill>
-                <a:latin typeface="Be Vietnam Pro" pitchFamily="34" charset="0"/>
-                <a:ea typeface="Be Vietnam Pro" pitchFamily="34" charset="-122"/>
-                <a:cs typeface="Be Vietnam Pro" pitchFamily="34" charset="-120"/>
-              </a:rPr>
-              <a:t> hai danh</a:t>
-            </a:r>
-            <a:r>
-              <a:rPr lang="en-US" sz="3000" b="1" dirty="0" spc="1" kern="0">
-                <a:solidFill>
-                  <a:srgbClr val="FF6A4D"/>
-                </a:solidFill>
-                <a:latin typeface="Be Vietnam Pro" pitchFamily="34" charset="0"/>
-                <a:ea typeface="Be Vietnam Pro" pitchFamily="34" charset="-122"/>
-                <a:cs typeface="Be Vietnam Pro" pitchFamily="34" charset="-120"/>
-              </a:rPr>
-              <a:t> sách</a:t>
+              <a:t> hình</a:t>
             </a:r>
             <a:endParaRPr lang="en-US" sz="3000" dirty="0"/>
           </a:p>
@@ -14762,81 +14503,37 @@
               <a:buNone/>
             </a:pPr>
             <a:r>
-              <a:rPr lang="en-US" sz="2700" dirty="0" spc="0" kern="0">
-                <a:solidFill>
-                  <a:srgbClr val="F3EEE3"/>
-                </a:solidFill>
-                <a:latin typeface="Be Vietnam Pro" pitchFamily="34" charset="0"/>
-                <a:ea typeface="Be Vietnam Pro" pitchFamily="34" charset="-122"/>
-                <a:cs typeface="Be Vietnam Pro" pitchFamily="34" charset="-120"/>
-              </a:rPr>
-              <a:t>Nguồn đặt</a:t>
-            </a:r>
-            <a:r>
-              <a:rPr lang="en-US" sz="2700" dirty="0" spc="7" kern="0">
-                <a:solidFill>
-                  <a:srgbClr val="F3EEE3"/>
-                </a:solidFill>
-                <a:latin typeface="Be Vietnam Pro" pitchFamily="34" charset="0"/>
-                <a:ea typeface="Be Vietnam Pro" pitchFamily="34" charset="-122"/>
-                <a:cs typeface="Be Vietnam Pro" pitchFamily="34" charset="-120"/>
-              </a:rPr>
-              <a:t> Python</a:t>
-            </a:r>
-            <a:r>
-              <a:rPr lang="en-US" sz="2700" dirty="0" spc="-14" kern="0">
-                <a:solidFill>
-                  <a:srgbClr val="F3EEE3"/>
-                </a:solidFill>
-                <a:latin typeface="Be Vietnam Pro" pitchFamily="34" charset="0"/>
-                <a:ea typeface="Be Vietnam Pro" pitchFamily="34" charset="-122"/>
-                <a:cs typeface="Be Vietnam Pro" pitchFamily="34" charset="-120"/>
-              </a:rPr>
-              <a:t> vào</a:t>
-            </a:r>
-            <a:r>
-              <a:rPr lang="en-US" sz="2700" dirty="0" spc="0" kern="0">
-                <a:solidFill>
-                  <a:srgbClr val="F3EEE3"/>
-                </a:solidFill>
-                <a:latin typeface="Be Vietnam Pro" pitchFamily="34" charset="0"/>
-                <a:ea typeface="Be Vietnam Pro" pitchFamily="34" charset="-122"/>
-                <a:cs typeface="Be Vietnam Pro" pitchFamily="34" charset="-120"/>
-              </a:rPr>
-              <a:t> cả</a:t>
-            </a:r>
-            <a:r>
-              <a:rPr lang="en-US" sz="2700" dirty="0" spc="-3" kern="0">
-                <a:solidFill>
-                  <a:srgbClr val="F3EEE3"/>
-                </a:solidFill>
-                <a:latin typeface="Be Vietnam Pro" pitchFamily="34" charset="0"/>
-                <a:ea typeface="Be Vietnam Pro" pitchFamily="34" charset="-122"/>
-                <a:cs typeface="Be Vietnam Pro" pitchFamily="34" charset="-120"/>
-              </a:rPr>
-              <a:t> danh</a:t>
-            </a:r>
-            <a:r>
-              <a:rPr lang="en-US" sz="2700" dirty="0" spc="-6" kern="0">
-                <a:solidFill>
-                  <a:srgbClr val="F3EEE3"/>
-                </a:solidFill>
-                <a:latin typeface="Be Vietnam Pro" pitchFamily="34" charset="0"/>
-                <a:ea typeface="Be Vietnam Pro" pitchFamily="34" charset="-122"/>
-                <a:cs typeface="Be Vietnam Pro" pitchFamily="34" charset="-120"/>
-              </a:rPr>
-              <a:t> sách</a:t>
-            </a:r>
-            <a:r>
-              <a:rPr lang="en-US" sz="2700" dirty="0" spc="-3" kern="0">
-                <a:solidFill>
-                  <a:srgbClr val="F3EEE3"/>
-                </a:solidFill>
-                <a:latin typeface="Be Vietnam Pro" pitchFamily="34" charset="0"/>
-                <a:ea typeface="Be Vietnam Pro" pitchFamily="34" charset="-122"/>
-                <a:cs typeface="Be Vietnam Pro" pitchFamily="34" charset="-120"/>
-              </a:rPr>
-              <a:t> mệnh</a:t>
+              <a:rPr lang="en-US" sz="2700" dirty="0" spc="3" kern="0">
+                <a:solidFill>
+                  <a:srgbClr val="F3EEE3"/>
+                </a:solidFill>
+                <a:latin typeface="Be Vietnam Pro" pitchFamily="34" charset="0"/>
+                <a:ea typeface="Be Vietnam Pro" pitchFamily="34" charset="-122"/>
+                <a:cs typeface="Be Vietnam Pro" pitchFamily="34" charset="-120"/>
+              </a:rPr>
+              <a:t>Cả</a:t>
+            </a:r>
+            <a:r>
+              <a:rPr lang="en-US" sz="2700" dirty="0" spc="-8" kern="0">
+                <a:solidFill>
+                  <a:srgbClr val="F3EEE3"/>
+                </a:solidFill>
+                <a:latin typeface="Be Vietnam Pro" pitchFamily="34" charset="0"/>
+                <a:ea typeface="Be Vietnam Pro" pitchFamily="34" charset="-122"/>
+                <a:cs typeface="Be Vietnam Pro" pitchFamily="34" charset="-120"/>
+              </a:rPr>
+              <a:t> ba</a:t>
+            </a:r>
+            <a:r>
+              <a:rPr lang="en-US" sz="2700" dirty="0" spc="6" kern="0">
+                <a:solidFill>
+                  <a:srgbClr val="F3EEE3"/>
+                </a:solidFill>
+                <a:latin typeface="Be Vietnam Pro" pitchFamily="34" charset="0"/>
+                <a:ea typeface="Be Vietnam Pro" pitchFamily="34" charset="-122"/>
+                <a:cs typeface="Be Vietnam Pro" pitchFamily="34" charset="-120"/>
+              </a:rPr>
+              <a:t> đoạn</a:t>
             </a:r>
             <a:r>
               <a:rPr lang="en-US" sz="2700" dirty="0" spc="-2" kern="0">
@@ -14847,51 +14544,62 @@
                 <a:ea typeface="Be Vietnam Pro" pitchFamily="34" charset="-122"/>
                 <a:cs typeface="Be Vietnam Pro" pitchFamily="34" charset="-120"/>
               </a:rPr>
-              <a:t> lệnh</a:t>
-            </a:r>
-            <a:r>
-              <a:rPr lang="en-US" sz="2700" dirty="0" spc="-1" kern="0">
-                <a:solidFill>
-                  <a:srgbClr val="F3EEE3"/>
-                </a:solidFill>
-                <a:latin typeface="Be Vietnam Pro" pitchFamily="34" charset="0"/>
-                <a:ea typeface="Be Vietnam Pro" pitchFamily="34" charset="-122"/>
-                <a:cs typeface="Be Vietnam Pro" pitchFamily="34" charset="-120"/>
-              </a:rPr>
-              <a:t> lẫn</a:t>
-            </a:r>
-            <a:r>
-              <a:rPr lang="en-US" sz="2700" dirty="0" spc="5" kern="0">
-                <a:solidFill>
-                  <a:srgbClr val="F3EEE3"/>
-                </a:solidFill>
-                <a:latin typeface="Be Vietnam Pro" pitchFamily="34" charset="0"/>
-                <a:ea typeface="Be Vietnam Pro" pitchFamily="34" charset="-122"/>
-                <a:cs typeface="Be Vietnam Pro" pitchFamily="34" charset="-120"/>
-              </a:rPr>
-              <a:t> hướng</a:t>
-            </a:r>
-            <a:r>
-              <a:rPr lang="en-US" sz="2700" dirty="0" spc="13" kern="0">
-                <a:solidFill>
-                  <a:srgbClr val="F3EEE3"/>
-                </a:solidFill>
-                <a:latin typeface="Be Vietnam Pro" pitchFamily="34" charset="0"/>
-                <a:ea typeface="Be Vietnam Pro" pitchFamily="34" charset="-122"/>
-                <a:cs typeface="Be Vietnam Pro" pitchFamily="34" charset="-120"/>
-              </a:rPr>
-              <a:t> đối</a:t>
-            </a:r>
-            <a:r>
-              <a:rPr lang="en-US" sz="2700" dirty="0" spc="5" kern="0">
-                <a:solidFill>
-                  <a:srgbClr val="F3EEE3"/>
-                </a:solidFill>
-                <a:latin typeface="Be Vietnam Pro" pitchFamily="34" charset="0"/>
-                <a:ea typeface="Be Vietnam Pro" pitchFamily="34" charset="-122"/>
-                <a:cs typeface="Be Vietnam Pro" pitchFamily="34" charset="-120"/>
-              </a:rPr>
-              <a:t> tượng.</a:t>
+              <a:t> mã</a:t>
+            </a:r>
+            <a:r>
+              <a:rPr lang="en-US" sz="2700" dirty="0" spc="12" kern="0">
+                <a:solidFill>
+                  <a:srgbClr val="F3EEE3"/>
+                </a:solidFill>
+                <a:latin typeface="Be Vietnam Pro" pitchFamily="34" charset="0"/>
+                <a:ea typeface="Be Vietnam Pro" pitchFamily="34" charset="-122"/>
+                <a:cs typeface="Be Vietnam Pro" pitchFamily="34" charset="-120"/>
+              </a:rPr>
+              <a:t> đều</a:t>
+            </a:r>
+            <a:r>
+              <a:rPr lang="en-US" sz="2700" dirty="0" spc="-5" kern="0">
+                <a:solidFill>
+                  <a:srgbClr val="F3EEE3"/>
+                </a:solidFill>
+                <a:latin typeface="Be Vietnam Pro" pitchFamily="34" charset="0"/>
+                <a:ea typeface="Be Vietnam Pro" pitchFamily="34" charset="-122"/>
+                <a:cs typeface="Be Vietnam Pro" pitchFamily="34" charset="-120"/>
+              </a:rPr>
+              <a:t> viết</a:t>
+            </a:r>
+            <a:r>
+              <a:rPr lang="en-US" sz="2700" dirty="0" spc="9" kern="0">
+                <a:solidFill>
+                  <a:srgbClr val="F3EEE3"/>
+                </a:solidFill>
+                <a:latin typeface="Be Vietnam Pro" pitchFamily="34" charset="0"/>
+                <a:ea typeface="Be Vietnam Pro" pitchFamily="34" charset="-122"/>
+                <a:cs typeface="Be Vietnam Pro" pitchFamily="34" charset="-120"/>
+              </a:rPr>
+              <a:t> được</a:t>
+            </a:r>
+            <a:r>
+              <a:rPr lang="en-US" sz="2700" dirty="0" spc="-5" kern="0">
+                <a:solidFill>
+                  <a:srgbClr val="F3EEE3"/>
+                </a:solidFill>
+                <a:latin typeface="Be Vietnam Pro" pitchFamily="34" charset="0"/>
+                <a:ea typeface="Be Vietnam Pro" pitchFamily="34" charset="-122"/>
+                <a:cs typeface="Be Vietnam Pro" pitchFamily="34" charset="-120"/>
+              </a:rPr>
+              <a:t> bằng</a:t>
+            </a:r>
+            <a:r>
+              <a:rPr lang="en-US" sz="2700" dirty="0" spc="6" kern="0">
+                <a:solidFill>
+                  <a:srgbClr val="F3EEE3"/>
+                </a:solidFill>
+                <a:latin typeface="Be Vietnam Pro" pitchFamily="34" charset="0"/>
+                <a:ea typeface="Be Vietnam Pro" pitchFamily="34" charset="-122"/>
+                <a:cs typeface="Be Vietnam Pro" pitchFamily="34" charset="-120"/>
+              </a:rPr>
+              <a:t> Python.</a:t>
             </a:r>
             <a:endParaRPr lang="en-US" sz="2700" dirty="0"/>
           </a:p>
@@ -15121,6 +14829,39 @@
               <a:buNone/>
             </a:pPr>
             <a:r>
+              <a:rPr lang="en-US" sz="2550" dirty="0" spc="1" kern="0">
+                <a:solidFill>
+                  <a:srgbClr val="F3EEE3"/>
+                </a:solidFill>
+                <a:latin typeface="Be Vietnam Pro" pitchFamily="34" charset="0"/>
+                <a:ea typeface="Be Vietnam Pro" pitchFamily="34" charset="-122"/>
+                <a:cs typeface="Be Vietnam Pro" pitchFamily="34" charset="-120"/>
+              </a:rPr>
+              <a:t>Cách</a:t>
+            </a:r>
+            <a:r>
+              <a:rPr lang="en-US" sz="2550" dirty="0" spc="-19" kern="0">
+                <a:solidFill>
+                  <a:srgbClr val="F3EEE3"/>
+                </a:solidFill>
+                <a:latin typeface="Be Vietnam Pro" pitchFamily="34" charset="0"/>
+                <a:ea typeface="Be Vietnam Pro" pitchFamily="34" charset="-122"/>
+                <a:cs typeface="Be Vietnam Pro" pitchFamily="34" charset="-120"/>
+              </a:rPr>
+              <a:t> xếp</a:t>
+            </a:r>
+            <a:r>
+              <a:rPr lang="en-US" sz="2550" dirty="0" spc="-10" kern="0">
+                <a:solidFill>
+                  <a:srgbClr val="F3EEE3"/>
+                </a:solidFill>
+                <a:latin typeface="Be Vietnam Pro" pitchFamily="34" charset="0"/>
+                <a:ea typeface="Be Vietnam Pro" pitchFamily="34" charset="-122"/>
+                <a:cs typeface="Be Vietnam Pro" pitchFamily="34" charset="-120"/>
+              </a:rPr>
+              <a:t> ngôn</a:t>
+            </a:r>
+            <a:r>
               <a:rPr lang="en-US" sz="2550" dirty="0" spc="-2" kern="0">
                 <a:solidFill>
                   <a:srgbClr val="F3EEE3"/>
@@ -15129,29 +14870,51 @@
                 <a:ea typeface="Be Vietnam Pro" pitchFamily="34" charset="-122"/>
                 <a:cs typeface="Be Vietnam Pro" pitchFamily="34" charset="-120"/>
               </a:rPr>
-              <a:t>Danh</a:t>
-            </a:r>
-            <a:r>
-              <a:rPr lang="en-US" sz="2550" dirty="0" spc="-6" kern="0">
-                <a:solidFill>
-                  <a:srgbClr val="F3EEE3"/>
-                </a:solidFill>
-                <a:latin typeface="Be Vietnam Pro" pitchFamily="34" charset="0"/>
-                <a:ea typeface="Be Vietnam Pro" pitchFamily="34" charset="-122"/>
-                <a:cs typeface="Be Vietnam Pro" pitchFamily="34" charset="-120"/>
-              </a:rPr>
-              <a:t> sách</a:t>
-            </a:r>
-            <a:r>
-              <a:rPr lang="en-US" sz="2550" dirty="0" spc="-10" kern="0">
-                <a:solidFill>
-                  <a:srgbClr val="F3EEE3"/>
-                </a:solidFill>
-                <a:latin typeface="Be Vietnam Pro" pitchFamily="34" charset="0"/>
-                <a:ea typeface="Be Vietnam Pro" pitchFamily="34" charset="-122"/>
-                <a:cs typeface="Be Vietnam Pro" pitchFamily="34" charset="-120"/>
-              </a:rPr>
-              <a:t> ngôn</a:t>
+              <a:t> ngữ</a:t>
+            </a:r>
+            <a:r>
+              <a:rPr lang="en-US" sz="2550" dirty="0" spc="-14" kern="0">
+                <a:solidFill>
+                  <a:srgbClr val="F3EEE3"/>
+                </a:solidFill>
+                <a:latin typeface="Be Vietnam Pro" pitchFamily="34" charset="0"/>
+                <a:ea typeface="Be Vietnam Pro" pitchFamily="34" charset="-122"/>
+                <a:cs typeface="Be Vietnam Pro" pitchFamily="34" charset="-120"/>
+              </a:rPr>
+              <a:t> vào</a:t>
+            </a:r>
+            <a:r>
+              <a:rPr lang="en-US" sz="2550" dirty="0" spc="1" kern="0">
+                <a:solidFill>
+                  <a:srgbClr val="F3EEE3"/>
+                </a:solidFill>
+                <a:latin typeface="Be Vietnam Pro" pitchFamily="34" charset="0"/>
+                <a:ea typeface="Be Vietnam Pro" pitchFamily="34" charset="-122"/>
+                <a:cs typeface="Be Vietnam Pro" pitchFamily="34" charset="-120"/>
+              </a:rPr>
+              <a:t> mô</a:t>
+            </a:r>
+            <a:r>
+              <a:rPr lang="en-US" sz="2550" dirty="0" spc="0" kern="0">
+                <a:solidFill>
+                  <a:srgbClr val="F3EEE3"/>
+                </a:solidFill>
+                <a:latin typeface="Be Vietnam Pro" pitchFamily="34" charset="0"/>
+                <a:ea typeface="Be Vietnam Pro" pitchFamily="34" charset="-122"/>
+                <a:cs typeface="Be Vietnam Pro" pitchFamily="34" charset="-120"/>
+              </a:rPr>
+              <a:t> hình</a:t>
+            </a:r>
+            <a:r>
+              <a:rPr lang="en-US" sz="2550" dirty="0" spc="1" kern="0">
+                <a:solidFill>
+                  <a:srgbClr val="F3EEE3"/>
+                </a:solidFill>
+                <a:latin typeface="Be Vietnam Pro" pitchFamily="34" charset="0"/>
+                <a:ea typeface="Be Vietnam Pro" pitchFamily="34" charset="-122"/>
+                <a:cs typeface="Be Vietnam Pro" pitchFamily="34" charset="-120"/>
+              </a:rPr>
+              <a:t> là</a:t>
             </a:r>
             <a:r>
               <a:rPr lang="en-US" sz="2550" dirty="0" spc="-2" kern="0">
@@ -15162,7 +14925,18 @@
                 <a:ea typeface="Be Vietnam Pro" pitchFamily="34" charset="-122"/>
                 <a:cs typeface="Be Vietnam Pro" pitchFamily="34" charset="-120"/>
               </a:rPr>
-              <a:t> ngữ</a:t>
+              <a:t> của</a:t>
+            </a:r>
+            <a:r>
+              <a:rPr lang="en-US" sz="2550" dirty="0" spc="-12" kern="0">
+                <a:solidFill>
+                  <a:srgbClr val="F3EEE3"/>
+                </a:solidFill>
+                <a:latin typeface="Be Vietnam Pro" pitchFamily="34" charset="0"/>
+                <a:ea typeface="Be Vietnam Pro" pitchFamily="34" charset="-122"/>
+                <a:cs typeface="Be Vietnam Pro" pitchFamily="34" charset="-120"/>
+              </a:rPr>
+              <a:t> tài</a:t>
             </a:r>
             <a:r>
               <a:rPr lang="en-US" sz="2550" dirty="0" spc="1" kern="0">
@@ -15173,62 +14947,18 @@
                 <a:ea typeface="Be Vietnam Pro" pitchFamily="34" charset="-122"/>
                 <a:cs typeface="Be Vietnam Pro" pitchFamily="34" charset="-120"/>
               </a:rPr>
-              <a:t> chỉ</a:t>
-            </a:r>
-            <a:r>
-              <a:rPr lang="en-US" sz="2550" dirty="0" spc="0" kern="0">
-                <a:solidFill>
-                  <a:srgbClr val="F3EEE3"/>
-                </a:solidFill>
-                <a:latin typeface="Be Vietnam Pro" pitchFamily="34" charset="0"/>
-                <a:ea typeface="Be Vietnam Pro" pitchFamily="34" charset="-122"/>
-                <a:cs typeface="Be Vietnam Pro" pitchFamily="34" charset="-120"/>
-              </a:rPr>
-              <a:t> là</a:t>
-            </a:r>
-            <a:r>
-              <a:rPr lang="en-US" sz="2550" dirty="0" spc="-1" kern="0">
-                <a:solidFill>
-                  <a:srgbClr val="F3EEE3"/>
-                </a:solidFill>
-                <a:latin typeface="Be Vietnam Pro" pitchFamily="34" charset="0"/>
-                <a:ea typeface="Be Vietnam Pro" pitchFamily="34" charset="-122"/>
-                <a:cs typeface="Be Vietnam Pro" pitchFamily="34" charset="-120"/>
-              </a:rPr>
-              <a:t> ví</a:t>
-            </a:r>
-            <a:r>
-              <a:rPr lang="en-US" sz="2550" dirty="0" spc="-2" kern="0">
-                <a:solidFill>
-                  <a:srgbClr val="F3EEE3"/>
-                </a:solidFill>
-                <a:latin typeface="Be Vietnam Pro" pitchFamily="34" charset="0"/>
-                <a:ea typeface="Be Vietnam Pro" pitchFamily="34" charset="-122"/>
-                <a:cs typeface="Be Vietnam Pro" pitchFamily="34" charset="-120"/>
-              </a:rPr>
-              <a:t> dụ</a:t>
-            </a:r>
-            <a:r>
-              <a:rPr lang="en-US" sz="2550" dirty="0" spc="-1" kern="0">
-                <a:solidFill>
-                  <a:srgbClr val="F3EEE3"/>
-                </a:solidFill>
-                <a:latin typeface="Be Vietnam Pro" pitchFamily="34" charset="0"/>
-                <a:ea typeface="Be Vietnam Pro" pitchFamily="34" charset="-122"/>
-                <a:cs typeface="Be Vietnam Pro" pitchFamily="34" charset="-120"/>
-              </a:rPr>
-              <a:t> của</a:t>
-            </a:r>
-            <a:r>
-              <a:rPr lang="en-US" sz="2550" dirty="0" spc="1" kern="0">
-                <a:solidFill>
-                  <a:srgbClr val="F3EEE3"/>
-                </a:solidFill>
-                <a:latin typeface="Be Vietnam Pro" pitchFamily="34" charset="0"/>
-                <a:ea typeface="Be Vietnam Pro" pitchFamily="34" charset="-122"/>
-                <a:cs typeface="Be Vietnam Pro" pitchFamily="34" charset="-120"/>
-              </a:rPr>
-              <a:t> nguồn.</a:t>
+              <a:t> liệu</a:t>
+            </a:r>
+            <a:r>
+              <a:rPr lang="en-US" sz="2550" dirty="0" spc="8" kern="0">
+                <a:solidFill>
+                  <a:srgbClr val="F3EEE3"/>
+                </a:solidFill>
+                <a:latin typeface="Be Vietnam Pro" pitchFamily="34" charset="0"/>
+                <a:ea typeface="Be Vietnam Pro" pitchFamily="34" charset="-122"/>
+                <a:cs typeface="Be Vietnam Pro" pitchFamily="34" charset="-120"/>
+              </a:rPr>
+              <a:t> Python.</a:t>
             </a:r>
             <a:endParaRPr lang="en-US" sz="2550" dirty="0"/>
           </a:p>
@@ -15410,15 +15140,15 @@
               <a:buNone/>
             </a:pPr>
             <a:r>
-              <a:rPr lang="en-US" sz="2250" b="1" dirty="0" spc="3" kern="0">
-                <a:solidFill>
-                  <a:srgbClr val="14161C"/>
-                </a:solidFill>
-                <a:latin typeface="Be Vietnam Pro" pitchFamily="34" charset="0"/>
-                <a:ea typeface="Be Vietnam Pro" pitchFamily="34" charset="-122"/>
-                <a:cs typeface="Be Vietnam Pro" pitchFamily="34" charset="-120"/>
-              </a:rPr>
-              <a:t>Python</a:t>
+              <a:rPr lang="en-US" sz="2250" b="1" dirty="0" spc="-11" kern="0">
+                <a:solidFill>
+                  <a:srgbClr val="14161C"/>
+                </a:solidFill>
+                <a:latin typeface="Be Vietnam Pro" pitchFamily="34" charset="0"/>
+                <a:ea typeface="Be Vietnam Pro" pitchFamily="34" charset="-122"/>
+                <a:cs typeface="Be Vietnam Pro" pitchFamily="34" charset="-120"/>
+              </a:rPr>
+              <a:t>Pascal</a:t>
             </a:r>
             <a:endParaRPr lang="en-US" sz="2250" dirty="0"/>
           </a:p>
@@ -15541,15 +15271,15 @@
               <a:buNone/>
             </a:pPr>
             <a:r>
-              <a:rPr lang="en-US" sz="2250" b="1" dirty="0" spc="3" kern="0">
-                <a:solidFill>
-                  <a:srgbClr val="14161C"/>
-                </a:solidFill>
-                <a:latin typeface="Be Vietnam Pro" pitchFamily="34" charset="0"/>
-                <a:ea typeface="Be Vietnam Pro" pitchFamily="34" charset="-122"/>
-                <a:cs typeface="Be Vietnam Pro" pitchFamily="34" charset="-120"/>
-              </a:rPr>
-              <a:t>Python</a:t>
+              <a:rPr lang="en-US" sz="2250" b="1" dirty="0" spc="-2" kern="0">
+                <a:solidFill>
+                  <a:srgbClr val="14161C"/>
+                </a:solidFill>
+                <a:latin typeface="Be Vietnam Pro" pitchFamily="34" charset="0"/>
+                <a:ea typeface="Be Vietnam Pro" pitchFamily="34" charset="-122"/>
+                <a:cs typeface="Be Vietnam Pro" pitchFamily="34" charset="-120"/>
+              </a:rPr>
+              <a:t>Smalltalk</a:t>
             </a:r>
             <a:endParaRPr lang="en-US" sz="2250" dirty="0"/>
           </a:p>
@@ -15670,15 +15400,15 @@
               <a:buNone/>
             </a:pPr>
             <a:r>
-              <a:rPr lang="en-US" sz="2250" b="1" dirty="0" spc="-46" kern="0">
-                <a:solidFill>
-                  <a:srgbClr val="14161C"/>
-                </a:solidFill>
-                <a:latin typeface="Be Vietnam Pro" pitchFamily="34" charset="0"/>
-                <a:ea typeface="Be Vietnam Pro" pitchFamily="34" charset="-122"/>
-                <a:cs typeface="Be Vietnam Pro" pitchFamily="34" charset="-120"/>
-              </a:rPr>
-              <a:t>Ruby</a:t>
+              <a:rPr lang="en-US" sz="2250" b="1" dirty="0" spc="3" kern="0">
+                <a:solidFill>
+                  <a:srgbClr val="14161C"/>
+                </a:solidFill>
+                <a:latin typeface="Be Vietnam Pro" pitchFamily="34" charset="0"/>
+                <a:ea typeface="Be Vietnam Pro" pitchFamily="34" charset="-122"/>
+                <a:cs typeface="Be Vietnam Pro" pitchFamily="34" charset="-120"/>
+              </a:rPr>
+              <a:t>Python</a:t>
             </a:r>
             <a:endParaRPr lang="en-US" sz="2250" dirty="0"/>
           </a:p>
@@ -15854,7 +15584,7 @@
               <a:buNone/>
             </a:pPr>
             <a:r>
-              <a:rPr lang="en-US" sz="1800" b="1" spc="225" kern="0" dirty="0">
+              <a:rPr lang="en-US" sz="1800" b="1" spc="218" kern="0" dirty="0">
                 <a:solidFill>
                   <a:srgbClr val="FF6A4D"/>
                 </a:solidFill>
@@ -15862,7 +15592,7 @@
                 <a:ea typeface="Be Vietnam Pro" pitchFamily="34" charset="-122"/>
                 <a:cs typeface="Be Vietnam Pro" pitchFamily="34" charset="-120"/>
               </a:rPr>
-              <a:t>NGUỒN</a:t>
+              <a:t>BÀI</a:t>
             </a:r>
             <a:r>
               <a:rPr lang="en-US" sz="1800" b="1" spc="226" kern="0" dirty="0">
@@ -16267,10 +15997,10 @@
                 <a:ea typeface="Be Vietnam Pro" pitchFamily="34" charset="-122"/>
                 <a:cs typeface="Be Vietnam Pro" pitchFamily="34" charset="-120"/>
               </a:rPr>
-              <a:t> hầu</a:t>
-            </a:r>
-            <a:r>
-              <a:rPr lang="en-US" sz="1950" dirty="0" spc="-6" kern="0">
+              <a:t> shell</a:t>
+            </a:r>
+            <a:r>
+              <a:rPr lang="en-US" sz="1950" dirty="0" spc="2" kern="0">
                 <a:solidFill>
                   <a:srgbClr val="C4C8D6"/>
                 </a:solidFill>
@@ -16278,57 +16008,15 @@
                 <a:ea typeface="Be Vietnam Pro" pitchFamily="34" charset="-122"/>
                 <a:cs typeface="Be Vietnam Pro" pitchFamily="34" charset="-120"/>
               </a:rPr>
-              <a:t> hết ngôn</a:t>
-            </a:r>
-            <a:r>
-              <a:rPr lang="en-US" sz="1950" dirty="0" spc="2" kern="0">
-                <a:solidFill>
-                  <a:srgbClr val="C4C8D6"/>
-                </a:solidFill>
-                <a:latin typeface="Be Vietnam Pro" pitchFamily="34" charset="0"/>
-                <a:ea typeface="Be Vietnam Pro" pitchFamily="34" charset="-122"/>
-                <a:cs typeface="Be Vietnam Pro" pitchFamily="34" charset="-120"/>
-              </a:rPr>
-              <a:t> ngữ</a:t>
+              <a:t> Unix</a:t>
             </a:r>
             <a:endParaRPr lang="en-US" sz="1950" dirty="0"/>
           </a:p>
-          <a:p>
-            <a:pPr algn="l" indent="0" marL="0">
-              <a:lnSpc>
-                <a:spcPts val="2535"/>
-              </a:lnSpc>
-              <a:buNone/>
-            </a:pPr>
-            <a:r>
-              <a:rPr lang="en-US" sz="1950" dirty="0" spc="0" kern="0">
-                <a:solidFill>
-                  <a:srgbClr val="C4C8D6"/>
-                </a:solidFill>
-                <a:latin typeface="Be Vietnam Pro" pitchFamily="34" charset="0"/>
-                <a:ea typeface="Be Vietnam Pro" pitchFamily="34" charset="-122"/>
-                <a:cs typeface="Be Vietnam Pro" pitchFamily="34" charset="-120"/>
-              </a:rPr>
-              <a:t>thủ</a:t>
-            </a:r>
-            <a:r>
-              <a:rPr lang="en-US" sz="1950" dirty="0" spc="-2" kern="0">
-                <a:solidFill>
-                  <a:srgbClr val="C4C8D6"/>
-                </a:solidFill>
-                <a:latin typeface="Be Vietnam Pro" pitchFamily="34" charset="0"/>
-                <a:ea typeface="Be Vietnam Pro" pitchFamily="34" charset="-122"/>
-                <a:cs typeface="Be Vietnam Pro" pitchFamily="34" charset="-120"/>
-              </a:rPr>
-              <a:t> tục</a:t>
-            </a:r>
-            <a:endParaRPr lang="en-US" sz="1950" dirty="0"/>
-          </a:p>
-        </p:txBody>
-      </p:sp>
-      <p:sp>
-        <p:nvSpPr>
-          <p:cNvPr id="37" name="Text richtext-1792339307336-465368506"/>
+        </p:txBody>
+      </p:sp>
+      <p:sp>
+        <p:nvSpPr>
+          <p:cNvPr id="37" name="Text 35"/>
           <p:cNvSpPr/>
           <p:nvPr/>
         </p:nvSpPr>
@@ -16347,16 +16035,14 @@
           <a:bodyPr wrap="square" lIns="0" tIns="13764" rIns="0" bIns="-13764" rtlCol="0" anchor="t"/>
           <a:lstStyle/>
           <a:p>
-            <a:pPr algn="l" marL="323850" indent="-231371">
+            <a:pPr algn="l" indent="0" marL="0">
               <a:lnSpc>
                 <a:spcPts val="3315"/>
               </a:lnSpc>
               <a:spcAft>
                 <a:spcPts val="1650"/>
               </a:spcAft>
-              <a:buSzPct val="100000"/>
-              <a:buFont typeface="Arial"/>
-              <a:buChar char="•"/>
+              <a:buNone/>
             </a:pPr>
             <a:r>
               <a:rPr lang="en-US" sz="2550" dirty="0" spc="0" kern="0">
@@ -16394,27 +16080,58 @@
             <a:endParaRPr lang="en-US" sz="2550" dirty="0"/>
           </a:p>
           <a:p>
-            <a:pPr algn="l" marL="323850" indent="-231371">
+            <a:pPr algn="l" indent="0" marL="0">
               <a:lnSpc>
                 <a:spcPts val="3315"/>
               </a:lnSpc>
               <a:spcAft>
                 <a:spcPts val="1650"/>
               </a:spcAft>
-              <a:buSzPct val="100000"/>
-              <a:buFont typeface="Arial"/>
-              <a:buChar char="•"/>
+              <a:buNone/>
             </a:pPr>
             <a:r>
-              <a:rPr lang="en-US" sz="2550" dirty="0" spc="-3" kern="0">
-                <a:solidFill>
-                  <a:srgbClr val="F3EEE3"/>
-                </a:solidFill>
-                <a:latin typeface="Be Vietnam Pro" pitchFamily="34" charset="0"/>
-                <a:ea typeface="Be Vietnam Pro" pitchFamily="34" charset="-122"/>
-                <a:cs typeface="Be Vietnam Pro" pitchFamily="34" charset="-120"/>
-              </a:rPr>
-              <a:t>Khi</a:t>
+              <a:rPr lang="en-US" sz="2550" dirty="0" spc="-82" kern="0">
+                <a:solidFill>
+                  <a:srgbClr val="F3EEE3"/>
+                </a:solidFill>
+                <a:latin typeface="Be Vietnam Pro" pitchFamily="34" charset="0"/>
+                <a:ea typeface="Be Vietnam Pro" pitchFamily="34" charset="-122"/>
+                <a:cs typeface="Be Vietnam Pro" pitchFamily="34" charset="-120"/>
+              </a:rPr>
+              <a:t>Tốc</a:t>
+            </a:r>
+            <a:r>
+              <a:rPr lang="en-US" sz="2550" dirty="0" spc="17" kern="0">
+                <a:solidFill>
+                  <a:srgbClr val="F3EEE3"/>
+                </a:solidFill>
+                <a:latin typeface="Be Vietnam Pro" pitchFamily="34" charset="0"/>
+                <a:ea typeface="Be Vietnam Pro" pitchFamily="34" charset="-122"/>
+                <a:cs typeface="Be Vietnam Pro" pitchFamily="34" charset="-120"/>
+              </a:rPr>
+              <a:t> độ</a:t>
+            </a:r>
+            <a:r>
+              <a:rPr lang="en-US" sz="2550" dirty="0" spc="-2" kern="0">
+                <a:solidFill>
+                  <a:srgbClr val="F3EEE3"/>
+                </a:solidFill>
+                <a:latin typeface="Be Vietnam Pro" pitchFamily="34" charset="0"/>
+                <a:ea typeface="Be Vietnam Pro" pitchFamily="34" charset="-122"/>
+                <a:cs typeface="Be Vietnam Pro" pitchFamily="34" charset="-120"/>
+              </a:rPr>
+              <a:t> của</a:t>
+            </a:r>
+            <a:r>
+              <a:rPr lang="en-US" sz="2550" dirty="0" spc="-4" kern="0">
+                <a:solidFill>
+                  <a:srgbClr val="F3EEE3"/>
+                </a:solidFill>
+                <a:latin typeface="Be Vietnam Pro" pitchFamily="34" charset="0"/>
+                <a:ea typeface="Be Vietnam Pro" pitchFamily="34" charset="-122"/>
+                <a:cs typeface="Be Vietnam Pro" pitchFamily="34" charset="-120"/>
+              </a:rPr>
+              <a:t> ba</a:t>
             </a:r>
             <a:r>
               <a:rPr lang="en-US" sz="2550" dirty="0" spc="0" kern="0">
@@ -16425,84 +16142,49 @@
                 <a:ea typeface="Be Vietnam Pro" pitchFamily="34" charset="-122"/>
                 <a:cs typeface="Be Vietnam Pro" pitchFamily="34" charset="-120"/>
               </a:rPr>
-              <a:t> nào chọn mô hình nào</a:t>
+              <a:t> cách</a:t>
             </a:r>
             <a:endParaRPr lang="en-US" sz="2550" dirty="0"/>
           </a:p>
           <a:p>
-            <a:pPr algn="l" marL="323850" indent="-231371">
+            <a:pPr algn="l" indent="0" marL="0">
               <a:lnSpc>
                 <a:spcPts val="3315"/>
               </a:lnSpc>
-              <a:buSzPct val="100000"/>
-              <a:buFont typeface="Arial"/>
-              <a:buChar char="•"/>
+              <a:buNone/>
             </a:pPr>
             <a:r>
-              <a:rPr lang="en-US" sz="2550" dirty="0" spc="1" kern="0">
-                <a:solidFill>
-                  <a:srgbClr val="F3EEE3"/>
-                </a:solidFill>
-                <a:latin typeface="Be Vietnam Pro" pitchFamily="34" charset="0"/>
-                <a:ea typeface="Be Vietnam Pro" pitchFamily="34" charset="-122"/>
-                <a:cs typeface="Be Vietnam Pro" pitchFamily="34" charset="-120"/>
-              </a:rPr>
-              <a:t>Mã</a:t>
-            </a:r>
-            <a:r>
-              <a:rPr lang="en-US" sz="2550" dirty="0" spc="-10" kern="0">
-                <a:solidFill>
-                  <a:srgbClr val="F3EEE3"/>
-                </a:solidFill>
-                <a:latin typeface="Be Vietnam Pro" pitchFamily="34" charset="0"/>
-                <a:ea typeface="Be Vietnam Pro" pitchFamily="34" charset="-122"/>
-                <a:cs typeface="Be Vietnam Pro" pitchFamily="34" charset="-120"/>
-              </a:rPr>
-              <a:t> hay</a:t>
-            </a:r>
-            <a:r>
-              <a:rPr lang="en-US" sz="2550" dirty="0" spc="-1" kern="0">
-                <a:solidFill>
-                  <a:srgbClr val="F3EEE3"/>
-                </a:solidFill>
-                <a:latin typeface="Be Vietnam Pro" pitchFamily="34" charset="0"/>
-                <a:ea typeface="Be Vietnam Pro" pitchFamily="34" charset="-122"/>
-                <a:cs typeface="Be Vietnam Pro" pitchFamily="34" charset="-120"/>
-              </a:rPr>
-              <a:t> ví</a:t>
-            </a:r>
-            <a:r>
-              <a:rPr lang="en-US" sz="2550" dirty="0" spc="-2" kern="0">
-                <a:solidFill>
-                  <a:srgbClr val="F3EEE3"/>
-                </a:solidFill>
-                <a:latin typeface="Be Vietnam Pro" pitchFamily="34" charset="0"/>
-                <a:ea typeface="Be Vietnam Pro" pitchFamily="34" charset="-122"/>
-                <a:cs typeface="Be Vietnam Pro" pitchFamily="34" charset="-120"/>
-              </a:rPr>
-              <a:t> dụ</a:t>
-            </a:r>
-            <a:r>
-              <a:rPr lang="en-US" sz="2550" dirty="0" spc="-8" kern="0">
-                <a:solidFill>
-                  <a:srgbClr val="F3EEE3"/>
-                </a:solidFill>
-                <a:latin typeface="Be Vietnam Pro" pitchFamily="34" charset="0"/>
-                <a:ea typeface="Be Vietnam Pro" pitchFamily="34" charset="-122"/>
-                <a:cs typeface="Be Vietnam Pro" pitchFamily="34" charset="-120"/>
-              </a:rPr>
-              <a:t> chạy</a:t>
-            </a:r>
-            <a:r>
-              <a:rPr lang="en-US" sz="2550" dirty="0" spc="7" kern="0">
-                <a:solidFill>
-                  <a:srgbClr val="F3EEE3"/>
-                </a:solidFill>
-                <a:latin typeface="Be Vietnam Pro" pitchFamily="34" charset="0"/>
-                <a:ea typeface="Be Vietnam Pro" pitchFamily="34" charset="-122"/>
-                <a:cs typeface="Be Vietnam Pro" pitchFamily="34" charset="-120"/>
-              </a:rPr>
-              <a:t> được</a:t>
+              <a:rPr lang="en-US" sz="2550" dirty="0" spc="0" kern="0">
+                <a:solidFill>
+                  <a:srgbClr val="F3EEE3"/>
+                </a:solidFill>
+                <a:latin typeface="Be Vietnam Pro" pitchFamily="34" charset="0"/>
+                <a:ea typeface="Be Vietnam Pro" pitchFamily="34" charset="-122"/>
+                <a:cs typeface="Be Vietnam Pro" pitchFamily="34" charset="-120"/>
+              </a:rPr>
+              <a:t>Mô hình nào hợp</a:t>
+            </a:r>
+            <a:r>
+              <a:rPr lang="en-US" sz="2550" dirty="0" spc="-4" kern="0">
+                <a:solidFill>
+                  <a:srgbClr val="F3EEE3"/>
+                </a:solidFill>
+                <a:latin typeface="Be Vietnam Pro" pitchFamily="34" charset="0"/>
+                <a:ea typeface="Be Vietnam Pro" pitchFamily="34" charset="-122"/>
+                <a:cs typeface="Be Vietnam Pro" pitchFamily="34" charset="-120"/>
+              </a:rPr>
+              <a:t> việc</a:t>
+            </a:r>
+            <a:r>
+              <a:rPr lang="en-US" sz="2550" dirty="0" spc="0" kern="0">
+                <a:solidFill>
+                  <a:srgbClr val="F3EEE3"/>
+                </a:solidFill>
+                <a:latin typeface="Be Vietnam Pro" pitchFamily="34" charset="0"/>
+                <a:ea typeface="Be Vietnam Pro" pitchFamily="34" charset="-122"/>
+                <a:cs typeface="Be Vietnam Pro" pitchFamily="34" charset="-120"/>
+              </a:rPr>
+              <a:t> nào</a:t>
             </a:r>
             <a:endParaRPr lang="en-US" sz="2550" dirty="0"/>
           </a:p>
@@ -16843,15 +16525,26 @@
               <a:buNone/>
             </a:pPr>
             <a:r>
-              <a:rPr lang="en-US" sz="2550" dirty="0" spc="-7" kern="0">
-                <a:solidFill>
-                  <a:srgbClr val="14161C"/>
-                </a:solidFill>
-                <a:latin typeface="Be Vietnam Pro" pitchFamily="34" charset="0"/>
-                <a:ea typeface="Be Vietnam Pro" pitchFamily="34" charset="-122"/>
-                <a:cs typeface="Be Vietnam Pro" pitchFamily="34" charset="-120"/>
-              </a:rPr>
-              <a:t>Một</a:t>
+              <a:rPr lang="en-US" sz="2550" dirty="0" spc="0" kern="0">
+                <a:solidFill>
+                  <a:srgbClr val="14161C"/>
+                </a:solidFill>
+                <a:latin typeface="Be Vietnam Pro" pitchFamily="34" charset="0"/>
+                <a:ea typeface="Be Vietnam Pro" pitchFamily="34" charset="-122"/>
+                <a:cs typeface="Be Vietnam Pro" pitchFamily="34" charset="-120"/>
+              </a:rPr>
+              <a:t>Hàm</a:t>
+            </a:r>
+            <a:r>
+              <a:rPr lang="en-US" sz="2550" dirty="0" spc="-14" kern="0">
+                <a:solidFill>
+                  <a:srgbClr val="14161C"/>
+                </a:solidFill>
+                <a:latin typeface="Be Vietnam Pro" pitchFamily="34" charset="0"/>
+                <a:ea typeface="Be Vietnam Pro" pitchFamily="34" charset="-122"/>
+                <a:cs typeface="Be Vietnam Pro" pitchFamily="34" charset="-120"/>
+              </a:rPr>
+              <a:t> square(n)</a:t>
             </a:r>
             <a:r>
               <a:rPr lang="en-US" sz="2550" dirty="0" spc="1" kern="0">
@@ -16862,9 +16555,163 @@
                 <a:ea typeface="Be Vietnam Pro" pitchFamily="34" charset="-122"/>
                 <a:cs typeface="Be Vietnam Pro" pitchFamily="34" charset="-120"/>
               </a:rPr>
+              <a:t> chỉ</a:t>
+            </a:r>
+            <a:r>
+              <a:rPr lang="en-US" sz="2550" dirty="0" spc="-24" kern="0">
+                <a:solidFill>
+                  <a:srgbClr val="14161C"/>
+                </a:solidFill>
+                <a:latin typeface="Be Vietnam Pro" pitchFamily="34" charset="0"/>
+                <a:ea typeface="Be Vietnam Pro" pitchFamily="34" charset="-122"/>
+                <a:cs typeface="Be Vietnam Pro" pitchFamily="34" charset="-120"/>
+              </a:rPr>
+              <a:t> trả</a:t>
+            </a:r>
+            <a:r>
+              <a:rPr lang="en-US" sz="2550" dirty="0" spc="-1" kern="0">
+                <a:solidFill>
+                  <a:srgbClr val="14161C"/>
+                </a:solidFill>
+                <a:latin typeface="Be Vietnam Pro" pitchFamily="34" charset="0"/>
+                <a:ea typeface="Be Vietnam Pro" pitchFamily="34" charset="-122"/>
+                <a:cs typeface="Be Vietnam Pro" pitchFamily="34" charset="-120"/>
+              </a:rPr>
+              <a:t> n</a:t>
+            </a:r>
+            <a:r>
+              <a:rPr lang="en-US" sz="2550" dirty="0" spc="2" kern="0">
+                <a:solidFill>
+                  <a:srgbClr val="14161C"/>
+                </a:solidFill>
+                <a:latin typeface="Be Vietnam Pro" pitchFamily="34" charset="0"/>
+                <a:ea typeface="Be Vietnam Pro" pitchFamily="34" charset="-122"/>
+                <a:cs typeface="Be Vietnam Pro" pitchFamily="34" charset="-120"/>
+              </a:rPr>
+              <a:t> *</a:t>
+            </a:r>
+            <a:r>
+              <a:rPr lang="en-US" sz="2550" dirty="0" spc="-2" kern="0">
+                <a:solidFill>
+                  <a:srgbClr val="14161C"/>
+                </a:solidFill>
+                <a:latin typeface="Be Vietnam Pro" pitchFamily="34" charset="0"/>
+                <a:ea typeface="Be Vietnam Pro" pitchFamily="34" charset="-122"/>
+                <a:cs typeface="Be Vietnam Pro" pitchFamily="34" charset="-120"/>
+              </a:rPr>
+              <a:t> n,</a:t>
+            </a:r>
+            <a:r>
+              <a:rPr lang="en-US" sz="2550" dirty="0" spc="0" kern="0">
+                <a:solidFill>
+                  <a:srgbClr val="14161C"/>
+                </a:solidFill>
+                <a:latin typeface="Be Vietnam Pro" pitchFamily="34" charset="0"/>
+                <a:ea typeface="Be Vietnam Pro" pitchFamily="34" charset="-122"/>
+                <a:cs typeface="Be Vietnam Pro" pitchFamily="34" charset="-120"/>
+              </a:rPr>
+              <a:t> không đụng</a:t>
+            </a:r>
+            <a:r>
+              <a:rPr lang="en-US" sz="2550" dirty="0" spc="-1" kern="0">
+                <a:solidFill>
+                  <a:srgbClr val="14161C"/>
+                </a:solidFill>
+                <a:latin typeface="Be Vietnam Pro" pitchFamily="34" charset="0"/>
+                <a:ea typeface="Be Vietnam Pro" pitchFamily="34" charset="-122"/>
+                <a:cs typeface="Be Vietnam Pro" pitchFamily="34" charset="-120"/>
+              </a:rPr>
+              <a:t> biến</a:t>
+            </a:r>
+            <a:r>
+              <a:rPr lang="en-US" sz="2550" dirty="0" spc="-8" kern="0">
+                <a:solidFill>
+                  <a:srgbClr val="14161C"/>
+                </a:solidFill>
+                <a:latin typeface="Be Vietnam Pro" pitchFamily="34" charset="0"/>
+                <a:ea typeface="Be Vietnam Pro" pitchFamily="34" charset="-122"/>
+                <a:cs typeface="Be Vietnam Pro" pitchFamily="34" charset="-120"/>
+              </a:rPr>
+              <a:t> ngoài.</a:t>
+            </a:r>
+            <a:r>
+              <a:rPr lang="en-US" sz="2550" dirty="0" spc="-59" kern="0">
+                <a:solidFill>
+                  <a:srgbClr val="14161C"/>
+                </a:solidFill>
+                <a:latin typeface="Be Vietnam Pro" pitchFamily="34" charset="0"/>
+                <a:ea typeface="Be Vietnam Pro" pitchFamily="34" charset="-122"/>
+                <a:cs typeface="Be Vietnam Pro" pitchFamily="34" charset="-120"/>
+              </a:rPr>
+              <a:t> Tài</a:t>
+            </a:r>
+            <a:r>
+              <a:rPr lang="en-US" sz="2550" dirty="0" spc="1" kern="0">
+                <a:solidFill>
+                  <a:srgbClr val="14161C"/>
+                </a:solidFill>
+                <a:latin typeface="Be Vietnam Pro" pitchFamily="34" charset="0"/>
+                <a:ea typeface="Be Vietnam Pro" pitchFamily="34" charset="-122"/>
+                <a:cs typeface="Be Vietnam Pro" pitchFamily="34" charset="-120"/>
+              </a:rPr>
+              <a:t> liệu</a:t>
+            </a:r>
+            <a:r>
+              <a:rPr lang="en-US" sz="2550" dirty="0" spc="8" kern="0">
+                <a:solidFill>
+                  <a:srgbClr val="14161C"/>
+                </a:solidFill>
+                <a:latin typeface="Be Vietnam Pro" pitchFamily="34" charset="0"/>
+                <a:ea typeface="Be Vietnam Pro" pitchFamily="34" charset="-122"/>
+                <a:cs typeface="Be Vietnam Pro" pitchFamily="34" charset="-120"/>
+              </a:rPr>
+              <a:t> Python</a:t>
+            </a:r>
+            <a:r>
+              <a:rPr lang="en-US" sz="2550" dirty="0" spc="-13" kern="0">
+                <a:solidFill>
+                  <a:srgbClr val="14161C"/>
+                </a:solidFill>
+                <a:latin typeface="Be Vietnam Pro" pitchFamily="34" charset="0"/>
+                <a:ea typeface="Be Vietnam Pro" pitchFamily="34" charset="-122"/>
+                <a:cs typeface="Be Vietnam Pro" pitchFamily="34" charset="-120"/>
+              </a:rPr>
+              <a:t> gọi</a:t>
+            </a:r>
+            <a:r>
+              <a:rPr lang="en-US" sz="2550" dirty="0" spc="1" kern="0">
+                <a:solidFill>
+                  <a:srgbClr val="14161C"/>
+                </a:solidFill>
+                <a:latin typeface="Be Vietnam Pro" pitchFamily="34" charset="0"/>
+                <a:ea typeface="Be Vietnam Pro" pitchFamily="34" charset="-122"/>
+                <a:cs typeface="Be Vietnam Pro" pitchFamily="34" charset="-120"/>
+              </a:rPr>
               <a:t> hàm</a:t>
             </a:r>
             <a:r>
+              <a:rPr lang="en-US" sz="2550" dirty="0" spc="-3" kern="0">
+                <a:solidFill>
+                  <a:srgbClr val="14161C"/>
+                </a:solidFill>
+                <a:latin typeface="Be Vietnam Pro" pitchFamily="34" charset="0"/>
+                <a:ea typeface="Be Vietnam Pro" pitchFamily="34" charset="-122"/>
+                <a:cs typeface="Be Vietnam Pro" pitchFamily="34" charset="-120"/>
+              </a:rPr>
+              <a:t> như</a:t>
+            </a:r>
+            <a:r>
+              <a:rPr lang="en-US" sz="2550" dirty="0" spc="-23" kern="0">
+                <a:solidFill>
+                  <a:srgbClr val="14161C"/>
+                </a:solidFill>
+                <a:latin typeface="Be Vietnam Pro" pitchFamily="34" charset="0"/>
+                <a:ea typeface="Be Vietnam Pro" pitchFamily="34" charset="-122"/>
+                <a:cs typeface="Be Vietnam Pro" pitchFamily="34" charset="-120"/>
+              </a:rPr>
+              <a:t> vậy</a:t>
+            </a:r>
+            <a:r>
               <a:rPr lang="en-US" sz="2550" dirty="0" spc="0" kern="0">
                 <a:solidFill>
                   <a:srgbClr val="14161C"/>
@@ -16873,117 +16720,7 @@
                 <a:ea typeface="Be Vietnam Pro" pitchFamily="34" charset="-122"/>
                 <a:cs typeface="Be Vietnam Pro" pitchFamily="34" charset="-120"/>
               </a:rPr>
-              <a:t> chỉ nhận</a:t>
-            </a:r>
-            <a:r>
-              <a:rPr lang="en-US" sz="2550" dirty="0" spc="15" kern="0">
-                <a:solidFill>
-                  <a:srgbClr val="14161C"/>
-                </a:solidFill>
-                <a:latin typeface="Be Vietnam Pro" pitchFamily="34" charset="0"/>
-                <a:ea typeface="Be Vietnam Pro" pitchFamily="34" charset="-122"/>
-                <a:cs typeface="Be Vietnam Pro" pitchFamily="34" charset="-120"/>
-              </a:rPr>
-              <a:t> đầu</a:t>
-            </a:r>
-            <a:r>
-              <a:rPr lang="en-US" sz="2550" dirty="0" spc="-12" kern="0">
-                <a:solidFill>
-                  <a:srgbClr val="14161C"/>
-                </a:solidFill>
-                <a:latin typeface="Be Vietnam Pro" pitchFamily="34" charset="0"/>
-                <a:ea typeface="Be Vietnam Pro" pitchFamily="34" charset="-122"/>
-                <a:cs typeface="Be Vietnam Pro" pitchFamily="34" charset="-120"/>
-              </a:rPr>
-              <a:t> vào,</a:t>
-            </a:r>
-            <a:r>
-              <a:rPr lang="en-US" sz="2550" dirty="0" spc="-24" kern="0">
-                <a:solidFill>
-                  <a:srgbClr val="14161C"/>
-                </a:solidFill>
-                <a:latin typeface="Be Vietnam Pro" pitchFamily="34" charset="0"/>
-                <a:ea typeface="Be Vietnam Pro" pitchFamily="34" charset="-122"/>
-                <a:cs typeface="Be Vietnam Pro" pitchFamily="34" charset="-120"/>
-              </a:rPr>
-              <a:t> trả</a:t>
-            </a:r>
-            <a:r>
-              <a:rPr lang="en-US" sz="2550" dirty="0" spc="15" kern="0">
-                <a:solidFill>
-                  <a:srgbClr val="14161C"/>
-                </a:solidFill>
-                <a:latin typeface="Be Vietnam Pro" pitchFamily="34" charset="0"/>
-                <a:ea typeface="Be Vietnam Pro" pitchFamily="34" charset="-122"/>
-                <a:cs typeface="Be Vietnam Pro" pitchFamily="34" charset="-120"/>
-              </a:rPr>
-              <a:t> đầu</a:t>
-            </a:r>
-            <a:r>
-              <a:rPr lang="en-US" sz="2550" dirty="0" spc="-27" kern="0">
-                <a:solidFill>
-                  <a:srgbClr val="14161C"/>
-                </a:solidFill>
-                <a:latin typeface="Be Vietnam Pro" pitchFamily="34" charset="0"/>
-                <a:ea typeface="Be Vietnam Pro" pitchFamily="34" charset="-122"/>
-                <a:cs typeface="Be Vietnam Pro" pitchFamily="34" charset="-120"/>
-              </a:rPr>
-              <a:t> ra,</a:t>
-            </a:r>
-            <a:r>
-              <a:rPr lang="en-US" sz="2550" dirty="0" spc="0" kern="0">
-                <a:solidFill>
-                  <a:srgbClr val="14161C"/>
-                </a:solidFill>
-                <a:latin typeface="Be Vietnam Pro" pitchFamily="34" charset="0"/>
-                <a:ea typeface="Be Vietnam Pro" pitchFamily="34" charset="-122"/>
-                <a:cs typeface="Be Vietnam Pro" pitchFamily="34" charset="-120"/>
-              </a:rPr>
-              <a:t> không</a:t>
-            </a:r>
-            <a:r>
-              <a:rPr lang="en-US" sz="2550" dirty="0" spc="7" kern="0">
-                <a:solidFill>
-                  <a:srgbClr val="14161C"/>
-                </a:solidFill>
-                <a:latin typeface="Be Vietnam Pro" pitchFamily="34" charset="0"/>
-                <a:ea typeface="Be Vietnam Pro" pitchFamily="34" charset="-122"/>
-                <a:cs typeface="Be Vietnam Pro" pitchFamily="34" charset="-120"/>
-              </a:rPr>
-              <a:t> sửa</a:t>
-            </a:r>
-            <a:r>
-              <a:rPr lang="en-US" sz="2550" dirty="0" spc="0" kern="0">
-                <a:solidFill>
-                  <a:srgbClr val="14161C"/>
-                </a:solidFill>
-                <a:latin typeface="Be Vietnam Pro" pitchFamily="34" charset="0"/>
-                <a:ea typeface="Be Vietnam Pro" pitchFamily="34" charset="-122"/>
-                <a:cs typeface="Be Vietnam Pro" pitchFamily="34" charset="-120"/>
-              </a:rPr>
-              <a:t> biến</a:t>
-            </a:r>
-            <a:r>
-              <a:rPr lang="en-US" sz="2550" dirty="0" spc="-9" kern="0">
-                <a:solidFill>
-                  <a:srgbClr val="14161C"/>
-                </a:solidFill>
-                <a:latin typeface="Be Vietnam Pro" pitchFamily="34" charset="0"/>
-                <a:ea typeface="Be Vietnam Pro" pitchFamily="34" charset="-122"/>
-                <a:cs typeface="Be Vietnam Pro" pitchFamily="34" charset="-120"/>
-              </a:rPr>
-              <a:t> ngoài.</a:t>
-            </a:r>
-            <a:r>
-              <a:rPr lang="en-US" sz="2550" dirty="0" spc="-2" kern="0">
-                <a:solidFill>
-                  <a:srgbClr val="14161C"/>
-                </a:solidFill>
-                <a:latin typeface="Be Vietnam Pro" pitchFamily="34" charset="0"/>
-                <a:ea typeface="Be Vietnam Pro" pitchFamily="34" charset="-122"/>
-                <a:cs typeface="Be Vietnam Pro" pitchFamily="34" charset="-120"/>
-              </a:rPr>
-              <a:t> Thuộc</a:t>
+              <a:t> là</a:t>
             </a:r>
             <a:r>
               <a:rPr lang="en-US" sz="2550" dirty="0" spc="1" kern="0">
@@ -16994,117 +16731,7 @@
                 <a:ea typeface="Be Vietnam Pro" pitchFamily="34" charset="-122"/>
                 <a:cs typeface="Be Vietnam Pro" pitchFamily="34" charset="-120"/>
               </a:rPr>
-              <a:t> mô</a:t>
-            </a:r>
-            <a:r>
-              <a:rPr lang="en-US" sz="2550" dirty="0" spc="0" kern="0">
-                <a:solidFill>
-                  <a:srgbClr val="14161C"/>
-                </a:solidFill>
-                <a:latin typeface="Be Vietnam Pro" pitchFamily="34" charset="0"/>
-                <a:ea typeface="Be Vietnam Pro" pitchFamily="34" charset="-122"/>
-                <a:cs typeface="Be Vietnam Pro" pitchFamily="34" charset="-120"/>
-              </a:rPr>
-              <a:t> hình nào,</a:t>
-            </a:r>
-            <a:r>
-              <a:rPr lang="en-US" sz="2550" dirty="0" spc="-19" kern="0">
-                <a:solidFill>
-                  <a:srgbClr val="14161C"/>
-                </a:solidFill>
-                <a:latin typeface="Be Vietnam Pro" pitchFamily="34" charset="0"/>
-                <a:ea typeface="Be Vietnam Pro" pitchFamily="34" charset="-122"/>
-                <a:cs typeface="Be Vietnam Pro" pitchFamily="34" charset="-120"/>
-              </a:rPr>
-              <a:t> và</a:t>
-            </a:r>
-            <a:r>
-              <a:rPr lang="en-US" sz="2550" dirty="0" spc="1" kern="0">
-                <a:solidFill>
-                  <a:srgbClr val="14161C"/>
-                </a:solidFill>
-                <a:latin typeface="Be Vietnam Pro" pitchFamily="34" charset="0"/>
-                <a:ea typeface="Be Vietnam Pro" pitchFamily="34" charset="-122"/>
-                <a:cs typeface="Be Vietnam Pro" pitchFamily="34" charset="-120"/>
-              </a:rPr>
-              <a:t> hàm</a:t>
-            </a:r>
-            <a:r>
-              <a:rPr lang="en-US" sz="2550" dirty="0" spc="0" kern="0">
-                <a:solidFill>
-                  <a:srgbClr val="14161C"/>
-                </a:solidFill>
-                <a:latin typeface="Be Vietnam Pro" pitchFamily="34" charset="0"/>
-                <a:ea typeface="Be Vietnam Pro" pitchFamily="34" charset="-122"/>
-                <a:cs typeface="Be Vietnam Pro" pitchFamily="34" charset="-120"/>
-              </a:rPr>
-              <a:t> không có</a:t>
-            </a:r>
-            <a:r>
-              <a:rPr lang="en-US" sz="2550" dirty="0" spc="-11" kern="0">
-                <a:solidFill>
-                  <a:srgbClr val="14161C"/>
-                </a:solidFill>
-                <a:latin typeface="Be Vietnam Pro" pitchFamily="34" charset="0"/>
-                <a:ea typeface="Be Vietnam Pro" pitchFamily="34" charset="-122"/>
-                <a:cs typeface="Be Vietnam Pro" pitchFamily="34" charset="-120"/>
-              </a:rPr>
-              <a:t> tác</a:t>
-            </a:r>
-            <a:r>
-              <a:rPr lang="en-US" sz="2550" dirty="0" spc="-1" kern="0">
-                <a:solidFill>
-                  <a:srgbClr val="14161C"/>
-                </a:solidFill>
-                <a:latin typeface="Be Vietnam Pro" pitchFamily="34" charset="0"/>
-                <a:ea typeface="Be Vietnam Pro" pitchFamily="34" charset="-122"/>
-                <a:cs typeface="Be Vietnam Pro" pitchFamily="34" charset="-120"/>
-              </a:rPr>
-              <a:t> dụng</a:t>
-            </a:r>
-            <a:r>
-              <a:rPr lang="en-US" sz="2550" dirty="0" spc="-2" kern="0">
-                <a:solidFill>
-                  <a:srgbClr val="14161C"/>
-                </a:solidFill>
-                <a:latin typeface="Be Vietnam Pro" pitchFamily="34" charset="0"/>
-                <a:ea typeface="Be Vietnam Pro" pitchFamily="34" charset="-122"/>
-                <a:cs typeface="Be Vietnam Pro" pitchFamily="34" charset="-120"/>
-              </a:rPr>
-              <a:t> phụ</a:t>
-            </a:r>
-            <a:r>
-              <a:rPr lang="en-US" sz="2550" dirty="0" spc="0" kern="0">
-                <a:solidFill>
-                  <a:srgbClr val="14161C"/>
-                </a:solidFill>
-                <a:latin typeface="Be Vietnam Pro" pitchFamily="34" charset="0"/>
-                <a:ea typeface="Be Vietnam Pro" pitchFamily="34" charset="-122"/>
-                <a:cs typeface="Be Vietnam Pro" pitchFamily="34" charset="-120"/>
-              </a:rPr>
-              <a:t> nào</a:t>
-            </a:r>
-            <a:r>
-              <a:rPr lang="en-US" sz="2550" dirty="0" spc="-13" kern="0">
-                <a:solidFill>
-                  <a:srgbClr val="14161C"/>
-                </a:solidFill>
-                <a:latin typeface="Be Vietnam Pro" pitchFamily="34" charset="0"/>
-                <a:ea typeface="Be Vietnam Pro" pitchFamily="34" charset="-122"/>
-                <a:cs typeface="Be Vietnam Pro" pitchFamily="34" charset="-120"/>
-              </a:rPr>
-              <a:t> gọi</a:t>
-            </a:r>
-            <a:r>
-              <a:rPr lang="en-US" sz="2550" dirty="0" spc="1" kern="0">
-                <a:solidFill>
-                  <a:srgbClr val="14161C"/>
-                </a:solidFill>
-                <a:latin typeface="Be Vietnam Pro" pitchFamily="34" charset="0"/>
-                <a:ea typeface="Be Vietnam Pro" pitchFamily="34" charset="-122"/>
-                <a:cs typeface="Be Vietnam Pro" pitchFamily="34" charset="-120"/>
-              </a:rPr>
-              <a:t> là gì?</a:t>
+              <a:t> gì?</a:t>
             </a:r>
             <a:endParaRPr lang="en-US" sz="2550" dirty="0"/>
           </a:p>
@@ -17210,6 +16837,149 @@
               <a:buNone/>
             </a:pPr>
             <a:r>
+              <a:rPr lang="en-US" sz="2550" dirty="0" spc="-1" kern="0">
+                <a:solidFill>
+                  <a:srgbClr val="14161C"/>
+                </a:solidFill>
+                <a:latin typeface="Be Vietnam Pro" pitchFamily="34" charset="0"/>
+                <a:ea typeface="Be Vietnam Pro" pitchFamily="34" charset="-122"/>
+                <a:cs typeface="Be Vietnam Pro" pitchFamily="34" charset="-120"/>
+              </a:rPr>
+              <a:t>Dòng</a:t>
+            </a:r>
+            <a:r>
+              <a:rPr lang="en-US" sz="2550" dirty="0" spc="-20" kern="0">
+                <a:solidFill>
+                  <a:srgbClr val="14161C"/>
+                </a:solidFill>
+                <a:latin typeface="Be Vietnam Pro" pitchFamily="34" charset="0"/>
+                <a:ea typeface="Be Vietnam Pro" pitchFamily="34" charset="-122"/>
+                <a:cs typeface="Be Vietnam Pro" pitchFamily="34" charset="-120"/>
+              </a:rPr>
+              <a:t> total</a:t>
+            </a:r>
+            <a:r>
+              <a:rPr lang="en-US" sz="2550" dirty="0" spc="-1" kern="0">
+                <a:solidFill>
+                  <a:srgbClr val="14161C"/>
+                </a:solidFill>
+                <a:latin typeface="Be Vietnam Pro" pitchFamily="34" charset="0"/>
+                <a:ea typeface="Be Vietnam Pro" pitchFamily="34" charset="-122"/>
+                <a:cs typeface="Be Vietnam Pro" pitchFamily="34" charset="-120"/>
+              </a:rPr>
+              <a:t> += n</a:t>
+            </a:r>
+            <a:r>
+              <a:rPr lang="en-US" sz="2550" dirty="0" spc="2" kern="0">
+                <a:solidFill>
+                  <a:srgbClr val="14161C"/>
+                </a:solidFill>
+                <a:latin typeface="Be Vietnam Pro" pitchFamily="34" charset="0"/>
+                <a:ea typeface="Be Vietnam Pro" pitchFamily="34" charset="-122"/>
+                <a:cs typeface="Be Vietnam Pro" pitchFamily="34" charset="-120"/>
+              </a:rPr>
+              <a:t> *</a:t>
+            </a:r>
+            <a:r>
+              <a:rPr lang="en-US" sz="2550" dirty="0" spc="-1" kern="0">
+                <a:solidFill>
+                  <a:srgbClr val="14161C"/>
+                </a:solidFill>
+                <a:latin typeface="Be Vietnam Pro" pitchFamily="34" charset="0"/>
+                <a:ea typeface="Be Vietnam Pro" pitchFamily="34" charset="-122"/>
+                <a:cs typeface="Be Vietnam Pro" pitchFamily="34" charset="-120"/>
+              </a:rPr>
+              <a:t> n thuộc</a:t>
+            </a:r>
+            <a:r>
+              <a:rPr lang="en-US" sz="2550" dirty="0" spc="1" kern="0">
+                <a:solidFill>
+                  <a:srgbClr val="14161C"/>
+                </a:solidFill>
+                <a:latin typeface="Be Vietnam Pro" pitchFamily="34" charset="0"/>
+                <a:ea typeface="Be Vietnam Pro" pitchFamily="34" charset="-122"/>
+                <a:cs typeface="Be Vietnam Pro" pitchFamily="34" charset="-120"/>
+              </a:rPr>
+              <a:t> mô</a:t>
+            </a:r>
+            <a:r>
+              <a:rPr lang="en-US" sz="2550" dirty="0" spc="0" kern="0">
+                <a:solidFill>
+                  <a:srgbClr val="14161C"/>
+                </a:solidFill>
+                <a:latin typeface="Be Vietnam Pro" pitchFamily="34" charset="0"/>
+                <a:ea typeface="Be Vietnam Pro" pitchFamily="34" charset="-122"/>
+                <a:cs typeface="Be Vietnam Pro" pitchFamily="34" charset="-120"/>
+              </a:rPr>
+              <a:t> hình nào,</a:t>
+            </a:r>
+            <a:r>
+              <a:rPr lang="en-US" sz="2550" dirty="0" spc="-19" kern="0">
+                <a:solidFill>
+                  <a:srgbClr val="14161C"/>
+                </a:solidFill>
+                <a:latin typeface="Be Vietnam Pro" pitchFamily="34" charset="0"/>
+                <a:ea typeface="Be Vietnam Pro" pitchFamily="34" charset="-122"/>
+                <a:cs typeface="Be Vietnam Pro" pitchFamily="34" charset="-120"/>
+              </a:rPr>
+              <a:t> và</a:t>
+            </a:r>
+            <a:r>
+              <a:rPr lang="en-US" sz="2550" dirty="0" spc="-1" kern="0">
+                <a:solidFill>
+                  <a:srgbClr val="14161C"/>
+                </a:solidFill>
+                <a:latin typeface="Be Vietnam Pro" pitchFamily="34" charset="0"/>
+                <a:ea typeface="Be Vietnam Pro" pitchFamily="34" charset="-122"/>
+                <a:cs typeface="Be Vietnam Pro" pitchFamily="34" charset="-120"/>
+              </a:rPr>
+              <a:t> vì</a:t>
+            </a:r>
+            <a:r>
+              <a:rPr lang="en-US" sz="2550" dirty="0" spc="-8" kern="0">
+                <a:solidFill>
+                  <a:srgbClr val="14161C"/>
+                </a:solidFill>
+                <a:latin typeface="Be Vietnam Pro" pitchFamily="34" charset="0"/>
+                <a:ea typeface="Be Vietnam Pro" pitchFamily="34" charset="-122"/>
+                <a:cs typeface="Be Vietnam Pro" pitchFamily="34" charset="-120"/>
+              </a:rPr>
+              <a:t> sao</a:t>
+            </a:r>
+            <a:r>
+              <a:rPr lang="en-US" sz="2550" dirty="0" spc="0" kern="0">
+                <a:solidFill>
+                  <a:srgbClr val="14161C"/>
+                </a:solidFill>
+                <a:latin typeface="Be Vietnam Pro" pitchFamily="34" charset="0"/>
+                <a:ea typeface="Be Vietnam Pro" pitchFamily="34" charset="-122"/>
+                <a:cs typeface="Be Vietnam Pro" pitchFamily="34" charset="-120"/>
+              </a:rPr>
+              <a:t> khó</a:t>
+            </a:r>
+            <a:r>
+              <a:rPr lang="en-US" sz="2550" dirty="0" spc="1" kern="0">
+                <a:solidFill>
+                  <a:srgbClr val="14161C"/>
+                </a:solidFill>
+                <a:latin typeface="Be Vietnam Pro" pitchFamily="34" charset="0"/>
+                <a:ea typeface="Be Vietnam Pro" pitchFamily="34" charset="-122"/>
+                <a:cs typeface="Be Vietnam Pro" pitchFamily="34" charset="-120"/>
+              </a:rPr>
+              <a:t> kiểm</a:t>
+            </a:r>
+            <a:r>
+              <a:rPr lang="en-US" sz="2550" dirty="0" spc="-1" kern="0">
+                <a:solidFill>
+                  <a:srgbClr val="14161C"/>
+                </a:solidFill>
+                <a:latin typeface="Be Vietnam Pro" pitchFamily="34" charset="0"/>
+                <a:ea typeface="Be Vietnam Pro" pitchFamily="34" charset="-122"/>
+                <a:cs typeface="Be Vietnam Pro" pitchFamily="34" charset="-120"/>
+              </a:rPr>
+              <a:t> thử</a:t>
+            </a:r>
+            <a:r>
               <a:rPr lang="en-US" sz="2550" dirty="0" spc="9" kern="0">
                 <a:solidFill>
                   <a:srgbClr val="14161C"/>
@@ -17218,18 +16988,7 @@
                 <a:ea typeface="Be Vietnam Pro" pitchFamily="34" charset="-122"/>
                 <a:cs typeface="Be Vietnam Pro" pitchFamily="34" charset="-120"/>
               </a:rPr>
-              <a:t>Python</a:t>
-            </a:r>
-            <a:r>
-              <a:rPr lang="en-US" sz="2550" dirty="0" spc="1" kern="0">
-                <a:solidFill>
-                  <a:srgbClr val="14161C"/>
-                </a:solidFill>
-                <a:latin typeface="Be Vietnam Pro" pitchFamily="34" charset="0"/>
-                <a:ea typeface="Be Vietnam Pro" pitchFamily="34" charset="-122"/>
-                <a:cs typeface="Be Vietnam Pro" pitchFamily="34" charset="-120"/>
-              </a:rPr>
-              <a:t> có</a:t>
+              <a:t> riêng</a:t>
             </a:r>
             <a:r>
               <a:rPr lang="en-US" sz="2550" dirty="0" spc="-1" kern="0">
@@ -17240,161 +16999,18 @@
                 <a:ea typeface="Be Vietnam Pro" pitchFamily="34" charset="-122"/>
                 <a:cs typeface="Be Vietnam Pro" pitchFamily="34" charset="-120"/>
               </a:rPr>
-              <a:t> ở</a:t>
-            </a:r>
-            <a:r>
-              <a:rPr lang="en-US" sz="2550" dirty="0" spc="1" kern="0">
-                <a:solidFill>
-                  <a:srgbClr val="14161C"/>
-                </a:solidFill>
-                <a:latin typeface="Be Vietnam Pro" pitchFamily="34" charset="0"/>
-                <a:ea typeface="Be Vietnam Pro" pitchFamily="34" charset="-122"/>
-                <a:cs typeface="Be Vietnam Pro" pitchFamily="34" charset="-120"/>
-              </a:rPr>
-              <a:t> cả</a:t>
-            </a:r>
-            <a:r>
-              <a:rPr lang="en-US" sz="2550" dirty="0" spc="-1" kern="0">
-                <a:solidFill>
-                  <a:srgbClr val="14161C"/>
-                </a:solidFill>
-                <a:latin typeface="Be Vietnam Pro" pitchFamily="34" charset="0"/>
-                <a:ea typeface="Be Vietnam Pro" pitchFamily="34" charset="-122"/>
-                <a:cs typeface="Be Vietnam Pro" pitchFamily="34" charset="-120"/>
-              </a:rPr>
-              <a:t> danh</a:t>
-            </a:r>
-            <a:r>
-              <a:rPr lang="en-US" sz="2550" dirty="0" spc="-6" kern="0">
-                <a:solidFill>
-                  <a:srgbClr val="14161C"/>
-                </a:solidFill>
-                <a:latin typeface="Be Vietnam Pro" pitchFamily="34" charset="0"/>
-                <a:ea typeface="Be Vietnam Pro" pitchFamily="34" charset="-122"/>
-                <a:cs typeface="Be Vietnam Pro" pitchFamily="34" charset="-120"/>
-              </a:rPr>
-              <a:t> sách</a:t>
-            </a:r>
-            <a:r>
-              <a:rPr lang="en-US" sz="2550" dirty="0" spc="1" kern="0">
-                <a:solidFill>
-                  <a:srgbClr val="14161C"/>
-                </a:solidFill>
-                <a:latin typeface="Be Vietnam Pro" pitchFamily="34" charset="0"/>
-                <a:ea typeface="Be Vietnam Pro" pitchFamily="34" charset="-122"/>
-                <a:cs typeface="Be Vietnam Pro" pitchFamily="34" charset="-120"/>
-              </a:rPr>
-              <a:t> mệnh</a:t>
-            </a:r>
-            <a:r>
-              <a:rPr lang="en-US" sz="2550" dirty="0" spc="0" kern="0">
-                <a:solidFill>
-                  <a:srgbClr val="14161C"/>
-                </a:solidFill>
-                <a:latin typeface="Be Vietnam Pro" pitchFamily="34" charset="0"/>
-                <a:ea typeface="Be Vietnam Pro" pitchFamily="34" charset="-122"/>
-                <a:cs typeface="Be Vietnam Pro" pitchFamily="34" charset="-120"/>
-              </a:rPr>
-              <a:t> lệnh</a:t>
-            </a:r>
-            <a:r>
-              <a:rPr lang="en-US" sz="2550" dirty="0" spc="-19" kern="0">
-                <a:solidFill>
-                  <a:srgbClr val="14161C"/>
-                </a:solidFill>
-                <a:latin typeface="Be Vietnam Pro" pitchFamily="34" charset="0"/>
-                <a:ea typeface="Be Vietnam Pro" pitchFamily="34" charset="-122"/>
-                <a:cs typeface="Be Vietnam Pro" pitchFamily="34" charset="-120"/>
-              </a:rPr>
-              <a:t> và</a:t>
-            </a:r>
-            <a:r>
-              <a:rPr lang="en-US" sz="2550" dirty="0" spc="5" kern="0">
-                <a:solidFill>
-                  <a:srgbClr val="14161C"/>
-                </a:solidFill>
-                <a:latin typeface="Be Vietnam Pro" pitchFamily="34" charset="0"/>
-                <a:ea typeface="Be Vietnam Pro" pitchFamily="34" charset="-122"/>
-                <a:cs typeface="Be Vietnam Pro" pitchFamily="34" charset="-120"/>
-              </a:rPr>
-              <a:t> hướng</a:t>
-            </a:r>
-            <a:r>
-              <a:rPr lang="en-US" sz="2550" dirty="0" spc="13" kern="0">
-                <a:solidFill>
-                  <a:srgbClr val="14161C"/>
-                </a:solidFill>
-                <a:latin typeface="Be Vietnam Pro" pitchFamily="34" charset="0"/>
-                <a:ea typeface="Be Vietnam Pro" pitchFamily="34" charset="-122"/>
-                <a:cs typeface="Be Vietnam Pro" pitchFamily="34" charset="-120"/>
-              </a:rPr>
-              <a:t> đối</a:t>
-            </a:r>
-            <a:r>
-              <a:rPr lang="en-US" sz="2550" dirty="0" spc="6" kern="0">
-                <a:solidFill>
-                  <a:srgbClr val="14161C"/>
-                </a:solidFill>
-                <a:latin typeface="Be Vietnam Pro" pitchFamily="34" charset="0"/>
-                <a:ea typeface="Be Vietnam Pro" pitchFamily="34" charset="-122"/>
-                <a:cs typeface="Be Vietnam Pro" pitchFamily="34" charset="-120"/>
-              </a:rPr>
-              <a:t> tượng.</a:t>
-            </a:r>
-            <a:r>
-              <a:rPr lang="en-US" sz="2550" dirty="0" spc="42" kern="0">
-                <a:solidFill>
-                  <a:srgbClr val="14161C"/>
-                </a:solidFill>
-                <a:latin typeface="Be Vietnam Pro" pitchFamily="34" charset="0"/>
-                <a:ea typeface="Be Vietnam Pro" pitchFamily="34" charset="-122"/>
-                <a:cs typeface="Be Vietnam Pro" pitchFamily="34" charset="-120"/>
-              </a:rPr>
-              <a:t> Vì</a:t>
-            </a:r>
-            <a:r>
-              <a:rPr lang="en-US" sz="2550" dirty="0" spc="-8" kern="0">
-                <a:solidFill>
-                  <a:srgbClr val="14161C"/>
-                </a:solidFill>
-                <a:latin typeface="Be Vietnam Pro" pitchFamily="34" charset="0"/>
-                <a:ea typeface="Be Vietnam Pro" pitchFamily="34" charset="-122"/>
-                <a:cs typeface="Be Vietnam Pro" pitchFamily="34" charset="-120"/>
-              </a:rPr>
-              <a:t> sao</a:t>
-            </a:r>
-            <a:r>
-              <a:rPr lang="en-US" sz="2550" dirty="0" spc="1" kern="0">
-                <a:solidFill>
-                  <a:srgbClr val="14161C"/>
-                </a:solidFill>
-                <a:latin typeface="Be Vietnam Pro" pitchFamily="34" charset="0"/>
-                <a:ea typeface="Be Vietnam Pro" pitchFamily="34" charset="-122"/>
-                <a:cs typeface="Be Vietnam Pro" pitchFamily="34" charset="-120"/>
-              </a:rPr>
-              <a:t> không</a:t>
-            </a:r>
-            <a:r>
-              <a:rPr lang="en-US" sz="2550" dirty="0" spc="2" kern="0">
-                <a:solidFill>
-                  <a:srgbClr val="14161C"/>
-                </a:solidFill>
-                <a:latin typeface="Be Vietnam Pro" pitchFamily="34" charset="0"/>
-                <a:ea typeface="Be Vietnam Pro" pitchFamily="34" charset="-122"/>
-                <a:cs typeface="Be Vietnam Pro" pitchFamily="34" charset="-120"/>
-              </a:rPr>
-              <a:t> mâu</a:t>
-            </a:r>
-            <a:r>
-              <a:rPr lang="en-US" sz="2550" dirty="0" spc="1" kern="0">
-                <a:solidFill>
-                  <a:srgbClr val="14161C"/>
-                </a:solidFill>
-                <a:latin typeface="Be Vietnam Pro" pitchFamily="34" charset="0"/>
-                <a:ea typeface="Be Vietnam Pro" pitchFamily="34" charset="-122"/>
-                <a:cs typeface="Be Vietnam Pro" pitchFamily="34" charset="-120"/>
-              </a:rPr>
-              <a:t> thuẫn?</a:t>
+              <a:t> hơn</a:t>
+            </a:r>
+            <a:r>
+              <a:rPr lang="en-US" sz="2550" dirty="0" spc="-16" kern="0">
+                <a:solidFill>
+                  <a:srgbClr val="14161C"/>
+                </a:solidFill>
+                <a:latin typeface="Be Vietnam Pro" pitchFamily="34" charset="0"/>
+                <a:ea typeface="Be Vietnam Pro" pitchFamily="34" charset="-122"/>
+                <a:cs typeface="Be Vietnam Pro" pitchFamily="34" charset="-120"/>
+              </a:rPr>
+              <a:t> square?</a:t>
             </a:r>
             <a:endParaRPr lang="en-US" sz="2550" dirty="0"/>
           </a:p>
@@ -17685,6 +17301,50 @@
               <a:buNone/>
             </a:pPr>
             <a:r>
+              <a:rPr lang="en-US" sz="2400" dirty="0" spc="4" kern="0">
+                <a:solidFill>
+                  <a:srgbClr val="14161C"/>
+                </a:solidFill>
+                <a:latin typeface="Be Vietnam Pro" pitchFamily="34" charset="0"/>
+                <a:ea typeface="Be Vietnam Pro" pitchFamily="34" charset="-122"/>
+                <a:cs typeface="Be Vietnam Pro" pitchFamily="34" charset="-120"/>
+              </a:rPr>
+              <a:t>Hàm</a:t>
+            </a:r>
+            <a:r>
+              <a:rPr lang="en-US" sz="2400" dirty="0" spc="0" kern="0">
+                <a:solidFill>
+                  <a:srgbClr val="14161C"/>
+                </a:solidFill>
+                <a:latin typeface="Be Vietnam Pro" pitchFamily="34" charset="0"/>
+                <a:ea typeface="Be Vietnam Pro" pitchFamily="34" charset="-122"/>
+                <a:cs typeface="Be Vietnam Pro" pitchFamily="34" charset="-120"/>
+              </a:rPr>
+              <a:t> thuần:</a:t>
+            </a:r>
+            <a:r>
+              <a:rPr lang="en-US" sz="2400" dirty="0" spc="14" kern="0">
+                <a:solidFill>
+                  <a:srgbClr val="14161C"/>
+                </a:solidFill>
+                <a:latin typeface="Be Vietnam Pro" pitchFamily="34" charset="0"/>
+                <a:ea typeface="Be Vietnam Pro" pitchFamily="34" charset="-122"/>
+                <a:cs typeface="Be Vietnam Pro" pitchFamily="34" charset="-120"/>
+              </a:rPr>
+              <a:t> đầu</a:t>
+            </a:r>
+            <a:r>
+              <a:rPr lang="en-US" sz="2400" dirty="0" spc="-29" kern="0">
+                <a:solidFill>
+                  <a:srgbClr val="14161C"/>
+                </a:solidFill>
+                <a:latin typeface="Be Vietnam Pro" pitchFamily="34" charset="0"/>
+                <a:ea typeface="Be Vietnam Pro" pitchFamily="34" charset="-122"/>
+                <a:cs typeface="Be Vietnam Pro" pitchFamily="34" charset="-120"/>
+              </a:rPr>
+              <a:t> ra</a:t>
+            </a:r>
+            <a:r>
               <a:rPr lang="en-US" sz="2400" dirty="0" spc="-1" kern="0">
                 <a:solidFill>
                   <a:srgbClr val="14161C"/>
@@ -17693,18 +17353,29 @@
                 <a:ea typeface="Be Vietnam Pro" pitchFamily="34" charset="-122"/>
                 <a:cs typeface="Be Vietnam Pro" pitchFamily="34" charset="-120"/>
               </a:rPr>
-              <a:t>Chỉ</a:t>
-            </a:r>
-            <a:r>
-              <a:rPr lang="en-US" sz="2400" dirty="0" spc="1" kern="0">
-                <a:solidFill>
-                  <a:srgbClr val="14161C"/>
-                </a:solidFill>
-                <a:latin typeface="Be Vietnam Pro" pitchFamily="34" charset="0"/>
-                <a:ea typeface="Be Vietnam Pro" pitchFamily="34" charset="-122"/>
-                <a:cs typeface="Be Vietnam Pro" pitchFamily="34" charset="-120"/>
-              </a:rPr>
-              <a:t> nhận</a:t>
+              <a:t> chỉ</a:t>
+            </a:r>
+            <a:r>
+              <a:rPr lang="en-US" sz="2400" dirty="0" spc="2" kern="0">
+                <a:solidFill>
+                  <a:srgbClr val="14161C"/>
+                </a:solidFill>
+                <a:latin typeface="Be Vietnam Pro" pitchFamily="34" charset="0"/>
+                <a:ea typeface="Be Vietnam Pro" pitchFamily="34" charset="-122"/>
+                <a:cs typeface="Be Vietnam Pro" pitchFamily="34" charset="-120"/>
+              </a:rPr>
+              <a:t> phụ</a:t>
+            </a:r>
+            <a:r>
+              <a:rPr lang="en-US" sz="2400" dirty="0" spc="-2" kern="0">
+                <a:solidFill>
+                  <a:srgbClr val="14161C"/>
+                </a:solidFill>
+                <a:latin typeface="Be Vietnam Pro" pitchFamily="34" charset="0"/>
+                <a:ea typeface="Be Vietnam Pro" pitchFamily="34" charset="-122"/>
+                <a:cs typeface="Be Vietnam Pro" pitchFamily="34" charset="-120"/>
+              </a:rPr>
+              <a:t> thuộc</a:t>
             </a:r>
             <a:r>
               <a:rPr lang="en-US" sz="2400" dirty="0" spc="13" kern="0">
@@ -17718,92 +17389,15 @@
               <a:t> đầu</a:t>
             </a:r>
             <a:r>
-              <a:rPr lang="en-US" sz="2400" dirty="0" spc="-8" kern="0">
-                <a:solidFill>
-                  <a:srgbClr val="14161C"/>
-                </a:solidFill>
-                <a:latin typeface="Be Vietnam Pro" pitchFamily="34" charset="0"/>
-                <a:ea typeface="Be Vietnam Pro" pitchFamily="34" charset="-122"/>
-                <a:cs typeface="Be Vietnam Pro" pitchFamily="34" charset="-120"/>
-              </a:rPr>
-              <a:t> vào,</a:t>
-            </a:r>
-            <a:r>
-              <a:rPr lang="en-US" sz="2400" dirty="0" spc="-21" kern="0">
-                <a:solidFill>
-                  <a:srgbClr val="14161C"/>
-                </a:solidFill>
-                <a:latin typeface="Be Vietnam Pro" pitchFamily="34" charset="0"/>
-                <a:ea typeface="Be Vietnam Pro" pitchFamily="34" charset="-122"/>
-                <a:cs typeface="Be Vietnam Pro" pitchFamily="34" charset="-120"/>
-              </a:rPr>
-              <a:t> trả</a:t>
-            </a:r>
-            <a:r>
-              <a:rPr lang="en-US" sz="2400" dirty="0" spc="13" kern="0">
-                <a:solidFill>
-                  <a:srgbClr val="14161C"/>
-                </a:solidFill>
-                <a:latin typeface="Be Vietnam Pro" pitchFamily="34" charset="0"/>
-                <a:ea typeface="Be Vietnam Pro" pitchFamily="34" charset="-122"/>
-                <a:cs typeface="Be Vietnam Pro" pitchFamily="34" charset="-120"/>
-              </a:rPr>
-              <a:t> đầu</a:t>
-            </a:r>
-            <a:r>
-              <a:rPr lang="en-US" sz="2400" dirty="0" spc="-21" kern="0">
-                <a:solidFill>
-                  <a:srgbClr val="14161C"/>
-                </a:solidFill>
-                <a:latin typeface="Be Vietnam Pro" pitchFamily="34" charset="0"/>
-                <a:ea typeface="Be Vietnam Pro" pitchFamily="34" charset="-122"/>
-                <a:cs typeface="Be Vietnam Pro" pitchFamily="34" charset="-120"/>
-              </a:rPr>
-              <a:t> ra,</a:t>
-            </a:r>
-            <a:r>
-              <a:rPr lang="en-US" sz="2400" dirty="0" spc="0" kern="0">
-                <a:solidFill>
-                  <a:srgbClr val="14161C"/>
-                </a:solidFill>
-                <a:latin typeface="Be Vietnam Pro" pitchFamily="34" charset="0"/>
-                <a:ea typeface="Be Vietnam Pro" pitchFamily="34" charset="-122"/>
-                <a:cs typeface="Be Vietnam Pro" pitchFamily="34" charset="-120"/>
-              </a:rPr>
-              <a:t> không</a:t>
-            </a:r>
-            <a:r>
-              <a:rPr lang="en-US" sz="2400" dirty="0" spc="11" kern="0">
-                <a:solidFill>
-                  <a:srgbClr val="14161C"/>
-                </a:solidFill>
-                <a:latin typeface="Be Vietnam Pro" pitchFamily="34" charset="0"/>
-                <a:ea typeface="Be Vietnam Pro" pitchFamily="34" charset="-122"/>
-                <a:cs typeface="Be Vietnam Pro" pitchFamily="34" charset="-120"/>
-              </a:rPr>
-              <a:t> sửa</a:t>
-            </a:r>
-            <a:r>
-              <a:rPr lang="en-US" sz="2400" dirty="0" spc="0" kern="0">
-                <a:solidFill>
-                  <a:srgbClr val="14161C"/>
-                </a:solidFill>
-                <a:latin typeface="Be Vietnam Pro" pitchFamily="34" charset="0"/>
-                <a:ea typeface="Be Vietnam Pro" pitchFamily="34" charset="-122"/>
-                <a:cs typeface="Be Vietnam Pro" pitchFamily="34" charset="-120"/>
-              </a:rPr>
-              <a:t> biến</a:t>
-            </a:r>
-            <a:r>
-              <a:rPr lang="en-US" sz="2400" dirty="0" spc="-8" kern="0">
-                <a:solidFill>
-                  <a:srgbClr val="14161C"/>
-                </a:solidFill>
-                <a:latin typeface="Be Vietnam Pro" pitchFamily="34" charset="0"/>
-                <a:ea typeface="Be Vietnam Pro" pitchFamily="34" charset="-122"/>
-                <a:cs typeface="Be Vietnam Pro" pitchFamily="34" charset="-120"/>
-              </a:rPr>
-              <a:t> ngoài</a:t>
+              <a:rPr lang="en-US" sz="2400" dirty="0" spc="-11" kern="0">
+                <a:solidFill>
+                  <a:srgbClr val="14161C"/>
+                </a:solidFill>
+                <a:latin typeface="Be Vietnam Pro" pitchFamily="34" charset="0"/>
+                <a:ea typeface="Be Vietnam Pro" pitchFamily="34" charset="-122"/>
+                <a:cs typeface="Be Vietnam Pro" pitchFamily="34" charset="-120"/>
+              </a:rPr>
+              <a:t> vào</a:t>
             </a:r>
             <a:endParaRPr lang="en-US" sz="2400" dirty="0"/>
           </a:p>
@@ -17995,15 +17589,15 @@
               <a:buNone/>
             </a:pPr>
             <a:r>
-              <a:rPr lang="en-US" sz="2400" dirty="0" spc="4" kern="0">
-                <a:solidFill>
-                  <a:srgbClr val="14161C"/>
-                </a:solidFill>
-                <a:latin typeface="Be Vietnam Pro" pitchFamily="34" charset="0"/>
-                <a:ea typeface="Be Vietnam Pro" pitchFamily="34" charset="-122"/>
-                <a:cs typeface="Be Vietnam Pro" pitchFamily="34" charset="-120"/>
-              </a:rPr>
-              <a:t>Hàm</a:t>
+              <a:rPr lang="en-US" sz="2400" dirty="0" spc="2" kern="0">
+                <a:solidFill>
+                  <a:srgbClr val="14161C"/>
+                </a:solidFill>
+                <a:latin typeface="Be Vietnam Pro" pitchFamily="34" charset="0"/>
+                <a:ea typeface="Be Vietnam Pro" pitchFamily="34" charset="-122"/>
+                <a:cs typeface="Be Vietnam Pro" pitchFamily="34" charset="-120"/>
+              </a:rPr>
+              <a:t>Không</a:t>
             </a:r>
             <a:r>
               <a:rPr lang="en-US" sz="2400" dirty="0" spc="1" kern="0">
@@ -18014,21 +17608,10 @@
                 <a:ea typeface="Be Vietnam Pro" pitchFamily="34" charset="-122"/>
                 <a:cs typeface="Be Vietnam Pro" pitchFamily="34" charset="-120"/>
               </a:rPr>
-              <a:t> không</a:t>
-            </a:r>
-            <a:r>
-              <a:rPr lang="en-US" sz="2400" dirty="0" spc="-1" kern="0">
-                <a:solidFill>
-                  <a:srgbClr val="14161C"/>
-                </a:solidFill>
-                <a:latin typeface="Be Vietnam Pro" pitchFamily="34" charset="0"/>
-                <a:ea typeface="Be Vietnam Pro" pitchFamily="34" charset="-122"/>
-                <a:cs typeface="Be Vietnam Pro" pitchFamily="34" charset="-120"/>
-              </a:rPr>
               <a:t> có</a:t>
             </a:r>
             <a:r>
-              <a:rPr lang="en-US" sz="2400" dirty="0" spc="-10" kern="0">
+              <a:rPr lang="en-US" sz="2400" dirty="0" spc="-11" kern="0">
                 <a:solidFill>
                   <a:srgbClr val="14161C"/>
                 </a:solidFill>
@@ -18047,21 +17630,10 @@
                 <a:ea typeface="Be Vietnam Pro" pitchFamily="34" charset="-122"/>
                 <a:cs typeface="Be Vietnam Pro" pitchFamily="34" charset="-120"/>
               </a:rPr>
-              <a:t> dụng</a:t>
+              <a:t> dụng phụ</a:t>
             </a:r>
             <a:r>
               <a:rPr lang="en-US" sz="2400" dirty="0" spc="2" kern="0">
-                <a:solidFill>
-                  <a:srgbClr val="14161C"/>
-                </a:solidFill>
-                <a:latin typeface="Be Vietnam Pro" pitchFamily="34" charset="0"/>
-                <a:ea typeface="Be Vietnam Pro" pitchFamily="34" charset="-122"/>
-                <a:cs typeface="Be Vietnam Pro" pitchFamily="34" charset="-120"/>
-              </a:rPr>
-              <a:t> phụ</a:t>
-            </a:r>
-            <a:r>
-              <a:rPr lang="en-US" sz="2400" dirty="0" spc="3" kern="0">
                 <a:solidFill>
                   <a:srgbClr val="14161C"/>
                 </a:solidFill>
@@ -18187,7 +17759,7 @@
               <a:buNone/>
             </a:pPr>
             <a:r>
-              <a:rPr lang="en-US" sz="3300" dirty="0" spc="-11" kern="0">
+              <a:rPr lang="en-US" sz="3300" dirty="0" spc="3" kern="0">
                 <a:solidFill>
                   <a:srgbClr val="E8472B"/>
                 </a:solidFill>
@@ -18195,10 +17767,10 @@
                 <a:ea typeface="Bricolage Grotesque ExtraBold" pitchFamily="34" charset="-122"/>
                 <a:cs typeface="Bricolage Grotesque ExtraBold" pitchFamily="34" charset="-120"/>
               </a:rPr>
-              <a:t>Đa</a:t>
-            </a:r>
-            <a:r>
-              <a:rPr lang="en-US" sz="3300" dirty="0" spc="-3" kern="0">
+              <a:t>Mệnh</a:t>
+            </a:r>
+            <a:r>
+              <a:rPr lang="en-US" sz="3300" dirty="0" spc="1" kern="0">
                 <a:solidFill>
                   <a:srgbClr val="E8472B"/>
                 </a:solidFill>
@@ -18206,18 +17778,7 @@
                 <a:ea typeface="Bricolage Grotesque ExtraBold" pitchFamily="34" charset="-122"/>
                 <a:cs typeface="Bricolage Grotesque ExtraBold" pitchFamily="34" charset="-120"/>
               </a:rPr>
-              <a:t> mô</a:t>
-            </a:r>
-            <a:r>
-              <a:rPr lang="en-US" sz="3300" dirty="0" spc="-7" kern="0">
-                <a:solidFill>
-                  <a:srgbClr val="E8472B"/>
-                </a:solidFill>
-                <a:latin typeface="Bricolage Grotesque ExtraBold" pitchFamily="34" charset="0"/>
-                <a:ea typeface="Bricolage Grotesque ExtraBold" pitchFamily="34" charset="-122"/>
-                <a:cs typeface="Bricolage Grotesque ExtraBold" pitchFamily="34" charset="-120"/>
-              </a:rPr>
-              <a:t> hình</a:t>
+              <a:t> lệnh</a:t>
             </a:r>
             <a:endParaRPr lang="en-US" sz="3300" dirty="0"/>
           </a:p>
@@ -18305,59 +17866,37 @@
               <a:buNone/>
             </a:pPr>
             <a:r>
-              <a:rPr lang="en-US" sz="2400" dirty="0" spc="-73" kern="0">
-                <a:solidFill>
-                  <a:srgbClr val="14161C"/>
-                </a:solidFill>
-                <a:latin typeface="Be Vietnam Pro" pitchFamily="34" charset="0"/>
-                <a:ea typeface="Be Vietnam Pro" pitchFamily="34" charset="-122"/>
-                <a:cs typeface="Be Vietnam Pro" pitchFamily="34" charset="-120"/>
-              </a:rPr>
-              <a:t>Tài</a:t>
-            </a:r>
-            <a:r>
-              <a:rPr lang="en-US" sz="2400" dirty="0" spc="-1" kern="0">
-                <a:solidFill>
-                  <a:srgbClr val="14161C"/>
-                </a:solidFill>
-                <a:latin typeface="Be Vietnam Pro" pitchFamily="34" charset="0"/>
-                <a:ea typeface="Be Vietnam Pro" pitchFamily="34" charset="-122"/>
-                <a:cs typeface="Be Vietnam Pro" pitchFamily="34" charset="-120"/>
-              </a:rPr>
-              <a:t> liệu</a:t>
-            </a:r>
-            <a:r>
-              <a:rPr lang="en-US" sz="2400" dirty="0" spc="6" kern="0">
-                <a:solidFill>
-                  <a:srgbClr val="14161C"/>
-                </a:solidFill>
-                <a:latin typeface="Be Vietnam Pro" pitchFamily="34" charset="0"/>
-                <a:ea typeface="Be Vietnam Pro" pitchFamily="34" charset="-122"/>
-                <a:cs typeface="Be Vietnam Pro" pitchFamily="34" charset="-120"/>
-              </a:rPr>
-              <a:t> Python:</a:t>
-            </a:r>
-            <a:r>
-              <a:rPr lang="en-US" sz="2400" dirty="0" spc="-6" kern="0">
-                <a:solidFill>
-                  <a:srgbClr val="14161C"/>
-                </a:solidFill>
-                <a:latin typeface="Be Vietnam Pro" pitchFamily="34" charset="0"/>
-                <a:ea typeface="Be Vietnam Pro" pitchFamily="34" charset="-122"/>
-                <a:cs typeface="Be Vietnam Pro" pitchFamily="34" charset="-120"/>
-              </a:rPr>
-              <a:t> viết</a:t>
-            </a:r>
-            <a:r>
-              <a:rPr lang="en-US" sz="2400" dirty="0" spc="-1" kern="0">
-                <a:solidFill>
-                  <a:srgbClr val="14161C"/>
-                </a:solidFill>
-                <a:latin typeface="Be Vietnam Pro" pitchFamily="34" charset="0"/>
-                <a:ea typeface="Be Vietnam Pro" pitchFamily="34" charset="-122"/>
-                <a:cs typeface="Be Vietnam Pro" pitchFamily="34" charset="-120"/>
-              </a:rPr>
-              <a:t> theo</a:t>
+              <a:rPr lang="en-US" sz="2400" dirty="0" spc="-2" kern="0">
+                <a:solidFill>
+                  <a:srgbClr val="14161C"/>
+                </a:solidFill>
+                <a:latin typeface="Be Vietnam Pro" pitchFamily="34" charset="0"/>
+                <a:ea typeface="Be Vietnam Pro" pitchFamily="34" charset="-122"/>
+                <a:cs typeface="Be Vietnam Pro" pitchFamily="34" charset="-120"/>
+              </a:rPr>
+              <a:t>Nó</a:t>
+            </a:r>
+            <a:r>
+              <a:rPr lang="en-US" sz="2400" dirty="0" spc="13" kern="0">
+                <a:solidFill>
+                  <a:srgbClr val="14161C"/>
+                </a:solidFill>
+                <a:latin typeface="Be Vietnam Pro" pitchFamily="34" charset="0"/>
+                <a:ea typeface="Be Vietnam Pro" pitchFamily="34" charset="-122"/>
+                <a:cs typeface="Be Vietnam Pro" pitchFamily="34" charset="-120"/>
+              </a:rPr>
+              <a:t> đổi</a:t>
+            </a:r>
+            <a:r>
+              <a:rPr lang="en-US" sz="2400" dirty="0" spc="-3" kern="0">
+                <a:solidFill>
+                  <a:srgbClr val="14161C"/>
+                </a:solidFill>
+                <a:latin typeface="Be Vietnam Pro" pitchFamily="34" charset="0"/>
+                <a:ea typeface="Be Vietnam Pro" pitchFamily="34" charset="-122"/>
+                <a:cs typeface="Be Vietnam Pro" pitchFamily="34" charset="-120"/>
+              </a:rPr>
+              <a:t> một</a:t>
             </a:r>
             <a:r>
               <a:rPr lang="en-US" sz="2400" dirty="0" spc="0" kern="0">
@@ -18368,7 +17907,29 @@
                 <a:ea typeface="Be Vietnam Pro" pitchFamily="34" charset="-122"/>
                 <a:cs typeface="Be Vietnam Pro" pitchFamily="34" charset="-120"/>
               </a:rPr>
-              <a:t> lối</a:t>
+              <a:t> biến</a:t>
+            </a:r>
+            <a:r>
+              <a:rPr lang="en-US" sz="2400" dirty="0" spc="-8" kern="0">
+                <a:solidFill>
+                  <a:srgbClr val="14161C"/>
+                </a:solidFill>
+                <a:latin typeface="Be Vietnam Pro" pitchFamily="34" charset="0"/>
+                <a:ea typeface="Be Vietnam Pro" pitchFamily="34" charset="-122"/>
+                <a:cs typeface="Be Vietnam Pro" pitchFamily="34" charset="-120"/>
+              </a:rPr>
+              <a:t> ngoài</a:t>
+            </a:r>
+            <a:r>
+              <a:rPr lang="en-US" sz="2400" dirty="0" spc="-9" kern="0">
+                <a:solidFill>
+                  <a:srgbClr val="14161C"/>
+                </a:solidFill>
+                <a:latin typeface="Be Vietnam Pro" pitchFamily="34" charset="0"/>
+                <a:ea typeface="Be Vietnam Pro" pitchFamily="34" charset="-122"/>
+                <a:cs typeface="Be Vietnam Pro" pitchFamily="34" charset="-120"/>
+              </a:rPr>
+              <a:t> vòng</a:t>
             </a:r>
             <a:r>
               <a:rPr lang="en-US" sz="2400" dirty="0" spc="2" kern="0">
@@ -18379,62 +17940,84 @@
                 <a:ea typeface="Be Vietnam Pro" pitchFamily="34" charset="-122"/>
                 <a:cs typeface="Be Vietnam Pro" pitchFamily="34" charset="-120"/>
               </a:rPr>
-              <a:t> thủ tục,</a:t>
-            </a:r>
-            <a:r>
-              <a:rPr lang="en-US" sz="2400" dirty="0" spc="7" kern="0">
-                <a:solidFill>
-                  <a:srgbClr val="14161C"/>
-                </a:solidFill>
-                <a:latin typeface="Be Vietnam Pro" pitchFamily="34" charset="0"/>
-                <a:ea typeface="Be Vietnam Pro" pitchFamily="34" charset="-122"/>
-                <a:cs typeface="Be Vietnam Pro" pitchFamily="34" charset="-120"/>
-              </a:rPr>
-              <a:t> hướng</a:t>
-            </a:r>
-            <a:r>
-              <a:rPr lang="en-US" sz="2400" dirty="0" spc="12" kern="0">
-                <a:solidFill>
-                  <a:srgbClr val="14161C"/>
-                </a:solidFill>
-                <a:latin typeface="Be Vietnam Pro" pitchFamily="34" charset="0"/>
-                <a:ea typeface="Be Vietnam Pro" pitchFamily="34" charset="-122"/>
-                <a:cs typeface="Be Vietnam Pro" pitchFamily="34" charset="-120"/>
-              </a:rPr>
-              <a:t> đối</a:t>
-            </a:r>
-            <a:r>
-              <a:rPr lang="en-US" sz="2400" dirty="0" spc="7" kern="0">
-                <a:solidFill>
-                  <a:srgbClr val="14161C"/>
-                </a:solidFill>
-                <a:latin typeface="Be Vietnam Pro" pitchFamily="34" charset="0"/>
-                <a:ea typeface="Be Vietnam Pro" pitchFamily="34" charset="-122"/>
-                <a:cs typeface="Be Vietnam Pro" pitchFamily="34" charset="-120"/>
-              </a:rPr>
-              <a:t> tượng</a:t>
-            </a:r>
-            <a:r>
-              <a:rPr lang="en-US" sz="2400" dirty="0" spc="-1" kern="0">
-                <a:solidFill>
-                  <a:srgbClr val="14161C"/>
-                </a:solidFill>
-                <a:latin typeface="Be Vietnam Pro" pitchFamily="34" charset="0"/>
-                <a:ea typeface="Be Vietnam Pro" pitchFamily="34" charset="-122"/>
-                <a:cs typeface="Be Vietnam Pro" pitchFamily="34" charset="-120"/>
-              </a:rPr>
-              <a:t> hoặc</a:t>
-            </a:r>
-            <a:r>
-              <a:rPr lang="en-US" sz="2400" dirty="0" spc="3" kern="0">
-                <a:solidFill>
-                  <a:srgbClr val="14161C"/>
-                </a:solidFill>
-                <a:latin typeface="Be Vietnam Pro" pitchFamily="34" charset="0"/>
-                <a:ea typeface="Be Vietnam Pro" pitchFamily="34" charset="-122"/>
-                <a:cs typeface="Be Vietnam Pro" pitchFamily="34" charset="-120"/>
-              </a:rPr>
-              <a:t> hàm</a:t>
+              <a:t> lặp,</a:t>
+            </a:r>
+            <a:r>
+              <a:rPr lang="en-US" sz="2400" dirty="0" spc="1" kern="0">
+                <a:solidFill>
+                  <a:srgbClr val="14161C"/>
+                </a:solidFill>
+                <a:latin typeface="Be Vietnam Pro" pitchFamily="34" charset="0"/>
+                <a:ea typeface="Be Vietnam Pro" pitchFamily="34" charset="-122"/>
+                <a:cs typeface="Be Vietnam Pro" pitchFamily="34" charset="-120"/>
+              </a:rPr>
+              <a:t> nên phải</a:t>
+            </a:r>
+            <a:r>
+              <a:rPr lang="en-US" sz="2400" dirty="0" spc="22" kern="0">
+                <a:solidFill>
+                  <a:srgbClr val="14161C"/>
+                </a:solidFill>
+                <a:latin typeface="Be Vietnam Pro" pitchFamily="34" charset="0"/>
+                <a:ea typeface="Be Vietnam Pro" pitchFamily="34" charset="-122"/>
+                <a:cs typeface="Be Vietnam Pro" pitchFamily="34" charset="-120"/>
+              </a:rPr>
+              <a:t> dựng</a:t>
+            </a:r>
+            <a:r>
+              <a:rPr lang="en-US" sz="2400" dirty="0" spc="-15" kern="0">
+                <a:solidFill>
+                  <a:srgbClr val="14161C"/>
+                </a:solidFill>
+                <a:latin typeface="Be Vietnam Pro" pitchFamily="34" charset="0"/>
+                <a:ea typeface="Be Vietnam Pro" pitchFamily="34" charset="-122"/>
+                <a:cs typeface="Be Vietnam Pro" pitchFamily="34" charset="-120"/>
+              </a:rPr>
+              <a:t> và</a:t>
+            </a:r>
+            <a:r>
+              <a:rPr lang="en-US" sz="2400" dirty="0" spc="9" kern="0">
+                <a:solidFill>
+                  <a:srgbClr val="14161C"/>
+                </a:solidFill>
+                <a:latin typeface="Be Vietnam Pro" pitchFamily="34" charset="0"/>
+                <a:ea typeface="Be Vietnam Pro" pitchFamily="34" charset="-122"/>
+                <a:cs typeface="Be Vietnam Pro" pitchFamily="34" charset="-120"/>
+              </a:rPr>
+              <a:t> đọc</a:t>
+            </a:r>
+            <a:r>
+              <a:rPr lang="en-US" sz="2400" dirty="0" spc="1" kern="0">
+                <a:solidFill>
+                  <a:srgbClr val="14161C"/>
+                </a:solidFill>
+                <a:latin typeface="Be Vietnam Pro" pitchFamily="34" charset="0"/>
+                <a:ea typeface="Be Vietnam Pro" pitchFamily="34" charset="-122"/>
+                <a:cs typeface="Be Vietnam Pro" pitchFamily="34" charset="-120"/>
+              </a:rPr>
+              <a:t> lại</a:t>
+            </a:r>
+            <a:r>
+              <a:rPr lang="en-US" sz="2400" dirty="0" spc="-13" kern="0">
+                <a:solidFill>
+                  <a:srgbClr val="14161C"/>
+                </a:solidFill>
+                <a:latin typeface="Be Vietnam Pro" pitchFamily="34" charset="0"/>
+                <a:ea typeface="Be Vietnam Pro" pitchFamily="34" charset="-122"/>
+                <a:cs typeface="Be Vietnam Pro" pitchFamily="34" charset="-120"/>
+              </a:rPr>
+              <a:t> trạng</a:t>
+            </a:r>
+            <a:r>
+              <a:rPr lang="en-US" sz="2400" dirty="0" spc="1" kern="0">
+                <a:solidFill>
+                  <a:srgbClr val="14161C"/>
+                </a:solidFill>
+                <a:latin typeface="Be Vietnam Pro" pitchFamily="34" charset="0"/>
+                <a:ea typeface="Be Vietnam Pro" pitchFamily="34" charset="-122"/>
+                <a:cs typeface="Be Vietnam Pro" pitchFamily="34" charset="-120"/>
+              </a:rPr>
+              <a:t> thái</a:t>
             </a:r>
             <a:endParaRPr lang="en-US" sz="2400" dirty="0"/>
           </a:p>
@@ -19134,6 +18717,39 @@
                 <a:ea typeface="Be Vietnam Pro" pitchFamily="34" charset="-122"/>
                 <a:cs typeface="Be Vietnam Pro" pitchFamily="34" charset="-120"/>
               </a:rPr>
+              <a:t> chỉ</a:t>
+            </a:r>
+            <a:r>
+              <a:rPr lang="en-US" sz="2400" dirty="0" spc="-7" kern="0">
+                <a:solidFill>
+                  <a:srgbClr val="F3EEE3"/>
+                </a:solidFill>
+                <a:latin typeface="Be Vietnam Pro" pitchFamily="34" charset="0"/>
+                <a:ea typeface="Be Vietnam Pro" pitchFamily="34" charset="-122"/>
+                <a:cs typeface="Be Vietnam Pro" pitchFamily="34" charset="-120"/>
+              </a:rPr>
+              <a:t> lấy</a:t>
+            </a:r>
+            <a:r>
+              <a:rPr lang="en-US" sz="2400" dirty="0" spc="-11" kern="0">
+                <a:solidFill>
+                  <a:srgbClr val="F3EEE3"/>
+                </a:solidFill>
+                <a:latin typeface="Be Vietnam Pro" pitchFamily="34" charset="0"/>
+                <a:ea typeface="Be Vietnam Pro" pitchFamily="34" charset="-122"/>
+                <a:cs typeface="Be Vietnam Pro" pitchFamily="34" charset="-120"/>
+              </a:rPr>
+              <a:t> tên</a:t>
+            </a:r>
+            <a:r>
+              <a:rPr lang="en-US" sz="2400" dirty="0" spc="-2" kern="0">
+                <a:solidFill>
+                  <a:srgbClr val="F3EEE3"/>
+                </a:solidFill>
+                <a:latin typeface="Be Vietnam Pro" pitchFamily="34" charset="0"/>
+                <a:ea typeface="Be Vietnam Pro" pitchFamily="34" charset="-122"/>
+                <a:cs typeface="Be Vietnam Pro" pitchFamily="34" charset="-120"/>
+              </a:rPr>
               <a:t> ba</a:t>
             </a:r>
             <a:r>
@@ -19148,28 +18764,6 @@
               <a:t> mô</a:t>
             </a:r>
             <a:r>
-              <a:rPr lang="en-US" sz="2400" dirty="0" spc="1" kern="0">
-                <a:solidFill>
-                  <a:srgbClr val="F3EEE3"/>
-                </a:solidFill>
-                <a:latin typeface="Be Vietnam Pro" pitchFamily="34" charset="0"/>
-                <a:ea typeface="Be Vietnam Pro" pitchFamily="34" charset="-122"/>
-                <a:cs typeface="Be Vietnam Pro" pitchFamily="34" charset="-120"/>
-              </a:rPr>
-              <a:t> hình, mỗi</a:t>
-            </a:r>
-            <a:r>
-              <a:rPr lang="en-US" sz="2400" dirty="0" spc="3" kern="0">
-                <a:solidFill>
-                  <a:srgbClr val="F3EEE3"/>
-                </a:solidFill>
-                <a:latin typeface="Be Vietnam Pro" pitchFamily="34" charset="0"/>
-                <a:ea typeface="Be Vietnam Pro" pitchFamily="34" charset="-122"/>
-                <a:cs typeface="Be Vietnam Pro" pitchFamily="34" charset="-120"/>
-              </a:rPr>
-              <a:t> mô</a:t>
-            </a:r>
-            <a:r>
               <a:rPr lang="en-US" sz="2400" dirty="0" spc="0" kern="0">
                 <a:solidFill>
                   <a:srgbClr val="F3EEE3"/>
@@ -19179,28 +18773,6 @@
                 <a:cs typeface="Be Vietnam Pro" pitchFamily="34" charset="-120"/>
               </a:rPr>
               <a:t> hình</a:t>
-            </a:r>
-            <a:r>
-              <a:rPr lang="en-US" sz="2400" dirty="0" spc="-1" kern="0">
-                <a:solidFill>
-                  <a:srgbClr val="F3EEE3"/>
-                </a:solidFill>
-                <a:latin typeface="Be Vietnam Pro" pitchFamily="34" charset="0"/>
-                <a:ea typeface="Be Vietnam Pro" pitchFamily="34" charset="-122"/>
-                <a:cs typeface="Be Vietnam Pro" pitchFamily="34" charset="-120"/>
-              </a:rPr>
-              <a:t> bốn</a:t>
-            </a:r>
-            <a:r>
-              <a:rPr lang="en-US" sz="2400" dirty="0" spc="1" kern="0">
-                <a:solidFill>
-                  <a:srgbClr val="F3EEE3"/>
-                </a:solidFill>
-                <a:latin typeface="Be Vietnam Pro" pitchFamily="34" charset="0"/>
-                <a:ea typeface="Be Vietnam Pro" pitchFamily="34" charset="-122"/>
-                <a:cs typeface="Be Vietnam Pro" pitchFamily="34" charset="-120"/>
-              </a:rPr>
-              <a:t> ý</a:t>
             </a:r>
             <a:endParaRPr lang="en-US" sz="2400" dirty="0"/>
           </a:p>
@@ -19294,26 +18866,15 @@
               <a:buChar char="•"/>
             </a:pPr>
             <a:r>
-              <a:rPr lang="en-US" sz="2400" dirty="0" spc="1" kern="0">
-                <a:solidFill>
-                  <a:srgbClr val="F3EEE3"/>
-                </a:solidFill>
-                <a:latin typeface="Be Vietnam Pro" pitchFamily="34" charset="0"/>
-                <a:ea typeface="Be Vietnam Pro" pitchFamily="34" charset="-122"/>
-                <a:cs typeface="Be Vietnam Pro" pitchFamily="34" charset="-120"/>
-              </a:rPr>
-              <a:t>Cả</a:t>
-            </a:r>
-            <a:r>
-              <a:rPr lang="en-US" sz="2400" dirty="0" spc="0" kern="0">
-                <a:solidFill>
-                  <a:srgbClr val="F3EEE3"/>
-                </a:solidFill>
-                <a:latin typeface="Be Vietnam Pro" pitchFamily="34" charset="0"/>
-                <a:ea typeface="Be Vietnam Pro" pitchFamily="34" charset="-122"/>
-                <a:cs typeface="Be Vietnam Pro" pitchFamily="34" charset="-120"/>
-              </a:rPr>
-              <a:t> hai</a:t>
+              <a:rPr lang="en-US" sz="2400" dirty="0" spc="4" kern="0">
+                <a:solidFill>
+                  <a:srgbClr val="F3EEE3"/>
+                </a:solidFill>
+                <a:latin typeface="Be Vietnam Pro" pitchFamily="34" charset="0"/>
+                <a:ea typeface="Be Vietnam Pro" pitchFamily="34" charset="-122"/>
+                <a:cs typeface="Be Vietnam Pro" pitchFamily="34" charset="-120"/>
+              </a:rPr>
+              <a:t>Ba</a:t>
             </a:r>
             <a:r>
               <a:rPr lang="en-US" sz="2400" dirty="0" spc="10" kern="0">
@@ -19324,51 +18885,51 @@
                 <a:ea typeface="Be Vietnam Pro" pitchFamily="34" charset="-122"/>
                 <a:cs typeface="Be Vietnam Pro" pitchFamily="34" charset="-120"/>
               </a:rPr>
-              <a:t> đọc</a:t>
-            </a:r>
-            <a:r>
-              <a:rPr lang="en-US" sz="2400" dirty="0" spc="-11" kern="0">
-                <a:solidFill>
-                  <a:srgbClr val="F3EEE3"/>
-                </a:solidFill>
-                <a:latin typeface="Be Vietnam Pro" pitchFamily="34" charset="0"/>
-                <a:ea typeface="Be Vietnam Pro" pitchFamily="34" charset="-122"/>
-                <a:cs typeface="Be Vietnam Pro" pitchFamily="34" charset="-120"/>
-              </a:rPr>
-              <a:t> tại</a:t>
-            </a:r>
-            <a:r>
-              <a:rPr lang="en-US" sz="2400" dirty="0" spc="2" kern="0">
-                <a:solidFill>
-                  <a:srgbClr val="F3EEE3"/>
-                </a:solidFill>
-                <a:latin typeface="Be Vietnam Pro" pitchFamily="34" charset="0"/>
-                <a:ea typeface="Be Vietnam Pro" pitchFamily="34" charset="-122"/>
-                <a:cs typeface="Be Vietnam Pro" pitchFamily="34" charset="-120"/>
-              </a:rPr>
-              <a:t> commit</a:t>
-            </a:r>
-            <a:r>
-              <a:rPr lang="en-US" sz="2400" dirty="0" spc="-1" kern="0">
-                <a:solidFill>
-                  <a:srgbClr val="F3EEE3"/>
-                </a:solidFill>
-                <a:latin typeface="Be Vietnam Pro" pitchFamily="34" charset="0"/>
-                <a:ea typeface="Be Vietnam Pro" pitchFamily="34" charset="-122"/>
-                <a:cs typeface="Be Vietnam Pro" pitchFamily="34" charset="-120"/>
-              </a:rPr>
-              <a:t> cố</a:t>
-            </a:r>
-            <a:r>
-              <a:rPr lang="en-US" sz="2400" dirty="0" spc="20" kern="0">
-                <a:solidFill>
-                  <a:srgbClr val="F3EEE3"/>
-                </a:solidFill>
-                <a:latin typeface="Be Vietnam Pro" pitchFamily="34" charset="0"/>
-                <a:ea typeface="Be Vietnam Pro" pitchFamily="34" charset="-122"/>
-                <a:cs typeface="Be Vietnam Pro" pitchFamily="34" charset="-120"/>
-              </a:rPr>
-              <a:t> định</a:t>
+              <a:t> đoạn</a:t>
+            </a:r>
+            <a:r>
+              <a:rPr lang="en-US" sz="2400" dirty="0" spc="3" kern="0">
+                <a:solidFill>
+                  <a:srgbClr val="F3EEE3"/>
+                </a:solidFill>
+                <a:latin typeface="Be Vietnam Pro" pitchFamily="34" charset="0"/>
+                <a:ea typeface="Be Vietnam Pro" pitchFamily="34" charset="-122"/>
+                <a:cs typeface="Be Vietnam Pro" pitchFamily="34" charset="-120"/>
+              </a:rPr>
+              <a:t> mã</a:t>
+            </a:r>
+            <a:r>
+              <a:rPr lang="en-US" sz="2400" dirty="0" spc="-7" kern="0">
+                <a:solidFill>
+                  <a:srgbClr val="F3EEE3"/>
+                </a:solidFill>
+                <a:latin typeface="Be Vietnam Pro" pitchFamily="34" charset="0"/>
+                <a:ea typeface="Be Vietnam Pro" pitchFamily="34" charset="-122"/>
+                <a:cs typeface="Be Vietnam Pro" pitchFamily="34" charset="-120"/>
+              </a:rPr>
+              <a:t> chạy</a:t>
+            </a:r>
+            <a:r>
+              <a:rPr lang="en-US" sz="2400" dirty="0" spc="-29" kern="0">
+                <a:solidFill>
+                  <a:srgbClr val="F3EEE3"/>
+                </a:solidFill>
+                <a:latin typeface="Be Vietnam Pro" pitchFamily="34" charset="0"/>
+                <a:ea typeface="Be Vietnam Pro" pitchFamily="34" charset="-122"/>
+                <a:cs typeface="Be Vietnam Pro" pitchFamily="34" charset="-120"/>
+              </a:rPr>
+              <a:t> ra</a:t>
+            </a:r>
+            <a:r>
+              <a:rPr lang="en-US" sz="2400" dirty="0" spc="-2" kern="0">
+                <a:solidFill>
+                  <a:srgbClr val="F3EEE3"/>
+                </a:solidFill>
+                <a:latin typeface="Be Vietnam Pro" pitchFamily="34" charset="0"/>
+                <a:ea typeface="Be Vietnam Pro" pitchFamily="34" charset="-122"/>
+                <a:cs typeface="Be Vietnam Pro" pitchFamily="34" charset="-120"/>
+              </a:rPr>
+              <a:t> 56</a:t>
             </a:r>
             <a:endParaRPr lang="en-US" sz="2400" dirty="0"/>
           </a:p>
@@ -19471,7 +19032,7 @@
               <a:t> ngày</a:t>
             </a:r>
             <a:r>
-              <a:rPr lang="en-US" sz="2100" dirty="0" spc="-1" kern="0">
+              <a:rPr lang="en-US" sz="2100" dirty="0" spc="0" kern="0">
                 <a:solidFill>
                   <a:srgbClr val="C4C8D6"/>
                 </a:solidFill>
@@ -19479,7 +19040,29 @@
                 <a:ea typeface="Be Vietnam Pro" pitchFamily="34" charset="-122"/>
                 <a:cs typeface="Be Vietnam Pro" pitchFamily="34" charset="-120"/>
               </a:rPr>
-              <a:t> 2026-10-18.</a:t>
+              <a:t> 2026-10-19.</a:t>
+            </a:r>
+            <a:r>
+              <a:rPr lang="en-US" sz="2100" dirty="0" spc="-3" kern="0">
+                <a:solidFill>
+                  <a:srgbClr val="C4C8D6"/>
+                </a:solidFill>
+                <a:latin typeface="Be Vietnam Pro" pitchFamily="34" charset="0"/>
+                <a:ea typeface="Be Vietnam Pro" pitchFamily="34" charset="-122"/>
+                <a:cs typeface="Be Vietnam Pro" pitchFamily="34" charset="-120"/>
+              </a:rPr>
+              <a:t> Mã</a:t>
+            </a:r>
+            <a:r>
+              <a:rPr lang="en-US" sz="2100" dirty="0" spc="-18" kern="0">
+                <a:solidFill>
+                  <a:srgbClr val="C4C8D6"/>
+                </a:solidFill>
+                <a:latin typeface="Be Vietnam Pro" pitchFamily="34" charset="0"/>
+                <a:ea typeface="Be Vietnam Pro" pitchFamily="34" charset="-122"/>
+                <a:cs typeface="Be Vietnam Pro" pitchFamily="34" charset="-120"/>
+              </a:rPr>
+              <a:t> và</a:t>
             </a:r>
             <a:r>
               <a:rPr lang="en-US" sz="2100" dirty="0" spc="0" kern="0">
@@ -19490,10 +19073,10 @@
                 <a:ea typeface="Be Vietnam Pro" pitchFamily="34" charset="-122"/>
                 <a:cs typeface="Be Vietnam Pro" pitchFamily="34" charset="-120"/>
               </a:rPr>
-              <a:t> Hình</a:t>
-            </a:r>
-            <a:r>
-              <a:rPr lang="en-US" sz="2100" dirty="0" spc="1" kern="0">
+              <a:t> hình</a:t>
+            </a:r>
+            <a:r>
+              <a:rPr lang="en-US" sz="2100" dirty="0" spc="-3" kern="0">
                 <a:solidFill>
                   <a:srgbClr val="C4C8D6"/>
                 </a:solidFill>
@@ -19501,10 +19084,10 @@
                 <a:ea typeface="Be Vietnam Pro" pitchFamily="34" charset="-122"/>
                 <a:cs typeface="Be Vietnam Pro" pitchFamily="34" charset="-120"/>
               </a:rPr>
-              <a:t> minh</a:t>
-            </a:r>
-            <a:r>
-              <a:rPr lang="en-US" sz="2100" dirty="0" spc="-6" kern="0">
+              <a:t> là</a:t>
+            </a:r>
+            <a:r>
+              <a:rPr lang="en-US" sz="2100" dirty="0" spc="0" kern="0">
                 <a:solidFill>
                   <a:srgbClr val="C4C8D6"/>
                 </a:solidFill>
@@ -19512,10 +19095,10 @@
                 <a:ea typeface="Be Vietnam Pro" pitchFamily="34" charset="-122"/>
                 <a:cs typeface="Be Vietnam Pro" pitchFamily="34" charset="-120"/>
               </a:rPr>
-              <a:t> họa</a:t>
-            </a:r>
-            <a:r>
-              <a:rPr lang="en-US" sz="2100" dirty="0" spc="-3" kern="0">
+              <a:t> của</a:t>
+            </a:r>
+            <a:r>
+              <a:rPr lang="en-US" sz="2100" dirty="0" spc="-5" kern="0">
                 <a:solidFill>
                   <a:srgbClr val="C4C8D6"/>
                 </a:solidFill>
@@ -19523,10 +19106,10 @@
                 <a:ea typeface="Be Vietnam Pro" pitchFamily="34" charset="-122"/>
                 <a:cs typeface="Be Vietnam Pro" pitchFamily="34" charset="-120"/>
               </a:rPr>
-              <a:t> là</a:t>
-            </a:r>
-            <a:r>
-              <a:rPr lang="en-US" sz="2100" dirty="0" spc="-4" kern="0">
+              <a:t> bài</a:t>
+            </a:r>
+            <a:r>
+              <a:rPr lang="en-US" sz="2100" dirty="0" spc="-8" kern="0">
                 <a:solidFill>
                   <a:srgbClr val="C4C8D6"/>
                 </a:solidFill>
@@ -19534,29 +19117,7 @@
                 <a:ea typeface="Be Vietnam Pro" pitchFamily="34" charset="-122"/>
                 <a:cs typeface="Be Vietnam Pro" pitchFamily="34" charset="-120"/>
               </a:rPr>
-              <a:t> thiết</a:t>
-            </a:r>
-            <a:r>
-              <a:rPr lang="en-US" sz="2100" dirty="0" spc="-30" kern="0">
-                <a:solidFill>
-                  <a:srgbClr val="C4C8D6"/>
-                </a:solidFill>
-                <a:latin typeface="Be Vietnam Pro" pitchFamily="34" charset="0"/>
-                <a:ea typeface="Be Vietnam Pro" pitchFamily="34" charset="-122"/>
-                <a:cs typeface="Be Vietnam Pro" pitchFamily="34" charset="-120"/>
-              </a:rPr>
-              <a:t> kế</a:t>
-            </a:r>
-            <a:r>
-              <a:rPr lang="en-US" sz="2100" dirty="0" spc="-1" kern="0">
-                <a:solidFill>
-                  <a:srgbClr val="C4C8D6"/>
-                </a:solidFill>
-                <a:latin typeface="Be Vietnam Pro" pitchFamily="34" charset="0"/>
-                <a:ea typeface="Be Vietnam Pro" pitchFamily="34" charset="-122"/>
-                <a:cs typeface="Be Vietnam Pro" pitchFamily="34" charset="-120"/>
-              </a:rPr>
-              <a:t> mới.</a:t>
+              <a:t> này.</a:t>
             </a:r>
             <a:endParaRPr lang="en-US" sz="2100" dirty="0"/>
           </a:p>
@@ -19614,7 +19175,7 @@
               <a:buNone/>
             </a:pPr>
             <a:r>
-              <a:rPr lang="en-US" sz="4200" dirty="0" spc="-2" kern="0">
+              <a:rPr lang="en-US" sz="4200" dirty="0" spc="-26" kern="0">
                 <a:solidFill>
                   <a:srgbClr val="F3EEE3"/>
                 </a:solidFill>
@@ -19622,10 +19183,10 @@
                 <a:ea typeface="Bricolage Grotesque ExtraBold" pitchFamily="34" charset="-122"/>
                 <a:cs typeface="Bricolage Grotesque ExtraBold" pitchFamily="34" charset="-120"/>
               </a:rPr>
-              <a:t>Mô</a:t>
-            </a:r>
-            <a:r>
-              <a:rPr lang="en-US" sz="4200" dirty="0" spc="-11" kern="0">
+              <a:t>Trạng</a:t>
+            </a:r>
+            <a:r>
+              <a:rPr lang="en-US" sz="4200" dirty="0" spc="1" kern="0">
                 <a:solidFill>
                   <a:srgbClr val="F3EEE3"/>
                 </a:solidFill>
@@ -19633,7 +19194,7 @@
                 <a:ea typeface="Bricolage Grotesque ExtraBold" pitchFamily="34" charset="-122"/>
                 <a:cs typeface="Bricolage Grotesque ExtraBold" pitchFamily="34" charset="-120"/>
               </a:rPr>
-              <a:t> hình</a:t>
+              <a:t> thái</a:t>
             </a:r>
             <a:endParaRPr lang="en-US" sz="4200" dirty="0"/>
           </a:p>
@@ -19881,7 +19442,7 @@
               <a:t> dụ</a:t>
             </a:r>
             <a:r>
-              <a:rPr lang="en-US" sz="4200" dirty="0" spc="3" kern="0">
+              <a:rPr lang="en-US" sz="4200" dirty="0" spc="-2" kern="0">
                 <a:solidFill>
                   <a:srgbClr val="C4C8D6"/>
                 </a:solidFill>
@@ -19889,18 +19450,7 @@
                 <a:ea typeface="Bricolage Grotesque ExtraBold" pitchFamily="34" charset="-122"/>
                 <a:cs typeface="Bricolage Grotesque ExtraBold" pitchFamily="34" charset="-120"/>
               </a:rPr>
-              <a:t> của</a:t>
-            </a:r>
-            <a:r>
-              <a:rPr lang="en-US" sz="4200" dirty="0" spc="0" kern="0">
-                <a:solidFill>
-                  <a:srgbClr val="C4C8D6"/>
-                </a:solidFill>
-                <a:latin typeface="Bricolage Grotesque ExtraBold" pitchFamily="34" charset="0"/>
-                <a:ea typeface="Bricolage Grotesque ExtraBold" pitchFamily="34" charset="-122"/>
-                <a:cs typeface="Bricolage Grotesque ExtraBold" pitchFamily="34" charset="-120"/>
-              </a:rPr>
-              <a:t> nguồn</a:t>
+              <a:t> nhỏ</a:t>
             </a:r>
             <a:endParaRPr lang="en-US" sz="4200" dirty="0"/>
           </a:p>
@@ -19962,29 +19512,29 @@
                 <a:ea typeface="Be Vietnam Pro" pitchFamily="34" charset="-122"/>
                 <a:cs typeface="Be Vietnam Pro" pitchFamily="34" charset="-120"/>
               </a:rPr>
-              <a:t>Danh</a:t>
-            </a:r>
-            <a:r>
-              <a:rPr lang="en-US" sz="2700" dirty="0" spc="-6" kern="0">
-                <a:solidFill>
-                  <a:srgbClr val="F3EEE3"/>
-                </a:solidFill>
-                <a:latin typeface="Be Vietnam Pro" pitchFamily="34" charset="0"/>
-                <a:ea typeface="Be Vietnam Pro" pitchFamily="34" charset="-122"/>
-                <a:cs typeface="Be Vietnam Pro" pitchFamily="34" charset="-120"/>
-              </a:rPr>
-              <a:t> sách</a:t>
-            </a:r>
-            <a:r>
-              <a:rPr lang="en-US" sz="2700" dirty="0" spc="-14" kern="0">
-                <a:solidFill>
-                  <a:srgbClr val="F3EEE3"/>
-                </a:solidFill>
-                <a:latin typeface="Be Vietnam Pro" pitchFamily="34" charset="0"/>
-                <a:ea typeface="Be Vietnam Pro" pitchFamily="34" charset="-122"/>
-                <a:cs typeface="Be Vietnam Pro" pitchFamily="34" charset="-120"/>
-              </a:rPr>
-              <a:t> ngôn</a:t>
+              <a:t>Bài</a:t>
+            </a:r>
+            <a:r>
+              <a:rPr lang="en-US" sz="2700" dirty="0" spc="-15" kern="0">
+                <a:solidFill>
+                  <a:srgbClr val="F3EEE3"/>
+                </a:solidFill>
+                <a:latin typeface="Be Vietnam Pro" pitchFamily="34" charset="0"/>
+                <a:ea typeface="Be Vietnam Pro" pitchFamily="34" charset="-122"/>
+                <a:cs typeface="Be Vietnam Pro" pitchFamily="34" charset="-120"/>
+              </a:rPr>
+              <a:t> toán</a:t>
+            </a:r>
+            <a:r>
+              <a:rPr lang="en-US" sz="2700" dirty="0" spc="-2" kern="0">
+                <a:solidFill>
+                  <a:srgbClr val="F3EEE3"/>
+                </a:solidFill>
+                <a:latin typeface="Be Vietnam Pro" pitchFamily="34" charset="0"/>
+                <a:ea typeface="Be Vietnam Pro" pitchFamily="34" charset="-122"/>
+                <a:cs typeface="Be Vietnam Pro" pitchFamily="34" charset="-120"/>
+              </a:rPr>
+              <a:t> nhỏ không</a:t>
             </a:r>
             <a:r>
               <a:rPr lang="en-US" sz="2700" dirty="0" spc="-3" kern="0">
@@ -19995,7 +19545,18 @@
                 <a:ea typeface="Be Vietnam Pro" pitchFamily="34" charset="-122"/>
                 <a:cs typeface="Be Vietnam Pro" pitchFamily="34" charset="-120"/>
               </a:rPr>
-              <a:t> ngữ</a:t>
+              <a:t> đủ</a:t>
+            </a:r>
+            <a:r>
+              <a:rPr lang="en-US" sz="2700" dirty="0" spc="14" kern="0">
+                <a:solidFill>
+                  <a:srgbClr val="F3EEE3"/>
+                </a:solidFill>
+                <a:latin typeface="Be Vietnam Pro" pitchFamily="34" charset="0"/>
+                <a:ea typeface="Be Vietnam Pro" pitchFamily="34" charset="-122"/>
+                <a:cs typeface="Be Vietnam Pro" pitchFamily="34" charset="-120"/>
+              </a:rPr>
+              <a:t> để</a:t>
             </a:r>
             <a:r>
               <a:rPr lang="en-US" sz="2700" dirty="0" spc="-1" kern="0">
@@ -20006,18 +19567,7 @@
                 <a:ea typeface="Be Vietnam Pro" pitchFamily="34" charset="-122"/>
                 <a:cs typeface="Be Vietnam Pro" pitchFamily="34" charset="-120"/>
               </a:rPr>
-              <a:t> chỉ</a:t>
-            </a:r>
-            <a:r>
-              <a:rPr lang="en-US" sz="2700" dirty="0" spc="0" kern="0">
-                <a:solidFill>
-                  <a:srgbClr val="F3EEE3"/>
-                </a:solidFill>
-                <a:latin typeface="Be Vietnam Pro" pitchFamily="34" charset="0"/>
-                <a:ea typeface="Be Vietnam Pro" pitchFamily="34" charset="-122"/>
-                <a:cs typeface="Be Vietnam Pro" pitchFamily="34" charset="-120"/>
-              </a:rPr>
-              <a:t> là</a:t>
+              <a:t> chọn</a:t>
             </a:r>
             <a:r>
               <a:rPr lang="en-US" sz="2700" dirty="0" spc="-2" kern="0">
@@ -20028,7 +19578,7 @@
                 <a:ea typeface="Be Vietnam Pro" pitchFamily="34" charset="-122"/>
                 <a:cs typeface="Be Vietnam Pro" pitchFamily="34" charset="-120"/>
               </a:rPr>
-              <a:t> ví</a:t>
+              <a:t> mô</a:t>
             </a:r>
             <a:r>
               <a:rPr lang="en-US" sz="2700" dirty="0" spc="-3" kern="0">
@@ -20039,18 +19589,18 @@
                 <a:ea typeface="Be Vietnam Pro" pitchFamily="34" charset="-122"/>
                 <a:cs typeface="Be Vietnam Pro" pitchFamily="34" charset="-120"/>
               </a:rPr>
-              <a:t> dụ</a:t>
-            </a:r>
-            <a:r>
-              <a:rPr lang="en-US" sz="2700" dirty="0" spc="-2" kern="0">
-                <a:solidFill>
-                  <a:srgbClr val="F3EEE3"/>
-                </a:solidFill>
-                <a:latin typeface="Be Vietnam Pro" pitchFamily="34" charset="0"/>
-                <a:ea typeface="Be Vietnam Pro" pitchFamily="34" charset="-122"/>
-                <a:cs typeface="Be Vietnam Pro" pitchFamily="34" charset="-120"/>
-              </a:rPr>
-              <a:t> của nguồn.</a:t>
+              <a:t> hình</a:t>
+            </a:r>
+            <a:r>
+              <a:rPr lang="en-US" sz="2700" dirty="0" spc="-1" kern="0">
+                <a:solidFill>
+                  <a:srgbClr val="F3EEE3"/>
+                </a:solidFill>
+                <a:latin typeface="Be Vietnam Pro" pitchFamily="34" charset="0"/>
+                <a:ea typeface="Be Vietnam Pro" pitchFamily="34" charset="-122"/>
+                <a:cs typeface="Be Vietnam Pro" pitchFamily="34" charset="-120"/>
+              </a:rPr>
+              <a:t> thắng.</a:t>
             </a:r>
             <a:endParaRPr lang="en-US" sz="2700" dirty="0"/>
           </a:p>
@@ -20489,6 +20039,39 @@
               <a:buNone/>
             </a:pPr>
             <a:r>
+              <a:rPr lang="en-US" sz="2700" dirty="0" spc="-22" kern="0">
+                <a:solidFill>
+                  <a:srgbClr val="F3EEE3"/>
+                </a:solidFill>
+                <a:latin typeface="Be Vietnam Pro" pitchFamily="34" charset="0"/>
+                <a:ea typeface="Be Vietnam Pro" pitchFamily="34" charset="-122"/>
+                <a:cs typeface="Be Vietnam Pro" pitchFamily="34" charset="-120"/>
+              </a:rPr>
+              <a:t>trạng</a:t>
+            </a:r>
+            <a:r>
+              <a:rPr lang="en-US" sz="2700" dirty="0" spc="0" kern="0">
+                <a:solidFill>
+                  <a:srgbClr val="F3EEE3"/>
+                </a:solidFill>
+                <a:latin typeface="Be Vietnam Pro" pitchFamily="34" charset="0"/>
+                <a:ea typeface="Be Vietnam Pro" pitchFamily="34" charset="-122"/>
+                <a:cs typeface="Be Vietnam Pro" pitchFamily="34" charset="-120"/>
+              </a:rPr>
+              <a:t> thái</a:t>
+            </a:r>
+            <a:r>
+              <a:rPr lang="en-US" sz="2700" dirty="0" spc="-8" kern="0">
+                <a:solidFill>
+                  <a:srgbClr val="F3EEE3"/>
+                </a:solidFill>
+                <a:latin typeface="Be Vietnam Pro" pitchFamily="34" charset="0"/>
+                <a:ea typeface="Be Vietnam Pro" pitchFamily="34" charset="-122"/>
+                <a:cs typeface="Be Vietnam Pro" pitchFamily="34" charset="-120"/>
+              </a:rPr>
+              <a:t> sống</a:t>
+            </a:r>
+            <a:r>
               <a:rPr lang="en-US" sz="2700" dirty="0" spc="-3" kern="0">
                 <a:solidFill>
                   <a:srgbClr val="F3EEE3"/>
@@ -20497,51 +20080,18 @@
                 <a:ea typeface="Be Vietnam Pro" pitchFamily="34" charset="-122"/>
                 <a:cs typeface="Be Vietnam Pro" pitchFamily="34" charset="-120"/>
               </a:rPr>
-              <a:t>nhìn</a:t>
-            </a:r>
-            <a:r>
-              <a:rPr lang="en-US" sz="2700" dirty="0" spc="5" kern="0">
-                <a:solidFill>
-                  <a:srgbClr val="F3EEE3"/>
-                </a:solidFill>
-                <a:latin typeface="Be Vietnam Pro" pitchFamily="34" charset="0"/>
-                <a:ea typeface="Be Vietnam Pro" pitchFamily="34" charset="-122"/>
-                <a:cs typeface="Be Vietnam Pro" pitchFamily="34" charset="-120"/>
-              </a:rPr>
-              <a:t> chương</a:t>
-            </a:r>
-            <a:r>
-              <a:rPr lang="en-US" sz="2700" dirty="0" spc="8" kern="0">
-                <a:solidFill>
-                  <a:srgbClr val="F3EEE3"/>
-                </a:solidFill>
-                <a:latin typeface="Be Vietnam Pro" pitchFamily="34" charset="0"/>
-                <a:ea typeface="Be Vietnam Pro" pitchFamily="34" charset="-122"/>
-                <a:cs typeface="Be Vietnam Pro" pitchFamily="34" charset="-120"/>
-              </a:rPr>
-              <a:t> trình</a:t>
-            </a:r>
-            <a:r>
-              <a:rPr lang="en-US" sz="2700" dirty="0" spc="-1" kern="0">
-                <a:solidFill>
-                  <a:srgbClr val="F3EEE3"/>
-                </a:solidFill>
-                <a:latin typeface="Be Vietnam Pro" pitchFamily="34" charset="0"/>
-                <a:ea typeface="Be Vietnam Pro" pitchFamily="34" charset="-122"/>
-                <a:cs typeface="Be Vietnam Pro" pitchFamily="34" charset="-120"/>
-              </a:rPr>
-              <a:t> là</a:t>
-            </a:r>
-            <a:r>
-              <a:rPr lang="en-US" sz="2700" dirty="0" spc="-4" kern="0">
-                <a:solidFill>
-                  <a:srgbClr val="F3EEE3"/>
-                </a:solidFill>
-                <a:latin typeface="Be Vietnam Pro" pitchFamily="34" charset="0"/>
-                <a:ea typeface="Be Vietnam Pro" pitchFamily="34" charset="-122"/>
-                <a:cs typeface="Be Vietnam Pro" pitchFamily="34" charset="-120"/>
-              </a:rPr>
-              <a:t> gì.</a:t>
+              <a:t> ở</a:t>
+            </a:r>
+            <a:r>
+              <a:rPr lang="en-US" sz="2700" dirty="0" spc="10" kern="0">
+                <a:solidFill>
+                  <a:srgbClr val="F3EEE3"/>
+                </a:solidFill>
+                <a:latin typeface="Be Vietnam Pro" pitchFamily="34" charset="0"/>
+                <a:ea typeface="Be Vietnam Pro" pitchFamily="34" charset="-122"/>
+                <a:cs typeface="Be Vietnam Pro" pitchFamily="34" charset="-120"/>
+              </a:rPr>
+              <a:t> đâu.</a:t>
             </a:r>
             <a:endParaRPr lang="en-US" sz="2700" dirty="0"/>
           </a:p>
@@ -20630,26 +20180,15 @@
               <a:t> thể</a:t>
             </a:r>
             <a:r>
-              <a:rPr lang="en-US" sz="2700" dirty="0" spc="-10" kern="0">
-                <a:solidFill>
-                  <a:srgbClr val="F3EEE3"/>
-                </a:solidFill>
-                <a:latin typeface="Be Vietnam Pro" pitchFamily="34" charset="0"/>
-                <a:ea typeface="Be Vietnam Pro" pitchFamily="34" charset="-122"/>
-                <a:cs typeface="Be Vietnam Pro" pitchFamily="34" charset="-120"/>
-              </a:rPr>
-              <a:t> xuất</a:t>
-            </a:r>
-            <a:r>
-              <a:rPr lang="en-US" sz="2700" dirty="0" spc="-3" kern="0">
-                <a:solidFill>
-                  <a:srgbClr val="F3EEE3"/>
-                </a:solidFill>
-                <a:latin typeface="Be Vietnam Pro" pitchFamily="34" charset="0"/>
-                <a:ea typeface="Be Vietnam Pro" pitchFamily="34" charset="-122"/>
-                <a:cs typeface="Be Vietnam Pro" pitchFamily="34" charset="-120"/>
-              </a:rPr>
-              <a:t> hiện</a:t>
+              <a:rPr lang="en-US" sz="2700" dirty="0" spc="-5" kern="0">
+                <a:solidFill>
+                  <a:srgbClr val="F3EEE3"/>
+                </a:solidFill>
+                <a:latin typeface="Be Vietnam Pro" pitchFamily="34" charset="0"/>
+                <a:ea typeface="Be Vietnam Pro" pitchFamily="34" charset="-122"/>
+                <a:cs typeface="Be Vietnam Pro" pitchFamily="34" charset="-120"/>
+              </a:rPr>
+              <a:t> viết</a:t>
             </a:r>
             <a:endParaRPr lang="en-US" sz="2700" dirty="0"/>
           </a:p>
@@ -20669,7 +20208,29 @@
                 <a:ea typeface="Be Vietnam Pro" pitchFamily="34" charset="-122"/>
                 <a:cs typeface="Be Vietnam Pro" pitchFamily="34" charset="-120"/>
               </a:rPr>
-              <a:t>ở nhiều mô</a:t>
+              <a:t>theo</a:t>
+            </a:r>
+            <a:r>
+              <a:rPr lang="en-US" sz="2700" dirty="0" spc="1" kern="0">
+                <a:solidFill>
+                  <a:srgbClr val="F3EEE3"/>
+                </a:solidFill>
+                <a:latin typeface="Be Vietnam Pro" pitchFamily="34" charset="0"/>
+                <a:ea typeface="Be Vietnam Pro" pitchFamily="34" charset="-122"/>
+                <a:cs typeface="Be Vietnam Pro" pitchFamily="34" charset="-120"/>
+              </a:rPr>
+              <a:t> cả</a:t>
+            </a:r>
+            <a:r>
+              <a:rPr lang="en-US" sz="2700" dirty="0" spc="-8" kern="0">
+                <a:solidFill>
+                  <a:srgbClr val="F3EEE3"/>
+                </a:solidFill>
+                <a:latin typeface="Be Vietnam Pro" pitchFamily="34" charset="0"/>
+                <a:ea typeface="Be Vietnam Pro" pitchFamily="34" charset="-122"/>
+                <a:cs typeface="Be Vietnam Pro" pitchFamily="34" charset="-120"/>
+              </a:rPr>
+              <a:t> ba</a:t>
             </a:r>
             <a:r>
               <a:rPr lang="en-US" sz="2700" dirty="0" spc="-3" kern="0">
@@ -20680,7 +20241,7 @@
                 <a:ea typeface="Be Vietnam Pro" pitchFamily="34" charset="-122"/>
                 <a:cs typeface="Be Vietnam Pro" pitchFamily="34" charset="-120"/>
               </a:rPr>
-              <a:t> hình.</a:t>
+              <a:t> mô hình.</a:t>
             </a:r>
             <a:endParaRPr lang="en-US" sz="2700" dirty="0"/>
           </a:p>
